--- a/slides/Influenza_Microbiome_ML_Overview_ZH.pptx
+++ b/slides/Influenza_Microbiome_ML_Overview_ZH.pptx
@@ -3778,7 +3778,7 @@
                 <a:ea typeface="微软雅黑" pitchFamily="34" charset="-122"/>
                 <a:cs typeface="微软雅黑" pitchFamily="34" charset="-120"/>
               </a:rPr>
-              <a:t>260 只野鸭  ·  70 个菌群特征  ·  6 种模型横向比较</a:t>
+              <a:t>260 只野鸭  ·  70 个菌群特征  ·  17 种模型横向比较</a:t>
             </a:r>
             <a:endParaRPr lang="en-US" sz="1300" dirty="0"/>
           </a:p>
@@ -23458,7 +23458,7 @@
                 <a:ea typeface="微软雅黑" pitchFamily="34" charset="-122"/>
                 <a:cs typeface="微软雅黑" pitchFamily="34" charset="-120"/>
               </a:rPr>
-              <a:t>嵌套交叉验证，所有预处理均在训练折内拟合；六种模型在完全相同的折划分上比较；三套独立的特征排序方法相互交叉验证。</a:t>
+              <a:t>嵌套交叉验证，所有预处理均在训练折内拟合；十七种模型在完全相同的折划分上比较；三套独立的特征排序方法相互交叉验证。</a:t>
             </a:r>
             <a:endParaRPr lang="en-US" sz="1200" dirty="0"/>
           </a:p>

--- a/slides/Influenza_Microbiome_ML_Overview_ZH.pptx
+++ b/slides/Influenza_Microbiome_ML_Overview_ZH.pptx
@@ -7200,7 +7200,7 @@
                 <a:ea typeface="微软雅黑" pitchFamily="34" charset="-122"/>
                 <a:cs typeface="微软雅黑" pitchFamily="34" charset="-120"/>
               </a:rPr>
-              <a:t>十七种模型，相同折划分</a:t>
+              <a:t>十七种模型，其中四个打平</a:t>
             </a:r>
             <a:endParaRPr lang="en-US" sz="3000" dirty="0"/>
           </a:p>
@@ -9130,7 +9130,7 @@
                         <a:buNone/>
                       </a:pPr>
                       <a:r>
-                        <a:rPr lang="en-US" sz="1000" dirty="0">
+                        <a:rPr lang="en-US" sz="1150" b="1" dirty="0">
                           <a:solidFill>
                             <a:srgbClr val="16252C"/>
                           </a:solidFill>
@@ -9140,7 +9140,7 @@
                         </a:rPr>
                         <a:t>Ensemble（软投票）</a:t>
                       </a:r>
-                      <a:endParaRPr lang="en-US" sz="1000" dirty="0">
+                      <a:endParaRPr lang="en-US" sz="1150" dirty="0">
                         <a:latin typeface="微软雅黑" charset="0"/>
                         <a:ea typeface="微软雅黑" charset="0"/>
                         <a:cs typeface="微软雅黑" charset="0"/>
@@ -9184,6 +9184,9 @@
                       <a:headEnd type="none" w="med" len="med"/>
                       <a:tailEnd type="none" w="med" len="med"/>
                     </a:lnB>
+                    <a:solidFill>
+                      <a:srgbClr val="E4F0F0"/>
+                    </a:solidFill>
                   </a:tcPr>
                 </a:tc>
                 <a:tc>
@@ -9195,7 +9198,7 @@
                         <a:buNone/>
                       </a:pPr>
                       <a:r>
-                        <a:rPr lang="en-US" sz="1000" dirty="0">
+                        <a:rPr lang="en-US" sz="1150" b="1" dirty="0">
                           <a:solidFill>
                             <a:srgbClr val="16252C"/>
                           </a:solidFill>
@@ -9205,7 +9208,7 @@
                         </a:rPr>
                         <a:t>0.766</a:t>
                       </a:r>
-                      <a:endParaRPr lang="en-US" sz="1000" dirty="0">
+                      <a:endParaRPr lang="en-US" sz="1150" dirty="0">
                         <a:latin typeface="微软雅黑" charset="0"/>
                         <a:ea typeface="微软雅黑" charset="0"/>
                         <a:cs typeface="微软雅黑" charset="0"/>
@@ -9249,6 +9252,9 @@
                       <a:headEnd type="none" w="med" len="med"/>
                       <a:tailEnd type="none" w="med" len="med"/>
                     </a:lnB>
+                    <a:solidFill>
+                      <a:srgbClr val="E4F0F0"/>
+                    </a:solidFill>
                   </a:tcPr>
                 </a:tc>
                 <a:tc>
@@ -9260,7 +9266,7 @@
                         <a:buNone/>
                       </a:pPr>
                       <a:r>
-                        <a:rPr lang="en-US" sz="1000" dirty="0">
+                        <a:rPr lang="en-US" sz="1150" b="1" dirty="0">
                           <a:solidFill>
                             <a:srgbClr val="16252C"/>
                           </a:solidFill>
@@ -9270,7 +9276,7 @@
                         </a:rPr>
                         <a:t>0.756</a:t>
                       </a:r>
-                      <a:endParaRPr lang="en-US" sz="1000" dirty="0">
+                      <a:endParaRPr lang="en-US" sz="1150" dirty="0">
                         <a:latin typeface="微软雅黑" charset="0"/>
                         <a:ea typeface="微软雅黑" charset="0"/>
                         <a:cs typeface="微软雅黑" charset="0"/>
@@ -9314,6 +9320,9 @@
                       <a:headEnd type="none" w="med" len="med"/>
                       <a:tailEnd type="none" w="med" len="med"/>
                     </a:lnB>
+                    <a:solidFill>
+                      <a:srgbClr val="E4F0F0"/>
+                    </a:solidFill>
                   </a:tcPr>
                 </a:tc>
                 <a:tc>
@@ -9325,7 +9334,7 @@
                         <a:buNone/>
                       </a:pPr>
                       <a:r>
-                        <a:rPr lang="en-US" sz="1000" dirty="0">
+                        <a:rPr lang="en-US" sz="1150" b="1" dirty="0">
                           <a:solidFill>
                             <a:srgbClr val="16252C"/>
                           </a:solidFill>
@@ -9335,7 +9344,7 @@
                         </a:rPr>
                         <a:t>0.836</a:t>
                       </a:r>
-                      <a:endParaRPr lang="en-US" sz="1000" dirty="0">
+                      <a:endParaRPr lang="en-US" sz="1150" dirty="0">
                         <a:latin typeface="微软雅黑" charset="0"/>
                         <a:ea typeface="微软雅黑" charset="0"/>
                         <a:cs typeface="微软雅黑" charset="0"/>
@@ -9379,6 +9388,9 @@
                       <a:headEnd type="none" w="med" len="med"/>
                       <a:tailEnd type="none" w="med" len="med"/>
                     </a:lnB>
+                    <a:solidFill>
+                      <a:srgbClr val="E4F0F0"/>
+                    </a:solidFill>
                   </a:tcPr>
                 </a:tc>
                 <a:tc>
@@ -9390,7 +9402,7 @@
                         <a:buNone/>
                       </a:pPr>
                       <a:r>
-                        <a:rPr lang="en-US" sz="1000" dirty="0">
+                        <a:rPr lang="en-US" sz="1150" b="1" dirty="0">
                           <a:solidFill>
                             <a:srgbClr val="16252C"/>
                           </a:solidFill>
@@ -9400,7 +9412,7 @@
                         </a:rPr>
                         <a:t>0.873</a:t>
                       </a:r>
-                      <a:endParaRPr lang="en-US" sz="1000" dirty="0">
+                      <a:endParaRPr lang="en-US" sz="1150" dirty="0">
                         <a:latin typeface="微软雅黑" charset="0"/>
                         <a:ea typeface="微软雅黑" charset="0"/>
                         <a:cs typeface="微软雅黑" charset="0"/>
@@ -9444,6 +9456,9 @@
                       <a:headEnd type="none" w="med" len="med"/>
                       <a:tailEnd type="none" w="med" len="med"/>
                     </a:lnB>
+                    <a:solidFill>
+                      <a:srgbClr val="E4F0F0"/>
+                    </a:solidFill>
                   </a:tcPr>
                 </a:tc>
                 <a:tc>
@@ -9455,7 +9470,7 @@
                         <a:buNone/>
                       </a:pPr>
                       <a:r>
-                        <a:rPr lang="en-US" sz="1000" dirty="0">
+                        <a:rPr lang="en-US" sz="1150" b="1" dirty="0">
                           <a:solidFill>
                             <a:srgbClr val="16252C"/>
                           </a:solidFill>
@@ -9465,7 +9480,7 @@
                         </a:rPr>
                         <a:t>0.818</a:t>
                       </a:r>
-                      <a:endParaRPr lang="en-US" sz="1000" dirty="0">
+                      <a:endParaRPr lang="en-US" sz="1150" dirty="0">
                         <a:latin typeface="微软雅黑" charset="0"/>
                         <a:ea typeface="微软雅黑" charset="0"/>
                         <a:cs typeface="微软雅黑" charset="0"/>
@@ -9509,6 +9524,9 @@
                       <a:headEnd type="none" w="med" len="med"/>
                       <a:tailEnd type="none" w="med" len="med"/>
                     </a:lnB>
+                    <a:solidFill>
+                      <a:srgbClr val="E4F0F0"/>
+                    </a:solidFill>
                   </a:tcPr>
                 </a:tc>
                 <a:tc>
@@ -9520,7 +9538,7 @@
                         <a:buNone/>
                       </a:pPr>
                       <a:r>
-                        <a:rPr lang="en-US" sz="1000" dirty="0">
+                        <a:rPr lang="en-US" sz="1150" b="1" dirty="0">
                           <a:solidFill>
                             <a:srgbClr val="16252C"/>
                           </a:solidFill>
@@ -9530,7 +9548,7 @@
                         </a:rPr>
                         <a:t>0.694</a:t>
                       </a:r>
-                      <a:endParaRPr lang="en-US" sz="1000" dirty="0">
+                      <a:endParaRPr lang="en-US" sz="1150" dirty="0">
                         <a:latin typeface="微软雅黑" charset="0"/>
                         <a:ea typeface="微软雅黑" charset="0"/>
                         <a:cs typeface="微软雅黑" charset="0"/>
@@ -9574,6 +9592,9 @@
                       <a:headEnd type="none" w="med" len="med"/>
                       <a:tailEnd type="none" w="med" len="med"/>
                     </a:lnB>
+                    <a:solidFill>
+                      <a:srgbClr val="E4F0F0"/>
+                    </a:solidFill>
                   </a:tcPr>
                 </a:tc>
                 <a:tc>
@@ -9585,7 +9606,7 @@
                         <a:buNone/>
                       </a:pPr>
                       <a:r>
-                        <a:rPr lang="en-US" sz="1000" dirty="0">
+                        <a:rPr lang="en-US" sz="1150" b="1" dirty="0">
                           <a:solidFill>
                             <a:srgbClr val="16252C"/>
                           </a:solidFill>
@@ -9595,7 +9616,7 @@
                         </a:rPr>
                         <a:t>0.802</a:t>
                       </a:r>
-                      <a:endParaRPr lang="en-US" sz="1000" dirty="0">
+                      <a:endParaRPr lang="en-US" sz="1150" dirty="0">
                         <a:latin typeface="微软雅黑" charset="0"/>
                         <a:ea typeface="微软雅黑" charset="0"/>
                         <a:cs typeface="微软雅黑" charset="0"/>
@@ -9639,6 +9660,9 @@
                       <a:headEnd type="none" w="med" len="med"/>
                       <a:tailEnd type="none" w="med" len="med"/>
                     </a:lnB>
+                    <a:solidFill>
+                      <a:srgbClr val="E4F0F0"/>
+                    </a:solidFill>
                   </a:tcPr>
                 </a:tc>
                 <a:tc>
@@ -9650,7 +9674,7 @@
                         <a:buNone/>
                       </a:pPr>
                       <a:r>
-                        <a:rPr lang="en-US" sz="1000" dirty="0">
+                        <a:rPr lang="en-US" sz="1150" b="1" dirty="0">
                           <a:solidFill>
                             <a:srgbClr val="16252C"/>
                           </a:solidFill>
@@ -9660,7 +9684,7 @@
                         </a:rPr>
                         <a:t>0.521</a:t>
                       </a:r>
-                      <a:endParaRPr lang="en-US" sz="1000" dirty="0">
+                      <a:endParaRPr lang="en-US" sz="1150" dirty="0">
                         <a:latin typeface="微软雅黑" charset="0"/>
                         <a:ea typeface="微软雅黑" charset="0"/>
                         <a:cs typeface="微软雅黑" charset="0"/>
@@ -9704,6 +9728,9 @@
                       <a:headEnd type="none" w="med" len="med"/>
                       <a:tailEnd type="none" w="med" len="med"/>
                     </a:lnB>
+                    <a:solidFill>
+                      <a:srgbClr val="E4F0F0"/>
+                    </a:solidFill>
                   </a:tcPr>
                 </a:tc>
               </a:tr>
@@ -9717,7 +9744,7 @@
                         <a:buNone/>
                       </a:pPr>
                       <a:r>
-                        <a:rPr lang="en-US" sz="1000" dirty="0">
+                        <a:rPr lang="en-US" sz="1150" b="1" dirty="0">
                           <a:solidFill>
                             <a:srgbClr val="16252C"/>
                           </a:solidFill>
@@ -9727,7 +9754,7 @@
                         </a:rPr>
                         <a:t>SVM-poly</a:t>
                       </a:r>
-                      <a:endParaRPr lang="en-US" sz="1000" dirty="0">
+                      <a:endParaRPr lang="en-US" sz="1150" dirty="0">
                         <a:latin typeface="微软雅黑" charset="0"/>
                         <a:ea typeface="微软雅黑" charset="0"/>
                         <a:cs typeface="微软雅黑" charset="0"/>
@@ -9771,6 +9798,9 @@
                       <a:headEnd type="none" w="med" len="med"/>
                       <a:tailEnd type="none" w="med" len="med"/>
                     </a:lnB>
+                    <a:solidFill>
+                      <a:srgbClr val="E4F0F0"/>
+                    </a:solidFill>
                   </a:tcPr>
                 </a:tc>
                 <a:tc>
@@ -9782,7 +9812,7 @@
                         <a:buNone/>
                       </a:pPr>
                       <a:r>
-                        <a:rPr lang="en-US" sz="1000" dirty="0">
+                        <a:rPr lang="en-US" sz="1150" b="1" dirty="0">
                           <a:solidFill>
                             <a:srgbClr val="16252C"/>
                           </a:solidFill>
@@ -9792,7 +9822,7 @@
                         </a:rPr>
                         <a:t>0.748</a:t>
                       </a:r>
-                      <a:endParaRPr lang="en-US" sz="1000" dirty="0">
+                      <a:endParaRPr lang="en-US" sz="1150" dirty="0">
                         <a:latin typeface="微软雅黑" charset="0"/>
                         <a:ea typeface="微软雅黑" charset="0"/>
                         <a:cs typeface="微软雅黑" charset="0"/>
@@ -9836,6 +9866,9 @@
                       <a:headEnd type="none" w="med" len="med"/>
                       <a:tailEnd type="none" w="med" len="med"/>
                     </a:lnB>
+                    <a:solidFill>
+                      <a:srgbClr val="E4F0F0"/>
+                    </a:solidFill>
                   </a:tcPr>
                 </a:tc>
                 <a:tc>
@@ -9847,7 +9880,7 @@
                         <a:buNone/>
                       </a:pPr>
                       <a:r>
-                        <a:rPr lang="en-US" sz="1000" dirty="0">
+                        <a:rPr lang="en-US" sz="1150" b="1" dirty="0">
                           <a:solidFill>
                             <a:srgbClr val="16252C"/>
                           </a:solidFill>
@@ -9857,7 +9890,7 @@
                         </a:rPr>
                         <a:t>0.728</a:t>
                       </a:r>
-                      <a:endParaRPr lang="en-US" sz="1000" dirty="0">
+                      <a:endParaRPr lang="en-US" sz="1150" dirty="0">
                         <a:latin typeface="微软雅黑" charset="0"/>
                         <a:ea typeface="微软雅黑" charset="0"/>
                         <a:cs typeface="微软雅黑" charset="0"/>
@@ -9901,6 +9934,9 @@
                       <a:headEnd type="none" w="med" len="med"/>
                       <a:tailEnd type="none" w="med" len="med"/>
                     </a:lnB>
+                    <a:solidFill>
+                      <a:srgbClr val="E4F0F0"/>
+                    </a:solidFill>
                   </a:tcPr>
                 </a:tc>
                 <a:tc>
@@ -9912,7 +9948,7 @@
                         <a:buNone/>
                       </a:pPr>
                       <a:r>
-                        <a:rPr lang="en-US" sz="1000" dirty="0">
+                        <a:rPr lang="en-US" sz="1150" b="1" dirty="0">
                           <a:solidFill>
                             <a:srgbClr val="16252C"/>
                           </a:solidFill>
@@ -9922,7 +9958,7 @@
                         </a:rPr>
                         <a:t>0.834</a:t>
                       </a:r>
-                      <a:endParaRPr lang="en-US" sz="1000" dirty="0">
+                      <a:endParaRPr lang="en-US" sz="1150" dirty="0">
                         <a:latin typeface="微软雅黑" charset="0"/>
                         <a:ea typeface="微软雅黑" charset="0"/>
                         <a:cs typeface="微软雅黑" charset="0"/>
@@ -9966,6 +10002,9 @@
                       <a:headEnd type="none" w="med" len="med"/>
                       <a:tailEnd type="none" w="med" len="med"/>
                     </a:lnB>
+                    <a:solidFill>
+                      <a:srgbClr val="E4F0F0"/>
+                    </a:solidFill>
                   </a:tcPr>
                 </a:tc>
                 <a:tc>
@@ -9977,7 +10016,7 @@
                         <a:buNone/>
                       </a:pPr>
                       <a:r>
-                        <a:rPr lang="en-US" sz="1000" dirty="0">
+                        <a:rPr lang="en-US" sz="1150" b="1" dirty="0">
                           <a:solidFill>
                             <a:srgbClr val="16252C"/>
                           </a:solidFill>
@@ -9987,7 +10026,7 @@
                         </a:rPr>
                         <a:t>0.861</a:t>
                       </a:r>
-                      <a:endParaRPr lang="en-US" sz="1000" dirty="0">
+                      <a:endParaRPr lang="en-US" sz="1150" dirty="0">
                         <a:latin typeface="微软雅黑" charset="0"/>
                         <a:ea typeface="微软雅黑" charset="0"/>
                         <a:cs typeface="微软雅黑" charset="0"/>
@@ -10031,6 +10070,9 @@
                       <a:headEnd type="none" w="med" len="med"/>
                       <a:tailEnd type="none" w="med" len="med"/>
                     </a:lnB>
+                    <a:solidFill>
+                      <a:srgbClr val="E4F0F0"/>
+                    </a:solidFill>
                   </a:tcPr>
                 </a:tc>
                 <a:tc>
@@ -10042,7 +10084,7 @@
                         <a:buNone/>
                       </a:pPr>
                       <a:r>
-                        <a:rPr lang="en-US" sz="1000" dirty="0">
+                        <a:rPr lang="en-US" sz="1150" b="1" dirty="0">
                           <a:solidFill>
                             <a:srgbClr val="16252C"/>
                           </a:solidFill>
@@ -10052,7 +10094,7 @@
                         </a:rPr>
                         <a:t>0.853</a:t>
                       </a:r>
-                      <a:endParaRPr lang="en-US" sz="1000" dirty="0">
+                      <a:endParaRPr lang="en-US" sz="1150" dirty="0">
                         <a:latin typeface="微软雅黑" charset="0"/>
                         <a:ea typeface="微软雅黑" charset="0"/>
                         <a:cs typeface="微软雅黑" charset="0"/>
@@ -10096,6 +10138,9 @@
                       <a:headEnd type="none" w="med" len="med"/>
                       <a:tailEnd type="none" w="med" len="med"/>
                     </a:lnB>
+                    <a:solidFill>
+                      <a:srgbClr val="E4F0F0"/>
+                    </a:solidFill>
                   </a:tcPr>
                 </a:tc>
                 <a:tc>
@@ -10107,7 +10152,7 @@
                         <a:buNone/>
                       </a:pPr>
                       <a:r>
-                        <a:rPr lang="en-US" sz="1000" dirty="0">
+                        <a:rPr lang="en-US" sz="1150" b="1" dirty="0">
                           <a:solidFill>
                             <a:srgbClr val="16252C"/>
                           </a:solidFill>
@@ -10117,7 +10162,7 @@
                         </a:rPr>
                         <a:t>0.604</a:t>
                       </a:r>
-                      <a:endParaRPr lang="en-US" sz="1000" dirty="0">
+                      <a:endParaRPr lang="en-US" sz="1150" dirty="0">
                         <a:latin typeface="微软雅黑" charset="0"/>
                         <a:ea typeface="微软雅黑" charset="0"/>
                         <a:cs typeface="微软雅黑" charset="0"/>
@@ -10161,6 +10206,9 @@
                       <a:headEnd type="none" w="med" len="med"/>
                       <a:tailEnd type="none" w="med" len="med"/>
                     </a:lnB>
+                    <a:solidFill>
+                      <a:srgbClr val="E4F0F0"/>
+                    </a:solidFill>
                   </a:tcPr>
                 </a:tc>
                 <a:tc>
@@ -10172,7 +10220,7 @@
                         <a:buNone/>
                       </a:pPr>
                       <a:r>
-                        <a:rPr lang="en-US" sz="1000" dirty="0">
+                        <a:rPr lang="en-US" sz="1150" b="1" dirty="0">
                           <a:solidFill>
                             <a:srgbClr val="16252C"/>
                           </a:solidFill>
@@ -10182,7 +10230,7 @@
                         </a:rPr>
                         <a:t>0.797</a:t>
                       </a:r>
-                      <a:endParaRPr lang="en-US" sz="1000" dirty="0">
+                      <a:endParaRPr lang="en-US" sz="1150" dirty="0">
                         <a:latin typeface="微软雅黑" charset="0"/>
                         <a:ea typeface="微软雅黑" charset="0"/>
                         <a:cs typeface="微软雅黑" charset="0"/>
@@ -10226,6 +10274,9 @@
                       <a:headEnd type="none" w="med" len="med"/>
                       <a:tailEnd type="none" w="med" len="med"/>
                     </a:lnB>
+                    <a:solidFill>
+                      <a:srgbClr val="E4F0F0"/>
+                    </a:solidFill>
                   </a:tcPr>
                 </a:tc>
                 <a:tc>
@@ -10237,7 +10288,7 @@
                         <a:buNone/>
                       </a:pPr>
                       <a:r>
-                        <a:rPr lang="en-US" sz="1000" dirty="0">
+                        <a:rPr lang="en-US" sz="1150" b="1" dirty="0">
                           <a:solidFill>
                             <a:srgbClr val="16252C"/>
                           </a:solidFill>
@@ -10247,7 +10298,7 @@
                         </a:rPr>
                         <a:t>0.481</a:t>
                       </a:r>
-                      <a:endParaRPr lang="en-US" sz="1000" dirty="0">
+                      <a:endParaRPr lang="en-US" sz="1150" dirty="0">
                         <a:latin typeface="微软雅黑" charset="0"/>
                         <a:ea typeface="微软雅黑" charset="0"/>
                         <a:cs typeface="微软雅黑" charset="0"/>
@@ -10291,6 +10342,9 @@
                       <a:headEnd type="none" w="med" len="med"/>
                       <a:tailEnd type="none" w="med" len="med"/>
                     </a:lnB>
+                    <a:solidFill>
+                      <a:srgbClr val="E4F0F0"/>
+                    </a:solidFill>
                   </a:tcPr>
                 </a:tc>
               </a:tr>
@@ -14440,7 +14494,7 @@
                 <a:ea typeface="微软雅黑" pitchFamily="34" charset="-122"/>
                 <a:cs typeface="微软雅黑" pitchFamily="34" charset="-120"/>
               </a:rPr>
-              <a:t>按 ROC-AUC 排序的前 10 名（共 17 个模型）· 完整表见 results/model_comparison_all16.csv</a:t>
+              <a:t>按 ROC-AUC 排序的前 10 名（共 17 个）· 底色标出打平的领先群体 · 完整表见 results/model_comparison_all16.csv</a:t>
             </a:r>
             <a:endParaRPr lang="en-US" sz="950" dirty="0"/>
           </a:p>
@@ -14526,7 +14580,7 @@
                 <a:ea typeface="微软雅黑" pitchFamily="34" charset="-122"/>
                 <a:cs typeface="微软雅黑" pitchFamily="34" charset="-120"/>
               </a:rPr>
-              <a:t>ExtraTrees 分数最高——但没有成为主模型</a:t>
+              <a:t>顶部这一块要当作一个群体读，而不是一个排名</a:t>
             </a:r>
             <a:endParaRPr lang="en-US" sz="1400" dirty="0"/>
           </a:p>
@@ -14568,7 +14622,7 @@
                 <a:ea typeface="微软雅黑" pitchFamily="34" charset="-122"/>
                 <a:cs typeface="微软雅黑" pitchFamily="34" charset="-120"/>
               </a:rPr>
-              <a:t>ExtraTrees 在 AUC、PR-AUC、MCC 上领先，但差距未达显著（p=0.085），且是 17 选 1 的最高分。后两页给出取舍依据。</a:t>
+              <a:t>前四行彼此无法区分（见下一页），此处的先后顺序是噪声。真正的分离要到 GP-RBF 以下才出现。</a:t>
             </a:r>
             <a:endParaRPr lang="en-US" sz="1100" dirty="0"/>
           </a:p>
@@ -14698,7 +14752,7 @@
                 <a:ea typeface="微软雅黑" pitchFamily="34" charset="-122"/>
                 <a:cs typeface="微软雅黑" pitchFamily="34" charset="-120"/>
               </a:rPr>
-              <a:t>差距是真的吗？配对检验</a:t>
+              <a:t>AUC 无法决定选哪个模型</a:t>
             </a:r>
             <a:endParaRPr lang="en-US" sz="3000" dirty="0"/>
           </a:p>
@@ -14752,7 +14806,7 @@
         <p:spPr>
           <a:xfrm>
             <a:off x="548640" y="1298448"/>
-            <a:ext cx="6400800" cy="457200"/>
+            <a:ext cx="11064240" cy="502920"/>
           </a:xfrm>
           <a:prstGeom prst="rect">
             <a:avLst/>
@@ -14776,7 +14830,7 @@
                 <a:ea typeface="微软雅黑" pitchFamily="34" charset="-122"/>
                 <a:cs typeface="微软雅黑" pitchFamily="34" charset="-120"/>
               </a:rPr>
-              <a:t>折间标准差为 ±0.05，仅比较平均 AUC 不足以下结论。我们在同一批 25 折上做逐折配对比较。</a:t>
+              <a:t>拿最优模型去比一个明显更差的模型，证明不了任何事。真正该问的是：领先的这几个模型之间到底能不能分辨。以下是前六名在同一批 25 折上的全部 15 次两两检验：</a:t>
             </a:r>
             <a:endParaRPr lang="en-US" sz="1250" dirty="0"/>
           </a:p>
@@ -14797,225 +14851,22 @@
           </p:nvPr>
         </p:nvGraphicFramePr>
         <p:xfrm>
-          <a:off x="548640" y="1828800"/>
-          <a:ext cx="6400800" cy="914400"/>
+          <a:off x="548640" y="1965960"/>
+          <a:ext cx="11064240" cy="914400"/>
         </p:xfrm>
         <a:graphic>
           <a:graphicData uri="http://schemas.openxmlformats.org/drawingml/2006/table">
             <a:tbl>
               <a:tblPr/>
               <a:tblGrid>
-                <a:gridCol w="2377440"/>
-                <a:gridCol w="1005840"/>
-                <a:gridCol w="914400"/>
-                <a:gridCol w="1234440"/>
-                <a:gridCol w="868680"/>
+                <a:gridCol w="2286000"/>
+                <a:gridCol w="1755648"/>
+                <a:gridCol w="1755648"/>
+                <a:gridCol w="1755648"/>
+                <a:gridCol w="1755648"/>
+                <a:gridCol w="1755648"/>
               </a:tblGrid>
-              <a:tr h="457200">
-                <a:tc>
-                  <a:txBody>
-                    <a:bodyPr/>
-                    <a:lstStyle/>
-                    <a:p>
-                      <a:pPr algn="ctr" indent="0" marL="0">
-                        <a:buNone/>
-                      </a:pPr>
-                      <a:r>
-                        <a:rPr lang="en-US" sz="1100" b="1" dirty="0">
-                          <a:solidFill>
-                            <a:srgbClr val="FFFFFF"/>
-                          </a:solidFill>
-                          <a:latin typeface="微软雅黑" pitchFamily="34" charset="0"/>
-                          <a:ea typeface="微软雅黑" pitchFamily="34" charset="-122"/>
-                          <a:cs typeface="微软雅黑" pitchFamily="34" charset="-120"/>
-                        </a:rPr>
-                        <a:t>对比</a:t>
-                      </a:r>
-                      <a:endParaRPr lang="en-US" sz="1100" dirty="0">
-                        <a:latin typeface="微软雅黑" charset="0"/>
-                        <a:ea typeface="微软雅黑" charset="0"/>
-                        <a:cs typeface="微软雅黑" charset="0"/>
-                      </a:endParaRPr>
-                    </a:p>
-                  </a:txBody>
-                  <a:tcPr marL="91440" marR="91440" marT="45720" marB="45720" anchor="ctr">
-                    <a:lnL w="6350" cap="flat" cmpd="sng" algn="ctr">
-                      <a:solidFill>
-                        <a:srgbClr val="DDE5E8"/>
-                      </a:solidFill>
-                      <a:prstDash val="solid"/>
-                      <a:round/>
-                      <a:headEnd type="none" w="med" len="med"/>
-                      <a:tailEnd type="none" w="med" len="med"/>
-                    </a:lnL>
-                    <a:lnR w="6350" cap="flat" cmpd="sng" algn="ctr">
-                      <a:solidFill>
-                        <a:srgbClr val="DDE5E8"/>
-                      </a:solidFill>
-                      <a:prstDash val="solid"/>
-                      <a:round/>
-                      <a:headEnd type="none" w="med" len="med"/>
-                      <a:tailEnd type="none" w="med" len="med"/>
-                    </a:lnR>
-                    <a:lnT w="6350" cap="flat" cmpd="sng" algn="ctr">
-                      <a:solidFill>
-                        <a:srgbClr val="DDE5E8"/>
-                      </a:solidFill>
-                      <a:prstDash val="solid"/>
-                      <a:round/>
-                      <a:headEnd type="none" w="med" len="med"/>
-                      <a:tailEnd type="none" w="med" len="med"/>
-                    </a:lnT>
-                    <a:lnB w="6350" cap="flat" cmpd="sng" algn="ctr">
-                      <a:solidFill>
-                        <a:srgbClr val="DDE5E8"/>
-                      </a:solidFill>
-                      <a:prstDash val="solid"/>
-                      <a:round/>
-                      <a:headEnd type="none" w="med" len="med"/>
-                      <a:tailEnd type="none" w="med" len="med"/>
-                    </a:lnB>
-                    <a:solidFill>
-                      <a:srgbClr val="0B3C49"/>
-                    </a:solidFill>
-                  </a:tcPr>
-                </a:tc>
-                <a:tc>
-                  <a:txBody>
-                    <a:bodyPr/>
-                    <a:lstStyle/>
-                    <a:p>
-                      <a:pPr algn="ctr" indent="0" marL="0">
-                        <a:buNone/>
-                      </a:pPr>
-                      <a:r>
-                        <a:rPr lang="en-US" sz="1100" b="1" dirty="0">
-                          <a:solidFill>
-                            <a:srgbClr val="FFFFFF"/>
-                          </a:solidFill>
-                          <a:latin typeface="微软雅黑" pitchFamily="34" charset="0"/>
-                          <a:ea typeface="微软雅黑" pitchFamily="34" charset="-122"/>
-                          <a:cs typeface="微软雅黑" pitchFamily="34" charset="-120"/>
-                        </a:rPr>
-                        <a:t>Δ AUC</a:t>
-                      </a:r>
-                      <a:endParaRPr lang="en-US" sz="1100" dirty="0">
-                        <a:latin typeface="微软雅黑" charset="0"/>
-                        <a:ea typeface="微软雅黑" charset="0"/>
-                        <a:cs typeface="微软雅黑" charset="0"/>
-                      </a:endParaRPr>
-                    </a:p>
-                  </a:txBody>
-                  <a:tcPr marL="91440" marR="91440" marT="45720" marB="45720" anchor="ctr">
-                    <a:lnL w="6350" cap="flat" cmpd="sng" algn="ctr">
-                      <a:solidFill>
-                        <a:srgbClr val="DDE5E8"/>
-                      </a:solidFill>
-                      <a:prstDash val="solid"/>
-                      <a:round/>
-                      <a:headEnd type="none" w="med" len="med"/>
-                      <a:tailEnd type="none" w="med" len="med"/>
-                    </a:lnL>
-                    <a:lnR w="6350" cap="flat" cmpd="sng" algn="ctr">
-                      <a:solidFill>
-                        <a:srgbClr val="DDE5E8"/>
-                      </a:solidFill>
-                      <a:prstDash val="solid"/>
-                      <a:round/>
-                      <a:headEnd type="none" w="med" len="med"/>
-                      <a:tailEnd type="none" w="med" len="med"/>
-                    </a:lnR>
-                    <a:lnT w="6350" cap="flat" cmpd="sng" algn="ctr">
-                      <a:solidFill>
-                        <a:srgbClr val="DDE5E8"/>
-                      </a:solidFill>
-                      <a:prstDash val="solid"/>
-                      <a:round/>
-                      <a:headEnd type="none" w="med" len="med"/>
-                      <a:tailEnd type="none" w="med" len="med"/>
-                    </a:lnT>
-                    <a:lnB w="6350" cap="flat" cmpd="sng" algn="ctr">
-                      <a:solidFill>
-                        <a:srgbClr val="DDE5E8"/>
-                      </a:solidFill>
-                      <a:prstDash val="solid"/>
-                      <a:round/>
-                      <a:headEnd type="none" w="med" len="med"/>
-                      <a:tailEnd type="none" w="med" len="med"/>
-                    </a:lnB>
-                    <a:solidFill>
-                      <a:srgbClr val="0B3C49"/>
-                    </a:solidFill>
-                  </a:tcPr>
-                </a:tc>
-                <a:tc>
-                  <a:txBody>
-                    <a:bodyPr/>
-                    <a:lstStyle/>
-                    <a:p>
-                      <a:pPr algn="ctr" indent="0" marL="0">
-                        <a:buNone/>
-                      </a:pPr>
-                      <a:r>
-                        <a:rPr lang="en-US" sz="1100" b="1" dirty="0">
-                          <a:solidFill>
-                            <a:srgbClr val="FFFFFF"/>
-                          </a:solidFill>
-                          <a:latin typeface="微软雅黑" pitchFamily="34" charset="0"/>
-                          <a:ea typeface="微软雅黑" pitchFamily="34" charset="-122"/>
-                          <a:cs typeface="微软雅黑" pitchFamily="34" charset="-120"/>
-                        </a:rPr>
-                        <a:t>胜出</a:t>
-                      </a:r>
-                      <a:endParaRPr lang="en-US" sz="1100" dirty="0">
-                        <a:latin typeface="微软雅黑" charset="0"/>
-                        <a:ea typeface="微软雅黑" charset="0"/>
-                        <a:cs typeface="微软雅黑" charset="0"/>
-                      </a:endParaRPr>
-                    </a:p>
-                  </a:txBody>
-                  <a:tcPr marL="91440" marR="91440" marT="45720" marB="45720" anchor="ctr">
-                    <a:lnL w="6350" cap="flat" cmpd="sng" algn="ctr">
-                      <a:solidFill>
-                        <a:srgbClr val="DDE5E8"/>
-                      </a:solidFill>
-                      <a:prstDash val="solid"/>
-                      <a:round/>
-                      <a:headEnd type="none" w="med" len="med"/>
-                      <a:tailEnd type="none" w="med" len="med"/>
-                    </a:lnL>
-                    <a:lnR w="6350" cap="flat" cmpd="sng" algn="ctr">
-                      <a:solidFill>
-                        <a:srgbClr val="DDE5E8"/>
-                      </a:solidFill>
-                      <a:prstDash val="solid"/>
-                      <a:round/>
-                      <a:headEnd type="none" w="med" len="med"/>
-                      <a:tailEnd type="none" w="med" len="med"/>
-                    </a:lnR>
-                    <a:lnT w="6350" cap="flat" cmpd="sng" algn="ctr">
-                      <a:solidFill>
-                        <a:srgbClr val="DDE5E8"/>
-                      </a:solidFill>
-                      <a:prstDash val="solid"/>
-                      <a:round/>
-                      <a:headEnd type="none" w="med" len="med"/>
-                      <a:tailEnd type="none" w="med" len="med"/>
-                    </a:lnT>
-                    <a:lnB w="6350" cap="flat" cmpd="sng" algn="ctr">
-                      <a:solidFill>
-                        <a:srgbClr val="DDE5E8"/>
-                      </a:solidFill>
-                      <a:prstDash val="solid"/>
-                      <a:round/>
-                      <a:headEnd type="none" w="med" len="med"/>
-                      <a:tailEnd type="none" w="med" len="med"/>
-                    </a:lnB>
-                    <a:solidFill>
-                      <a:srgbClr val="0B3C49"/>
-                    </a:solidFill>
-                  </a:tcPr>
-                </a:tc>
+              <a:tr h="384048">
                 <a:tc>
                   <a:txBody>
                     <a:bodyPr/>
@@ -15101,7 +14952,7 @@
                           <a:ea typeface="微软雅黑" pitchFamily="34" charset="-122"/>
                           <a:cs typeface="微软雅黑" pitchFamily="34" charset="-120"/>
                         </a:rPr>
-                        <a:t>配对 t p</a:t>
+                        <a:t>SVM-RBF</a:t>
                       </a:r>
                       <a:endParaRPr lang="en-US" sz="1100" dirty="0">
                         <a:latin typeface="微软雅黑" charset="0"/>
@@ -15152,8 +15003,6 @@
                     </a:solidFill>
                   </a:tcPr>
                 </a:tc>
-              </a:tr>
-              <a:tr h="457200">
                 <a:tc>
                   <a:txBody>
                     <a:bodyPr/>
@@ -15163,7 +15012,281 @@
                         <a:buNone/>
                       </a:pPr>
                       <a:r>
-                        <a:rPr lang="en-US" sz="1050" dirty="0">
+                        <a:rPr lang="en-US" sz="1100" b="1" dirty="0">
+                          <a:solidFill>
+                            <a:srgbClr val="FFFFFF"/>
+                          </a:solidFill>
+                          <a:latin typeface="微软雅黑" pitchFamily="34" charset="0"/>
+                          <a:ea typeface="微软雅黑" pitchFamily="34" charset="-122"/>
+                          <a:cs typeface="微软雅黑" pitchFamily="34" charset="-120"/>
+                        </a:rPr>
+                        <a:t>Ensemble</a:t>
+                      </a:r>
+                      <a:endParaRPr lang="en-US" sz="1100" dirty="0">
+                        <a:latin typeface="微软雅黑" charset="0"/>
+                        <a:ea typeface="微软雅黑" charset="0"/>
+                        <a:cs typeface="微软雅黑" charset="0"/>
+                      </a:endParaRPr>
+                    </a:p>
+                  </a:txBody>
+                  <a:tcPr marL="91440" marR="91440" marT="45720" marB="45720" anchor="ctr">
+                    <a:lnL w="6350" cap="flat" cmpd="sng" algn="ctr">
+                      <a:solidFill>
+                        <a:srgbClr val="DDE5E8"/>
+                      </a:solidFill>
+                      <a:prstDash val="solid"/>
+                      <a:round/>
+                      <a:headEnd type="none" w="med" len="med"/>
+                      <a:tailEnd type="none" w="med" len="med"/>
+                    </a:lnL>
+                    <a:lnR w="6350" cap="flat" cmpd="sng" algn="ctr">
+                      <a:solidFill>
+                        <a:srgbClr val="DDE5E8"/>
+                      </a:solidFill>
+                      <a:prstDash val="solid"/>
+                      <a:round/>
+                      <a:headEnd type="none" w="med" len="med"/>
+                      <a:tailEnd type="none" w="med" len="med"/>
+                    </a:lnR>
+                    <a:lnT w="6350" cap="flat" cmpd="sng" algn="ctr">
+                      <a:solidFill>
+                        <a:srgbClr val="DDE5E8"/>
+                      </a:solidFill>
+                      <a:prstDash val="solid"/>
+                      <a:round/>
+                      <a:headEnd type="none" w="med" len="med"/>
+                      <a:tailEnd type="none" w="med" len="med"/>
+                    </a:lnT>
+                    <a:lnB w="6350" cap="flat" cmpd="sng" algn="ctr">
+                      <a:solidFill>
+                        <a:srgbClr val="DDE5E8"/>
+                      </a:solidFill>
+                      <a:prstDash val="solid"/>
+                      <a:round/>
+                      <a:headEnd type="none" w="med" len="med"/>
+                      <a:tailEnd type="none" w="med" len="med"/>
+                    </a:lnB>
+                    <a:solidFill>
+                      <a:srgbClr val="0B3C49"/>
+                    </a:solidFill>
+                  </a:tcPr>
+                </a:tc>
+                <a:tc>
+                  <a:txBody>
+                    <a:bodyPr/>
+                    <a:lstStyle/>
+                    <a:p>
+                      <a:pPr algn="ctr" indent="0" marL="0">
+                        <a:buNone/>
+                      </a:pPr>
+                      <a:r>
+                        <a:rPr lang="en-US" sz="1100" b="1" dirty="0">
+                          <a:solidFill>
+                            <a:srgbClr val="FFFFFF"/>
+                          </a:solidFill>
+                          <a:latin typeface="微软雅黑" pitchFamily="34" charset="0"/>
+                          <a:ea typeface="微软雅黑" pitchFamily="34" charset="-122"/>
+                          <a:cs typeface="微软雅黑" pitchFamily="34" charset="-120"/>
+                        </a:rPr>
+                        <a:t>SVM-poly</a:t>
+                      </a:r>
+                      <a:endParaRPr lang="en-US" sz="1100" dirty="0">
+                        <a:latin typeface="微软雅黑" charset="0"/>
+                        <a:ea typeface="微软雅黑" charset="0"/>
+                        <a:cs typeface="微软雅黑" charset="0"/>
+                      </a:endParaRPr>
+                    </a:p>
+                  </a:txBody>
+                  <a:tcPr marL="91440" marR="91440" marT="45720" marB="45720" anchor="ctr">
+                    <a:lnL w="6350" cap="flat" cmpd="sng" algn="ctr">
+                      <a:solidFill>
+                        <a:srgbClr val="DDE5E8"/>
+                      </a:solidFill>
+                      <a:prstDash val="solid"/>
+                      <a:round/>
+                      <a:headEnd type="none" w="med" len="med"/>
+                      <a:tailEnd type="none" w="med" len="med"/>
+                    </a:lnL>
+                    <a:lnR w="6350" cap="flat" cmpd="sng" algn="ctr">
+                      <a:solidFill>
+                        <a:srgbClr val="DDE5E8"/>
+                      </a:solidFill>
+                      <a:prstDash val="solid"/>
+                      <a:round/>
+                      <a:headEnd type="none" w="med" len="med"/>
+                      <a:tailEnd type="none" w="med" len="med"/>
+                    </a:lnR>
+                    <a:lnT w="6350" cap="flat" cmpd="sng" algn="ctr">
+                      <a:solidFill>
+                        <a:srgbClr val="DDE5E8"/>
+                      </a:solidFill>
+                      <a:prstDash val="solid"/>
+                      <a:round/>
+                      <a:headEnd type="none" w="med" len="med"/>
+                      <a:tailEnd type="none" w="med" len="med"/>
+                    </a:lnT>
+                    <a:lnB w="6350" cap="flat" cmpd="sng" algn="ctr">
+                      <a:solidFill>
+                        <a:srgbClr val="DDE5E8"/>
+                      </a:solidFill>
+                      <a:prstDash val="solid"/>
+                      <a:round/>
+                      <a:headEnd type="none" w="med" len="med"/>
+                      <a:tailEnd type="none" w="med" len="med"/>
+                    </a:lnB>
+                    <a:solidFill>
+                      <a:srgbClr val="0B3C49"/>
+                    </a:solidFill>
+                  </a:tcPr>
+                </a:tc>
+                <a:tc>
+                  <a:txBody>
+                    <a:bodyPr/>
+                    <a:lstStyle/>
+                    <a:p>
+                      <a:pPr algn="ctr" indent="0" marL="0">
+                        <a:buNone/>
+                      </a:pPr>
+                      <a:r>
+                        <a:rPr lang="en-US" sz="1100" b="1" dirty="0">
+                          <a:solidFill>
+                            <a:srgbClr val="FFFFFF"/>
+                          </a:solidFill>
+                          <a:latin typeface="微软雅黑" pitchFamily="34" charset="0"/>
+                          <a:ea typeface="微软雅黑" pitchFamily="34" charset="-122"/>
+                          <a:cs typeface="微软雅黑" pitchFamily="34" charset="-120"/>
+                        </a:rPr>
+                        <a:t>GP-RBF</a:t>
+                      </a:r>
+                      <a:endParaRPr lang="en-US" sz="1100" dirty="0">
+                        <a:latin typeface="微软雅黑" charset="0"/>
+                        <a:ea typeface="微软雅黑" charset="0"/>
+                        <a:cs typeface="微软雅黑" charset="0"/>
+                      </a:endParaRPr>
+                    </a:p>
+                  </a:txBody>
+                  <a:tcPr marL="91440" marR="91440" marT="45720" marB="45720" anchor="ctr">
+                    <a:lnL w="6350" cap="flat" cmpd="sng" algn="ctr">
+                      <a:solidFill>
+                        <a:srgbClr val="DDE5E8"/>
+                      </a:solidFill>
+                      <a:prstDash val="solid"/>
+                      <a:round/>
+                      <a:headEnd type="none" w="med" len="med"/>
+                      <a:tailEnd type="none" w="med" len="med"/>
+                    </a:lnL>
+                    <a:lnR w="6350" cap="flat" cmpd="sng" algn="ctr">
+                      <a:solidFill>
+                        <a:srgbClr val="DDE5E8"/>
+                      </a:solidFill>
+                      <a:prstDash val="solid"/>
+                      <a:round/>
+                      <a:headEnd type="none" w="med" len="med"/>
+                      <a:tailEnd type="none" w="med" len="med"/>
+                    </a:lnR>
+                    <a:lnT w="6350" cap="flat" cmpd="sng" algn="ctr">
+                      <a:solidFill>
+                        <a:srgbClr val="DDE5E8"/>
+                      </a:solidFill>
+                      <a:prstDash val="solid"/>
+                      <a:round/>
+                      <a:headEnd type="none" w="med" len="med"/>
+                      <a:tailEnd type="none" w="med" len="med"/>
+                    </a:lnT>
+                    <a:lnB w="6350" cap="flat" cmpd="sng" algn="ctr">
+                      <a:solidFill>
+                        <a:srgbClr val="DDE5E8"/>
+                      </a:solidFill>
+                      <a:prstDash val="solid"/>
+                      <a:round/>
+                      <a:headEnd type="none" w="med" len="med"/>
+                      <a:tailEnd type="none" w="med" len="med"/>
+                    </a:lnB>
+                    <a:solidFill>
+                      <a:srgbClr val="0B3C49"/>
+                    </a:solidFill>
+                  </a:tcPr>
+                </a:tc>
+                <a:tc>
+                  <a:txBody>
+                    <a:bodyPr/>
+                    <a:lstStyle/>
+                    <a:p>
+                      <a:pPr algn="ctr" indent="0" marL="0">
+                        <a:buNone/>
+                      </a:pPr>
+                      <a:r>
+                        <a:rPr lang="en-US" sz="1100" b="1" dirty="0">
+                          <a:solidFill>
+                            <a:srgbClr val="FFFFFF"/>
+                          </a:solidFill>
+                          <a:latin typeface="微软雅黑" pitchFamily="34" charset="0"/>
+                          <a:ea typeface="微软雅黑" pitchFamily="34" charset="-122"/>
+                          <a:cs typeface="微软雅黑" pitchFamily="34" charset="-120"/>
+                        </a:rPr>
+                        <a:t>GP-Matérn</a:t>
+                      </a:r>
+                      <a:endParaRPr lang="en-US" sz="1100" dirty="0">
+                        <a:latin typeface="微软雅黑" charset="0"/>
+                        <a:ea typeface="微软雅黑" charset="0"/>
+                        <a:cs typeface="微软雅黑" charset="0"/>
+                      </a:endParaRPr>
+                    </a:p>
+                  </a:txBody>
+                  <a:tcPr marL="91440" marR="91440" marT="45720" marB="45720" anchor="ctr">
+                    <a:lnL w="6350" cap="flat" cmpd="sng" algn="ctr">
+                      <a:solidFill>
+                        <a:srgbClr val="DDE5E8"/>
+                      </a:solidFill>
+                      <a:prstDash val="solid"/>
+                      <a:round/>
+                      <a:headEnd type="none" w="med" len="med"/>
+                      <a:tailEnd type="none" w="med" len="med"/>
+                    </a:lnL>
+                    <a:lnR w="6350" cap="flat" cmpd="sng" algn="ctr">
+                      <a:solidFill>
+                        <a:srgbClr val="DDE5E8"/>
+                      </a:solidFill>
+                      <a:prstDash val="solid"/>
+                      <a:round/>
+                      <a:headEnd type="none" w="med" len="med"/>
+                      <a:tailEnd type="none" w="med" len="med"/>
+                    </a:lnR>
+                    <a:lnT w="6350" cap="flat" cmpd="sng" algn="ctr">
+                      <a:solidFill>
+                        <a:srgbClr val="DDE5E8"/>
+                      </a:solidFill>
+                      <a:prstDash val="solid"/>
+                      <a:round/>
+                      <a:headEnd type="none" w="med" len="med"/>
+                      <a:tailEnd type="none" w="med" len="med"/>
+                    </a:lnT>
+                    <a:lnB w="6350" cap="flat" cmpd="sng" algn="ctr">
+                      <a:solidFill>
+                        <a:srgbClr val="DDE5E8"/>
+                      </a:solidFill>
+                      <a:prstDash val="solid"/>
+                      <a:round/>
+                      <a:headEnd type="none" w="med" len="med"/>
+                      <a:tailEnd type="none" w="med" len="med"/>
+                    </a:lnB>
+                    <a:solidFill>
+                      <a:srgbClr val="0B3C49"/>
+                    </a:solidFill>
+                  </a:tcPr>
+                </a:tc>
+              </a:tr>
+              <a:tr h="384048">
+                <a:tc>
+                  <a:txBody>
+                    <a:bodyPr/>
+                    <a:lstStyle/>
+                    <a:p>
+                      <a:pPr algn="l" indent="0" marL="0">
+                        <a:buNone/>
+                      </a:pPr>
+                      <a:r>
+                        <a:rPr lang="en-US" sz="1100" b="1" dirty="0">
                           <a:solidFill>
                             <a:srgbClr val="16252C"/>
                           </a:solidFill>
@@ -15171,9 +15294,9 @@
                           <a:ea typeface="微软雅黑" pitchFamily="34" charset="-122"/>
                           <a:cs typeface="微软雅黑" pitchFamily="34" charset="-120"/>
                         </a:rPr>
-                        <a:t>SVM-RBF vs 随机森林</a:t>
+                        <a:t>ExtraTrees</a:t>
                       </a:r>
-                      <a:endParaRPr lang="en-US" sz="1050" dirty="0">
+                      <a:endParaRPr lang="en-US" sz="1100" dirty="0">
                         <a:latin typeface="微软雅黑" charset="0"/>
                         <a:ea typeface="微软雅黑" charset="0"/>
                         <a:cs typeface="微软雅黑" charset="0"/>
@@ -15228,17 +15351,17 @@
                         <a:buNone/>
                       </a:pPr>
                       <a:r>
-                        <a:rPr lang="en-US" sz="1050" dirty="0">
+                        <a:rPr lang="en-US" sz="1100" dirty="0">
                           <a:solidFill>
-                            <a:srgbClr val="16252C"/>
+                            <a:srgbClr val="5F7580"/>
                           </a:solidFill>
                           <a:latin typeface="微软雅黑" pitchFamily="34" charset="0"/>
                           <a:ea typeface="微软雅黑" pitchFamily="34" charset="-122"/>
                           <a:cs typeface="微软雅黑" pitchFamily="34" charset="-120"/>
                         </a:rPr>
-                        <a:t>+0.029</a:t>
+                        <a:t>.085</a:t>
                       </a:r>
-                      <a:endParaRPr lang="en-US" sz="1050" dirty="0">
+                      <a:endParaRPr lang="en-US" sz="1100" dirty="0">
                         <a:latin typeface="微软雅黑" charset="0"/>
                         <a:ea typeface="微软雅黑" charset="0"/>
                         <a:cs typeface="微软雅黑" charset="0"/>
@@ -15282,6 +15405,9 @@
                       <a:headEnd type="none" w="med" len="med"/>
                       <a:tailEnd type="none" w="med" len="med"/>
                     </a:lnB>
+                    <a:solidFill>
+                      <a:srgbClr val="EDEDEA"/>
+                    </a:solidFill>
                   </a:tcPr>
                 </a:tc>
                 <a:tc>
@@ -15293,82 +15419,17 @@
                         <a:buNone/>
                       </a:pPr>
                       <a:r>
-                        <a:rPr lang="en-US" sz="1050" dirty="0">
+                        <a:rPr lang="en-US" sz="1100" b="1" dirty="0">
                           <a:solidFill>
-                            <a:srgbClr val="16252C"/>
+                            <a:srgbClr val="18707F"/>
                           </a:solidFill>
                           <a:latin typeface="微软雅黑" pitchFamily="34" charset="0"/>
                           <a:ea typeface="微软雅黑" pitchFamily="34" charset="-122"/>
                           <a:cs typeface="微软雅黑" pitchFamily="34" charset="-120"/>
                         </a:rPr>
-                        <a:t>17/25</a:t>
+                        <a:t>.005</a:t>
                       </a:r>
-                      <a:endParaRPr lang="en-US" sz="1050" dirty="0">
-                        <a:latin typeface="微软雅黑" charset="0"/>
-                        <a:ea typeface="微软雅黑" charset="0"/>
-                        <a:cs typeface="微软雅黑" charset="0"/>
-                      </a:endParaRPr>
-                    </a:p>
-                  </a:txBody>
-                  <a:tcPr marL="91440" marR="91440" marT="45720" marB="45720" anchor="ctr">
-                    <a:lnL w="6350" cap="flat" cmpd="sng" algn="ctr">
-                      <a:solidFill>
-                        <a:srgbClr val="DDE5E8"/>
-                      </a:solidFill>
-                      <a:prstDash val="solid"/>
-                      <a:round/>
-                      <a:headEnd type="none" w="med" len="med"/>
-                      <a:tailEnd type="none" w="med" len="med"/>
-                    </a:lnL>
-                    <a:lnR w="6350" cap="flat" cmpd="sng" algn="ctr">
-                      <a:solidFill>
-                        <a:srgbClr val="DDE5E8"/>
-                      </a:solidFill>
-                      <a:prstDash val="solid"/>
-                      <a:round/>
-                      <a:headEnd type="none" w="med" len="med"/>
-                      <a:tailEnd type="none" w="med" len="med"/>
-                    </a:lnR>
-                    <a:lnT w="6350" cap="flat" cmpd="sng" algn="ctr">
-                      <a:solidFill>
-                        <a:srgbClr val="DDE5E8"/>
-                      </a:solidFill>
-                      <a:prstDash val="solid"/>
-                      <a:round/>
-                      <a:headEnd type="none" w="med" len="med"/>
-                      <a:tailEnd type="none" w="med" len="med"/>
-                    </a:lnT>
-                    <a:lnB w="6350" cap="flat" cmpd="sng" algn="ctr">
-                      <a:solidFill>
-                        <a:srgbClr val="DDE5E8"/>
-                      </a:solidFill>
-                      <a:prstDash val="solid"/>
-                      <a:round/>
-                      <a:headEnd type="none" w="med" len="med"/>
-                      <a:tailEnd type="none" w="med" len="med"/>
-                    </a:lnB>
-                  </a:tcPr>
-                </a:tc>
-                <a:tc>
-                  <a:txBody>
-                    <a:bodyPr/>
-                    <a:lstStyle/>
-                    <a:p>
-                      <a:pPr algn="ctr" indent="0" marL="0">
-                        <a:buNone/>
-                      </a:pPr>
-                      <a:r>
-                        <a:rPr lang="en-US" sz="1150" b="1" dirty="0">
-                          <a:solidFill>
-                            <a:srgbClr val="16252C"/>
-                          </a:solidFill>
-                          <a:latin typeface="微软雅黑" pitchFamily="34" charset="0"/>
-                          <a:ea typeface="微软雅黑" pitchFamily="34" charset="-122"/>
-                          <a:cs typeface="微软雅黑" pitchFamily="34" charset="-120"/>
-                        </a:rPr>
-                        <a:t>0.021</a:t>
-                      </a:r>
-                      <a:endParaRPr lang="en-US" sz="1150" dirty="0">
+                      <a:endParaRPr lang="en-US" sz="1100" dirty="0">
                         <a:latin typeface="微软雅黑" charset="0"/>
                         <a:ea typeface="微软雅黑" charset="0"/>
                         <a:cs typeface="微软雅黑" charset="0"/>
@@ -15426,279 +15487,17 @@
                         <a:buNone/>
                       </a:pPr>
                       <a:r>
-                        <a:rPr lang="en-US" sz="1050" dirty="0">
+                        <a:rPr lang="en-US" sz="1100" b="1" dirty="0">
                           <a:solidFill>
-                            <a:srgbClr val="16252C"/>
+                            <a:srgbClr val="18707F"/>
                           </a:solidFill>
                           <a:latin typeface="微软雅黑" pitchFamily="34" charset="0"/>
                           <a:ea typeface="微软雅黑" pitchFamily="34" charset="-122"/>
                           <a:cs typeface="微软雅黑" pitchFamily="34" charset="-120"/>
                         </a:rPr>
-                        <a:t>0.013</a:t>
+                        <a:t>.003</a:t>
                       </a:r>
-                      <a:endParaRPr lang="en-US" sz="1050" dirty="0">
-                        <a:latin typeface="微软雅黑" charset="0"/>
-                        <a:ea typeface="微软雅黑" charset="0"/>
-                        <a:cs typeface="微软雅黑" charset="0"/>
-                      </a:endParaRPr>
-                    </a:p>
-                  </a:txBody>
-                  <a:tcPr marL="91440" marR="91440" marT="45720" marB="45720" anchor="ctr">
-                    <a:lnL w="6350" cap="flat" cmpd="sng" algn="ctr">
-                      <a:solidFill>
-                        <a:srgbClr val="DDE5E8"/>
-                      </a:solidFill>
-                      <a:prstDash val="solid"/>
-                      <a:round/>
-                      <a:headEnd type="none" w="med" len="med"/>
-                      <a:tailEnd type="none" w="med" len="med"/>
-                    </a:lnL>
-                    <a:lnR w="6350" cap="flat" cmpd="sng" algn="ctr">
-                      <a:solidFill>
-                        <a:srgbClr val="DDE5E8"/>
-                      </a:solidFill>
-                      <a:prstDash val="solid"/>
-                      <a:round/>
-                      <a:headEnd type="none" w="med" len="med"/>
-                      <a:tailEnd type="none" w="med" len="med"/>
-                    </a:lnR>
-                    <a:lnT w="6350" cap="flat" cmpd="sng" algn="ctr">
-                      <a:solidFill>
-                        <a:srgbClr val="DDE5E8"/>
-                      </a:solidFill>
-                      <a:prstDash val="solid"/>
-                      <a:round/>
-                      <a:headEnd type="none" w="med" len="med"/>
-                      <a:tailEnd type="none" w="med" len="med"/>
-                    </a:lnT>
-                    <a:lnB w="6350" cap="flat" cmpd="sng" algn="ctr">
-                      <a:solidFill>
-                        <a:srgbClr val="DDE5E8"/>
-                      </a:solidFill>
-                      <a:prstDash val="solid"/>
-                      <a:round/>
-                      <a:headEnd type="none" w="med" len="med"/>
-                      <a:tailEnd type="none" w="med" len="med"/>
-                    </a:lnB>
-                  </a:tcPr>
-                </a:tc>
-              </a:tr>
-              <a:tr h="457200">
-                <a:tc>
-                  <a:txBody>
-                    <a:bodyPr/>
-                    <a:lstStyle/>
-                    <a:p>
-                      <a:pPr algn="ctr" indent="0" marL="0">
-                        <a:buNone/>
-                      </a:pPr>
-                      <a:r>
-                        <a:rPr lang="en-US" sz="1050" dirty="0">
-                          <a:solidFill>
-                            <a:srgbClr val="16252C"/>
-                          </a:solidFill>
-                          <a:latin typeface="微软雅黑" pitchFamily="34" charset="0"/>
-                          <a:ea typeface="微软雅黑" pitchFamily="34" charset="-122"/>
-                          <a:cs typeface="微软雅黑" pitchFamily="34" charset="-120"/>
-                        </a:rPr>
-                        <a:t>SVM-RBF vs L1-LR</a:t>
-                      </a:r>
-                      <a:endParaRPr lang="en-US" sz="1050" dirty="0">
-                        <a:latin typeface="微软雅黑" charset="0"/>
-                        <a:ea typeface="微软雅黑" charset="0"/>
-                        <a:cs typeface="微软雅黑" charset="0"/>
-                      </a:endParaRPr>
-                    </a:p>
-                  </a:txBody>
-                  <a:tcPr marL="91440" marR="91440" marT="45720" marB="45720" anchor="ctr">
-                    <a:lnL w="6350" cap="flat" cmpd="sng" algn="ctr">
-                      <a:solidFill>
-                        <a:srgbClr val="DDE5E8"/>
-                      </a:solidFill>
-                      <a:prstDash val="solid"/>
-                      <a:round/>
-                      <a:headEnd type="none" w="med" len="med"/>
-                      <a:tailEnd type="none" w="med" len="med"/>
-                    </a:lnL>
-                    <a:lnR w="6350" cap="flat" cmpd="sng" algn="ctr">
-                      <a:solidFill>
-                        <a:srgbClr val="DDE5E8"/>
-                      </a:solidFill>
-                      <a:prstDash val="solid"/>
-                      <a:round/>
-                      <a:headEnd type="none" w="med" len="med"/>
-                      <a:tailEnd type="none" w="med" len="med"/>
-                    </a:lnR>
-                    <a:lnT w="6350" cap="flat" cmpd="sng" algn="ctr">
-                      <a:solidFill>
-                        <a:srgbClr val="DDE5E8"/>
-                      </a:solidFill>
-                      <a:prstDash val="solid"/>
-                      <a:round/>
-                      <a:headEnd type="none" w="med" len="med"/>
-                      <a:tailEnd type="none" w="med" len="med"/>
-                    </a:lnT>
-                    <a:lnB w="6350" cap="flat" cmpd="sng" algn="ctr">
-                      <a:solidFill>
-                        <a:srgbClr val="DDE5E8"/>
-                      </a:solidFill>
-                      <a:prstDash val="solid"/>
-                      <a:round/>
-                      <a:headEnd type="none" w="med" len="med"/>
-                      <a:tailEnd type="none" w="med" len="med"/>
-                    </a:lnB>
-                  </a:tcPr>
-                </a:tc>
-                <a:tc>
-                  <a:txBody>
-                    <a:bodyPr/>
-                    <a:lstStyle/>
-                    <a:p>
-                      <a:pPr algn="ctr" indent="0" marL="0">
-                        <a:buNone/>
-                      </a:pPr>
-                      <a:r>
-                        <a:rPr lang="en-US" sz="1050" dirty="0">
-                          <a:solidFill>
-                            <a:srgbClr val="16252C"/>
-                          </a:solidFill>
-                          <a:latin typeface="微软雅黑" pitchFamily="34" charset="0"/>
-                          <a:ea typeface="微软雅黑" pitchFamily="34" charset="-122"/>
-                          <a:cs typeface="微软雅黑" pitchFamily="34" charset="-120"/>
-                        </a:rPr>
-                        <a:t>+0.052</a:t>
-                      </a:r>
-                      <a:endParaRPr lang="en-US" sz="1050" dirty="0">
-                        <a:latin typeface="微软雅黑" charset="0"/>
-                        <a:ea typeface="微软雅黑" charset="0"/>
-                        <a:cs typeface="微软雅黑" charset="0"/>
-                      </a:endParaRPr>
-                    </a:p>
-                  </a:txBody>
-                  <a:tcPr marL="91440" marR="91440" marT="45720" marB="45720" anchor="ctr">
-                    <a:lnL w="6350" cap="flat" cmpd="sng" algn="ctr">
-                      <a:solidFill>
-                        <a:srgbClr val="DDE5E8"/>
-                      </a:solidFill>
-                      <a:prstDash val="solid"/>
-                      <a:round/>
-                      <a:headEnd type="none" w="med" len="med"/>
-                      <a:tailEnd type="none" w="med" len="med"/>
-                    </a:lnL>
-                    <a:lnR w="6350" cap="flat" cmpd="sng" algn="ctr">
-                      <a:solidFill>
-                        <a:srgbClr val="DDE5E8"/>
-                      </a:solidFill>
-                      <a:prstDash val="solid"/>
-                      <a:round/>
-                      <a:headEnd type="none" w="med" len="med"/>
-                      <a:tailEnd type="none" w="med" len="med"/>
-                    </a:lnR>
-                    <a:lnT w="6350" cap="flat" cmpd="sng" algn="ctr">
-                      <a:solidFill>
-                        <a:srgbClr val="DDE5E8"/>
-                      </a:solidFill>
-                      <a:prstDash val="solid"/>
-                      <a:round/>
-                      <a:headEnd type="none" w="med" len="med"/>
-                      <a:tailEnd type="none" w="med" len="med"/>
-                    </a:lnT>
-                    <a:lnB w="6350" cap="flat" cmpd="sng" algn="ctr">
-                      <a:solidFill>
-                        <a:srgbClr val="DDE5E8"/>
-                      </a:solidFill>
-                      <a:prstDash val="solid"/>
-                      <a:round/>
-                      <a:headEnd type="none" w="med" len="med"/>
-                      <a:tailEnd type="none" w="med" len="med"/>
-                    </a:lnB>
-                  </a:tcPr>
-                </a:tc>
-                <a:tc>
-                  <a:txBody>
-                    <a:bodyPr/>
-                    <a:lstStyle/>
-                    <a:p>
-                      <a:pPr algn="ctr" indent="0" marL="0">
-                        <a:buNone/>
-                      </a:pPr>
-                      <a:r>
-                        <a:rPr lang="en-US" sz="1050" dirty="0">
-                          <a:solidFill>
-                            <a:srgbClr val="16252C"/>
-                          </a:solidFill>
-                          <a:latin typeface="微软雅黑" pitchFamily="34" charset="0"/>
-                          <a:ea typeface="微软雅黑" pitchFamily="34" charset="-122"/>
-                          <a:cs typeface="微软雅黑" pitchFamily="34" charset="-120"/>
-                        </a:rPr>
-                        <a:t>21/25</a:t>
-                      </a:r>
-                      <a:endParaRPr lang="en-US" sz="1050" dirty="0">
-                        <a:latin typeface="微软雅黑" charset="0"/>
-                        <a:ea typeface="微软雅黑" charset="0"/>
-                        <a:cs typeface="微软雅黑" charset="0"/>
-                      </a:endParaRPr>
-                    </a:p>
-                  </a:txBody>
-                  <a:tcPr marL="91440" marR="91440" marT="45720" marB="45720" anchor="ctr">
-                    <a:lnL w="6350" cap="flat" cmpd="sng" algn="ctr">
-                      <a:solidFill>
-                        <a:srgbClr val="DDE5E8"/>
-                      </a:solidFill>
-                      <a:prstDash val="solid"/>
-                      <a:round/>
-                      <a:headEnd type="none" w="med" len="med"/>
-                      <a:tailEnd type="none" w="med" len="med"/>
-                    </a:lnL>
-                    <a:lnR w="6350" cap="flat" cmpd="sng" algn="ctr">
-                      <a:solidFill>
-                        <a:srgbClr val="DDE5E8"/>
-                      </a:solidFill>
-                      <a:prstDash val="solid"/>
-                      <a:round/>
-                      <a:headEnd type="none" w="med" len="med"/>
-                      <a:tailEnd type="none" w="med" len="med"/>
-                    </a:lnR>
-                    <a:lnT w="6350" cap="flat" cmpd="sng" algn="ctr">
-                      <a:solidFill>
-                        <a:srgbClr val="DDE5E8"/>
-                      </a:solidFill>
-                      <a:prstDash val="solid"/>
-                      <a:round/>
-                      <a:headEnd type="none" w="med" len="med"/>
-                      <a:tailEnd type="none" w="med" len="med"/>
-                    </a:lnT>
-                    <a:lnB w="6350" cap="flat" cmpd="sng" algn="ctr">
-                      <a:solidFill>
-                        <a:srgbClr val="DDE5E8"/>
-                      </a:solidFill>
-                      <a:prstDash val="solid"/>
-                      <a:round/>
-                      <a:headEnd type="none" w="med" len="med"/>
-                      <a:tailEnd type="none" w="med" len="med"/>
-                    </a:lnB>
-                  </a:tcPr>
-                </a:tc>
-                <a:tc>
-                  <a:txBody>
-                    <a:bodyPr/>
-                    <a:lstStyle/>
-                    <a:p>
-                      <a:pPr algn="ctr" indent="0" marL="0">
-                        <a:buNone/>
-                      </a:pPr>
-                      <a:r>
-                        <a:rPr lang="en-US" sz="1150" b="1" dirty="0">
-                          <a:solidFill>
-                            <a:srgbClr val="16252C"/>
-                          </a:solidFill>
-                          <a:latin typeface="微软雅黑" pitchFamily="34" charset="0"/>
-                          <a:ea typeface="微软雅黑" pitchFamily="34" charset="-122"/>
-                          <a:cs typeface="微软雅黑" pitchFamily="34" charset="-120"/>
-                        </a:rPr>
-                        <a:t>0.0002</a:t>
-                      </a:r>
-                      <a:endParaRPr lang="en-US" sz="1150" dirty="0">
+                      <a:endParaRPr lang="en-US" sz="1100" dirty="0">
                         <a:latin typeface="微软雅黑" charset="0"/>
                         <a:ea typeface="微软雅黑" charset="0"/>
                         <a:cs typeface="微软雅黑" charset="0"/>
@@ -15756,17 +15555,17 @@
                         <a:buNone/>
                       </a:pPr>
                       <a:r>
-                        <a:rPr lang="en-US" sz="1050" dirty="0">
+                        <a:rPr lang="en-US" sz="1100" b="1" dirty="0">
                           <a:solidFill>
-                            <a:srgbClr val="16252C"/>
+                            <a:srgbClr val="18707F"/>
                           </a:solidFill>
                           <a:latin typeface="微软雅黑" pitchFamily="34" charset="0"/>
                           <a:ea typeface="微软雅黑" pitchFamily="34" charset="-122"/>
                           <a:cs typeface="微软雅黑" pitchFamily="34" charset="-120"/>
                         </a:rPr>
-                        <a:t>&lt;0.0001</a:t>
+                        <a:t>.001</a:t>
                       </a:r>
-                      <a:endParaRPr lang="en-US" sz="1050" dirty="0">
+                      <a:endParaRPr lang="en-US" sz="1100" dirty="0">
                         <a:latin typeface="微软雅黑" charset="0"/>
                         <a:ea typeface="微软雅黑" charset="0"/>
                         <a:cs typeface="微软雅黑" charset="0"/>
@@ -15810,6 +15609,1595 @@
                       <a:headEnd type="none" w="med" len="med"/>
                       <a:tailEnd type="none" w="med" len="med"/>
                     </a:lnB>
+                    <a:solidFill>
+                      <a:srgbClr val="E4F0F0"/>
+                    </a:solidFill>
+                  </a:tcPr>
+                </a:tc>
+                <a:tc>
+                  <a:txBody>
+                    <a:bodyPr/>
+                    <a:lstStyle/>
+                    <a:p>
+                      <a:pPr algn="ctr" indent="0" marL="0">
+                        <a:buNone/>
+                      </a:pPr>
+                      <a:r>
+                        <a:rPr lang="en-US" sz="1100" b="1" dirty="0">
+                          <a:solidFill>
+                            <a:srgbClr val="18707F"/>
+                          </a:solidFill>
+                          <a:latin typeface="微软雅黑" pitchFamily="34" charset="0"/>
+                          <a:ea typeface="微软雅黑" pitchFamily="34" charset="-122"/>
+                          <a:cs typeface="微软雅黑" pitchFamily="34" charset="-120"/>
+                        </a:rPr>
+                        <a:t>.001</a:t>
+                      </a:r>
+                      <a:endParaRPr lang="en-US" sz="1100" dirty="0">
+                        <a:latin typeface="微软雅黑" charset="0"/>
+                        <a:ea typeface="微软雅黑" charset="0"/>
+                        <a:cs typeface="微软雅黑" charset="0"/>
+                      </a:endParaRPr>
+                    </a:p>
+                  </a:txBody>
+                  <a:tcPr marL="91440" marR="91440" marT="45720" marB="45720" anchor="ctr">
+                    <a:lnL w="6350" cap="flat" cmpd="sng" algn="ctr">
+                      <a:solidFill>
+                        <a:srgbClr val="DDE5E8"/>
+                      </a:solidFill>
+                      <a:prstDash val="solid"/>
+                      <a:round/>
+                      <a:headEnd type="none" w="med" len="med"/>
+                      <a:tailEnd type="none" w="med" len="med"/>
+                    </a:lnL>
+                    <a:lnR w="6350" cap="flat" cmpd="sng" algn="ctr">
+                      <a:solidFill>
+                        <a:srgbClr val="DDE5E8"/>
+                      </a:solidFill>
+                      <a:prstDash val="solid"/>
+                      <a:round/>
+                      <a:headEnd type="none" w="med" len="med"/>
+                      <a:tailEnd type="none" w="med" len="med"/>
+                    </a:lnR>
+                    <a:lnT w="6350" cap="flat" cmpd="sng" algn="ctr">
+                      <a:solidFill>
+                        <a:srgbClr val="DDE5E8"/>
+                      </a:solidFill>
+                      <a:prstDash val="solid"/>
+                      <a:round/>
+                      <a:headEnd type="none" w="med" len="med"/>
+                      <a:tailEnd type="none" w="med" len="med"/>
+                    </a:lnT>
+                    <a:lnB w="6350" cap="flat" cmpd="sng" algn="ctr">
+                      <a:solidFill>
+                        <a:srgbClr val="DDE5E8"/>
+                      </a:solidFill>
+                      <a:prstDash val="solid"/>
+                      <a:round/>
+                      <a:headEnd type="none" w="med" len="med"/>
+                      <a:tailEnd type="none" w="med" len="med"/>
+                    </a:lnB>
+                    <a:solidFill>
+                      <a:srgbClr val="E4F0F0"/>
+                    </a:solidFill>
+                  </a:tcPr>
+                </a:tc>
+              </a:tr>
+              <a:tr h="384048">
+                <a:tc>
+                  <a:txBody>
+                    <a:bodyPr/>
+                    <a:lstStyle/>
+                    <a:p>
+                      <a:pPr algn="l" indent="0" marL="0">
+                        <a:buNone/>
+                      </a:pPr>
+                      <a:r>
+                        <a:rPr lang="en-US" sz="1100" b="1" dirty="0">
+                          <a:solidFill>
+                            <a:srgbClr val="16252C"/>
+                          </a:solidFill>
+                          <a:latin typeface="微软雅黑" pitchFamily="34" charset="0"/>
+                          <a:ea typeface="微软雅黑" pitchFamily="34" charset="-122"/>
+                          <a:cs typeface="微软雅黑" pitchFamily="34" charset="-120"/>
+                        </a:rPr>
+                        <a:t>SVM-RBF</a:t>
+                      </a:r>
+                      <a:endParaRPr lang="en-US" sz="1100" dirty="0">
+                        <a:latin typeface="微软雅黑" charset="0"/>
+                        <a:ea typeface="微软雅黑" charset="0"/>
+                        <a:cs typeface="微软雅黑" charset="0"/>
+                      </a:endParaRPr>
+                    </a:p>
+                  </a:txBody>
+                  <a:tcPr marL="91440" marR="91440" marT="45720" marB="45720" anchor="ctr">
+                    <a:lnL w="6350" cap="flat" cmpd="sng" algn="ctr">
+                      <a:solidFill>
+                        <a:srgbClr val="DDE5E8"/>
+                      </a:solidFill>
+                      <a:prstDash val="solid"/>
+                      <a:round/>
+                      <a:headEnd type="none" w="med" len="med"/>
+                      <a:tailEnd type="none" w="med" len="med"/>
+                    </a:lnL>
+                    <a:lnR w="6350" cap="flat" cmpd="sng" algn="ctr">
+                      <a:solidFill>
+                        <a:srgbClr val="DDE5E8"/>
+                      </a:solidFill>
+                      <a:prstDash val="solid"/>
+                      <a:round/>
+                      <a:headEnd type="none" w="med" len="med"/>
+                      <a:tailEnd type="none" w="med" len="med"/>
+                    </a:lnR>
+                    <a:lnT w="6350" cap="flat" cmpd="sng" algn="ctr">
+                      <a:solidFill>
+                        <a:srgbClr val="DDE5E8"/>
+                      </a:solidFill>
+                      <a:prstDash val="solid"/>
+                      <a:round/>
+                      <a:headEnd type="none" w="med" len="med"/>
+                      <a:tailEnd type="none" w="med" len="med"/>
+                    </a:lnT>
+                    <a:lnB w="6350" cap="flat" cmpd="sng" algn="ctr">
+                      <a:solidFill>
+                        <a:srgbClr val="DDE5E8"/>
+                      </a:solidFill>
+                      <a:prstDash val="solid"/>
+                      <a:round/>
+                      <a:headEnd type="none" w="med" len="med"/>
+                      <a:tailEnd type="none" w="med" len="med"/>
+                    </a:lnB>
+                  </a:tcPr>
+                </a:tc>
+                <a:tc>
+                  <a:txBody>
+                    <a:bodyPr/>
+                    <a:lstStyle/>
+                    <a:p>
+                      <a:pPr algn="ctr" indent="0" marL="0">
+                        <a:buNone/>
+                      </a:pPr>
+                      <a:endParaRPr lang="en-US" sz="1100" dirty="0">
+                        <a:latin typeface="微软雅黑" charset="0"/>
+                        <a:ea typeface="微软雅黑" charset="0"/>
+                        <a:cs typeface="微软雅黑" charset="0"/>
+                      </a:endParaRPr>
+                    </a:p>
+                  </a:txBody>
+                  <a:tcPr marL="91440" marR="91440" marT="45720" marB="45720" anchor="ctr">
+                    <a:lnL w="6350" cap="flat" cmpd="sng" algn="ctr">
+                      <a:solidFill>
+                        <a:srgbClr val="DDE5E8"/>
+                      </a:solidFill>
+                      <a:prstDash val="solid"/>
+                      <a:round/>
+                      <a:headEnd type="none" w="med" len="med"/>
+                      <a:tailEnd type="none" w="med" len="med"/>
+                    </a:lnL>
+                    <a:lnR w="6350" cap="flat" cmpd="sng" algn="ctr">
+                      <a:solidFill>
+                        <a:srgbClr val="DDE5E8"/>
+                      </a:solidFill>
+                      <a:prstDash val="solid"/>
+                      <a:round/>
+                      <a:headEnd type="none" w="med" len="med"/>
+                      <a:tailEnd type="none" w="med" len="med"/>
+                    </a:lnR>
+                    <a:lnT w="6350" cap="flat" cmpd="sng" algn="ctr">
+                      <a:solidFill>
+                        <a:srgbClr val="DDE5E8"/>
+                      </a:solidFill>
+                      <a:prstDash val="solid"/>
+                      <a:round/>
+                      <a:headEnd type="none" w="med" len="med"/>
+                      <a:tailEnd type="none" w="med" len="med"/>
+                    </a:lnT>
+                    <a:lnB w="6350" cap="flat" cmpd="sng" algn="ctr">
+                      <a:solidFill>
+                        <a:srgbClr val="DDE5E8"/>
+                      </a:solidFill>
+                      <a:prstDash val="solid"/>
+                      <a:round/>
+                      <a:headEnd type="none" w="med" len="med"/>
+                      <a:tailEnd type="none" w="med" len="med"/>
+                    </a:lnB>
+                    <a:solidFill>
+                      <a:srgbClr val="F7F5F1"/>
+                    </a:solidFill>
+                  </a:tcPr>
+                </a:tc>
+                <a:tc>
+                  <a:txBody>
+                    <a:bodyPr/>
+                    <a:lstStyle/>
+                    <a:p>
+                      <a:pPr algn="ctr" indent="0" marL="0">
+                        <a:buNone/>
+                      </a:pPr>
+                      <a:r>
+                        <a:rPr lang="en-US" sz="1100" dirty="0">
+                          <a:solidFill>
+                            <a:srgbClr val="5F7580"/>
+                          </a:solidFill>
+                          <a:latin typeface="微软雅黑" pitchFamily="34" charset="0"/>
+                          <a:ea typeface="微软雅黑" pitchFamily="34" charset="-122"/>
+                          <a:cs typeface="微软雅黑" pitchFamily="34" charset="-120"/>
+                        </a:rPr>
+                        <a:t>.360</a:t>
+                      </a:r>
+                      <a:endParaRPr lang="en-US" sz="1100" dirty="0">
+                        <a:latin typeface="微软雅黑" charset="0"/>
+                        <a:ea typeface="微软雅黑" charset="0"/>
+                        <a:cs typeface="微软雅黑" charset="0"/>
+                      </a:endParaRPr>
+                    </a:p>
+                  </a:txBody>
+                  <a:tcPr marL="91440" marR="91440" marT="45720" marB="45720" anchor="ctr">
+                    <a:lnL w="6350" cap="flat" cmpd="sng" algn="ctr">
+                      <a:solidFill>
+                        <a:srgbClr val="DDE5E8"/>
+                      </a:solidFill>
+                      <a:prstDash val="solid"/>
+                      <a:round/>
+                      <a:headEnd type="none" w="med" len="med"/>
+                      <a:tailEnd type="none" w="med" len="med"/>
+                    </a:lnL>
+                    <a:lnR w="6350" cap="flat" cmpd="sng" algn="ctr">
+                      <a:solidFill>
+                        <a:srgbClr val="DDE5E8"/>
+                      </a:solidFill>
+                      <a:prstDash val="solid"/>
+                      <a:round/>
+                      <a:headEnd type="none" w="med" len="med"/>
+                      <a:tailEnd type="none" w="med" len="med"/>
+                    </a:lnR>
+                    <a:lnT w="6350" cap="flat" cmpd="sng" algn="ctr">
+                      <a:solidFill>
+                        <a:srgbClr val="DDE5E8"/>
+                      </a:solidFill>
+                      <a:prstDash val="solid"/>
+                      <a:round/>
+                      <a:headEnd type="none" w="med" len="med"/>
+                      <a:tailEnd type="none" w="med" len="med"/>
+                    </a:lnT>
+                    <a:lnB w="6350" cap="flat" cmpd="sng" algn="ctr">
+                      <a:solidFill>
+                        <a:srgbClr val="DDE5E8"/>
+                      </a:solidFill>
+                      <a:prstDash val="solid"/>
+                      <a:round/>
+                      <a:headEnd type="none" w="med" len="med"/>
+                      <a:tailEnd type="none" w="med" len="med"/>
+                    </a:lnB>
+                    <a:solidFill>
+                      <a:srgbClr val="EDEDEA"/>
+                    </a:solidFill>
+                  </a:tcPr>
+                </a:tc>
+                <a:tc>
+                  <a:txBody>
+                    <a:bodyPr/>
+                    <a:lstStyle/>
+                    <a:p>
+                      <a:pPr algn="ctr" indent="0" marL="0">
+                        <a:buNone/>
+                      </a:pPr>
+                      <a:r>
+                        <a:rPr lang="en-US" sz="1100" dirty="0">
+                          <a:solidFill>
+                            <a:srgbClr val="5F7580"/>
+                          </a:solidFill>
+                          <a:latin typeface="微软雅黑" pitchFamily="34" charset="0"/>
+                          <a:ea typeface="微软雅黑" pitchFamily="34" charset="-122"/>
+                          <a:cs typeface="微软雅黑" pitchFamily="34" charset="-120"/>
+                        </a:rPr>
+                        <a:t>.476</a:t>
+                      </a:r>
+                      <a:endParaRPr lang="en-US" sz="1100" dirty="0">
+                        <a:latin typeface="微软雅黑" charset="0"/>
+                        <a:ea typeface="微软雅黑" charset="0"/>
+                        <a:cs typeface="微软雅黑" charset="0"/>
+                      </a:endParaRPr>
+                    </a:p>
+                  </a:txBody>
+                  <a:tcPr marL="91440" marR="91440" marT="45720" marB="45720" anchor="ctr">
+                    <a:lnL w="6350" cap="flat" cmpd="sng" algn="ctr">
+                      <a:solidFill>
+                        <a:srgbClr val="DDE5E8"/>
+                      </a:solidFill>
+                      <a:prstDash val="solid"/>
+                      <a:round/>
+                      <a:headEnd type="none" w="med" len="med"/>
+                      <a:tailEnd type="none" w="med" len="med"/>
+                    </a:lnL>
+                    <a:lnR w="6350" cap="flat" cmpd="sng" algn="ctr">
+                      <a:solidFill>
+                        <a:srgbClr val="DDE5E8"/>
+                      </a:solidFill>
+                      <a:prstDash val="solid"/>
+                      <a:round/>
+                      <a:headEnd type="none" w="med" len="med"/>
+                      <a:tailEnd type="none" w="med" len="med"/>
+                    </a:lnR>
+                    <a:lnT w="6350" cap="flat" cmpd="sng" algn="ctr">
+                      <a:solidFill>
+                        <a:srgbClr val="DDE5E8"/>
+                      </a:solidFill>
+                      <a:prstDash val="solid"/>
+                      <a:round/>
+                      <a:headEnd type="none" w="med" len="med"/>
+                      <a:tailEnd type="none" w="med" len="med"/>
+                    </a:lnT>
+                    <a:lnB w="6350" cap="flat" cmpd="sng" algn="ctr">
+                      <a:solidFill>
+                        <a:srgbClr val="DDE5E8"/>
+                      </a:solidFill>
+                      <a:prstDash val="solid"/>
+                      <a:round/>
+                      <a:headEnd type="none" w="med" len="med"/>
+                      <a:tailEnd type="none" w="med" len="med"/>
+                    </a:lnB>
+                    <a:solidFill>
+                      <a:srgbClr val="EDEDEA"/>
+                    </a:solidFill>
+                  </a:tcPr>
+                </a:tc>
+                <a:tc>
+                  <a:txBody>
+                    <a:bodyPr/>
+                    <a:lstStyle/>
+                    <a:p>
+                      <a:pPr algn="ctr" indent="0" marL="0">
+                        <a:buNone/>
+                      </a:pPr>
+                      <a:r>
+                        <a:rPr lang="en-US" sz="1100" b="1" dirty="0">
+                          <a:solidFill>
+                            <a:srgbClr val="18707F"/>
+                          </a:solidFill>
+                          <a:latin typeface="微软雅黑" pitchFamily="34" charset="0"/>
+                          <a:ea typeface="微软雅黑" pitchFamily="34" charset="-122"/>
+                          <a:cs typeface="微软雅黑" pitchFamily="34" charset="-120"/>
+                        </a:rPr>
+                        <a:t>.003</a:t>
+                      </a:r>
+                      <a:endParaRPr lang="en-US" sz="1100" dirty="0">
+                        <a:latin typeface="微软雅黑" charset="0"/>
+                        <a:ea typeface="微软雅黑" charset="0"/>
+                        <a:cs typeface="微软雅黑" charset="0"/>
+                      </a:endParaRPr>
+                    </a:p>
+                  </a:txBody>
+                  <a:tcPr marL="91440" marR="91440" marT="45720" marB="45720" anchor="ctr">
+                    <a:lnL w="6350" cap="flat" cmpd="sng" algn="ctr">
+                      <a:solidFill>
+                        <a:srgbClr val="DDE5E8"/>
+                      </a:solidFill>
+                      <a:prstDash val="solid"/>
+                      <a:round/>
+                      <a:headEnd type="none" w="med" len="med"/>
+                      <a:tailEnd type="none" w="med" len="med"/>
+                    </a:lnL>
+                    <a:lnR w="6350" cap="flat" cmpd="sng" algn="ctr">
+                      <a:solidFill>
+                        <a:srgbClr val="DDE5E8"/>
+                      </a:solidFill>
+                      <a:prstDash val="solid"/>
+                      <a:round/>
+                      <a:headEnd type="none" w="med" len="med"/>
+                      <a:tailEnd type="none" w="med" len="med"/>
+                    </a:lnR>
+                    <a:lnT w="6350" cap="flat" cmpd="sng" algn="ctr">
+                      <a:solidFill>
+                        <a:srgbClr val="DDE5E8"/>
+                      </a:solidFill>
+                      <a:prstDash val="solid"/>
+                      <a:round/>
+                      <a:headEnd type="none" w="med" len="med"/>
+                      <a:tailEnd type="none" w="med" len="med"/>
+                    </a:lnT>
+                    <a:lnB w="6350" cap="flat" cmpd="sng" algn="ctr">
+                      <a:solidFill>
+                        <a:srgbClr val="DDE5E8"/>
+                      </a:solidFill>
+                      <a:prstDash val="solid"/>
+                      <a:round/>
+                      <a:headEnd type="none" w="med" len="med"/>
+                      <a:tailEnd type="none" w="med" len="med"/>
+                    </a:lnB>
+                    <a:solidFill>
+                      <a:srgbClr val="E4F0F0"/>
+                    </a:solidFill>
+                  </a:tcPr>
+                </a:tc>
+                <a:tc>
+                  <a:txBody>
+                    <a:bodyPr/>
+                    <a:lstStyle/>
+                    <a:p>
+                      <a:pPr algn="ctr" indent="0" marL="0">
+                        <a:buNone/>
+                      </a:pPr>
+                      <a:r>
+                        <a:rPr lang="en-US" sz="1100" b="1" dirty="0">
+                          <a:solidFill>
+                            <a:srgbClr val="18707F"/>
+                          </a:solidFill>
+                          <a:latin typeface="微软雅黑" pitchFamily="34" charset="0"/>
+                          <a:ea typeface="微软雅黑" pitchFamily="34" charset="-122"/>
+                          <a:cs typeface="微软雅黑" pitchFamily="34" charset="-120"/>
+                        </a:rPr>
+                        <a:t>.002</a:t>
+                      </a:r>
+                      <a:endParaRPr lang="en-US" sz="1100" dirty="0">
+                        <a:latin typeface="微软雅黑" charset="0"/>
+                        <a:ea typeface="微软雅黑" charset="0"/>
+                        <a:cs typeface="微软雅黑" charset="0"/>
+                      </a:endParaRPr>
+                    </a:p>
+                  </a:txBody>
+                  <a:tcPr marL="91440" marR="91440" marT="45720" marB="45720" anchor="ctr">
+                    <a:lnL w="6350" cap="flat" cmpd="sng" algn="ctr">
+                      <a:solidFill>
+                        <a:srgbClr val="DDE5E8"/>
+                      </a:solidFill>
+                      <a:prstDash val="solid"/>
+                      <a:round/>
+                      <a:headEnd type="none" w="med" len="med"/>
+                      <a:tailEnd type="none" w="med" len="med"/>
+                    </a:lnL>
+                    <a:lnR w="6350" cap="flat" cmpd="sng" algn="ctr">
+                      <a:solidFill>
+                        <a:srgbClr val="DDE5E8"/>
+                      </a:solidFill>
+                      <a:prstDash val="solid"/>
+                      <a:round/>
+                      <a:headEnd type="none" w="med" len="med"/>
+                      <a:tailEnd type="none" w="med" len="med"/>
+                    </a:lnR>
+                    <a:lnT w="6350" cap="flat" cmpd="sng" algn="ctr">
+                      <a:solidFill>
+                        <a:srgbClr val="DDE5E8"/>
+                      </a:solidFill>
+                      <a:prstDash val="solid"/>
+                      <a:round/>
+                      <a:headEnd type="none" w="med" len="med"/>
+                      <a:tailEnd type="none" w="med" len="med"/>
+                    </a:lnT>
+                    <a:lnB w="6350" cap="flat" cmpd="sng" algn="ctr">
+                      <a:solidFill>
+                        <a:srgbClr val="DDE5E8"/>
+                      </a:solidFill>
+                      <a:prstDash val="solid"/>
+                      <a:round/>
+                      <a:headEnd type="none" w="med" len="med"/>
+                      <a:tailEnd type="none" w="med" len="med"/>
+                    </a:lnB>
+                    <a:solidFill>
+                      <a:srgbClr val="E4F0F0"/>
+                    </a:solidFill>
+                  </a:tcPr>
+                </a:tc>
+              </a:tr>
+              <a:tr h="384048">
+                <a:tc>
+                  <a:txBody>
+                    <a:bodyPr/>
+                    <a:lstStyle/>
+                    <a:p>
+                      <a:pPr algn="l" indent="0" marL="0">
+                        <a:buNone/>
+                      </a:pPr>
+                      <a:r>
+                        <a:rPr lang="en-US" sz="1100" b="1" dirty="0">
+                          <a:solidFill>
+                            <a:srgbClr val="16252C"/>
+                          </a:solidFill>
+                          <a:latin typeface="微软雅黑" pitchFamily="34" charset="0"/>
+                          <a:ea typeface="微软雅黑" pitchFamily="34" charset="-122"/>
+                          <a:cs typeface="微软雅黑" pitchFamily="34" charset="-120"/>
+                        </a:rPr>
+                        <a:t>Ensemble</a:t>
+                      </a:r>
+                      <a:endParaRPr lang="en-US" sz="1100" dirty="0">
+                        <a:latin typeface="微软雅黑" charset="0"/>
+                        <a:ea typeface="微软雅黑" charset="0"/>
+                        <a:cs typeface="微软雅黑" charset="0"/>
+                      </a:endParaRPr>
+                    </a:p>
+                  </a:txBody>
+                  <a:tcPr marL="91440" marR="91440" marT="45720" marB="45720" anchor="ctr">
+                    <a:lnL w="6350" cap="flat" cmpd="sng" algn="ctr">
+                      <a:solidFill>
+                        <a:srgbClr val="DDE5E8"/>
+                      </a:solidFill>
+                      <a:prstDash val="solid"/>
+                      <a:round/>
+                      <a:headEnd type="none" w="med" len="med"/>
+                      <a:tailEnd type="none" w="med" len="med"/>
+                    </a:lnL>
+                    <a:lnR w="6350" cap="flat" cmpd="sng" algn="ctr">
+                      <a:solidFill>
+                        <a:srgbClr val="DDE5E8"/>
+                      </a:solidFill>
+                      <a:prstDash val="solid"/>
+                      <a:round/>
+                      <a:headEnd type="none" w="med" len="med"/>
+                      <a:tailEnd type="none" w="med" len="med"/>
+                    </a:lnR>
+                    <a:lnT w="6350" cap="flat" cmpd="sng" algn="ctr">
+                      <a:solidFill>
+                        <a:srgbClr val="DDE5E8"/>
+                      </a:solidFill>
+                      <a:prstDash val="solid"/>
+                      <a:round/>
+                      <a:headEnd type="none" w="med" len="med"/>
+                      <a:tailEnd type="none" w="med" len="med"/>
+                    </a:lnT>
+                    <a:lnB w="6350" cap="flat" cmpd="sng" algn="ctr">
+                      <a:solidFill>
+                        <a:srgbClr val="DDE5E8"/>
+                      </a:solidFill>
+                      <a:prstDash val="solid"/>
+                      <a:round/>
+                      <a:headEnd type="none" w="med" len="med"/>
+                      <a:tailEnd type="none" w="med" len="med"/>
+                    </a:lnB>
+                  </a:tcPr>
+                </a:tc>
+                <a:tc>
+                  <a:txBody>
+                    <a:bodyPr/>
+                    <a:lstStyle/>
+                    <a:p>
+                      <a:pPr algn="ctr" indent="0" marL="0">
+                        <a:buNone/>
+                      </a:pPr>
+                      <a:endParaRPr lang="en-US" sz="1100" dirty="0">
+                        <a:latin typeface="微软雅黑" charset="0"/>
+                        <a:ea typeface="微软雅黑" charset="0"/>
+                        <a:cs typeface="微软雅黑" charset="0"/>
+                      </a:endParaRPr>
+                    </a:p>
+                  </a:txBody>
+                  <a:tcPr marL="91440" marR="91440" marT="45720" marB="45720" anchor="ctr">
+                    <a:lnL w="6350" cap="flat" cmpd="sng" algn="ctr">
+                      <a:solidFill>
+                        <a:srgbClr val="DDE5E8"/>
+                      </a:solidFill>
+                      <a:prstDash val="solid"/>
+                      <a:round/>
+                      <a:headEnd type="none" w="med" len="med"/>
+                      <a:tailEnd type="none" w="med" len="med"/>
+                    </a:lnL>
+                    <a:lnR w="6350" cap="flat" cmpd="sng" algn="ctr">
+                      <a:solidFill>
+                        <a:srgbClr val="DDE5E8"/>
+                      </a:solidFill>
+                      <a:prstDash val="solid"/>
+                      <a:round/>
+                      <a:headEnd type="none" w="med" len="med"/>
+                      <a:tailEnd type="none" w="med" len="med"/>
+                    </a:lnR>
+                    <a:lnT w="6350" cap="flat" cmpd="sng" algn="ctr">
+                      <a:solidFill>
+                        <a:srgbClr val="DDE5E8"/>
+                      </a:solidFill>
+                      <a:prstDash val="solid"/>
+                      <a:round/>
+                      <a:headEnd type="none" w="med" len="med"/>
+                      <a:tailEnd type="none" w="med" len="med"/>
+                    </a:lnT>
+                    <a:lnB w="6350" cap="flat" cmpd="sng" algn="ctr">
+                      <a:solidFill>
+                        <a:srgbClr val="DDE5E8"/>
+                      </a:solidFill>
+                      <a:prstDash val="solid"/>
+                      <a:round/>
+                      <a:headEnd type="none" w="med" len="med"/>
+                      <a:tailEnd type="none" w="med" len="med"/>
+                    </a:lnB>
+                    <a:solidFill>
+                      <a:srgbClr val="F7F5F1"/>
+                    </a:solidFill>
+                  </a:tcPr>
+                </a:tc>
+                <a:tc>
+                  <a:txBody>
+                    <a:bodyPr/>
+                    <a:lstStyle/>
+                    <a:p>
+                      <a:pPr algn="ctr" indent="0" marL="0">
+                        <a:buNone/>
+                      </a:pPr>
+                      <a:endParaRPr lang="en-US" sz="1100" dirty="0">
+                        <a:latin typeface="微软雅黑" charset="0"/>
+                        <a:ea typeface="微软雅黑" charset="0"/>
+                        <a:cs typeface="微软雅黑" charset="0"/>
+                      </a:endParaRPr>
+                    </a:p>
+                  </a:txBody>
+                  <a:tcPr marL="91440" marR="91440" marT="45720" marB="45720" anchor="ctr">
+                    <a:lnL w="6350" cap="flat" cmpd="sng" algn="ctr">
+                      <a:solidFill>
+                        <a:srgbClr val="DDE5E8"/>
+                      </a:solidFill>
+                      <a:prstDash val="solid"/>
+                      <a:round/>
+                      <a:headEnd type="none" w="med" len="med"/>
+                      <a:tailEnd type="none" w="med" len="med"/>
+                    </a:lnL>
+                    <a:lnR w="6350" cap="flat" cmpd="sng" algn="ctr">
+                      <a:solidFill>
+                        <a:srgbClr val="DDE5E8"/>
+                      </a:solidFill>
+                      <a:prstDash val="solid"/>
+                      <a:round/>
+                      <a:headEnd type="none" w="med" len="med"/>
+                      <a:tailEnd type="none" w="med" len="med"/>
+                    </a:lnR>
+                    <a:lnT w="6350" cap="flat" cmpd="sng" algn="ctr">
+                      <a:solidFill>
+                        <a:srgbClr val="DDE5E8"/>
+                      </a:solidFill>
+                      <a:prstDash val="solid"/>
+                      <a:round/>
+                      <a:headEnd type="none" w="med" len="med"/>
+                      <a:tailEnd type="none" w="med" len="med"/>
+                    </a:lnT>
+                    <a:lnB w="6350" cap="flat" cmpd="sng" algn="ctr">
+                      <a:solidFill>
+                        <a:srgbClr val="DDE5E8"/>
+                      </a:solidFill>
+                      <a:prstDash val="solid"/>
+                      <a:round/>
+                      <a:headEnd type="none" w="med" len="med"/>
+                      <a:tailEnd type="none" w="med" len="med"/>
+                    </a:lnB>
+                    <a:solidFill>
+                      <a:srgbClr val="F7F5F1"/>
+                    </a:solidFill>
+                  </a:tcPr>
+                </a:tc>
+                <a:tc>
+                  <a:txBody>
+                    <a:bodyPr/>
+                    <a:lstStyle/>
+                    <a:p>
+                      <a:pPr algn="ctr" indent="0" marL="0">
+                        <a:buNone/>
+                      </a:pPr>
+                      <a:r>
+                        <a:rPr lang="en-US" sz="1100" dirty="0">
+                          <a:solidFill>
+                            <a:srgbClr val="5F7580"/>
+                          </a:solidFill>
+                          <a:latin typeface="微软雅黑" pitchFamily="34" charset="0"/>
+                          <a:ea typeface="微软雅黑" pitchFamily="34" charset="-122"/>
+                          <a:cs typeface="微软雅黑" pitchFamily="34" charset="-120"/>
+                        </a:rPr>
+                        <a:t>.609</a:t>
+                      </a:r>
+                      <a:endParaRPr lang="en-US" sz="1100" dirty="0">
+                        <a:latin typeface="微软雅黑" charset="0"/>
+                        <a:ea typeface="微软雅黑" charset="0"/>
+                        <a:cs typeface="微软雅黑" charset="0"/>
+                      </a:endParaRPr>
+                    </a:p>
+                  </a:txBody>
+                  <a:tcPr marL="91440" marR="91440" marT="45720" marB="45720" anchor="ctr">
+                    <a:lnL w="6350" cap="flat" cmpd="sng" algn="ctr">
+                      <a:solidFill>
+                        <a:srgbClr val="DDE5E8"/>
+                      </a:solidFill>
+                      <a:prstDash val="solid"/>
+                      <a:round/>
+                      <a:headEnd type="none" w="med" len="med"/>
+                      <a:tailEnd type="none" w="med" len="med"/>
+                    </a:lnL>
+                    <a:lnR w="6350" cap="flat" cmpd="sng" algn="ctr">
+                      <a:solidFill>
+                        <a:srgbClr val="DDE5E8"/>
+                      </a:solidFill>
+                      <a:prstDash val="solid"/>
+                      <a:round/>
+                      <a:headEnd type="none" w="med" len="med"/>
+                      <a:tailEnd type="none" w="med" len="med"/>
+                    </a:lnR>
+                    <a:lnT w="6350" cap="flat" cmpd="sng" algn="ctr">
+                      <a:solidFill>
+                        <a:srgbClr val="DDE5E8"/>
+                      </a:solidFill>
+                      <a:prstDash val="solid"/>
+                      <a:round/>
+                      <a:headEnd type="none" w="med" len="med"/>
+                      <a:tailEnd type="none" w="med" len="med"/>
+                    </a:lnT>
+                    <a:lnB w="6350" cap="flat" cmpd="sng" algn="ctr">
+                      <a:solidFill>
+                        <a:srgbClr val="DDE5E8"/>
+                      </a:solidFill>
+                      <a:prstDash val="solid"/>
+                      <a:round/>
+                      <a:headEnd type="none" w="med" len="med"/>
+                      <a:tailEnd type="none" w="med" len="med"/>
+                    </a:lnB>
+                    <a:solidFill>
+                      <a:srgbClr val="EDEDEA"/>
+                    </a:solidFill>
+                  </a:tcPr>
+                </a:tc>
+                <a:tc>
+                  <a:txBody>
+                    <a:bodyPr/>
+                    <a:lstStyle/>
+                    <a:p>
+                      <a:pPr algn="ctr" indent="0" marL="0">
+                        <a:buNone/>
+                      </a:pPr>
+                      <a:r>
+                        <a:rPr lang="en-US" sz="1100" b="1" dirty="0">
+                          <a:solidFill>
+                            <a:srgbClr val="18707F"/>
+                          </a:solidFill>
+                          <a:latin typeface="微软雅黑" pitchFamily="34" charset="0"/>
+                          <a:ea typeface="微软雅黑" pitchFamily="34" charset="-122"/>
+                          <a:cs typeface="微软雅黑" pitchFamily="34" charset="-120"/>
+                        </a:rPr>
+                        <a:t>.001</a:t>
+                      </a:r>
+                      <a:endParaRPr lang="en-US" sz="1100" dirty="0">
+                        <a:latin typeface="微软雅黑" charset="0"/>
+                        <a:ea typeface="微软雅黑" charset="0"/>
+                        <a:cs typeface="微软雅黑" charset="0"/>
+                      </a:endParaRPr>
+                    </a:p>
+                  </a:txBody>
+                  <a:tcPr marL="91440" marR="91440" marT="45720" marB="45720" anchor="ctr">
+                    <a:lnL w="6350" cap="flat" cmpd="sng" algn="ctr">
+                      <a:solidFill>
+                        <a:srgbClr val="DDE5E8"/>
+                      </a:solidFill>
+                      <a:prstDash val="solid"/>
+                      <a:round/>
+                      <a:headEnd type="none" w="med" len="med"/>
+                      <a:tailEnd type="none" w="med" len="med"/>
+                    </a:lnL>
+                    <a:lnR w="6350" cap="flat" cmpd="sng" algn="ctr">
+                      <a:solidFill>
+                        <a:srgbClr val="DDE5E8"/>
+                      </a:solidFill>
+                      <a:prstDash val="solid"/>
+                      <a:round/>
+                      <a:headEnd type="none" w="med" len="med"/>
+                      <a:tailEnd type="none" w="med" len="med"/>
+                    </a:lnR>
+                    <a:lnT w="6350" cap="flat" cmpd="sng" algn="ctr">
+                      <a:solidFill>
+                        <a:srgbClr val="DDE5E8"/>
+                      </a:solidFill>
+                      <a:prstDash val="solid"/>
+                      <a:round/>
+                      <a:headEnd type="none" w="med" len="med"/>
+                      <a:tailEnd type="none" w="med" len="med"/>
+                    </a:lnT>
+                    <a:lnB w="6350" cap="flat" cmpd="sng" algn="ctr">
+                      <a:solidFill>
+                        <a:srgbClr val="DDE5E8"/>
+                      </a:solidFill>
+                      <a:prstDash val="solid"/>
+                      <a:round/>
+                      <a:headEnd type="none" w="med" len="med"/>
+                      <a:tailEnd type="none" w="med" len="med"/>
+                    </a:lnB>
+                    <a:solidFill>
+                      <a:srgbClr val="E4F0F0"/>
+                    </a:solidFill>
+                  </a:tcPr>
+                </a:tc>
+                <a:tc>
+                  <a:txBody>
+                    <a:bodyPr/>
+                    <a:lstStyle/>
+                    <a:p>
+                      <a:pPr algn="ctr" indent="0" marL="0">
+                        <a:buNone/>
+                      </a:pPr>
+                      <a:r>
+                        <a:rPr lang="en-US" sz="1100" b="1" dirty="0">
+                          <a:solidFill>
+                            <a:srgbClr val="18707F"/>
+                          </a:solidFill>
+                          <a:latin typeface="微软雅黑" pitchFamily="34" charset="0"/>
+                          <a:ea typeface="微软雅黑" pitchFamily="34" charset="-122"/>
+                          <a:cs typeface="微软雅黑" pitchFamily="34" charset="-120"/>
+                        </a:rPr>
+                        <a:t>.000</a:t>
+                      </a:r>
+                      <a:endParaRPr lang="en-US" sz="1100" dirty="0">
+                        <a:latin typeface="微软雅黑" charset="0"/>
+                        <a:ea typeface="微软雅黑" charset="0"/>
+                        <a:cs typeface="微软雅黑" charset="0"/>
+                      </a:endParaRPr>
+                    </a:p>
+                  </a:txBody>
+                  <a:tcPr marL="91440" marR="91440" marT="45720" marB="45720" anchor="ctr">
+                    <a:lnL w="6350" cap="flat" cmpd="sng" algn="ctr">
+                      <a:solidFill>
+                        <a:srgbClr val="DDE5E8"/>
+                      </a:solidFill>
+                      <a:prstDash val="solid"/>
+                      <a:round/>
+                      <a:headEnd type="none" w="med" len="med"/>
+                      <a:tailEnd type="none" w="med" len="med"/>
+                    </a:lnL>
+                    <a:lnR w="6350" cap="flat" cmpd="sng" algn="ctr">
+                      <a:solidFill>
+                        <a:srgbClr val="DDE5E8"/>
+                      </a:solidFill>
+                      <a:prstDash val="solid"/>
+                      <a:round/>
+                      <a:headEnd type="none" w="med" len="med"/>
+                      <a:tailEnd type="none" w="med" len="med"/>
+                    </a:lnR>
+                    <a:lnT w="6350" cap="flat" cmpd="sng" algn="ctr">
+                      <a:solidFill>
+                        <a:srgbClr val="DDE5E8"/>
+                      </a:solidFill>
+                      <a:prstDash val="solid"/>
+                      <a:round/>
+                      <a:headEnd type="none" w="med" len="med"/>
+                      <a:tailEnd type="none" w="med" len="med"/>
+                    </a:lnT>
+                    <a:lnB w="6350" cap="flat" cmpd="sng" algn="ctr">
+                      <a:solidFill>
+                        <a:srgbClr val="DDE5E8"/>
+                      </a:solidFill>
+                      <a:prstDash val="solid"/>
+                      <a:round/>
+                      <a:headEnd type="none" w="med" len="med"/>
+                      <a:tailEnd type="none" w="med" len="med"/>
+                    </a:lnB>
+                    <a:solidFill>
+                      <a:srgbClr val="E4F0F0"/>
+                    </a:solidFill>
+                  </a:tcPr>
+                </a:tc>
+              </a:tr>
+              <a:tr h="384048">
+                <a:tc>
+                  <a:txBody>
+                    <a:bodyPr/>
+                    <a:lstStyle/>
+                    <a:p>
+                      <a:pPr algn="l" indent="0" marL="0">
+                        <a:buNone/>
+                      </a:pPr>
+                      <a:r>
+                        <a:rPr lang="en-US" sz="1100" b="1" dirty="0">
+                          <a:solidFill>
+                            <a:srgbClr val="16252C"/>
+                          </a:solidFill>
+                          <a:latin typeface="微软雅黑" pitchFamily="34" charset="0"/>
+                          <a:ea typeface="微软雅黑" pitchFamily="34" charset="-122"/>
+                          <a:cs typeface="微软雅黑" pitchFamily="34" charset="-120"/>
+                        </a:rPr>
+                        <a:t>SVM-poly</a:t>
+                      </a:r>
+                      <a:endParaRPr lang="en-US" sz="1100" dirty="0">
+                        <a:latin typeface="微软雅黑" charset="0"/>
+                        <a:ea typeface="微软雅黑" charset="0"/>
+                        <a:cs typeface="微软雅黑" charset="0"/>
+                      </a:endParaRPr>
+                    </a:p>
+                  </a:txBody>
+                  <a:tcPr marL="91440" marR="91440" marT="45720" marB="45720" anchor="ctr">
+                    <a:lnL w="6350" cap="flat" cmpd="sng" algn="ctr">
+                      <a:solidFill>
+                        <a:srgbClr val="DDE5E8"/>
+                      </a:solidFill>
+                      <a:prstDash val="solid"/>
+                      <a:round/>
+                      <a:headEnd type="none" w="med" len="med"/>
+                      <a:tailEnd type="none" w="med" len="med"/>
+                    </a:lnL>
+                    <a:lnR w="6350" cap="flat" cmpd="sng" algn="ctr">
+                      <a:solidFill>
+                        <a:srgbClr val="DDE5E8"/>
+                      </a:solidFill>
+                      <a:prstDash val="solid"/>
+                      <a:round/>
+                      <a:headEnd type="none" w="med" len="med"/>
+                      <a:tailEnd type="none" w="med" len="med"/>
+                    </a:lnR>
+                    <a:lnT w="6350" cap="flat" cmpd="sng" algn="ctr">
+                      <a:solidFill>
+                        <a:srgbClr val="DDE5E8"/>
+                      </a:solidFill>
+                      <a:prstDash val="solid"/>
+                      <a:round/>
+                      <a:headEnd type="none" w="med" len="med"/>
+                      <a:tailEnd type="none" w="med" len="med"/>
+                    </a:lnT>
+                    <a:lnB w="6350" cap="flat" cmpd="sng" algn="ctr">
+                      <a:solidFill>
+                        <a:srgbClr val="DDE5E8"/>
+                      </a:solidFill>
+                      <a:prstDash val="solid"/>
+                      <a:round/>
+                      <a:headEnd type="none" w="med" len="med"/>
+                      <a:tailEnd type="none" w="med" len="med"/>
+                    </a:lnB>
+                  </a:tcPr>
+                </a:tc>
+                <a:tc>
+                  <a:txBody>
+                    <a:bodyPr/>
+                    <a:lstStyle/>
+                    <a:p>
+                      <a:pPr algn="ctr" indent="0" marL="0">
+                        <a:buNone/>
+                      </a:pPr>
+                      <a:endParaRPr lang="en-US" sz="1100" dirty="0">
+                        <a:latin typeface="微软雅黑" charset="0"/>
+                        <a:ea typeface="微软雅黑" charset="0"/>
+                        <a:cs typeface="微软雅黑" charset="0"/>
+                      </a:endParaRPr>
+                    </a:p>
+                  </a:txBody>
+                  <a:tcPr marL="91440" marR="91440" marT="45720" marB="45720" anchor="ctr">
+                    <a:lnL w="6350" cap="flat" cmpd="sng" algn="ctr">
+                      <a:solidFill>
+                        <a:srgbClr val="DDE5E8"/>
+                      </a:solidFill>
+                      <a:prstDash val="solid"/>
+                      <a:round/>
+                      <a:headEnd type="none" w="med" len="med"/>
+                      <a:tailEnd type="none" w="med" len="med"/>
+                    </a:lnL>
+                    <a:lnR w="6350" cap="flat" cmpd="sng" algn="ctr">
+                      <a:solidFill>
+                        <a:srgbClr val="DDE5E8"/>
+                      </a:solidFill>
+                      <a:prstDash val="solid"/>
+                      <a:round/>
+                      <a:headEnd type="none" w="med" len="med"/>
+                      <a:tailEnd type="none" w="med" len="med"/>
+                    </a:lnR>
+                    <a:lnT w="6350" cap="flat" cmpd="sng" algn="ctr">
+                      <a:solidFill>
+                        <a:srgbClr val="DDE5E8"/>
+                      </a:solidFill>
+                      <a:prstDash val="solid"/>
+                      <a:round/>
+                      <a:headEnd type="none" w="med" len="med"/>
+                      <a:tailEnd type="none" w="med" len="med"/>
+                    </a:lnT>
+                    <a:lnB w="6350" cap="flat" cmpd="sng" algn="ctr">
+                      <a:solidFill>
+                        <a:srgbClr val="DDE5E8"/>
+                      </a:solidFill>
+                      <a:prstDash val="solid"/>
+                      <a:round/>
+                      <a:headEnd type="none" w="med" len="med"/>
+                      <a:tailEnd type="none" w="med" len="med"/>
+                    </a:lnB>
+                    <a:solidFill>
+                      <a:srgbClr val="F7F5F1"/>
+                    </a:solidFill>
+                  </a:tcPr>
+                </a:tc>
+                <a:tc>
+                  <a:txBody>
+                    <a:bodyPr/>
+                    <a:lstStyle/>
+                    <a:p>
+                      <a:pPr algn="ctr" indent="0" marL="0">
+                        <a:buNone/>
+                      </a:pPr>
+                      <a:endParaRPr lang="en-US" sz="1100" dirty="0">
+                        <a:latin typeface="微软雅黑" charset="0"/>
+                        <a:ea typeface="微软雅黑" charset="0"/>
+                        <a:cs typeface="微软雅黑" charset="0"/>
+                      </a:endParaRPr>
+                    </a:p>
+                  </a:txBody>
+                  <a:tcPr marL="91440" marR="91440" marT="45720" marB="45720" anchor="ctr">
+                    <a:lnL w="6350" cap="flat" cmpd="sng" algn="ctr">
+                      <a:solidFill>
+                        <a:srgbClr val="DDE5E8"/>
+                      </a:solidFill>
+                      <a:prstDash val="solid"/>
+                      <a:round/>
+                      <a:headEnd type="none" w="med" len="med"/>
+                      <a:tailEnd type="none" w="med" len="med"/>
+                    </a:lnL>
+                    <a:lnR w="6350" cap="flat" cmpd="sng" algn="ctr">
+                      <a:solidFill>
+                        <a:srgbClr val="DDE5E8"/>
+                      </a:solidFill>
+                      <a:prstDash val="solid"/>
+                      <a:round/>
+                      <a:headEnd type="none" w="med" len="med"/>
+                      <a:tailEnd type="none" w="med" len="med"/>
+                    </a:lnR>
+                    <a:lnT w="6350" cap="flat" cmpd="sng" algn="ctr">
+                      <a:solidFill>
+                        <a:srgbClr val="DDE5E8"/>
+                      </a:solidFill>
+                      <a:prstDash val="solid"/>
+                      <a:round/>
+                      <a:headEnd type="none" w="med" len="med"/>
+                      <a:tailEnd type="none" w="med" len="med"/>
+                    </a:lnT>
+                    <a:lnB w="6350" cap="flat" cmpd="sng" algn="ctr">
+                      <a:solidFill>
+                        <a:srgbClr val="DDE5E8"/>
+                      </a:solidFill>
+                      <a:prstDash val="solid"/>
+                      <a:round/>
+                      <a:headEnd type="none" w="med" len="med"/>
+                      <a:tailEnd type="none" w="med" len="med"/>
+                    </a:lnB>
+                    <a:solidFill>
+                      <a:srgbClr val="F7F5F1"/>
+                    </a:solidFill>
+                  </a:tcPr>
+                </a:tc>
+                <a:tc>
+                  <a:txBody>
+                    <a:bodyPr/>
+                    <a:lstStyle/>
+                    <a:p>
+                      <a:pPr algn="ctr" indent="0" marL="0">
+                        <a:buNone/>
+                      </a:pPr>
+                      <a:endParaRPr lang="en-US" sz="1100" dirty="0">
+                        <a:latin typeface="微软雅黑" charset="0"/>
+                        <a:ea typeface="微软雅黑" charset="0"/>
+                        <a:cs typeface="微软雅黑" charset="0"/>
+                      </a:endParaRPr>
+                    </a:p>
+                  </a:txBody>
+                  <a:tcPr marL="91440" marR="91440" marT="45720" marB="45720" anchor="ctr">
+                    <a:lnL w="6350" cap="flat" cmpd="sng" algn="ctr">
+                      <a:solidFill>
+                        <a:srgbClr val="DDE5E8"/>
+                      </a:solidFill>
+                      <a:prstDash val="solid"/>
+                      <a:round/>
+                      <a:headEnd type="none" w="med" len="med"/>
+                      <a:tailEnd type="none" w="med" len="med"/>
+                    </a:lnL>
+                    <a:lnR w="6350" cap="flat" cmpd="sng" algn="ctr">
+                      <a:solidFill>
+                        <a:srgbClr val="DDE5E8"/>
+                      </a:solidFill>
+                      <a:prstDash val="solid"/>
+                      <a:round/>
+                      <a:headEnd type="none" w="med" len="med"/>
+                      <a:tailEnd type="none" w="med" len="med"/>
+                    </a:lnR>
+                    <a:lnT w="6350" cap="flat" cmpd="sng" algn="ctr">
+                      <a:solidFill>
+                        <a:srgbClr val="DDE5E8"/>
+                      </a:solidFill>
+                      <a:prstDash val="solid"/>
+                      <a:round/>
+                      <a:headEnd type="none" w="med" len="med"/>
+                      <a:tailEnd type="none" w="med" len="med"/>
+                    </a:lnT>
+                    <a:lnB w="6350" cap="flat" cmpd="sng" algn="ctr">
+                      <a:solidFill>
+                        <a:srgbClr val="DDE5E8"/>
+                      </a:solidFill>
+                      <a:prstDash val="solid"/>
+                      <a:round/>
+                      <a:headEnd type="none" w="med" len="med"/>
+                      <a:tailEnd type="none" w="med" len="med"/>
+                    </a:lnB>
+                    <a:solidFill>
+                      <a:srgbClr val="F7F5F1"/>
+                    </a:solidFill>
+                  </a:tcPr>
+                </a:tc>
+                <a:tc>
+                  <a:txBody>
+                    <a:bodyPr/>
+                    <a:lstStyle/>
+                    <a:p>
+                      <a:pPr algn="ctr" indent="0" marL="0">
+                        <a:buNone/>
+                      </a:pPr>
+                      <a:r>
+                        <a:rPr lang="en-US" sz="1100" dirty="0">
+                          <a:solidFill>
+                            <a:srgbClr val="5F7580"/>
+                          </a:solidFill>
+                          <a:latin typeface="微软雅黑" pitchFamily="34" charset="0"/>
+                          <a:ea typeface="微软雅黑" pitchFamily="34" charset="-122"/>
+                          <a:cs typeface="微软雅黑" pitchFamily="34" charset="-120"/>
+                        </a:rPr>
+                        <a:t>.554</a:t>
+                      </a:r>
+                      <a:endParaRPr lang="en-US" sz="1100" dirty="0">
+                        <a:latin typeface="微软雅黑" charset="0"/>
+                        <a:ea typeface="微软雅黑" charset="0"/>
+                        <a:cs typeface="微软雅黑" charset="0"/>
+                      </a:endParaRPr>
+                    </a:p>
+                  </a:txBody>
+                  <a:tcPr marL="91440" marR="91440" marT="45720" marB="45720" anchor="ctr">
+                    <a:lnL w="6350" cap="flat" cmpd="sng" algn="ctr">
+                      <a:solidFill>
+                        <a:srgbClr val="DDE5E8"/>
+                      </a:solidFill>
+                      <a:prstDash val="solid"/>
+                      <a:round/>
+                      <a:headEnd type="none" w="med" len="med"/>
+                      <a:tailEnd type="none" w="med" len="med"/>
+                    </a:lnL>
+                    <a:lnR w="6350" cap="flat" cmpd="sng" algn="ctr">
+                      <a:solidFill>
+                        <a:srgbClr val="DDE5E8"/>
+                      </a:solidFill>
+                      <a:prstDash val="solid"/>
+                      <a:round/>
+                      <a:headEnd type="none" w="med" len="med"/>
+                      <a:tailEnd type="none" w="med" len="med"/>
+                    </a:lnR>
+                    <a:lnT w="6350" cap="flat" cmpd="sng" algn="ctr">
+                      <a:solidFill>
+                        <a:srgbClr val="DDE5E8"/>
+                      </a:solidFill>
+                      <a:prstDash val="solid"/>
+                      <a:round/>
+                      <a:headEnd type="none" w="med" len="med"/>
+                      <a:tailEnd type="none" w="med" len="med"/>
+                    </a:lnT>
+                    <a:lnB w="6350" cap="flat" cmpd="sng" algn="ctr">
+                      <a:solidFill>
+                        <a:srgbClr val="DDE5E8"/>
+                      </a:solidFill>
+                      <a:prstDash val="solid"/>
+                      <a:round/>
+                      <a:headEnd type="none" w="med" len="med"/>
+                      <a:tailEnd type="none" w="med" len="med"/>
+                    </a:lnB>
+                    <a:solidFill>
+                      <a:srgbClr val="EDEDEA"/>
+                    </a:solidFill>
+                  </a:tcPr>
+                </a:tc>
+                <a:tc>
+                  <a:txBody>
+                    <a:bodyPr/>
+                    <a:lstStyle/>
+                    <a:p>
+                      <a:pPr algn="ctr" indent="0" marL="0">
+                        <a:buNone/>
+                      </a:pPr>
+                      <a:r>
+                        <a:rPr lang="en-US" sz="1100" dirty="0">
+                          <a:solidFill>
+                            <a:srgbClr val="5F7580"/>
+                          </a:solidFill>
+                          <a:latin typeface="微软雅黑" pitchFamily="34" charset="0"/>
+                          <a:ea typeface="微软雅黑" pitchFamily="34" charset="-122"/>
+                          <a:cs typeface="微软雅黑" pitchFamily="34" charset="-120"/>
+                        </a:rPr>
+                        <a:t>.420</a:t>
+                      </a:r>
+                      <a:endParaRPr lang="en-US" sz="1100" dirty="0">
+                        <a:latin typeface="微软雅黑" charset="0"/>
+                        <a:ea typeface="微软雅黑" charset="0"/>
+                        <a:cs typeface="微软雅黑" charset="0"/>
+                      </a:endParaRPr>
+                    </a:p>
+                  </a:txBody>
+                  <a:tcPr marL="91440" marR="91440" marT="45720" marB="45720" anchor="ctr">
+                    <a:lnL w="6350" cap="flat" cmpd="sng" algn="ctr">
+                      <a:solidFill>
+                        <a:srgbClr val="DDE5E8"/>
+                      </a:solidFill>
+                      <a:prstDash val="solid"/>
+                      <a:round/>
+                      <a:headEnd type="none" w="med" len="med"/>
+                      <a:tailEnd type="none" w="med" len="med"/>
+                    </a:lnL>
+                    <a:lnR w="6350" cap="flat" cmpd="sng" algn="ctr">
+                      <a:solidFill>
+                        <a:srgbClr val="DDE5E8"/>
+                      </a:solidFill>
+                      <a:prstDash val="solid"/>
+                      <a:round/>
+                      <a:headEnd type="none" w="med" len="med"/>
+                      <a:tailEnd type="none" w="med" len="med"/>
+                    </a:lnR>
+                    <a:lnT w="6350" cap="flat" cmpd="sng" algn="ctr">
+                      <a:solidFill>
+                        <a:srgbClr val="DDE5E8"/>
+                      </a:solidFill>
+                      <a:prstDash val="solid"/>
+                      <a:round/>
+                      <a:headEnd type="none" w="med" len="med"/>
+                      <a:tailEnd type="none" w="med" len="med"/>
+                    </a:lnT>
+                    <a:lnB w="6350" cap="flat" cmpd="sng" algn="ctr">
+                      <a:solidFill>
+                        <a:srgbClr val="DDE5E8"/>
+                      </a:solidFill>
+                      <a:prstDash val="solid"/>
+                      <a:round/>
+                      <a:headEnd type="none" w="med" len="med"/>
+                      <a:tailEnd type="none" w="med" len="med"/>
+                    </a:lnB>
+                    <a:solidFill>
+                      <a:srgbClr val="EDEDEA"/>
+                    </a:solidFill>
+                  </a:tcPr>
+                </a:tc>
+              </a:tr>
+              <a:tr h="384048">
+                <a:tc>
+                  <a:txBody>
+                    <a:bodyPr/>
+                    <a:lstStyle/>
+                    <a:p>
+                      <a:pPr algn="l" indent="0" marL="0">
+                        <a:buNone/>
+                      </a:pPr>
+                      <a:r>
+                        <a:rPr lang="en-US" sz="1100" b="1" dirty="0">
+                          <a:solidFill>
+                            <a:srgbClr val="16252C"/>
+                          </a:solidFill>
+                          <a:latin typeface="微软雅黑" pitchFamily="34" charset="0"/>
+                          <a:ea typeface="微软雅黑" pitchFamily="34" charset="-122"/>
+                          <a:cs typeface="微软雅黑" pitchFamily="34" charset="-120"/>
+                        </a:rPr>
+                        <a:t>GP-RBF</a:t>
+                      </a:r>
+                      <a:endParaRPr lang="en-US" sz="1100" dirty="0">
+                        <a:latin typeface="微软雅黑" charset="0"/>
+                        <a:ea typeface="微软雅黑" charset="0"/>
+                        <a:cs typeface="微软雅黑" charset="0"/>
+                      </a:endParaRPr>
+                    </a:p>
+                  </a:txBody>
+                  <a:tcPr marL="91440" marR="91440" marT="45720" marB="45720" anchor="ctr">
+                    <a:lnL w="6350" cap="flat" cmpd="sng" algn="ctr">
+                      <a:solidFill>
+                        <a:srgbClr val="DDE5E8"/>
+                      </a:solidFill>
+                      <a:prstDash val="solid"/>
+                      <a:round/>
+                      <a:headEnd type="none" w="med" len="med"/>
+                      <a:tailEnd type="none" w="med" len="med"/>
+                    </a:lnL>
+                    <a:lnR w="6350" cap="flat" cmpd="sng" algn="ctr">
+                      <a:solidFill>
+                        <a:srgbClr val="DDE5E8"/>
+                      </a:solidFill>
+                      <a:prstDash val="solid"/>
+                      <a:round/>
+                      <a:headEnd type="none" w="med" len="med"/>
+                      <a:tailEnd type="none" w="med" len="med"/>
+                    </a:lnR>
+                    <a:lnT w="6350" cap="flat" cmpd="sng" algn="ctr">
+                      <a:solidFill>
+                        <a:srgbClr val="DDE5E8"/>
+                      </a:solidFill>
+                      <a:prstDash val="solid"/>
+                      <a:round/>
+                      <a:headEnd type="none" w="med" len="med"/>
+                      <a:tailEnd type="none" w="med" len="med"/>
+                    </a:lnT>
+                    <a:lnB w="6350" cap="flat" cmpd="sng" algn="ctr">
+                      <a:solidFill>
+                        <a:srgbClr val="DDE5E8"/>
+                      </a:solidFill>
+                      <a:prstDash val="solid"/>
+                      <a:round/>
+                      <a:headEnd type="none" w="med" len="med"/>
+                      <a:tailEnd type="none" w="med" len="med"/>
+                    </a:lnB>
+                  </a:tcPr>
+                </a:tc>
+                <a:tc>
+                  <a:txBody>
+                    <a:bodyPr/>
+                    <a:lstStyle/>
+                    <a:p>
+                      <a:pPr algn="ctr" indent="0" marL="0">
+                        <a:buNone/>
+                      </a:pPr>
+                      <a:endParaRPr lang="en-US" sz="1100" dirty="0">
+                        <a:latin typeface="微软雅黑" charset="0"/>
+                        <a:ea typeface="微软雅黑" charset="0"/>
+                        <a:cs typeface="微软雅黑" charset="0"/>
+                      </a:endParaRPr>
+                    </a:p>
+                  </a:txBody>
+                  <a:tcPr marL="91440" marR="91440" marT="45720" marB="45720" anchor="ctr">
+                    <a:lnL w="6350" cap="flat" cmpd="sng" algn="ctr">
+                      <a:solidFill>
+                        <a:srgbClr val="DDE5E8"/>
+                      </a:solidFill>
+                      <a:prstDash val="solid"/>
+                      <a:round/>
+                      <a:headEnd type="none" w="med" len="med"/>
+                      <a:tailEnd type="none" w="med" len="med"/>
+                    </a:lnL>
+                    <a:lnR w="6350" cap="flat" cmpd="sng" algn="ctr">
+                      <a:solidFill>
+                        <a:srgbClr val="DDE5E8"/>
+                      </a:solidFill>
+                      <a:prstDash val="solid"/>
+                      <a:round/>
+                      <a:headEnd type="none" w="med" len="med"/>
+                      <a:tailEnd type="none" w="med" len="med"/>
+                    </a:lnR>
+                    <a:lnT w="6350" cap="flat" cmpd="sng" algn="ctr">
+                      <a:solidFill>
+                        <a:srgbClr val="DDE5E8"/>
+                      </a:solidFill>
+                      <a:prstDash val="solid"/>
+                      <a:round/>
+                      <a:headEnd type="none" w="med" len="med"/>
+                      <a:tailEnd type="none" w="med" len="med"/>
+                    </a:lnT>
+                    <a:lnB w="6350" cap="flat" cmpd="sng" algn="ctr">
+                      <a:solidFill>
+                        <a:srgbClr val="DDE5E8"/>
+                      </a:solidFill>
+                      <a:prstDash val="solid"/>
+                      <a:round/>
+                      <a:headEnd type="none" w="med" len="med"/>
+                      <a:tailEnd type="none" w="med" len="med"/>
+                    </a:lnB>
+                    <a:solidFill>
+                      <a:srgbClr val="F7F5F1"/>
+                    </a:solidFill>
+                  </a:tcPr>
+                </a:tc>
+                <a:tc>
+                  <a:txBody>
+                    <a:bodyPr/>
+                    <a:lstStyle/>
+                    <a:p>
+                      <a:pPr algn="ctr" indent="0" marL="0">
+                        <a:buNone/>
+                      </a:pPr>
+                      <a:endParaRPr lang="en-US" sz="1100" dirty="0">
+                        <a:latin typeface="微软雅黑" charset="0"/>
+                        <a:ea typeface="微软雅黑" charset="0"/>
+                        <a:cs typeface="微软雅黑" charset="0"/>
+                      </a:endParaRPr>
+                    </a:p>
+                  </a:txBody>
+                  <a:tcPr marL="91440" marR="91440" marT="45720" marB="45720" anchor="ctr">
+                    <a:lnL w="6350" cap="flat" cmpd="sng" algn="ctr">
+                      <a:solidFill>
+                        <a:srgbClr val="DDE5E8"/>
+                      </a:solidFill>
+                      <a:prstDash val="solid"/>
+                      <a:round/>
+                      <a:headEnd type="none" w="med" len="med"/>
+                      <a:tailEnd type="none" w="med" len="med"/>
+                    </a:lnL>
+                    <a:lnR w="6350" cap="flat" cmpd="sng" algn="ctr">
+                      <a:solidFill>
+                        <a:srgbClr val="DDE5E8"/>
+                      </a:solidFill>
+                      <a:prstDash val="solid"/>
+                      <a:round/>
+                      <a:headEnd type="none" w="med" len="med"/>
+                      <a:tailEnd type="none" w="med" len="med"/>
+                    </a:lnR>
+                    <a:lnT w="6350" cap="flat" cmpd="sng" algn="ctr">
+                      <a:solidFill>
+                        <a:srgbClr val="DDE5E8"/>
+                      </a:solidFill>
+                      <a:prstDash val="solid"/>
+                      <a:round/>
+                      <a:headEnd type="none" w="med" len="med"/>
+                      <a:tailEnd type="none" w="med" len="med"/>
+                    </a:lnT>
+                    <a:lnB w="6350" cap="flat" cmpd="sng" algn="ctr">
+                      <a:solidFill>
+                        <a:srgbClr val="DDE5E8"/>
+                      </a:solidFill>
+                      <a:prstDash val="solid"/>
+                      <a:round/>
+                      <a:headEnd type="none" w="med" len="med"/>
+                      <a:tailEnd type="none" w="med" len="med"/>
+                    </a:lnB>
+                    <a:solidFill>
+                      <a:srgbClr val="F7F5F1"/>
+                    </a:solidFill>
+                  </a:tcPr>
+                </a:tc>
+                <a:tc>
+                  <a:txBody>
+                    <a:bodyPr/>
+                    <a:lstStyle/>
+                    <a:p>
+                      <a:pPr algn="ctr" indent="0" marL="0">
+                        <a:buNone/>
+                      </a:pPr>
+                      <a:endParaRPr lang="en-US" sz="1100" dirty="0">
+                        <a:latin typeface="微软雅黑" charset="0"/>
+                        <a:ea typeface="微软雅黑" charset="0"/>
+                        <a:cs typeface="微软雅黑" charset="0"/>
+                      </a:endParaRPr>
+                    </a:p>
+                  </a:txBody>
+                  <a:tcPr marL="91440" marR="91440" marT="45720" marB="45720" anchor="ctr">
+                    <a:lnL w="6350" cap="flat" cmpd="sng" algn="ctr">
+                      <a:solidFill>
+                        <a:srgbClr val="DDE5E8"/>
+                      </a:solidFill>
+                      <a:prstDash val="solid"/>
+                      <a:round/>
+                      <a:headEnd type="none" w="med" len="med"/>
+                      <a:tailEnd type="none" w="med" len="med"/>
+                    </a:lnL>
+                    <a:lnR w="6350" cap="flat" cmpd="sng" algn="ctr">
+                      <a:solidFill>
+                        <a:srgbClr val="DDE5E8"/>
+                      </a:solidFill>
+                      <a:prstDash val="solid"/>
+                      <a:round/>
+                      <a:headEnd type="none" w="med" len="med"/>
+                      <a:tailEnd type="none" w="med" len="med"/>
+                    </a:lnR>
+                    <a:lnT w="6350" cap="flat" cmpd="sng" algn="ctr">
+                      <a:solidFill>
+                        <a:srgbClr val="DDE5E8"/>
+                      </a:solidFill>
+                      <a:prstDash val="solid"/>
+                      <a:round/>
+                      <a:headEnd type="none" w="med" len="med"/>
+                      <a:tailEnd type="none" w="med" len="med"/>
+                    </a:lnT>
+                    <a:lnB w="6350" cap="flat" cmpd="sng" algn="ctr">
+                      <a:solidFill>
+                        <a:srgbClr val="DDE5E8"/>
+                      </a:solidFill>
+                      <a:prstDash val="solid"/>
+                      <a:round/>
+                      <a:headEnd type="none" w="med" len="med"/>
+                      <a:tailEnd type="none" w="med" len="med"/>
+                    </a:lnB>
+                    <a:solidFill>
+                      <a:srgbClr val="F7F5F1"/>
+                    </a:solidFill>
+                  </a:tcPr>
+                </a:tc>
+                <a:tc>
+                  <a:txBody>
+                    <a:bodyPr/>
+                    <a:lstStyle/>
+                    <a:p>
+                      <a:pPr algn="ctr" indent="0" marL="0">
+                        <a:buNone/>
+                      </a:pPr>
+                      <a:endParaRPr lang="en-US" sz="1100" dirty="0">
+                        <a:latin typeface="微软雅黑" charset="0"/>
+                        <a:ea typeface="微软雅黑" charset="0"/>
+                        <a:cs typeface="微软雅黑" charset="0"/>
+                      </a:endParaRPr>
+                    </a:p>
+                  </a:txBody>
+                  <a:tcPr marL="91440" marR="91440" marT="45720" marB="45720" anchor="ctr">
+                    <a:lnL w="6350" cap="flat" cmpd="sng" algn="ctr">
+                      <a:solidFill>
+                        <a:srgbClr val="DDE5E8"/>
+                      </a:solidFill>
+                      <a:prstDash val="solid"/>
+                      <a:round/>
+                      <a:headEnd type="none" w="med" len="med"/>
+                      <a:tailEnd type="none" w="med" len="med"/>
+                    </a:lnL>
+                    <a:lnR w="6350" cap="flat" cmpd="sng" algn="ctr">
+                      <a:solidFill>
+                        <a:srgbClr val="DDE5E8"/>
+                      </a:solidFill>
+                      <a:prstDash val="solid"/>
+                      <a:round/>
+                      <a:headEnd type="none" w="med" len="med"/>
+                      <a:tailEnd type="none" w="med" len="med"/>
+                    </a:lnR>
+                    <a:lnT w="6350" cap="flat" cmpd="sng" algn="ctr">
+                      <a:solidFill>
+                        <a:srgbClr val="DDE5E8"/>
+                      </a:solidFill>
+                      <a:prstDash val="solid"/>
+                      <a:round/>
+                      <a:headEnd type="none" w="med" len="med"/>
+                      <a:tailEnd type="none" w="med" len="med"/>
+                    </a:lnT>
+                    <a:lnB w="6350" cap="flat" cmpd="sng" algn="ctr">
+                      <a:solidFill>
+                        <a:srgbClr val="DDE5E8"/>
+                      </a:solidFill>
+                      <a:prstDash val="solid"/>
+                      <a:round/>
+                      <a:headEnd type="none" w="med" len="med"/>
+                      <a:tailEnd type="none" w="med" len="med"/>
+                    </a:lnB>
+                    <a:solidFill>
+                      <a:srgbClr val="F7F5F1"/>
+                    </a:solidFill>
+                  </a:tcPr>
+                </a:tc>
+                <a:tc>
+                  <a:txBody>
+                    <a:bodyPr/>
+                    <a:lstStyle/>
+                    <a:p>
+                      <a:pPr algn="ctr" indent="0" marL="0">
+                        <a:buNone/>
+                      </a:pPr>
+                      <a:r>
+                        <a:rPr lang="en-US" sz="1100" dirty="0">
+                          <a:solidFill>
+                            <a:srgbClr val="5F7580"/>
+                          </a:solidFill>
+                          <a:latin typeface="微软雅黑" pitchFamily="34" charset="0"/>
+                          <a:ea typeface="微软雅黑" pitchFamily="34" charset="-122"/>
+                          <a:cs typeface="微软雅黑" pitchFamily="34" charset="-120"/>
+                        </a:rPr>
+                        <a:t>.051</a:t>
+                      </a:r>
+                      <a:endParaRPr lang="en-US" sz="1100" dirty="0">
+                        <a:latin typeface="微软雅黑" charset="0"/>
+                        <a:ea typeface="微软雅黑" charset="0"/>
+                        <a:cs typeface="微软雅黑" charset="0"/>
+                      </a:endParaRPr>
+                    </a:p>
+                  </a:txBody>
+                  <a:tcPr marL="91440" marR="91440" marT="45720" marB="45720" anchor="ctr">
+                    <a:lnL w="6350" cap="flat" cmpd="sng" algn="ctr">
+                      <a:solidFill>
+                        <a:srgbClr val="DDE5E8"/>
+                      </a:solidFill>
+                      <a:prstDash val="solid"/>
+                      <a:round/>
+                      <a:headEnd type="none" w="med" len="med"/>
+                      <a:tailEnd type="none" w="med" len="med"/>
+                    </a:lnL>
+                    <a:lnR w="6350" cap="flat" cmpd="sng" algn="ctr">
+                      <a:solidFill>
+                        <a:srgbClr val="DDE5E8"/>
+                      </a:solidFill>
+                      <a:prstDash val="solid"/>
+                      <a:round/>
+                      <a:headEnd type="none" w="med" len="med"/>
+                      <a:tailEnd type="none" w="med" len="med"/>
+                    </a:lnR>
+                    <a:lnT w="6350" cap="flat" cmpd="sng" algn="ctr">
+                      <a:solidFill>
+                        <a:srgbClr val="DDE5E8"/>
+                      </a:solidFill>
+                      <a:prstDash val="solid"/>
+                      <a:round/>
+                      <a:headEnd type="none" w="med" len="med"/>
+                      <a:tailEnd type="none" w="med" len="med"/>
+                    </a:lnT>
+                    <a:lnB w="6350" cap="flat" cmpd="sng" algn="ctr">
+                      <a:solidFill>
+                        <a:srgbClr val="DDE5E8"/>
+                      </a:solidFill>
+                      <a:prstDash val="solid"/>
+                      <a:round/>
+                      <a:headEnd type="none" w="med" len="med"/>
+                      <a:tailEnd type="none" w="med" len="med"/>
+                    </a:lnB>
+                    <a:solidFill>
+                      <a:srgbClr val="EDEDEA"/>
+                    </a:solidFill>
                   </a:tcPr>
                 </a:tc>
               </a:tr>
@@ -15817,40 +17205,36 @@
           </a:graphicData>
         </a:graphic>
       </p:graphicFrame>
-      <p:pic>
-        <p:nvPicPr>
-          <p:cNvPr id="8" name="Image 0" descr="/mnt/d/claude-code-project/group-corparation/Christina-project/slides/img/roc6_zh.png">    </p:cNvPr>
-          <p:cNvPicPr>
-            <a:picLocks noChangeAspect="1"/>
-          </p:cNvPicPr>
-          <p:nvPr/>
-        </p:nvPicPr>
-        <p:blipFill>
-          <a:blip r:embed="rId1"/>
-          <a:stretch>
-            <a:fillRect/>
-          </a:stretch>
-        </p:blipFill>
-        <p:spPr>
-          <a:xfrm>
-            <a:off x="7452360" y="1481328"/>
-            <a:ext cx="4069080" cy="3282696"/>
-          </a:xfrm>
-          <a:prstGeom prst="rect">
-            <a:avLst/>
-          </a:prstGeom>
-        </p:spPr>
-      </p:pic>
-      <p:sp>
-        <p:nvSpPr>
-          <p:cNvPr id="9" name="Text 5"/>
-          <p:cNvSpPr/>
-          <p:nvPr/>
-        </p:nvSpPr>
-        <p:spPr>
-          <a:xfrm>
-            <a:off x="7452360" y="4791456"/>
-            <a:ext cx="4069080" cy="502920"/>
+      <p:sp>
+        <p:nvSpPr>
+          <p:cNvPr id="8" name="Shape 5"/>
+          <p:cNvSpPr/>
+          <p:nvPr/>
+        </p:nvSpPr>
+        <p:spPr>
+          <a:xfrm>
+            <a:off x="548640" y="4407408"/>
+            <a:ext cx="182880" cy="182880"/>
+          </a:xfrm>
+          <a:prstGeom prst="rect">
+            <a:avLst/>
+          </a:prstGeom>
+          <a:solidFill>
+            <a:srgbClr val="EDEDEA"/>
+          </a:solidFill>
+          <a:ln/>
+        </p:spPr>
+      </p:sp>
+      <p:sp>
+        <p:nvSpPr>
+          <p:cNvPr id="9" name="Text 6"/>
+          <p:cNvSpPr/>
+          <p:nvPr/>
+        </p:nvSpPr>
+        <p:spPr>
+          <a:xfrm>
+            <a:off x="822960" y="4370832"/>
+            <a:ext cx="3840480" cy="274320"/>
           </a:xfrm>
           <a:prstGeom prst="rect">
             <a:avLst/>
@@ -15866,7 +17250,7 @@
               <a:buNone/>
             </a:pPr>
             <a:r>
-              <a:rPr lang="en-US" sz="900" i="1" dirty="0">
+              <a:rPr lang="en-US" sz="1000" dirty="0">
                 <a:solidFill>
                   <a:srgbClr val="5F7580"/>
                 </a:solidFill>
@@ -15874,28 +17258,87 @@
                 <a:ea typeface="微软雅黑" pitchFamily="34" charset="-122"/>
                 <a:cs typeface="微软雅黑" pitchFamily="34" charset="-120"/>
               </a:rPr>
-              <a:t>折外 ROC：单次 5 折划分 + 固定超参，非上一页的嵌套 CV 估计值</a:t>
+              <a:t>灰色 = 无法区分（p ≥ 0.05）</a:t>
             </a:r>
-            <a:endParaRPr lang="en-US" sz="900" dirty="0"/>
+            <a:endParaRPr lang="en-US" sz="1000" dirty="0"/>
           </a:p>
         </p:txBody>
       </p:sp>
       <p:sp>
         <p:nvSpPr>
-          <p:cNvPr id="10" name="Shape 6"/>
-          <p:cNvSpPr/>
-          <p:nvPr/>
-        </p:nvSpPr>
-        <p:spPr>
-          <a:xfrm>
-            <a:off x="548640" y="3383280"/>
-            <a:ext cx="6400800" cy="1371600"/>
+          <p:cNvPr id="10" name="Shape 7"/>
+          <p:cNvSpPr/>
+          <p:nvPr/>
+        </p:nvSpPr>
+        <p:spPr>
+          <a:xfrm>
+            <a:off x="4480560" y="4407408"/>
+            <a:ext cx="182880" cy="182880"/>
           </a:xfrm>
           <a:prstGeom prst="rect">
             <a:avLst/>
           </a:prstGeom>
           <a:solidFill>
-            <a:srgbClr val="FFFFFF"/>
+            <a:srgbClr val="E4F0F0"/>
+          </a:solidFill>
+          <a:ln/>
+        </p:spPr>
+      </p:sp>
+      <p:sp>
+        <p:nvSpPr>
+          <p:cNvPr id="11" name="Text 8"/>
+          <p:cNvSpPr/>
+          <p:nvPr/>
+        </p:nvSpPr>
+        <p:spPr>
+          <a:xfrm>
+            <a:off x="4754880" y="4370832"/>
+            <a:ext cx="3657600" cy="274320"/>
+          </a:xfrm>
+          <a:prstGeom prst="rect">
+            <a:avLst/>
+          </a:prstGeom>
+          <a:noFill/>
+          <a:ln/>
+        </p:spPr>
+        <p:txBody>
+          <a:bodyPr wrap="square" lIns="0" tIns="0" rIns="0" bIns="0" rtlCol="0" anchor="ctr"/>
+          <a:lstStyle/>
+          <a:p>
+            <a:pPr indent="0" marL="0">
+              <a:buNone/>
+            </a:pPr>
+            <a:r>
+              <a:rPr lang="en-US" sz="1000" dirty="0">
+                <a:solidFill>
+                  <a:srgbClr val="5F7580"/>
+                </a:solidFill>
+                <a:latin typeface="微软雅黑" pitchFamily="34" charset="0"/>
+                <a:ea typeface="微软雅黑" pitchFamily="34" charset="-122"/>
+                <a:cs typeface="微软雅黑" pitchFamily="34" charset="-120"/>
+              </a:rPr>
+              <a:t>青色 = 可以区分</a:t>
+            </a:r>
+            <a:endParaRPr lang="en-US" sz="1000" dirty="0"/>
+          </a:p>
+        </p:txBody>
+      </p:sp>
+      <p:sp>
+        <p:nvSpPr>
+          <p:cNvPr id="12" name="Shape 9"/>
+          <p:cNvSpPr/>
+          <p:nvPr/>
+        </p:nvSpPr>
+        <p:spPr>
+          <a:xfrm>
+            <a:off x="548640" y="4709160"/>
+            <a:ext cx="5394960" cy="1536192"/>
+          </a:xfrm>
+          <a:prstGeom prst="rect">
+            <a:avLst/>
+          </a:prstGeom>
+          <a:solidFill>
+            <a:srgbClr val="FBEDE7"/>
           </a:solidFill>
           <a:ln/>
           <a:effectLst>
@@ -15909,34 +17352,34 @@
       </p:sp>
       <p:sp>
         <p:nvSpPr>
-          <p:cNvPr id="11" name="Shape 7"/>
-          <p:cNvSpPr/>
-          <p:nvPr/>
-        </p:nvSpPr>
-        <p:spPr>
-          <a:xfrm>
-            <a:off x="548640" y="3383280"/>
-            <a:ext cx="68580" cy="1371600"/>
+          <p:cNvPr id="13" name="Shape 10"/>
+          <p:cNvSpPr/>
+          <p:nvPr/>
+        </p:nvSpPr>
+        <p:spPr>
+          <a:xfrm>
+            <a:off x="548640" y="4709160"/>
+            <a:ext cx="68580" cy="1536192"/>
           </a:xfrm>
           <a:prstGeom prst="rect">
             <a:avLst/>
           </a:prstGeom>
           <a:solidFill>
-            <a:srgbClr val="8FB996"/>
+            <a:srgbClr val="D2603A"/>
           </a:solidFill>
           <a:ln/>
         </p:spPr>
       </p:sp>
       <p:sp>
         <p:nvSpPr>
-          <p:cNvPr id="12" name="Text 8"/>
-          <p:cNvSpPr/>
-          <p:nvPr/>
-        </p:nvSpPr>
-        <p:spPr>
-          <a:xfrm>
-            <a:off x="804672" y="3529584"/>
-            <a:ext cx="5943600" cy="329184"/>
+          <p:cNvPr id="14" name="Text 11"/>
+          <p:cNvSpPr/>
+          <p:nvPr/>
+        </p:nvSpPr>
+        <p:spPr>
+          <a:xfrm>
+            <a:off x="804672" y="4855464"/>
+            <a:ext cx="4937760" cy="329184"/>
           </a:xfrm>
           <a:prstGeom prst="rect">
             <a:avLst/>
@@ -15960,7 +17403,7 @@
                 <a:ea typeface="微软雅黑" pitchFamily="34" charset="-122"/>
                 <a:cs typeface="微软雅黑" pitchFamily="34" charset="-120"/>
               </a:rPr>
-              <a:t>结论</a:t>
+              <a:t>前四名是统计意义上的平局</a:t>
             </a:r>
             <a:endParaRPr lang="en-US" sz="1400" dirty="0"/>
           </a:p>
@@ -15968,14 +17411,14 @@
       </p:sp>
       <p:sp>
         <p:nvSpPr>
-          <p:cNvPr id="13" name="Text 9"/>
-          <p:cNvSpPr/>
-          <p:nvPr/>
-        </p:nvSpPr>
-        <p:spPr>
-          <a:xfrm>
-            <a:off x="804672" y="3913632"/>
-            <a:ext cx="5943600" cy="713232"/>
+          <p:cNvPr id="15" name="Text 12"/>
+          <p:cNvSpPr/>
+          <p:nvPr/>
+        </p:nvSpPr>
+        <p:spPr>
+          <a:xfrm>
+            <a:off x="804672" y="5239512"/>
+            <a:ext cx="4937760" cy="877824"/>
           </a:xfrm>
           <a:prstGeom prst="rect">
             <a:avLst/>
@@ -15994,7 +17437,164 @@
               <a:buNone/>
             </a:pPr>
             <a:r>
-              <a:rPr lang="en-US" sz="1150" dirty="0">
+              <a:rPr lang="en-US" sz="1100" dirty="0">
+                <a:solidFill>
+                  <a:srgbClr val="7A2E14"/>
+                </a:solidFill>
+                <a:latin typeface="微软雅黑" pitchFamily="34" charset="0"/>
+                <a:ea typeface="微软雅黑" pitchFamily="34" charset="-122"/>
+                <a:cs typeface="微软雅黑" pitchFamily="34" charset="-120"/>
+              </a:rPr>
+              <a:t>ExtraTrees、SVM-RBF、集成模型与 SVM-poly 在这份数据上彼此无法区分。它们的 AUC 落在 0.834–0.859，完全处在 ±0.04–0.06 的折间波动之内。</a:t>
+            </a:r>
+            <a:endParaRPr lang="en-US" sz="1100" dirty="0"/>
+          </a:p>
+          <a:p>
+            <a:pPr indent="0" marL="0">
+              <a:lnSpc>
+                <a:spcPct val="112000"/>
+              </a:lnSpc>
+              <a:buNone/>
+            </a:pPr>
+            <a:endParaRPr lang="en-US" sz="1100" dirty="0"/>
+          </a:p>
+          <a:p>
+            <a:pPr indent="0" marL="0">
+              <a:lnSpc>
+                <a:spcPct val="112000"/>
+              </a:lnSpc>
+              <a:buNone/>
+            </a:pPr>
+            <a:r>
+              <a:rPr lang="en-US" sz="1100" dirty="0">
+                <a:solidFill>
+                  <a:srgbClr val="7A2E14"/>
+                </a:solidFill>
+                <a:latin typeface="微软雅黑" pitchFamily="34" charset="0"/>
+                <a:ea typeface="微软雅黑" pitchFamily="34" charset="-122"/>
+                <a:cs typeface="微软雅黑" pitchFamily="34" charset="-120"/>
+              </a:rPr>
+              <a:t>给它们排名等于在读噪声。</a:t>
+            </a:r>
+            <a:endParaRPr lang="en-US" sz="1100" dirty="0"/>
+          </a:p>
+        </p:txBody>
+      </p:sp>
+      <p:sp>
+        <p:nvSpPr>
+          <p:cNvPr id="16" name="Shape 13"/>
+          <p:cNvSpPr/>
+          <p:nvPr/>
+        </p:nvSpPr>
+        <p:spPr>
+          <a:xfrm>
+            <a:off x="6217920" y="4709160"/>
+            <a:ext cx="5394960" cy="1536192"/>
+          </a:xfrm>
+          <a:prstGeom prst="rect">
+            <a:avLst/>
+          </a:prstGeom>
+          <a:solidFill>
+            <a:srgbClr val="FFFFFF"/>
+          </a:solidFill>
+          <a:ln/>
+          <a:effectLst>
+            <a:outerShdw sx="100000" sy="100000" kx="0" ky="0" algn="bl" rotWithShape="0" blurRad="101600" dist="25400" dir="8100000">
+              <a:srgbClr val="000000">
+                <a:alpha val="10000"/>
+              </a:srgbClr>
+            </a:outerShdw>
+          </a:effectLst>
+        </p:spPr>
+      </p:sp>
+      <p:sp>
+        <p:nvSpPr>
+          <p:cNvPr id="17" name="Shape 14"/>
+          <p:cNvSpPr/>
+          <p:nvPr/>
+        </p:nvSpPr>
+        <p:spPr>
+          <a:xfrm>
+            <a:off x="6217920" y="4709160"/>
+            <a:ext cx="68580" cy="1536192"/>
+          </a:xfrm>
+          <a:prstGeom prst="rect">
+            <a:avLst/>
+          </a:prstGeom>
+          <a:solidFill>
+            <a:srgbClr val="8FB996"/>
+          </a:solidFill>
+          <a:ln/>
+        </p:spPr>
+      </p:sp>
+      <p:sp>
+        <p:nvSpPr>
+          <p:cNvPr id="18" name="Text 15"/>
+          <p:cNvSpPr/>
+          <p:nvPr/>
+        </p:nvSpPr>
+        <p:spPr>
+          <a:xfrm>
+            <a:off x="6473952" y="4855464"/>
+            <a:ext cx="4937760" cy="329184"/>
+          </a:xfrm>
+          <a:prstGeom prst="rect">
+            <a:avLst/>
+          </a:prstGeom>
+          <a:noFill/>
+          <a:ln/>
+        </p:spPr>
+        <p:txBody>
+          <a:bodyPr wrap="square" lIns="0" tIns="0" rIns="0" bIns="0" rtlCol="0" anchor="t"/>
+          <a:lstStyle/>
+          <a:p>
+            <a:pPr indent="0" marL="0">
+              <a:buNone/>
+            </a:pPr>
+            <a:r>
+              <a:rPr lang="en-US" sz="1400" b="1" dirty="0">
+                <a:solidFill>
+                  <a:srgbClr val="16252C"/>
+                </a:solidFill>
+                <a:latin typeface="微软雅黑" pitchFamily="34" charset="0"/>
+                <a:ea typeface="微软雅黑" pitchFamily="34" charset="-122"/>
+                <a:cs typeface="微软雅黑" pitchFamily="34" charset="-120"/>
+              </a:rPr>
+              <a:t>所以取舍必须依据别的东西</a:t>
+            </a:r>
+            <a:endParaRPr lang="en-US" sz="1400" dirty="0"/>
+          </a:p>
+        </p:txBody>
+      </p:sp>
+      <p:sp>
+        <p:nvSpPr>
+          <p:cNvPr id="19" name="Text 16"/>
+          <p:cNvSpPr/>
+          <p:nvPr/>
+        </p:nvSpPr>
+        <p:spPr>
+          <a:xfrm>
+            <a:off x="6473952" y="5239512"/>
+            <a:ext cx="4937760" cy="877824"/>
+          </a:xfrm>
+          <a:prstGeom prst="rect">
+            <a:avLst/>
+          </a:prstGeom>
+          <a:noFill/>
+          <a:ln/>
+        </p:spPr>
+        <p:txBody>
+          <a:bodyPr wrap="square" lIns="0" tIns="0" rIns="0" bIns="0" rtlCol="0" anchor="t"/>
+          <a:lstStyle/>
+          <a:p>
+            <a:pPr indent="0" marL="0">
+              <a:lnSpc>
+                <a:spcPct val="112000"/>
+              </a:lnSpc>
+              <a:buNone/>
+            </a:pPr>
+            <a:r>
+              <a:rPr lang="en-US" sz="1100" dirty="0">
                 <a:solidFill>
                   <a:srgbClr val="5F7580"/>
                 </a:solidFill>
@@ -16002,68 +17602,38 @@
                 <a:ea typeface="微软雅黑" pitchFamily="34" charset="-122"/>
                 <a:cs typeface="微软雅黑" pitchFamily="34" charset="-120"/>
               </a:rPr>
-              <a:t>SVM-RBF 显著优于除 ExtraTrees 外的所有模型。ExtraTrees 的 +0.020 领先只到 p=0.085，25 折中仅胜 14 折。单凭这一点还不足以定夺——下一页的分层检验才是决定性的。</a:t>
+              <a:t>剩下两条依据：判决阈值处的错误结构（SVM-RBF 特异度 0.703，ExtraTrees 0.620），以及信号微弱处的稳健性。</a:t>
             </a:r>
-            <a:endParaRPr lang="en-US" sz="1150" dirty="0"/>
+            <a:endParaRPr lang="en-US" sz="1100" dirty="0"/>
           </a:p>
-        </p:txBody>
-      </p:sp>
-      <p:sp>
-        <p:nvSpPr>
-          <p:cNvPr id="14" name="Shape 10"/>
-          <p:cNvSpPr/>
-          <p:nvPr/>
-        </p:nvSpPr>
-        <p:spPr>
-          <a:xfrm>
-            <a:off x="548640" y="5394960"/>
-            <a:ext cx="11064240" cy="822960"/>
-          </a:xfrm>
-          <a:prstGeom prst="rect">
-            <a:avLst/>
-          </a:prstGeom>
-          <a:solidFill>
-            <a:srgbClr val="0B3C49"/>
-          </a:solidFill>
-          <a:ln/>
-        </p:spPr>
-      </p:sp>
-      <p:sp>
-        <p:nvSpPr>
-          <p:cNvPr id="15" name="Text 11"/>
-          <p:cNvSpPr/>
-          <p:nvPr/>
-        </p:nvSpPr>
-        <p:spPr>
-          <a:xfrm>
-            <a:off x="868680" y="5596128"/>
-            <a:ext cx="10515600" cy="457200"/>
-          </a:xfrm>
-          <a:prstGeom prst="rect">
-            <a:avLst/>
-          </a:prstGeom>
-          <a:noFill/>
-          <a:ln/>
-        </p:spPr>
-        <p:txBody>
-          <a:bodyPr wrap="square" lIns="0" tIns="0" rIns="0" bIns="0" rtlCol="0" anchor="ctr"/>
-          <a:lstStyle/>
           <a:p>
             <a:pPr indent="0" marL="0">
+              <a:lnSpc>
+                <a:spcPct val="112000"/>
+              </a:lnSpc>
+              <a:buNone/>
+            </a:pPr>
+            <a:endParaRPr lang="en-US" sz="1100" dirty="0"/>
+          </a:p>
+          <a:p>
+            <a:pPr indent="0" marL="0">
+              <a:lnSpc>
+                <a:spcPct val="112000"/>
+              </a:lnSpc>
               <a:buNone/>
             </a:pPr>
             <a:r>
-              <a:rPr lang="en-US" sz="1400" i="1" dirty="0">
+              <a:rPr lang="en-US" sz="1100" dirty="0">
                 <a:solidFill>
-                  <a:srgbClr val="8FB996"/>
+                  <a:srgbClr val="5F7580"/>
                 </a:solidFill>
                 <a:latin typeface="微软雅黑" pitchFamily="34" charset="0"/>
                 <a:ea typeface="微软雅黑" pitchFamily="34" charset="-122"/>
                 <a:cs typeface="微软雅黑" pitchFamily="34" charset="-120"/>
               </a:rPr>
-              <a:t>SVM-linear 只有 0.766——赢的是核函数，不是 SVM 本身。这是真实非线性结构的第一个线索。</a:t>
+              <a:t>真正决定取舍的检验在下一页。</a:t>
             </a:r>
-            <a:endParaRPr lang="en-US" sz="1400" dirty="0"/>
+            <a:endParaRPr lang="en-US" sz="1100" dirty="0"/>
           </a:p>
         </p:txBody>
       </p:sp>
@@ -34431,7 +36001,36 @@
                 <a:ea typeface="微软雅黑" pitchFamily="34" charset="-122"/>
                 <a:cs typeface="微软雅黑" pitchFamily="34" charset="-120"/>
               </a:rPr>
-              <a:t>两个模型仅在核函数上不同，却差出 0.073。带来性能的是非线性，而不是最大间隔这一形式本身。</a:t>
+              <a:t>Δ = +0.073，25 折中 25 折全胜，Wilcoxon p = 1e-5。</a:t>
+            </a:r>
+            <a:endParaRPr lang="en-US" sz="1200" dirty="0"/>
+          </a:p>
+          <a:p>
+            <a:pPr indent="0" marL="0">
+              <a:lnSpc>
+                <a:spcPct val="112000"/>
+              </a:lnSpc>
+              <a:buNone/>
+            </a:pPr>
+            <a:endParaRPr lang="en-US" sz="1200" dirty="0"/>
+          </a:p>
+          <a:p>
+            <a:pPr indent="0" marL="0">
+              <a:lnSpc>
+                <a:spcPct val="112000"/>
+              </a:lnSpc>
+              <a:buNone/>
+            </a:pPr>
+            <a:r>
+              <a:rPr lang="en-US" sz="1200" dirty="0">
+                <a:solidFill>
+                  <a:srgbClr val="5F7580"/>
+                </a:solidFill>
+                <a:latin typeface="微软雅黑" pitchFamily="34" charset="0"/>
+                <a:ea typeface="微软雅黑" pitchFamily="34" charset="-122"/>
+                <a:cs typeface="微软雅黑" pitchFamily="34" charset="-120"/>
+              </a:rPr>
+              <a:t>这是一次受控对比——同一模型族，只换核函数——也是本报告中最具决定性的检验。</a:t>
             </a:r>
             <a:endParaRPr lang="en-US" sz="1200" dirty="0"/>
           </a:p>
@@ -34717,6 +36316,35 @@
                 <a:cs typeface="微软雅黑" pitchFamily="34" charset="-120"/>
               </a:rPr>
               <a:t>这与已知的肠道菌群规律一致：菌通过菌群联合体与代谢交叉喂养发挥作用，而非孤立起效。单个属很少能独自决定一个免疫表型。</a:t>
+            </a:r>
+            <a:endParaRPr lang="en-US" sz="1200" dirty="0"/>
+          </a:p>
+          <a:p>
+            <a:pPr indent="0" marL="0">
+              <a:lnSpc>
+                <a:spcPct val="112000"/>
+              </a:lnSpc>
+              <a:buNone/>
+            </a:pPr>
+            <a:endParaRPr lang="en-US" sz="1200" dirty="0"/>
+          </a:p>
+          <a:p>
+            <a:pPr indent="0" marL="0">
+              <a:lnSpc>
+                <a:spcPct val="112000"/>
+              </a:lnSpc>
+              <a:buNone/>
+            </a:pPr>
+            <a:r>
+              <a:rPr lang="en-US" sz="1200" dirty="0">
+                <a:solidFill>
+                  <a:srgbClr val="5F7580"/>
+                </a:solidFill>
+                <a:latin typeface="微软雅黑" pitchFamily="34" charset="0"/>
+                <a:ea typeface="微软雅黑" pitchFamily="34" charset="-122"/>
+                <a:cs typeface="微软雅黑" pitchFamily="34" charset="-120"/>
+              </a:rPr>
+              <a:t>与模型比较那一页形成对照：在那里，领先的几个模型互相分不开；在这里，一次受控改动在每一折上都干净地分开了。</a:t>
             </a:r>
             <a:endParaRPr lang="en-US" sz="1200" dirty="0"/>
           </a:p>

--- a/slides/Influenza_Microbiome_ML_Overview_ZH.pptx
+++ b/slides/Influenza_Microbiome_ML_Overview_ZH.pptx
@@ -7201,7 +7201,7 @@
                 <a:ea typeface="微软雅黑" pitchFamily="34" charset="-122"/>
                 <a:cs typeface="微软雅黑" pitchFamily="34" charset="-120"/>
               </a:rPr>
-              <a:t>十七种模型，其中四个打平</a:t>
+              <a:t>十七种模型，不存在一致的排名</a:t>
             </a:r>
             <a:endParaRPr lang="en-US" sz="3000" dirty="0"/>
           </a:p>
@@ -14495,7 +14495,7 @@
                 <a:ea typeface="微软雅黑" pitchFamily="34" charset="-122"/>
                 <a:cs typeface="微软雅黑" pitchFamily="34" charset="-120"/>
               </a:rPr>
-              <a:t>按 ROC-AUC 排序的前 10 名（共 17 个）· 底色标出打平的领先群体 · 完整表见 results/model_comparison_all16.csv</a:t>
+              <a:t>按 ROC-AUC 排序的前 10 名（共 17 个）· 底色标出领先群体 · 完整表见 results/model_comparison_all16.csv</a:t>
             </a:r>
             <a:endParaRPr lang="en-US" sz="950" dirty="0"/>
           </a:p>
@@ -14623,7 +14623,7 @@
                 <a:ea typeface="微软雅黑" pitchFamily="34" charset="-122"/>
                 <a:cs typeface="微软雅黑" pitchFamily="34" charset="-120"/>
               </a:rPr>
-              <a:t>前四行彼此无法区分（见下一页），此处的先后顺序是噪声。真正的分离要到 GP-RBF 以下才出现。</a:t>
+              <a:t>两个领跑者之间无法区分，且这四个中有三个互相无法区分（见下一页）。此处的先后顺序基本上是噪声；真正的分离要到 GP-RBF 以下才出现。</a:t>
             </a:r>
             <a:endParaRPr lang="en-US" sz="1100" dirty="0"/>
           </a:p>
@@ -17214,8 +17214,8 @@
         </p:nvSpPr>
         <p:spPr>
           <a:xfrm>
-            <a:off x="548640" y="4407408"/>
-            <a:ext cx="182880" cy="182880"/>
+            <a:off x="548640" y="4334256"/>
+            <a:ext cx="164592" cy="164592"/>
           </a:xfrm>
           <a:prstGeom prst="rect">
             <a:avLst/>
@@ -17234,8 +17234,8 @@
         </p:nvSpPr>
         <p:spPr>
           <a:xfrm>
-            <a:off x="822960" y="4370832"/>
-            <a:ext cx="3840480" cy="274320"/>
+            <a:off x="804672" y="4306824"/>
+            <a:ext cx="3840480" cy="237744"/>
           </a:xfrm>
           <a:prstGeom prst="rect">
             <a:avLst/>
@@ -17273,8 +17273,8 @@
         </p:nvSpPr>
         <p:spPr>
           <a:xfrm>
-            <a:off x="4480560" y="4407408"/>
-            <a:ext cx="182880" cy="182880"/>
+            <a:off x="4480560" y="4334256"/>
+            <a:ext cx="164592" cy="164592"/>
           </a:xfrm>
           <a:prstGeom prst="rect">
             <a:avLst/>
@@ -17293,8 +17293,8 @@
         </p:nvSpPr>
         <p:spPr>
           <a:xfrm>
-            <a:off x="4754880" y="4370832"/>
-            <a:ext cx="3657600" cy="274320"/>
+            <a:off x="4736592" y="4306824"/>
+            <a:ext cx="3657600" cy="237744"/>
           </a:xfrm>
           <a:prstGeom prst="rect">
             <a:avLst/>
@@ -17332,8 +17332,8 @@
         </p:nvSpPr>
         <p:spPr>
           <a:xfrm>
-            <a:off x="548640" y="4617720"/>
-            <a:ext cx="5394960" cy="1298448"/>
+            <a:off x="548640" y="4626864"/>
+            <a:ext cx="5394960" cy="1325880"/>
           </a:xfrm>
           <a:prstGeom prst="rect">
             <a:avLst/>
@@ -17359,8 +17359,8 @@
         </p:nvSpPr>
         <p:spPr>
           <a:xfrm>
-            <a:off x="548640" y="4617720"/>
-            <a:ext cx="68580" cy="1298448"/>
+            <a:off x="548640" y="4626864"/>
+            <a:ext cx="68580" cy="1325880"/>
           </a:xfrm>
           <a:prstGeom prst="rect">
             <a:avLst/>
@@ -17379,7 +17379,7 @@
         </p:nvSpPr>
         <p:spPr>
           <a:xfrm>
-            <a:off x="804672" y="4764024"/>
+            <a:off x="804672" y="4773168"/>
             <a:ext cx="4937760" cy="329184"/>
           </a:xfrm>
           <a:prstGeom prst="rect">
@@ -17404,7 +17404,7 @@
                 <a:ea typeface="微软雅黑" pitchFamily="34" charset="-122"/>
                 <a:cs typeface="微软雅黑" pitchFamily="34" charset="-120"/>
               </a:rPr>
-              <a:t>前四名是统计意义上的平局</a:t>
+              <a:t>「无法区分」不具传递性</a:t>
             </a:r>
             <a:endParaRPr lang="en-US" sz="1400" dirty="0"/>
           </a:p>
@@ -17418,8 +17418,8 @@
         </p:nvSpPr>
         <p:spPr>
           <a:xfrm>
-            <a:off x="804672" y="5148072"/>
-            <a:ext cx="4937760" cy="640080"/>
+            <a:off x="804672" y="5157216"/>
+            <a:ext cx="4937760" cy="667512"/>
           </a:xfrm>
           <a:prstGeom prst="rect">
             <a:avLst/>
@@ -17446,7 +17446,7 @@
                 <a:ea typeface="微软雅黑" pitchFamily="34" charset="-122"/>
                 <a:cs typeface="微软雅黑" pitchFamily="34" charset="-120"/>
               </a:rPr>
-              <a:t>ExtraTrees、SVM-RBF、集成模型与 SVM-poly 在这份数据上彼此无法区分。它们的 AUC 落在 0.834–0.859，完全处在 ±0.04–0.06 的折间波动之内。</a:t>
+              <a:t>ExtraTrees 对 SVM-RBF：p = 0.085。SVM-RBF、集成、SVM-poly 三者互相无法区分（p = 0.360–0.609）。但 ExtraTrees 确实能与后两者分开。</a:t>
             </a:r>
             <a:endParaRPr lang="en-US" sz="1100" dirty="0"/>
           </a:p>
@@ -17475,7 +17475,7 @@
                 <a:ea typeface="微软雅黑" pitchFamily="34" charset="-122"/>
                 <a:cs typeface="微软雅黑" pitchFamily="34" charset="-120"/>
               </a:rPr>
-              <a:t>给它们排名等于在读噪声。</a:t>
+              <a:t>领先者之间不存在一致的排名。</a:t>
             </a:r>
             <a:endParaRPr lang="en-US" sz="1100" dirty="0"/>
           </a:p>
@@ -17489,8 +17489,8 @@
         </p:nvSpPr>
         <p:spPr>
           <a:xfrm>
-            <a:off x="6217920" y="4617720"/>
-            <a:ext cx="5394960" cy="1298448"/>
+            <a:off x="6217920" y="4626864"/>
+            <a:ext cx="5394960" cy="1325880"/>
           </a:xfrm>
           <a:prstGeom prst="rect">
             <a:avLst/>
@@ -17516,8 +17516,8 @@
         </p:nvSpPr>
         <p:spPr>
           <a:xfrm>
-            <a:off x="6217920" y="4617720"/>
-            <a:ext cx="68580" cy="1298448"/>
+            <a:off x="6217920" y="4626864"/>
+            <a:ext cx="68580" cy="1325880"/>
           </a:xfrm>
           <a:prstGeom prst="rect">
             <a:avLst/>
@@ -17536,7 +17536,7 @@
         </p:nvSpPr>
         <p:spPr>
           <a:xfrm>
-            <a:off x="6473952" y="4764024"/>
+            <a:off x="6473952" y="4773168"/>
             <a:ext cx="4937760" cy="329184"/>
           </a:xfrm>
           <a:prstGeom prst="rect">
@@ -17575,8 +17575,8 @@
         </p:nvSpPr>
         <p:spPr>
           <a:xfrm>
-            <a:off x="6473952" y="5148072"/>
-            <a:ext cx="4937760" cy="640080"/>
+            <a:off x="6473952" y="5157216"/>
+            <a:ext cx="4937760" cy="667512"/>
           </a:xfrm>
           <a:prstGeom prst="rect">
             <a:avLst/>
@@ -17646,8 +17646,8 @@
         </p:nvSpPr>
         <p:spPr>
           <a:xfrm>
-            <a:off x="548640" y="6016752"/>
-            <a:ext cx="11064240" cy="320040"/>
+            <a:off x="548640" y="6035040"/>
+            <a:ext cx="10607040" cy="292608"/>
           </a:xfrm>
           <a:prstGeom prst="rect">
             <a:avLst/>
@@ -17663,7 +17663,7 @@
               <a:buNone/>
             </a:pPr>
             <a:r>
-              <a:rPr lang="en-US" sz="950" i="1" dirty="0">
+              <a:rPr lang="en-US" sz="900" i="1" dirty="0">
                 <a:solidFill>
                   <a:srgbClr val="5F7580"/>
                 </a:solidFill>
@@ -17671,9 +17671,9 @@
                 <a:ea typeface="微软雅黑" pitchFamily="34" charset="-122"/>
                 <a:cs typeface="微软雅黑" pitchFamily="34" charset="-120"/>
               </a:rPr>
-              <a:t>超参稳健性：SVM-RBF 网格已扩展至 C ∈ [0.01, 500]、gamma ∈ [1e-4, 0.1] + scale。15 折中 0 折选中边界值，AUC 未变（0.838 对 0.839），整个曲面跨度仅 0.73–0.81。完整曲面见 results/svm_hyperparam_surface.csv。</a:t>
+              <a:t>超参稳健性：网格扩展至 C ∈ [0.01, 500]、gamma ∈ [1e-4, 0.1] + scale。15 折中 0 折触及边界，AUC 未变（0.838 对 0.839），曲面跨度仅 0.73–0.81。</a:t>
             </a:r>
-            <a:endParaRPr lang="en-US" sz="950" dirty="0"/>
+            <a:endParaRPr lang="en-US" sz="900" dirty="0"/>
           </a:p>
         </p:txBody>
       </p:sp>

--- a/slides/Influenza_Microbiome_ML_Overview_ZH.pptx
+++ b/slides/Influenza_Microbiome_ML_Overview_ZH.pptx
@@ -34,9 +34,10 @@
     <p:sldId id="282" r:id="rId28"/>
     <p:sldId id="283" r:id="rId29"/>
     <p:sldId id="284" r:id="rId30"/>
+    <p:sldId id="285" r:id="rId31"/>
   </p:sldIdLst>
   <p:notesMasterIdLst>
-    <p:notesMasterId r:id="rId31"/>
+    <p:notesMasterId r:id="rId32"/>
   </p:notesMasterIdLst>
   <p:sldSz cx="12192000" cy="6858000"/>
   <p:notesSz cx="6858000" cy="12192000"/>
@@ -2490,6 +2491,94 @@
             <a:fld id="{F7021451-1387-4CA6-816F-3879F97B5CBC}" type="slidenum">
               <a:rPr lang="en-US"/>
               <a:t>3</a:t>
+            </a:fld>
+            <a:endParaRPr lang="en-US"/>
+          </a:p>
+        </p:txBody>
+      </p:sp>
+    </p:spTree>
+    <p:extLst>
+      <p:ext uri="{BB962C8B-B14F-4D97-AF65-F5344CB8AC3E}">
+        <p14:creationId xmlns:p14="http://schemas.microsoft.com/office/powerpoint/2010/main" val="1024086991"/>
+      </p:ext>
+    </p:extLst>
+  </p:cSld>
+  <p:clrMapOvr>
+    <a:masterClrMapping/>
+  </p:clrMapOvr>
+</p:notes>
+</file>
+
+<file path=ppt/notesSlides/notesSlide30.xml><?xml version="1.0" encoding="utf-8"?>
+<p:notes xmlns:a="http://schemas.openxmlformats.org/drawingml/2006/main" xmlns:r="http://schemas.openxmlformats.org/officeDocument/2006/relationships" xmlns:p="http://schemas.openxmlformats.org/presentationml/2006/main">
+  <p:cSld>
+    <p:spTree>
+      <p:nvGrpSpPr>
+        <p:cNvPr id="1" name=""/>
+        <p:cNvGrpSpPr/>
+        <p:nvPr/>
+      </p:nvGrpSpPr>
+      <p:grpSpPr>
+        <a:xfrm>
+          <a:off x="0" y="0"/>
+          <a:ext cx="0" cy="0"/>
+          <a:chOff x="0" y="0"/>
+          <a:chExt cx="0" cy="0"/>
+        </a:xfrm>
+      </p:grpSpPr>
+      <p:sp>
+        <p:nvSpPr>
+          <p:cNvPr id="2" name="Slide Image Placeholder 1"/>
+          <p:cNvSpPr>
+            <a:spLocks noGrp="1" noRot="1" noChangeAspect="1"/>
+          </p:cNvSpPr>
+          <p:nvPr>
+            <p:ph type="sldImg"/>
+          </p:nvPr>
+        </p:nvSpPr>
+        <p:spPr/>
+      </p:sp>
+      <p:sp>
+        <p:nvSpPr>
+          <p:cNvPr id="3" name="Notes Placeholder 2"/>
+          <p:cNvSpPr>
+            <a:spLocks noGrp="1"/>
+          </p:cNvSpPr>
+          <p:nvPr>
+            <p:ph type="body" idx="1"/>
+          </p:nvPr>
+        </p:nvSpPr>
+        <p:spPr/>
+        <p:txBody>
+          <a:bodyPr/>
+          <a:lstStyle/>
+          <a:p>
+            <a:r>
+              <a:rPr lang="en-US" dirty="0"/>
+              <a:t/>
+            </a:r>
+            <a:endParaRPr lang="en-US" dirty="0"/>
+          </a:p>
+        </p:txBody>
+      </p:sp>
+      <p:sp>
+        <p:nvSpPr>
+          <p:cNvPr id="4" name="Slide Number Placeholder 3"/>
+          <p:cNvSpPr>
+            <a:spLocks noGrp="1"/>
+          </p:cNvSpPr>
+          <p:nvPr>
+            <p:ph type="sldNum" sz="quarter" idx="10"/>
+          </p:nvPr>
+        </p:nvSpPr>
+        <p:spPr/>
+        <p:txBody>
+          <a:bodyPr/>
+          <a:lstStyle/>
+          <a:p>
+            <a:fld id="{F7021451-1387-4CA6-816F-3879F97B5CBC}" type="slidenum">
+              <a:rPr lang="en-US"/>
+              <a:t>30</a:t>
             </a:fld>
             <a:endParaRPr lang="en-US"/>
           </a:p>
@@ -27199,6 +27288,2139 @@
     <p:bg>
       <p:bgPr>
         <a:solidFill>
+          <a:srgbClr val="FCFAF6"/>
+        </a:solidFill>
+      </p:bgPr>
+    </p:bg>
+    <p:spTree>
+      <p:nvGrpSpPr>
+        <p:cNvPr id="1" name=""/>
+        <p:cNvGrpSpPr/>
+        <p:nvPr/>
+      </p:nvGrpSpPr>
+      <p:grpSpPr>
+        <a:xfrm>
+          <a:off x="0" y="0"/>
+          <a:ext cx="0" cy="0"/>
+          <a:chOff x="0" y="0"/>
+          <a:chExt cx="0" cy="0"/>
+        </a:xfrm>
+      </p:grpSpPr>
+      <p:sp>
+        <p:nvSpPr>
+          <p:cNvPr id="2" name="Shape 0"/>
+          <p:cNvSpPr/>
+          <p:nvPr/>
+        </p:nvSpPr>
+        <p:spPr>
+          <a:xfrm>
+            <a:off x="0" y="0"/>
+            <a:ext cx="12191695" cy="54864"/>
+          </a:xfrm>
+          <a:prstGeom prst="rect">
+            <a:avLst/>
+          </a:prstGeom>
+          <a:solidFill>
+            <a:srgbClr val="18707F"/>
+          </a:solidFill>
+          <a:ln/>
+        </p:spPr>
+      </p:sp>
+      <p:sp>
+        <p:nvSpPr>
+          <p:cNvPr id="3" name="Text 1"/>
+          <p:cNvSpPr/>
+          <p:nvPr/>
+        </p:nvSpPr>
+        <p:spPr>
+          <a:xfrm>
+            <a:off x="548640" y="310896"/>
+            <a:ext cx="7315200" cy="256032"/>
+          </a:xfrm>
+          <a:prstGeom prst="rect">
+            <a:avLst/>
+          </a:prstGeom>
+          <a:noFill/>
+          <a:ln/>
+        </p:spPr>
+        <p:txBody>
+          <a:bodyPr wrap="square" lIns="0" tIns="0" rIns="0" bIns="0" rtlCol="0" anchor="ctr"/>
+          <a:lstStyle/>
+          <a:p>
+            <a:pPr indent="0" marL="0">
+              <a:buNone/>
+            </a:pPr>
+            <a:r>
+              <a:rPr lang="en-US" sz="1100" b="1" spc="200" kern="0" dirty="0">
+                <a:solidFill>
+                  <a:srgbClr val="18707F"/>
+                </a:solidFill>
+                <a:latin typeface="微软雅黑" pitchFamily="34" charset="0"/>
+                <a:ea typeface="微软雅黑" pitchFamily="34" charset="-122"/>
+                <a:cs typeface="微软雅黑" pitchFamily="34" charset="-120"/>
+              </a:rPr>
+              <a:t>有效性 · 敏感性分析</a:t>
+            </a:r>
+            <a:endParaRPr lang="en-US" sz="1100" dirty="0"/>
+          </a:p>
+        </p:txBody>
+      </p:sp>
+      <p:sp>
+        <p:nvSpPr>
+          <p:cNvPr id="4" name="Text 2"/>
+          <p:cNvSpPr/>
+          <p:nvPr/>
+        </p:nvSpPr>
+        <p:spPr>
+          <a:xfrm>
+            <a:off x="548640" y="566928"/>
+            <a:ext cx="11064240" cy="685800"/>
+          </a:xfrm>
+          <a:prstGeom prst="rect">
+            <a:avLst/>
+          </a:prstGeom>
+          <a:noFill/>
+          <a:ln/>
+        </p:spPr>
+        <p:txBody>
+          <a:bodyPr wrap="square" lIns="0" tIns="0" rIns="0" bIns="0" rtlCol="0" anchor="ctr"/>
+          <a:lstStyle/>
+          <a:p>
+            <a:pPr indent="0" marL="0">
+              <a:buNone/>
+            </a:pPr>
+            <a:r>
+              <a:rPr lang="en-US" sz="3000" b="1" dirty="0">
+                <a:solidFill>
+                  <a:srgbClr val="16252C"/>
+                </a:solidFill>
+                <a:latin typeface="微软雅黑" pitchFamily="34" charset="0"/>
+                <a:ea typeface="微软雅黑" pitchFamily="34" charset="-122"/>
+                <a:cs typeface="微软雅黑" pitchFamily="34" charset="-120"/>
+              </a:rPr>
+              <a:t>如果直接删掉被混杂的月份呢？</a:t>
+            </a:r>
+            <a:endParaRPr lang="en-US" sz="3000" dirty="0"/>
+          </a:p>
+        </p:txBody>
+      </p:sp>
+      <p:sp>
+        <p:nvSpPr>
+          <p:cNvPr id="5" name="Text 3"/>
+          <p:cNvSpPr/>
+          <p:nvPr/>
+        </p:nvSpPr>
+        <p:spPr>
+          <a:xfrm>
+            <a:off x="11430000" y="6355080"/>
+            <a:ext cx="411480" cy="274320"/>
+          </a:xfrm>
+          <a:prstGeom prst="rect">
+            <a:avLst/>
+          </a:prstGeom>
+          <a:noFill/>
+          <a:ln/>
+        </p:spPr>
+        <p:txBody>
+          <a:bodyPr wrap="square" lIns="0" tIns="0" rIns="0" bIns="0" rtlCol="0" anchor="ctr"/>
+          <a:lstStyle/>
+          <a:p>
+            <a:pPr algn="r" indent="0" marL="0">
+              <a:buNone/>
+            </a:pPr>
+            <a:r>
+              <a:rPr lang="en-US" sz="1000" dirty="0">
+                <a:solidFill>
+                  <a:srgbClr val="5F7580"/>
+                </a:solidFill>
+                <a:latin typeface="微软雅黑" pitchFamily="34" charset="0"/>
+                <a:ea typeface="微软雅黑" pitchFamily="34" charset="-122"/>
+                <a:cs typeface="微软雅黑" pitchFamily="34" charset="-120"/>
+              </a:rPr>
+              <a:t>22</a:t>
+            </a:r>
+            <a:endParaRPr lang="en-US" sz="1000" dirty="0"/>
+          </a:p>
+        </p:txBody>
+      </p:sp>
+      <p:sp>
+        <p:nvSpPr>
+          <p:cNvPr id="6" name="Text 4"/>
+          <p:cNvSpPr/>
+          <p:nvPr/>
+        </p:nvSpPr>
+        <p:spPr>
+          <a:xfrm>
+            <a:off x="548640" y="1298448"/>
+            <a:ext cx="11064240" cy="457200"/>
+          </a:xfrm>
+          <a:prstGeom prst="rect">
+            <a:avLst/>
+          </a:prstGeom>
+          <a:noFill/>
+          <a:ln/>
+        </p:spPr>
+        <p:txBody>
+          <a:bodyPr wrap="square" lIns="0" tIns="0" rIns="0" bIns="0" rtlCol="0" anchor="t"/>
+          <a:lstStyle/>
+          <a:p>
+            <a:pPr indent="0" marL="0">
+              <a:buNone/>
+            </a:pPr>
+            <a:r>
+              <a:rPr lang="en-US" sz="1250" dirty="0">
+                <a:solidFill>
+                  <a:srgbClr val="5F7580"/>
+                </a:solidFill>
+                <a:latin typeface="微软雅黑" pitchFamily="34" charset="0"/>
+                <a:ea typeface="微软雅黑" pitchFamily="34" charset="-122"/>
+                <a:cs typeface="微软雅黑" pitchFamily="34" charset="-120"/>
+              </a:rPr>
+              <a:t>11–12 月 100% 阳性、1 月 90% 阴性。在这 95 个样本上，模型只要学会「这是几月」就能拿高分，学的不是菌群。排除它们之后（n = 260 → 165）：</a:t>
+            </a:r>
+            <a:endParaRPr lang="en-US" sz="1250" dirty="0"/>
+          </a:p>
+        </p:txBody>
+      </p:sp>
+      <p:graphicFrame>
+        <p:nvGraphicFramePr>
+          <p:cNvPr id="23" name="Table 0"/>
+          <p:cNvGraphicFramePr>
+            <a:graphicFrameLocks noGrp="1"/>
+          </p:cNvGraphicFramePr>
+          <p:nvPr>
+            <p:extLst>
+              <p:ext uri="{D42A27DB-BD31-4B8C-83A1-F6EECF244321}">
+                <p14:modId xmlns:p14="http://schemas.microsoft.com/office/powerpoint/2010/main" val="1579011935"/>
+              </p:ext>
+            </p:extLst>
+          </p:nvPr>
+        </p:nvGraphicFramePr>
+        <p:xfrm>
+          <a:off x="548640" y="1828800"/>
+          <a:ext cx="6309360" cy="914400"/>
+        </p:xfrm>
+        <a:graphic>
+          <a:graphicData uri="http://schemas.openxmlformats.org/drawingml/2006/table">
+            <a:tbl>
+              <a:tblPr/>
+              <a:tblGrid>
+                <a:gridCol w="2468880"/>
+                <a:gridCol w="1280160"/>
+                <a:gridCol w="1371600"/>
+                <a:gridCol w="1188720"/>
+              </a:tblGrid>
+              <a:tr h="402336">
+                <a:tc>
+                  <a:txBody>
+                    <a:bodyPr/>
+                    <a:lstStyle/>
+                    <a:p>
+                      <a:pPr algn="ctr" indent="0" marL="0">
+                        <a:buNone/>
+                      </a:pPr>
+                      <a:r>
+                        <a:rPr lang="en-US" sz="1100" b="1" dirty="0">
+                          <a:solidFill>
+                            <a:srgbClr val="FFFFFF"/>
+                          </a:solidFill>
+                          <a:latin typeface="微软雅黑" pitchFamily="34" charset="0"/>
+                          <a:ea typeface="微软雅黑" pitchFamily="34" charset="-122"/>
+                          <a:cs typeface="微软雅黑" pitchFamily="34" charset="-120"/>
+                        </a:rPr>
+                        <a:t>特征集</a:t>
+                      </a:r>
+                      <a:endParaRPr lang="en-US" sz="1100" dirty="0">
+                        <a:latin typeface="微软雅黑" charset="0"/>
+                        <a:ea typeface="微软雅黑" charset="0"/>
+                        <a:cs typeface="微软雅黑" charset="0"/>
+                      </a:endParaRPr>
+                    </a:p>
+                  </a:txBody>
+                  <a:tcPr marL="91440" marR="91440" marT="45720" marB="45720" anchor="ctr">
+                    <a:lnL w="6350" cap="flat" cmpd="sng" algn="ctr">
+                      <a:solidFill>
+                        <a:srgbClr val="DDE5E8"/>
+                      </a:solidFill>
+                      <a:prstDash val="solid"/>
+                      <a:round/>
+                      <a:headEnd type="none" w="med" len="med"/>
+                      <a:tailEnd type="none" w="med" len="med"/>
+                    </a:lnL>
+                    <a:lnR w="6350" cap="flat" cmpd="sng" algn="ctr">
+                      <a:solidFill>
+                        <a:srgbClr val="DDE5E8"/>
+                      </a:solidFill>
+                      <a:prstDash val="solid"/>
+                      <a:round/>
+                      <a:headEnd type="none" w="med" len="med"/>
+                      <a:tailEnd type="none" w="med" len="med"/>
+                    </a:lnR>
+                    <a:lnT w="6350" cap="flat" cmpd="sng" algn="ctr">
+                      <a:solidFill>
+                        <a:srgbClr val="DDE5E8"/>
+                      </a:solidFill>
+                      <a:prstDash val="solid"/>
+                      <a:round/>
+                      <a:headEnd type="none" w="med" len="med"/>
+                      <a:tailEnd type="none" w="med" len="med"/>
+                    </a:lnT>
+                    <a:lnB w="6350" cap="flat" cmpd="sng" algn="ctr">
+                      <a:solidFill>
+                        <a:srgbClr val="DDE5E8"/>
+                      </a:solidFill>
+                      <a:prstDash val="solid"/>
+                      <a:round/>
+                      <a:headEnd type="none" w="med" len="med"/>
+                      <a:tailEnd type="none" w="med" len="med"/>
+                    </a:lnB>
+                    <a:solidFill>
+                      <a:srgbClr val="0B3C49"/>
+                    </a:solidFill>
+                  </a:tcPr>
+                </a:tc>
+                <a:tc>
+                  <a:txBody>
+                    <a:bodyPr/>
+                    <a:lstStyle/>
+                    <a:p>
+                      <a:pPr algn="ctr" indent="0" marL="0">
+                        <a:buNone/>
+                      </a:pPr>
+                      <a:r>
+                        <a:rPr lang="en-US" sz="1100" b="1" dirty="0">
+                          <a:solidFill>
+                            <a:srgbClr val="FFFFFF"/>
+                          </a:solidFill>
+                          <a:latin typeface="微软雅黑" pitchFamily="34" charset="0"/>
+                          <a:ea typeface="微软雅黑" pitchFamily="34" charset="-122"/>
+                          <a:cs typeface="微软雅黑" pitchFamily="34" charset="-120"/>
+                        </a:rPr>
+                        <a:t>全队列 n=260</a:t>
+                      </a:r>
+                      <a:endParaRPr lang="en-US" sz="1100" dirty="0">
+                        <a:latin typeface="微软雅黑" charset="0"/>
+                        <a:ea typeface="微软雅黑" charset="0"/>
+                        <a:cs typeface="微软雅黑" charset="0"/>
+                      </a:endParaRPr>
+                    </a:p>
+                  </a:txBody>
+                  <a:tcPr marL="91440" marR="91440" marT="45720" marB="45720" anchor="ctr">
+                    <a:lnL w="6350" cap="flat" cmpd="sng" algn="ctr">
+                      <a:solidFill>
+                        <a:srgbClr val="DDE5E8"/>
+                      </a:solidFill>
+                      <a:prstDash val="solid"/>
+                      <a:round/>
+                      <a:headEnd type="none" w="med" len="med"/>
+                      <a:tailEnd type="none" w="med" len="med"/>
+                    </a:lnL>
+                    <a:lnR w="6350" cap="flat" cmpd="sng" algn="ctr">
+                      <a:solidFill>
+                        <a:srgbClr val="DDE5E8"/>
+                      </a:solidFill>
+                      <a:prstDash val="solid"/>
+                      <a:round/>
+                      <a:headEnd type="none" w="med" len="med"/>
+                      <a:tailEnd type="none" w="med" len="med"/>
+                    </a:lnR>
+                    <a:lnT w="6350" cap="flat" cmpd="sng" algn="ctr">
+                      <a:solidFill>
+                        <a:srgbClr val="DDE5E8"/>
+                      </a:solidFill>
+                      <a:prstDash val="solid"/>
+                      <a:round/>
+                      <a:headEnd type="none" w="med" len="med"/>
+                      <a:tailEnd type="none" w="med" len="med"/>
+                    </a:lnT>
+                    <a:lnB w="6350" cap="flat" cmpd="sng" algn="ctr">
+                      <a:solidFill>
+                        <a:srgbClr val="DDE5E8"/>
+                      </a:solidFill>
+                      <a:prstDash val="solid"/>
+                      <a:round/>
+                      <a:headEnd type="none" w="med" len="med"/>
+                      <a:tailEnd type="none" w="med" len="med"/>
+                    </a:lnB>
+                    <a:solidFill>
+                      <a:srgbClr val="0B3C49"/>
+                    </a:solidFill>
+                  </a:tcPr>
+                </a:tc>
+                <a:tc>
+                  <a:txBody>
+                    <a:bodyPr/>
+                    <a:lstStyle/>
+                    <a:p>
+                      <a:pPr algn="ctr" indent="0" marL="0">
+                        <a:buNone/>
+                      </a:pPr>
+                      <a:r>
+                        <a:rPr lang="en-US" sz="1100" b="1" dirty="0">
+                          <a:solidFill>
+                            <a:srgbClr val="FFFFFF"/>
+                          </a:solidFill>
+                          <a:latin typeface="微软雅黑" pitchFamily="34" charset="0"/>
+                          <a:ea typeface="微软雅黑" pitchFamily="34" charset="-122"/>
+                          <a:cs typeface="微软雅黑" pitchFamily="34" charset="-120"/>
+                        </a:rPr>
+                        <a:t>子集 n=165</a:t>
+                      </a:r>
+                      <a:endParaRPr lang="en-US" sz="1100" dirty="0">
+                        <a:latin typeface="微软雅黑" charset="0"/>
+                        <a:ea typeface="微软雅黑" charset="0"/>
+                        <a:cs typeface="微软雅黑" charset="0"/>
+                      </a:endParaRPr>
+                    </a:p>
+                  </a:txBody>
+                  <a:tcPr marL="91440" marR="91440" marT="45720" marB="45720" anchor="ctr">
+                    <a:lnL w="6350" cap="flat" cmpd="sng" algn="ctr">
+                      <a:solidFill>
+                        <a:srgbClr val="DDE5E8"/>
+                      </a:solidFill>
+                      <a:prstDash val="solid"/>
+                      <a:round/>
+                      <a:headEnd type="none" w="med" len="med"/>
+                      <a:tailEnd type="none" w="med" len="med"/>
+                    </a:lnL>
+                    <a:lnR w="6350" cap="flat" cmpd="sng" algn="ctr">
+                      <a:solidFill>
+                        <a:srgbClr val="DDE5E8"/>
+                      </a:solidFill>
+                      <a:prstDash val="solid"/>
+                      <a:round/>
+                      <a:headEnd type="none" w="med" len="med"/>
+                      <a:tailEnd type="none" w="med" len="med"/>
+                    </a:lnR>
+                    <a:lnT w="6350" cap="flat" cmpd="sng" algn="ctr">
+                      <a:solidFill>
+                        <a:srgbClr val="DDE5E8"/>
+                      </a:solidFill>
+                      <a:prstDash val="solid"/>
+                      <a:round/>
+                      <a:headEnd type="none" w="med" len="med"/>
+                      <a:tailEnd type="none" w="med" len="med"/>
+                    </a:lnT>
+                    <a:lnB w="6350" cap="flat" cmpd="sng" algn="ctr">
+                      <a:solidFill>
+                        <a:srgbClr val="DDE5E8"/>
+                      </a:solidFill>
+                      <a:prstDash val="solid"/>
+                      <a:round/>
+                      <a:headEnd type="none" w="med" len="med"/>
+                      <a:tailEnd type="none" w="med" len="med"/>
+                    </a:lnB>
+                    <a:solidFill>
+                      <a:srgbClr val="0B3C49"/>
+                    </a:solidFill>
+                  </a:tcPr>
+                </a:tc>
+                <a:tc>
+                  <a:txBody>
+                    <a:bodyPr/>
+                    <a:lstStyle/>
+                    <a:p>
+                      <a:pPr algn="ctr" indent="0" marL="0">
+                        <a:buNone/>
+                      </a:pPr>
+                      <a:r>
+                        <a:rPr lang="en-US" sz="1100" b="1" dirty="0">
+                          <a:solidFill>
+                            <a:srgbClr val="FFFFFF"/>
+                          </a:solidFill>
+                          <a:latin typeface="微软雅黑" pitchFamily="34" charset="0"/>
+                          <a:ea typeface="微软雅黑" pitchFamily="34" charset="-122"/>
+                          <a:cs typeface="微软雅黑" pitchFamily="34" charset="-120"/>
+                        </a:rPr>
+                        <a:t>变化</a:t>
+                      </a:r>
+                      <a:endParaRPr lang="en-US" sz="1100" dirty="0">
+                        <a:latin typeface="微软雅黑" charset="0"/>
+                        <a:ea typeface="微软雅黑" charset="0"/>
+                        <a:cs typeface="微软雅黑" charset="0"/>
+                      </a:endParaRPr>
+                    </a:p>
+                  </a:txBody>
+                  <a:tcPr marL="91440" marR="91440" marT="45720" marB="45720" anchor="ctr">
+                    <a:lnL w="6350" cap="flat" cmpd="sng" algn="ctr">
+                      <a:solidFill>
+                        <a:srgbClr val="DDE5E8"/>
+                      </a:solidFill>
+                      <a:prstDash val="solid"/>
+                      <a:round/>
+                      <a:headEnd type="none" w="med" len="med"/>
+                      <a:tailEnd type="none" w="med" len="med"/>
+                    </a:lnL>
+                    <a:lnR w="6350" cap="flat" cmpd="sng" algn="ctr">
+                      <a:solidFill>
+                        <a:srgbClr val="DDE5E8"/>
+                      </a:solidFill>
+                      <a:prstDash val="solid"/>
+                      <a:round/>
+                      <a:headEnd type="none" w="med" len="med"/>
+                      <a:tailEnd type="none" w="med" len="med"/>
+                    </a:lnR>
+                    <a:lnT w="6350" cap="flat" cmpd="sng" algn="ctr">
+                      <a:solidFill>
+                        <a:srgbClr val="DDE5E8"/>
+                      </a:solidFill>
+                      <a:prstDash val="solid"/>
+                      <a:round/>
+                      <a:headEnd type="none" w="med" len="med"/>
+                      <a:tailEnd type="none" w="med" len="med"/>
+                    </a:lnT>
+                    <a:lnB w="6350" cap="flat" cmpd="sng" algn="ctr">
+                      <a:solidFill>
+                        <a:srgbClr val="DDE5E8"/>
+                      </a:solidFill>
+                      <a:prstDash val="solid"/>
+                      <a:round/>
+                      <a:headEnd type="none" w="med" len="med"/>
+                      <a:tailEnd type="none" w="med" len="med"/>
+                    </a:lnB>
+                    <a:solidFill>
+                      <a:srgbClr val="0B3C49"/>
+                    </a:solidFill>
+                  </a:tcPr>
+                </a:tc>
+              </a:tr>
+              <a:tr h="402336">
+                <a:tc>
+                  <a:txBody>
+                    <a:bodyPr/>
+                    <a:lstStyle/>
+                    <a:p>
+                      <a:pPr algn="ctr" indent="0" marL="0">
+                        <a:buNone/>
+                      </a:pPr>
+                      <a:r>
+                        <a:rPr lang="en-US" sz="1100" dirty="0">
+                          <a:solidFill>
+                            <a:srgbClr val="16252C"/>
+                          </a:solidFill>
+                          <a:latin typeface="微软雅黑" pitchFamily="34" charset="0"/>
+                          <a:ea typeface="微软雅黑" pitchFamily="34" charset="-122"/>
+                          <a:cs typeface="微软雅黑" pitchFamily="34" charset="-120"/>
+                        </a:rPr>
+                        <a:t>仅协变量</a:t>
+                      </a:r>
+                      <a:endParaRPr lang="en-US" sz="1100" dirty="0">
+                        <a:latin typeface="微软雅黑" charset="0"/>
+                        <a:ea typeface="微软雅黑" charset="0"/>
+                        <a:cs typeface="微软雅黑" charset="0"/>
+                      </a:endParaRPr>
+                    </a:p>
+                  </a:txBody>
+                  <a:tcPr marL="91440" marR="91440" marT="45720" marB="45720" anchor="ctr">
+                    <a:lnL w="6350" cap="flat" cmpd="sng" algn="ctr">
+                      <a:solidFill>
+                        <a:srgbClr val="DDE5E8"/>
+                      </a:solidFill>
+                      <a:prstDash val="solid"/>
+                      <a:round/>
+                      <a:headEnd type="none" w="med" len="med"/>
+                      <a:tailEnd type="none" w="med" len="med"/>
+                    </a:lnL>
+                    <a:lnR w="6350" cap="flat" cmpd="sng" algn="ctr">
+                      <a:solidFill>
+                        <a:srgbClr val="DDE5E8"/>
+                      </a:solidFill>
+                      <a:prstDash val="solid"/>
+                      <a:round/>
+                      <a:headEnd type="none" w="med" len="med"/>
+                      <a:tailEnd type="none" w="med" len="med"/>
+                    </a:lnR>
+                    <a:lnT w="6350" cap="flat" cmpd="sng" algn="ctr">
+                      <a:solidFill>
+                        <a:srgbClr val="DDE5E8"/>
+                      </a:solidFill>
+                      <a:prstDash val="solid"/>
+                      <a:round/>
+                      <a:headEnd type="none" w="med" len="med"/>
+                      <a:tailEnd type="none" w="med" len="med"/>
+                    </a:lnT>
+                    <a:lnB w="6350" cap="flat" cmpd="sng" algn="ctr">
+                      <a:solidFill>
+                        <a:srgbClr val="DDE5E8"/>
+                      </a:solidFill>
+                      <a:prstDash val="solid"/>
+                      <a:round/>
+                      <a:headEnd type="none" w="med" len="med"/>
+                      <a:tailEnd type="none" w="med" len="med"/>
+                    </a:lnB>
+                  </a:tcPr>
+                </a:tc>
+                <a:tc>
+                  <a:txBody>
+                    <a:bodyPr/>
+                    <a:lstStyle/>
+                    <a:p>
+                      <a:pPr algn="ctr" indent="0" marL="0">
+                        <a:buNone/>
+                      </a:pPr>
+                      <a:r>
+                        <a:rPr lang="en-US" sz="1100" dirty="0">
+                          <a:solidFill>
+                            <a:srgbClr val="16252C"/>
+                          </a:solidFill>
+                          <a:latin typeface="微软雅黑" pitchFamily="34" charset="0"/>
+                          <a:ea typeface="微软雅黑" pitchFamily="34" charset="-122"/>
+                          <a:cs typeface="微软雅黑" pitchFamily="34" charset="-120"/>
+                        </a:rPr>
+                        <a:t>0.881</a:t>
+                      </a:r>
+                      <a:endParaRPr lang="en-US" sz="1100" dirty="0">
+                        <a:latin typeface="微软雅黑" charset="0"/>
+                        <a:ea typeface="微软雅黑" charset="0"/>
+                        <a:cs typeface="微软雅黑" charset="0"/>
+                      </a:endParaRPr>
+                    </a:p>
+                  </a:txBody>
+                  <a:tcPr marL="91440" marR="91440" marT="45720" marB="45720" anchor="ctr">
+                    <a:lnL w="6350" cap="flat" cmpd="sng" algn="ctr">
+                      <a:solidFill>
+                        <a:srgbClr val="DDE5E8"/>
+                      </a:solidFill>
+                      <a:prstDash val="solid"/>
+                      <a:round/>
+                      <a:headEnd type="none" w="med" len="med"/>
+                      <a:tailEnd type="none" w="med" len="med"/>
+                    </a:lnL>
+                    <a:lnR w="6350" cap="flat" cmpd="sng" algn="ctr">
+                      <a:solidFill>
+                        <a:srgbClr val="DDE5E8"/>
+                      </a:solidFill>
+                      <a:prstDash val="solid"/>
+                      <a:round/>
+                      <a:headEnd type="none" w="med" len="med"/>
+                      <a:tailEnd type="none" w="med" len="med"/>
+                    </a:lnR>
+                    <a:lnT w="6350" cap="flat" cmpd="sng" algn="ctr">
+                      <a:solidFill>
+                        <a:srgbClr val="DDE5E8"/>
+                      </a:solidFill>
+                      <a:prstDash val="solid"/>
+                      <a:round/>
+                      <a:headEnd type="none" w="med" len="med"/>
+                      <a:tailEnd type="none" w="med" len="med"/>
+                    </a:lnT>
+                    <a:lnB w="6350" cap="flat" cmpd="sng" algn="ctr">
+                      <a:solidFill>
+                        <a:srgbClr val="DDE5E8"/>
+                      </a:solidFill>
+                      <a:prstDash val="solid"/>
+                      <a:round/>
+                      <a:headEnd type="none" w="med" len="med"/>
+                      <a:tailEnd type="none" w="med" len="med"/>
+                    </a:lnB>
+                  </a:tcPr>
+                </a:tc>
+                <a:tc>
+                  <a:txBody>
+                    <a:bodyPr/>
+                    <a:lstStyle/>
+                    <a:p>
+                      <a:pPr algn="ctr" indent="0" marL="0">
+                        <a:buNone/>
+                      </a:pPr>
+                      <a:r>
+                        <a:rPr lang="en-US" sz="1100" dirty="0">
+                          <a:solidFill>
+                            <a:srgbClr val="16252C"/>
+                          </a:solidFill>
+                          <a:latin typeface="微软雅黑" pitchFamily="34" charset="0"/>
+                          <a:ea typeface="微软雅黑" pitchFamily="34" charset="-122"/>
+                          <a:cs typeface="微软雅黑" pitchFamily="34" charset="-120"/>
+                        </a:rPr>
+                        <a:t>0.774</a:t>
+                      </a:r>
+                      <a:endParaRPr lang="en-US" sz="1100" dirty="0">
+                        <a:latin typeface="微软雅黑" charset="0"/>
+                        <a:ea typeface="微软雅黑" charset="0"/>
+                        <a:cs typeface="微软雅黑" charset="0"/>
+                      </a:endParaRPr>
+                    </a:p>
+                  </a:txBody>
+                  <a:tcPr marL="91440" marR="91440" marT="45720" marB="45720" anchor="ctr">
+                    <a:lnL w="6350" cap="flat" cmpd="sng" algn="ctr">
+                      <a:solidFill>
+                        <a:srgbClr val="DDE5E8"/>
+                      </a:solidFill>
+                      <a:prstDash val="solid"/>
+                      <a:round/>
+                      <a:headEnd type="none" w="med" len="med"/>
+                      <a:tailEnd type="none" w="med" len="med"/>
+                    </a:lnL>
+                    <a:lnR w="6350" cap="flat" cmpd="sng" algn="ctr">
+                      <a:solidFill>
+                        <a:srgbClr val="DDE5E8"/>
+                      </a:solidFill>
+                      <a:prstDash val="solid"/>
+                      <a:round/>
+                      <a:headEnd type="none" w="med" len="med"/>
+                      <a:tailEnd type="none" w="med" len="med"/>
+                    </a:lnR>
+                    <a:lnT w="6350" cap="flat" cmpd="sng" algn="ctr">
+                      <a:solidFill>
+                        <a:srgbClr val="DDE5E8"/>
+                      </a:solidFill>
+                      <a:prstDash val="solid"/>
+                      <a:round/>
+                      <a:headEnd type="none" w="med" len="med"/>
+                      <a:tailEnd type="none" w="med" len="med"/>
+                    </a:lnT>
+                    <a:lnB w="6350" cap="flat" cmpd="sng" algn="ctr">
+                      <a:solidFill>
+                        <a:srgbClr val="DDE5E8"/>
+                      </a:solidFill>
+                      <a:prstDash val="solid"/>
+                      <a:round/>
+                      <a:headEnd type="none" w="med" len="med"/>
+                      <a:tailEnd type="none" w="med" len="med"/>
+                    </a:lnB>
+                  </a:tcPr>
+                </a:tc>
+                <a:tc>
+                  <a:txBody>
+                    <a:bodyPr/>
+                    <a:lstStyle/>
+                    <a:p>
+                      <a:pPr algn="ctr" indent="0" marL="0">
+                        <a:buNone/>
+                      </a:pPr>
+                      <a:r>
+                        <a:rPr lang="en-US" sz="1100" dirty="0">
+                          <a:solidFill>
+                            <a:srgbClr val="5F7580"/>
+                          </a:solidFill>
+                          <a:latin typeface="微软雅黑" pitchFamily="34" charset="0"/>
+                          <a:ea typeface="微软雅黑" pitchFamily="34" charset="-122"/>
+                          <a:cs typeface="微软雅黑" pitchFamily="34" charset="-120"/>
+                        </a:rPr>
+                        <a:t>−0.107</a:t>
+                      </a:r>
+                      <a:endParaRPr lang="en-US" sz="1100" dirty="0">
+                        <a:latin typeface="微软雅黑" charset="0"/>
+                        <a:ea typeface="微软雅黑" charset="0"/>
+                        <a:cs typeface="微软雅黑" charset="0"/>
+                      </a:endParaRPr>
+                    </a:p>
+                  </a:txBody>
+                  <a:tcPr marL="91440" marR="91440" marT="45720" marB="45720" anchor="ctr">
+                    <a:lnL w="6350" cap="flat" cmpd="sng" algn="ctr">
+                      <a:solidFill>
+                        <a:srgbClr val="DDE5E8"/>
+                      </a:solidFill>
+                      <a:prstDash val="solid"/>
+                      <a:round/>
+                      <a:headEnd type="none" w="med" len="med"/>
+                      <a:tailEnd type="none" w="med" len="med"/>
+                    </a:lnL>
+                    <a:lnR w="6350" cap="flat" cmpd="sng" algn="ctr">
+                      <a:solidFill>
+                        <a:srgbClr val="DDE5E8"/>
+                      </a:solidFill>
+                      <a:prstDash val="solid"/>
+                      <a:round/>
+                      <a:headEnd type="none" w="med" len="med"/>
+                      <a:tailEnd type="none" w="med" len="med"/>
+                    </a:lnR>
+                    <a:lnT w="6350" cap="flat" cmpd="sng" algn="ctr">
+                      <a:solidFill>
+                        <a:srgbClr val="DDE5E8"/>
+                      </a:solidFill>
+                      <a:prstDash val="solid"/>
+                      <a:round/>
+                      <a:headEnd type="none" w="med" len="med"/>
+                      <a:tailEnd type="none" w="med" len="med"/>
+                    </a:lnT>
+                    <a:lnB w="6350" cap="flat" cmpd="sng" algn="ctr">
+                      <a:solidFill>
+                        <a:srgbClr val="DDE5E8"/>
+                      </a:solidFill>
+                      <a:prstDash val="solid"/>
+                      <a:round/>
+                      <a:headEnd type="none" w="med" len="med"/>
+                      <a:tailEnd type="none" w="med" len="med"/>
+                    </a:lnB>
+                  </a:tcPr>
+                </a:tc>
+              </a:tr>
+              <a:tr h="402336">
+                <a:tc>
+                  <a:txBody>
+                    <a:bodyPr/>
+                    <a:lstStyle/>
+                    <a:p>
+                      <a:pPr algn="ctr" indent="0" marL="0">
+                        <a:buNone/>
+                      </a:pPr>
+                      <a:r>
+                        <a:rPr lang="en-US" sz="1100" dirty="0">
+                          <a:solidFill>
+                            <a:srgbClr val="16252C"/>
+                          </a:solidFill>
+                          <a:latin typeface="微软雅黑" pitchFamily="34" charset="0"/>
+                          <a:ea typeface="微软雅黑" pitchFamily="34" charset="-122"/>
+                          <a:cs typeface="微软雅黑" pitchFamily="34" charset="-120"/>
+                        </a:rPr>
+                        <a:t>仅菌群</a:t>
+                      </a:r>
+                      <a:endParaRPr lang="en-US" sz="1100" dirty="0">
+                        <a:latin typeface="微软雅黑" charset="0"/>
+                        <a:ea typeface="微软雅黑" charset="0"/>
+                        <a:cs typeface="微软雅黑" charset="0"/>
+                      </a:endParaRPr>
+                    </a:p>
+                  </a:txBody>
+                  <a:tcPr marL="91440" marR="91440" marT="45720" marB="45720" anchor="ctr">
+                    <a:lnL w="6350" cap="flat" cmpd="sng" algn="ctr">
+                      <a:solidFill>
+                        <a:srgbClr val="DDE5E8"/>
+                      </a:solidFill>
+                      <a:prstDash val="solid"/>
+                      <a:round/>
+                      <a:headEnd type="none" w="med" len="med"/>
+                      <a:tailEnd type="none" w="med" len="med"/>
+                    </a:lnL>
+                    <a:lnR w="6350" cap="flat" cmpd="sng" algn="ctr">
+                      <a:solidFill>
+                        <a:srgbClr val="DDE5E8"/>
+                      </a:solidFill>
+                      <a:prstDash val="solid"/>
+                      <a:round/>
+                      <a:headEnd type="none" w="med" len="med"/>
+                      <a:tailEnd type="none" w="med" len="med"/>
+                    </a:lnR>
+                    <a:lnT w="6350" cap="flat" cmpd="sng" algn="ctr">
+                      <a:solidFill>
+                        <a:srgbClr val="DDE5E8"/>
+                      </a:solidFill>
+                      <a:prstDash val="solid"/>
+                      <a:round/>
+                      <a:headEnd type="none" w="med" len="med"/>
+                      <a:tailEnd type="none" w="med" len="med"/>
+                    </a:lnT>
+                    <a:lnB w="6350" cap="flat" cmpd="sng" algn="ctr">
+                      <a:solidFill>
+                        <a:srgbClr val="DDE5E8"/>
+                      </a:solidFill>
+                      <a:prstDash val="solid"/>
+                      <a:round/>
+                      <a:headEnd type="none" w="med" len="med"/>
+                      <a:tailEnd type="none" w="med" len="med"/>
+                    </a:lnB>
+                  </a:tcPr>
+                </a:tc>
+                <a:tc>
+                  <a:txBody>
+                    <a:bodyPr/>
+                    <a:lstStyle/>
+                    <a:p>
+                      <a:pPr algn="ctr" indent="0" marL="0">
+                        <a:buNone/>
+                      </a:pPr>
+                      <a:r>
+                        <a:rPr lang="en-US" sz="1100" dirty="0">
+                          <a:solidFill>
+                            <a:srgbClr val="16252C"/>
+                          </a:solidFill>
+                          <a:latin typeface="微软雅黑" pitchFamily="34" charset="0"/>
+                          <a:ea typeface="微软雅黑" pitchFamily="34" charset="-122"/>
+                          <a:cs typeface="微软雅黑" pitchFamily="34" charset="-120"/>
+                        </a:rPr>
+                        <a:t>0.766</a:t>
+                      </a:r>
+                      <a:endParaRPr lang="en-US" sz="1100" dirty="0">
+                        <a:latin typeface="微软雅黑" charset="0"/>
+                        <a:ea typeface="微软雅黑" charset="0"/>
+                        <a:cs typeface="微软雅黑" charset="0"/>
+                      </a:endParaRPr>
+                    </a:p>
+                  </a:txBody>
+                  <a:tcPr marL="91440" marR="91440" marT="45720" marB="45720" anchor="ctr">
+                    <a:lnL w="6350" cap="flat" cmpd="sng" algn="ctr">
+                      <a:solidFill>
+                        <a:srgbClr val="DDE5E8"/>
+                      </a:solidFill>
+                      <a:prstDash val="solid"/>
+                      <a:round/>
+                      <a:headEnd type="none" w="med" len="med"/>
+                      <a:tailEnd type="none" w="med" len="med"/>
+                    </a:lnL>
+                    <a:lnR w="6350" cap="flat" cmpd="sng" algn="ctr">
+                      <a:solidFill>
+                        <a:srgbClr val="DDE5E8"/>
+                      </a:solidFill>
+                      <a:prstDash val="solid"/>
+                      <a:round/>
+                      <a:headEnd type="none" w="med" len="med"/>
+                      <a:tailEnd type="none" w="med" len="med"/>
+                    </a:lnR>
+                    <a:lnT w="6350" cap="flat" cmpd="sng" algn="ctr">
+                      <a:solidFill>
+                        <a:srgbClr val="DDE5E8"/>
+                      </a:solidFill>
+                      <a:prstDash val="solid"/>
+                      <a:round/>
+                      <a:headEnd type="none" w="med" len="med"/>
+                      <a:tailEnd type="none" w="med" len="med"/>
+                    </a:lnT>
+                    <a:lnB w="6350" cap="flat" cmpd="sng" algn="ctr">
+                      <a:solidFill>
+                        <a:srgbClr val="DDE5E8"/>
+                      </a:solidFill>
+                      <a:prstDash val="solid"/>
+                      <a:round/>
+                      <a:headEnd type="none" w="med" len="med"/>
+                      <a:tailEnd type="none" w="med" len="med"/>
+                    </a:lnB>
+                  </a:tcPr>
+                </a:tc>
+                <a:tc>
+                  <a:txBody>
+                    <a:bodyPr/>
+                    <a:lstStyle/>
+                    <a:p>
+                      <a:pPr algn="ctr" indent="0" marL="0">
+                        <a:buNone/>
+                      </a:pPr>
+                      <a:r>
+                        <a:rPr lang="en-US" sz="1100" b="1" dirty="0">
+                          <a:solidFill>
+                            <a:srgbClr val="16252C"/>
+                          </a:solidFill>
+                          <a:latin typeface="微软雅黑" pitchFamily="34" charset="0"/>
+                          <a:ea typeface="微软雅黑" pitchFamily="34" charset="-122"/>
+                          <a:cs typeface="微软雅黑" pitchFamily="34" charset="-120"/>
+                        </a:rPr>
+                        <a:t>0.933</a:t>
+                      </a:r>
+                      <a:endParaRPr lang="en-US" sz="1100" dirty="0">
+                        <a:latin typeface="微软雅黑" charset="0"/>
+                        <a:ea typeface="微软雅黑" charset="0"/>
+                        <a:cs typeface="微软雅黑" charset="0"/>
+                      </a:endParaRPr>
+                    </a:p>
+                  </a:txBody>
+                  <a:tcPr marL="91440" marR="91440" marT="45720" marB="45720" anchor="ctr">
+                    <a:lnL w="6350" cap="flat" cmpd="sng" algn="ctr">
+                      <a:solidFill>
+                        <a:srgbClr val="DDE5E8"/>
+                      </a:solidFill>
+                      <a:prstDash val="solid"/>
+                      <a:round/>
+                      <a:headEnd type="none" w="med" len="med"/>
+                      <a:tailEnd type="none" w="med" len="med"/>
+                    </a:lnL>
+                    <a:lnR w="6350" cap="flat" cmpd="sng" algn="ctr">
+                      <a:solidFill>
+                        <a:srgbClr val="DDE5E8"/>
+                      </a:solidFill>
+                      <a:prstDash val="solid"/>
+                      <a:round/>
+                      <a:headEnd type="none" w="med" len="med"/>
+                      <a:tailEnd type="none" w="med" len="med"/>
+                    </a:lnR>
+                    <a:lnT w="6350" cap="flat" cmpd="sng" algn="ctr">
+                      <a:solidFill>
+                        <a:srgbClr val="DDE5E8"/>
+                      </a:solidFill>
+                      <a:prstDash val="solid"/>
+                      <a:round/>
+                      <a:headEnd type="none" w="med" len="med"/>
+                      <a:tailEnd type="none" w="med" len="med"/>
+                    </a:lnT>
+                    <a:lnB w="6350" cap="flat" cmpd="sng" algn="ctr">
+                      <a:solidFill>
+                        <a:srgbClr val="DDE5E8"/>
+                      </a:solidFill>
+                      <a:prstDash val="solid"/>
+                      <a:round/>
+                      <a:headEnd type="none" w="med" len="med"/>
+                      <a:tailEnd type="none" w="med" len="med"/>
+                    </a:lnB>
+                  </a:tcPr>
+                </a:tc>
+                <a:tc>
+                  <a:txBody>
+                    <a:bodyPr/>
+                    <a:lstStyle/>
+                    <a:p>
+                      <a:pPr algn="ctr" indent="0" marL="0">
+                        <a:buNone/>
+                      </a:pPr>
+                      <a:r>
+                        <a:rPr lang="en-US" sz="1100" b="1" dirty="0">
+                          <a:solidFill>
+                            <a:srgbClr val="8FB996"/>
+                          </a:solidFill>
+                          <a:latin typeface="微软雅黑" pitchFamily="34" charset="0"/>
+                          <a:ea typeface="微软雅黑" pitchFamily="34" charset="-122"/>
+                          <a:cs typeface="微软雅黑" pitchFamily="34" charset="-120"/>
+                        </a:rPr>
+                        <a:t>+0.168</a:t>
+                      </a:r>
+                      <a:endParaRPr lang="en-US" sz="1100" dirty="0">
+                        <a:latin typeface="微软雅黑" charset="0"/>
+                        <a:ea typeface="微软雅黑" charset="0"/>
+                        <a:cs typeface="微软雅黑" charset="0"/>
+                      </a:endParaRPr>
+                    </a:p>
+                  </a:txBody>
+                  <a:tcPr marL="91440" marR="91440" marT="45720" marB="45720" anchor="ctr">
+                    <a:lnL w="6350" cap="flat" cmpd="sng" algn="ctr">
+                      <a:solidFill>
+                        <a:srgbClr val="DDE5E8"/>
+                      </a:solidFill>
+                      <a:prstDash val="solid"/>
+                      <a:round/>
+                      <a:headEnd type="none" w="med" len="med"/>
+                      <a:tailEnd type="none" w="med" len="med"/>
+                    </a:lnL>
+                    <a:lnR w="6350" cap="flat" cmpd="sng" algn="ctr">
+                      <a:solidFill>
+                        <a:srgbClr val="DDE5E8"/>
+                      </a:solidFill>
+                      <a:prstDash val="solid"/>
+                      <a:round/>
+                      <a:headEnd type="none" w="med" len="med"/>
+                      <a:tailEnd type="none" w="med" len="med"/>
+                    </a:lnR>
+                    <a:lnT w="6350" cap="flat" cmpd="sng" algn="ctr">
+                      <a:solidFill>
+                        <a:srgbClr val="DDE5E8"/>
+                      </a:solidFill>
+                      <a:prstDash val="solid"/>
+                      <a:round/>
+                      <a:headEnd type="none" w="med" len="med"/>
+                      <a:tailEnd type="none" w="med" len="med"/>
+                    </a:lnT>
+                    <a:lnB w="6350" cap="flat" cmpd="sng" algn="ctr">
+                      <a:solidFill>
+                        <a:srgbClr val="DDE5E8"/>
+                      </a:solidFill>
+                      <a:prstDash val="solid"/>
+                      <a:round/>
+                      <a:headEnd type="none" w="med" len="med"/>
+                      <a:tailEnd type="none" w="med" len="med"/>
+                    </a:lnB>
+                  </a:tcPr>
+                </a:tc>
+              </a:tr>
+              <a:tr h="402336">
+                <a:tc>
+                  <a:txBody>
+                    <a:bodyPr/>
+                    <a:lstStyle/>
+                    <a:p>
+                      <a:pPr algn="ctr" indent="0" marL="0">
+                        <a:buNone/>
+                      </a:pPr>
+                      <a:r>
+                        <a:rPr lang="en-US" sz="1100" dirty="0">
+                          <a:solidFill>
+                            <a:srgbClr val="16252C"/>
+                          </a:solidFill>
+                          <a:latin typeface="微软雅黑" pitchFamily="34" charset="0"/>
+                          <a:ea typeface="微软雅黑" pitchFamily="34" charset="-122"/>
+                          <a:cs typeface="微软雅黑" pitchFamily="34" charset="-120"/>
+                        </a:rPr>
+                        <a:t>菌群 + 协变量</a:t>
+                      </a:r>
+                      <a:endParaRPr lang="en-US" sz="1100" dirty="0">
+                        <a:latin typeface="微软雅黑" charset="0"/>
+                        <a:ea typeface="微软雅黑" charset="0"/>
+                        <a:cs typeface="微软雅黑" charset="0"/>
+                      </a:endParaRPr>
+                    </a:p>
+                  </a:txBody>
+                  <a:tcPr marL="91440" marR="91440" marT="45720" marB="45720" anchor="ctr">
+                    <a:lnL w="6350" cap="flat" cmpd="sng" algn="ctr">
+                      <a:solidFill>
+                        <a:srgbClr val="DDE5E8"/>
+                      </a:solidFill>
+                      <a:prstDash val="solid"/>
+                      <a:round/>
+                      <a:headEnd type="none" w="med" len="med"/>
+                      <a:tailEnd type="none" w="med" len="med"/>
+                    </a:lnL>
+                    <a:lnR w="6350" cap="flat" cmpd="sng" algn="ctr">
+                      <a:solidFill>
+                        <a:srgbClr val="DDE5E8"/>
+                      </a:solidFill>
+                      <a:prstDash val="solid"/>
+                      <a:round/>
+                      <a:headEnd type="none" w="med" len="med"/>
+                      <a:tailEnd type="none" w="med" len="med"/>
+                    </a:lnR>
+                    <a:lnT w="6350" cap="flat" cmpd="sng" algn="ctr">
+                      <a:solidFill>
+                        <a:srgbClr val="DDE5E8"/>
+                      </a:solidFill>
+                      <a:prstDash val="solid"/>
+                      <a:round/>
+                      <a:headEnd type="none" w="med" len="med"/>
+                      <a:tailEnd type="none" w="med" len="med"/>
+                    </a:lnT>
+                    <a:lnB w="6350" cap="flat" cmpd="sng" algn="ctr">
+                      <a:solidFill>
+                        <a:srgbClr val="DDE5E8"/>
+                      </a:solidFill>
+                      <a:prstDash val="solid"/>
+                      <a:round/>
+                      <a:headEnd type="none" w="med" len="med"/>
+                      <a:tailEnd type="none" w="med" len="med"/>
+                    </a:lnB>
+                  </a:tcPr>
+                </a:tc>
+                <a:tc>
+                  <a:txBody>
+                    <a:bodyPr/>
+                    <a:lstStyle/>
+                    <a:p>
+                      <a:pPr algn="ctr" indent="0" marL="0">
+                        <a:buNone/>
+                      </a:pPr>
+                      <a:r>
+                        <a:rPr lang="en-US" sz="1100" dirty="0">
+                          <a:solidFill>
+                            <a:srgbClr val="16252C"/>
+                          </a:solidFill>
+                          <a:latin typeface="微软雅黑" pitchFamily="34" charset="0"/>
+                          <a:ea typeface="微软雅黑" pitchFamily="34" charset="-122"/>
+                          <a:cs typeface="微软雅黑" pitchFamily="34" charset="-120"/>
+                        </a:rPr>
+                        <a:t>0.924</a:t>
+                      </a:r>
+                      <a:endParaRPr lang="en-US" sz="1100" dirty="0">
+                        <a:latin typeface="微软雅黑" charset="0"/>
+                        <a:ea typeface="微软雅黑" charset="0"/>
+                        <a:cs typeface="微软雅黑" charset="0"/>
+                      </a:endParaRPr>
+                    </a:p>
+                  </a:txBody>
+                  <a:tcPr marL="91440" marR="91440" marT="45720" marB="45720" anchor="ctr">
+                    <a:lnL w="6350" cap="flat" cmpd="sng" algn="ctr">
+                      <a:solidFill>
+                        <a:srgbClr val="DDE5E8"/>
+                      </a:solidFill>
+                      <a:prstDash val="solid"/>
+                      <a:round/>
+                      <a:headEnd type="none" w="med" len="med"/>
+                      <a:tailEnd type="none" w="med" len="med"/>
+                    </a:lnL>
+                    <a:lnR w="6350" cap="flat" cmpd="sng" algn="ctr">
+                      <a:solidFill>
+                        <a:srgbClr val="DDE5E8"/>
+                      </a:solidFill>
+                      <a:prstDash val="solid"/>
+                      <a:round/>
+                      <a:headEnd type="none" w="med" len="med"/>
+                      <a:tailEnd type="none" w="med" len="med"/>
+                    </a:lnR>
+                    <a:lnT w="6350" cap="flat" cmpd="sng" algn="ctr">
+                      <a:solidFill>
+                        <a:srgbClr val="DDE5E8"/>
+                      </a:solidFill>
+                      <a:prstDash val="solid"/>
+                      <a:round/>
+                      <a:headEnd type="none" w="med" len="med"/>
+                      <a:tailEnd type="none" w="med" len="med"/>
+                    </a:lnT>
+                    <a:lnB w="6350" cap="flat" cmpd="sng" algn="ctr">
+                      <a:solidFill>
+                        <a:srgbClr val="DDE5E8"/>
+                      </a:solidFill>
+                      <a:prstDash val="solid"/>
+                      <a:round/>
+                      <a:headEnd type="none" w="med" len="med"/>
+                      <a:tailEnd type="none" w="med" len="med"/>
+                    </a:lnB>
+                  </a:tcPr>
+                </a:tc>
+                <a:tc>
+                  <a:txBody>
+                    <a:bodyPr/>
+                    <a:lstStyle/>
+                    <a:p>
+                      <a:pPr algn="ctr" indent="0" marL="0">
+                        <a:buNone/>
+                      </a:pPr>
+                      <a:r>
+                        <a:rPr lang="en-US" sz="1100" dirty="0">
+                          <a:solidFill>
+                            <a:srgbClr val="16252C"/>
+                          </a:solidFill>
+                          <a:latin typeface="微软雅黑" pitchFamily="34" charset="0"/>
+                          <a:ea typeface="微软雅黑" pitchFamily="34" charset="-122"/>
+                          <a:cs typeface="微软雅黑" pitchFamily="34" charset="-120"/>
+                        </a:rPr>
+                        <a:t>0.951</a:t>
+                      </a:r>
+                      <a:endParaRPr lang="en-US" sz="1100" dirty="0">
+                        <a:latin typeface="微软雅黑" charset="0"/>
+                        <a:ea typeface="微软雅黑" charset="0"/>
+                        <a:cs typeface="微软雅黑" charset="0"/>
+                      </a:endParaRPr>
+                    </a:p>
+                  </a:txBody>
+                  <a:tcPr marL="91440" marR="91440" marT="45720" marB="45720" anchor="ctr">
+                    <a:lnL w="6350" cap="flat" cmpd="sng" algn="ctr">
+                      <a:solidFill>
+                        <a:srgbClr val="DDE5E8"/>
+                      </a:solidFill>
+                      <a:prstDash val="solid"/>
+                      <a:round/>
+                      <a:headEnd type="none" w="med" len="med"/>
+                      <a:tailEnd type="none" w="med" len="med"/>
+                    </a:lnL>
+                    <a:lnR w="6350" cap="flat" cmpd="sng" algn="ctr">
+                      <a:solidFill>
+                        <a:srgbClr val="DDE5E8"/>
+                      </a:solidFill>
+                      <a:prstDash val="solid"/>
+                      <a:round/>
+                      <a:headEnd type="none" w="med" len="med"/>
+                      <a:tailEnd type="none" w="med" len="med"/>
+                    </a:lnR>
+                    <a:lnT w="6350" cap="flat" cmpd="sng" algn="ctr">
+                      <a:solidFill>
+                        <a:srgbClr val="DDE5E8"/>
+                      </a:solidFill>
+                      <a:prstDash val="solid"/>
+                      <a:round/>
+                      <a:headEnd type="none" w="med" len="med"/>
+                      <a:tailEnd type="none" w="med" len="med"/>
+                    </a:lnT>
+                    <a:lnB w="6350" cap="flat" cmpd="sng" algn="ctr">
+                      <a:solidFill>
+                        <a:srgbClr val="DDE5E8"/>
+                      </a:solidFill>
+                      <a:prstDash val="solid"/>
+                      <a:round/>
+                      <a:headEnd type="none" w="med" len="med"/>
+                      <a:tailEnd type="none" w="med" len="med"/>
+                    </a:lnB>
+                  </a:tcPr>
+                </a:tc>
+                <a:tc>
+                  <a:txBody>
+                    <a:bodyPr/>
+                    <a:lstStyle/>
+                    <a:p>
+                      <a:pPr algn="ctr" indent="0" marL="0">
+                        <a:buNone/>
+                      </a:pPr>
+                      <a:r>
+                        <a:rPr lang="en-US" sz="1100" dirty="0">
+                          <a:solidFill>
+                            <a:srgbClr val="8FB996"/>
+                          </a:solidFill>
+                          <a:latin typeface="微软雅黑" pitchFamily="34" charset="0"/>
+                          <a:ea typeface="微软雅黑" pitchFamily="34" charset="-122"/>
+                          <a:cs typeface="微软雅黑" pitchFamily="34" charset="-120"/>
+                        </a:rPr>
+                        <a:t>+0.027</a:t>
+                      </a:r>
+                      <a:endParaRPr lang="en-US" sz="1100" dirty="0">
+                        <a:latin typeface="微软雅黑" charset="0"/>
+                        <a:ea typeface="微软雅黑" charset="0"/>
+                        <a:cs typeface="微软雅黑" charset="0"/>
+                      </a:endParaRPr>
+                    </a:p>
+                  </a:txBody>
+                  <a:tcPr marL="91440" marR="91440" marT="45720" marB="45720" anchor="ctr">
+                    <a:lnL w="6350" cap="flat" cmpd="sng" algn="ctr">
+                      <a:solidFill>
+                        <a:srgbClr val="DDE5E8"/>
+                      </a:solidFill>
+                      <a:prstDash val="solid"/>
+                      <a:round/>
+                      <a:headEnd type="none" w="med" len="med"/>
+                      <a:tailEnd type="none" w="med" len="med"/>
+                    </a:lnL>
+                    <a:lnR w="6350" cap="flat" cmpd="sng" algn="ctr">
+                      <a:solidFill>
+                        <a:srgbClr val="DDE5E8"/>
+                      </a:solidFill>
+                      <a:prstDash val="solid"/>
+                      <a:round/>
+                      <a:headEnd type="none" w="med" len="med"/>
+                      <a:tailEnd type="none" w="med" len="med"/>
+                    </a:lnR>
+                    <a:lnT w="6350" cap="flat" cmpd="sng" algn="ctr">
+                      <a:solidFill>
+                        <a:srgbClr val="DDE5E8"/>
+                      </a:solidFill>
+                      <a:prstDash val="solid"/>
+                      <a:round/>
+                      <a:headEnd type="none" w="med" len="med"/>
+                      <a:tailEnd type="none" w="med" len="med"/>
+                    </a:lnT>
+                    <a:lnB w="6350" cap="flat" cmpd="sng" algn="ctr">
+                      <a:solidFill>
+                        <a:srgbClr val="DDE5E8"/>
+                      </a:solidFill>
+                      <a:prstDash val="solid"/>
+                      <a:round/>
+                      <a:headEnd type="none" w="med" len="med"/>
+                      <a:tailEnd type="none" w="med" len="med"/>
+                    </a:lnB>
+                  </a:tcPr>
+                </a:tc>
+              </a:tr>
+              <a:tr h="402336">
+                <a:tc>
+                  <a:txBody>
+                    <a:bodyPr/>
+                    <a:lstStyle/>
+                    <a:p>
+                      <a:pPr algn="ctr" indent="0" marL="0">
+                        <a:buNone/>
+                      </a:pPr>
+                      <a:r>
+                        <a:rPr lang="en-US" sz="1150" b="1" dirty="0">
+                          <a:solidFill>
+                            <a:srgbClr val="16252C"/>
+                          </a:solidFill>
+                          <a:latin typeface="微软雅黑" pitchFamily="34" charset="0"/>
+                          <a:ea typeface="微软雅黑" pitchFamily="34" charset="-122"/>
+                          <a:cs typeface="微软雅黑" pitchFamily="34" charset="-120"/>
+                        </a:rPr>
+                        <a:t>菌群独立增量</a:t>
+                      </a:r>
+                      <a:endParaRPr lang="en-US" sz="1150" dirty="0">
+                        <a:latin typeface="微软雅黑" charset="0"/>
+                        <a:ea typeface="微软雅黑" charset="0"/>
+                        <a:cs typeface="微软雅黑" charset="0"/>
+                      </a:endParaRPr>
+                    </a:p>
+                  </a:txBody>
+                  <a:tcPr marL="91440" marR="91440" marT="45720" marB="45720" anchor="ctr">
+                    <a:lnL w="6350" cap="flat" cmpd="sng" algn="ctr">
+                      <a:solidFill>
+                        <a:srgbClr val="DDE5E8"/>
+                      </a:solidFill>
+                      <a:prstDash val="solid"/>
+                      <a:round/>
+                      <a:headEnd type="none" w="med" len="med"/>
+                      <a:tailEnd type="none" w="med" len="med"/>
+                    </a:lnL>
+                    <a:lnR w="6350" cap="flat" cmpd="sng" algn="ctr">
+                      <a:solidFill>
+                        <a:srgbClr val="DDE5E8"/>
+                      </a:solidFill>
+                      <a:prstDash val="solid"/>
+                      <a:round/>
+                      <a:headEnd type="none" w="med" len="med"/>
+                      <a:tailEnd type="none" w="med" len="med"/>
+                    </a:lnR>
+                    <a:lnT w="6350" cap="flat" cmpd="sng" algn="ctr">
+                      <a:solidFill>
+                        <a:srgbClr val="DDE5E8"/>
+                      </a:solidFill>
+                      <a:prstDash val="solid"/>
+                      <a:round/>
+                      <a:headEnd type="none" w="med" len="med"/>
+                      <a:tailEnd type="none" w="med" len="med"/>
+                    </a:lnT>
+                    <a:lnB w="6350" cap="flat" cmpd="sng" algn="ctr">
+                      <a:solidFill>
+                        <a:srgbClr val="DDE5E8"/>
+                      </a:solidFill>
+                      <a:prstDash val="solid"/>
+                      <a:round/>
+                      <a:headEnd type="none" w="med" len="med"/>
+                      <a:tailEnd type="none" w="med" len="med"/>
+                    </a:lnB>
+                    <a:solidFill>
+                      <a:srgbClr val="E4F0F0"/>
+                    </a:solidFill>
+                  </a:tcPr>
+                </a:tc>
+                <a:tc>
+                  <a:txBody>
+                    <a:bodyPr/>
+                    <a:lstStyle/>
+                    <a:p>
+                      <a:pPr algn="ctr" indent="0" marL="0">
+                        <a:buNone/>
+                      </a:pPr>
+                      <a:r>
+                        <a:rPr lang="en-US" sz="1150" b="1" dirty="0">
+                          <a:solidFill>
+                            <a:srgbClr val="16252C"/>
+                          </a:solidFill>
+                          <a:latin typeface="微软雅黑" pitchFamily="34" charset="0"/>
+                          <a:ea typeface="微软雅黑" pitchFamily="34" charset="-122"/>
+                          <a:cs typeface="微软雅黑" pitchFamily="34" charset="-120"/>
+                        </a:rPr>
+                        <a:t>+0.043</a:t>
+                      </a:r>
+                      <a:endParaRPr lang="en-US" sz="1150" dirty="0">
+                        <a:latin typeface="微软雅黑" charset="0"/>
+                        <a:ea typeface="微软雅黑" charset="0"/>
+                        <a:cs typeface="微软雅黑" charset="0"/>
+                      </a:endParaRPr>
+                    </a:p>
+                  </a:txBody>
+                  <a:tcPr marL="91440" marR="91440" marT="45720" marB="45720" anchor="ctr">
+                    <a:lnL w="6350" cap="flat" cmpd="sng" algn="ctr">
+                      <a:solidFill>
+                        <a:srgbClr val="DDE5E8"/>
+                      </a:solidFill>
+                      <a:prstDash val="solid"/>
+                      <a:round/>
+                      <a:headEnd type="none" w="med" len="med"/>
+                      <a:tailEnd type="none" w="med" len="med"/>
+                    </a:lnL>
+                    <a:lnR w="6350" cap="flat" cmpd="sng" algn="ctr">
+                      <a:solidFill>
+                        <a:srgbClr val="DDE5E8"/>
+                      </a:solidFill>
+                      <a:prstDash val="solid"/>
+                      <a:round/>
+                      <a:headEnd type="none" w="med" len="med"/>
+                      <a:tailEnd type="none" w="med" len="med"/>
+                    </a:lnR>
+                    <a:lnT w="6350" cap="flat" cmpd="sng" algn="ctr">
+                      <a:solidFill>
+                        <a:srgbClr val="DDE5E8"/>
+                      </a:solidFill>
+                      <a:prstDash val="solid"/>
+                      <a:round/>
+                      <a:headEnd type="none" w="med" len="med"/>
+                      <a:tailEnd type="none" w="med" len="med"/>
+                    </a:lnT>
+                    <a:lnB w="6350" cap="flat" cmpd="sng" algn="ctr">
+                      <a:solidFill>
+                        <a:srgbClr val="DDE5E8"/>
+                      </a:solidFill>
+                      <a:prstDash val="solid"/>
+                      <a:round/>
+                      <a:headEnd type="none" w="med" len="med"/>
+                      <a:tailEnd type="none" w="med" len="med"/>
+                    </a:lnB>
+                    <a:solidFill>
+                      <a:srgbClr val="E4F0F0"/>
+                    </a:solidFill>
+                  </a:tcPr>
+                </a:tc>
+                <a:tc>
+                  <a:txBody>
+                    <a:bodyPr/>
+                    <a:lstStyle/>
+                    <a:p>
+                      <a:pPr algn="ctr" indent="0" marL="0">
+                        <a:buNone/>
+                      </a:pPr>
+                      <a:r>
+                        <a:rPr lang="en-US" sz="1150" b="1" dirty="0">
+                          <a:solidFill>
+                            <a:srgbClr val="16252C"/>
+                          </a:solidFill>
+                          <a:latin typeface="微软雅黑" pitchFamily="34" charset="0"/>
+                          <a:ea typeface="微软雅黑" pitchFamily="34" charset="-122"/>
+                          <a:cs typeface="微软雅黑" pitchFamily="34" charset="-120"/>
+                        </a:rPr>
+                        <a:t>+0.177</a:t>
+                      </a:r>
+                      <a:endParaRPr lang="en-US" sz="1150" dirty="0">
+                        <a:latin typeface="微软雅黑" charset="0"/>
+                        <a:ea typeface="微软雅黑" charset="0"/>
+                        <a:cs typeface="微软雅黑" charset="0"/>
+                      </a:endParaRPr>
+                    </a:p>
+                  </a:txBody>
+                  <a:tcPr marL="91440" marR="91440" marT="45720" marB="45720" anchor="ctr">
+                    <a:lnL w="6350" cap="flat" cmpd="sng" algn="ctr">
+                      <a:solidFill>
+                        <a:srgbClr val="DDE5E8"/>
+                      </a:solidFill>
+                      <a:prstDash val="solid"/>
+                      <a:round/>
+                      <a:headEnd type="none" w="med" len="med"/>
+                      <a:tailEnd type="none" w="med" len="med"/>
+                    </a:lnL>
+                    <a:lnR w="6350" cap="flat" cmpd="sng" algn="ctr">
+                      <a:solidFill>
+                        <a:srgbClr val="DDE5E8"/>
+                      </a:solidFill>
+                      <a:prstDash val="solid"/>
+                      <a:round/>
+                      <a:headEnd type="none" w="med" len="med"/>
+                      <a:tailEnd type="none" w="med" len="med"/>
+                    </a:lnR>
+                    <a:lnT w="6350" cap="flat" cmpd="sng" algn="ctr">
+                      <a:solidFill>
+                        <a:srgbClr val="DDE5E8"/>
+                      </a:solidFill>
+                      <a:prstDash val="solid"/>
+                      <a:round/>
+                      <a:headEnd type="none" w="med" len="med"/>
+                      <a:tailEnd type="none" w="med" len="med"/>
+                    </a:lnT>
+                    <a:lnB w="6350" cap="flat" cmpd="sng" algn="ctr">
+                      <a:solidFill>
+                        <a:srgbClr val="DDE5E8"/>
+                      </a:solidFill>
+                      <a:prstDash val="solid"/>
+                      <a:round/>
+                      <a:headEnd type="none" w="med" len="med"/>
+                      <a:tailEnd type="none" w="med" len="med"/>
+                    </a:lnB>
+                    <a:solidFill>
+                      <a:srgbClr val="E4F0F0"/>
+                    </a:solidFill>
+                  </a:tcPr>
+                </a:tc>
+                <a:tc>
+                  <a:txBody>
+                    <a:bodyPr/>
+                    <a:lstStyle/>
+                    <a:p>
+                      <a:pPr algn="ctr" indent="0" marL="0">
+                        <a:buNone/>
+                      </a:pPr>
+                      <a:r>
+                        <a:rPr lang="en-US" sz="1150" b="1" dirty="0">
+                          <a:solidFill>
+                            <a:srgbClr val="16252C"/>
+                          </a:solidFill>
+                          <a:latin typeface="微软雅黑" pitchFamily="34" charset="0"/>
+                          <a:ea typeface="微软雅黑" pitchFamily="34" charset="-122"/>
+                          <a:cs typeface="微软雅黑" pitchFamily="34" charset="-120"/>
+                        </a:rPr>
+                        <a:t>×4</a:t>
+                      </a:r>
+                      <a:endParaRPr lang="en-US" sz="1150" dirty="0">
+                        <a:latin typeface="微软雅黑" charset="0"/>
+                        <a:ea typeface="微软雅黑" charset="0"/>
+                        <a:cs typeface="微软雅黑" charset="0"/>
+                      </a:endParaRPr>
+                    </a:p>
+                  </a:txBody>
+                  <a:tcPr marL="91440" marR="91440" marT="45720" marB="45720" anchor="ctr">
+                    <a:lnL w="6350" cap="flat" cmpd="sng" algn="ctr">
+                      <a:solidFill>
+                        <a:srgbClr val="DDE5E8"/>
+                      </a:solidFill>
+                      <a:prstDash val="solid"/>
+                      <a:round/>
+                      <a:headEnd type="none" w="med" len="med"/>
+                      <a:tailEnd type="none" w="med" len="med"/>
+                    </a:lnL>
+                    <a:lnR w="6350" cap="flat" cmpd="sng" algn="ctr">
+                      <a:solidFill>
+                        <a:srgbClr val="DDE5E8"/>
+                      </a:solidFill>
+                      <a:prstDash val="solid"/>
+                      <a:round/>
+                      <a:headEnd type="none" w="med" len="med"/>
+                      <a:tailEnd type="none" w="med" len="med"/>
+                    </a:lnR>
+                    <a:lnT w="6350" cap="flat" cmpd="sng" algn="ctr">
+                      <a:solidFill>
+                        <a:srgbClr val="DDE5E8"/>
+                      </a:solidFill>
+                      <a:prstDash val="solid"/>
+                      <a:round/>
+                      <a:headEnd type="none" w="med" len="med"/>
+                      <a:tailEnd type="none" w="med" len="med"/>
+                    </a:lnT>
+                    <a:lnB w="6350" cap="flat" cmpd="sng" algn="ctr">
+                      <a:solidFill>
+                        <a:srgbClr val="DDE5E8"/>
+                      </a:solidFill>
+                      <a:prstDash val="solid"/>
+                      <a:round/>
+                      <a:headEnd type="none" w="med" len="med"/>
+                      <a:tailEnd type="none" w="med" len="med"/>
+                    </a:lnB>
+                    <a:solidFill>
+                      <a:srgbClr val="E4F0F0"/>
+                    </a:solidFill>
+                  </a:tcPr>
+                </a:tc>
+              </a:tr>
+            </a:tbl>
+          </a:graphicData>
+        </a:graphic>
+      </p:graphicFrame>
+      <p:sp>
+        <p:nvSpPr>
+          <p:cNvPr id="8" name="Shape 5"/>
+          <p:cNvSpPr/>
+          <p:nvPr/>
+        </p:nvSpPr>
+        <p:spPr>
+          <a:xfrm>
+            <a:off x="7132320" y="1828800"/>
+            <a:ext cx="4480560" cy="2011680"/>
+          </a:xfrm>
+          <a:prstGeom prst="rect">
+            <a:avLst/>
+          </a:prstGeom>
+          <a:solidFill>
+            <a:srgbClr val="FFFFFF"/>
+          </a:solidFill>
+          <a:ln/>
+          <a:effectLst>
+            <a:outerShdw sx="100000" sy="100000" kx="0" ky="0" algn="bl" rotWithShape="0" blurRad="101600" dist="25400" dir="8100000">
+              <a:srgbClr val="000000">
+                <a:alpha val="10000"/>
+              </a:srgbClr>
+            </a:outerShdw>
+          </a:effectLst>
+        </p:spPr>
+      </p:sp>
+      <p:sp>
+        <p:nvSpPr>
+          <p:cNvPr id="9" name="Shape 6"/>
+          <p:cNvSpPr/>
+          <p:nvPr/>
+        </p:nvSpPr>
+        <p:spPr>
+          <a:xfrm>
+            <a:off x="7132320" y="1828800"/>
+            <a:ext cx="68580" cy="2011680"/>
+          </a:xfrm>
+          <a:prstGeom prst="rect">
+            <a:avLst/>
+          </a:prstGeom>
+          <a:solidFill>
+            <a:srgbClr val="8FB996"/>
+          </a:solidFill>
+          <a:ln/>
+        </p:spPr>
+      </p:sp>
+      <p:sp>
+        <p:nvSpPr>
+          <p:cNvPr id="10" name="Text 7"/>
+          <p:cNvSpPr/>
+          <p:nvPr/>
+        </p:nvSpPr>
+        <p:spPr>
+          <a:xfrm>
+            <a:off x="7388352" y="1975104"/>
+            <a:ext cx="4023360" cy="329184"/>
+          </a:xfrm>
+          <a:prstGeom prst="rect">
+            <a:avLst/>
+          </a:prstGeom>
+          <a:noFill/>
+          <a:ln/>
+        </p:spPr>
+        <p:txBody>
+          <a:bodyPr wrap="square" lIns="0" tIns="0" rIns="0" bIns="0" rtlCol="0" anchor="t"/>
+          <a:lstStyle/>
+          <a:p>
+            <a:pPr indent="0" marL="0">
+              <a:buNone/>
+            </a:pPr>
+            <a:r>
+              <a:rPr lang="en-US" sz="1400" b="1" dirty="0">
+                <a:solidFill>
+                  <a:srgbClr val="16252C"/>
+                </a:solidFill>
+                <a:latin typeface="微软雅黑" pitchFamily="34" charset="0"/>
+                <a:ea typeface="微软雅黑" pitchFamily="34" charset="-122"/>
+                <a:cs typeface="微软雅黑" pitchFamily="34" charset="-120"/>
+              </a:rPr>
+              <a:t>去混杂确实成功了</a:t>
+            </a:r>
+            <a:endParaRPr lang="en-US" sz="1400" dirty="0"/>
+          </a:p>
+        </p:txBody>
+      </p:sp>
+      <p:sp>
+        <p:nvSpPr>
+          <p:cNvPr id="11" name="Text 8"/>
+          <p:cNvSpPr/>
+          <p:nvPr/>
+        </p:nvSpPr>
+        <p:spPr>
+          <a:xfrm>
+            <a:off x="7388352" y="2359152"/>
+            <a:ext cx="4023360" cy="1353312"/>
+          </a:xfrm>
+          <a:prstGeom prst="rect">
+            <a:avLst/>
+          </a:prstGeom>
+          <a:noFill/>
+          <a:ln/>
+        </p:spPr>
+        <p:txBody>
+          <a:bodyPr wrap="square" lIns="0" tIns="0" rIns="0" bIns="0" rtlCol="0" anchor="t"/>
+          <a:lstStyle/>
+          <a:p>
+            <a:pPr indent="0" marL="0">
+              <a:lnSpc>
+                <a:spcPct val="112000"/>
+              </a:lnSpc>
+              <a:buNone/>
+            </a:pPr>
+            <a:r>
+              <a:rPr lang="en-US" sz="1100" dirty="0">
+                <a:solidFill>
+                  <a:srgbClr val="5F7580"/>
+                </a:solidFill>
+                <a:latin typeface="微软雅黑" pitchFamily="34" charset="0"/>
+                <a:ea typeface="微软雅黑" pitchFamily="34" charset="-122"/>
+                <a:cs typeface="微软雅黑" pitchFamily="34" charset="-120"/>
+              </a:rPr>
+              <a:t>仅用月份一个变量预测标签：</a:t>
+            </a:r>
+            <a:endParaRPr lang="en-US" sz="1100" dirty="0"/>
+          </a:p>
+          <a:p>
+            <a:pPr indent="0" marL="0">
+              <a:lnSpc>
+                <a:spcPct val="112000"/>
+              </a:lnSpc>
+              <a:buNone/>
+            </a:pPr>
+            <a:endParaRPr lang="en-US" sz="1100" dirty="0"/>
+          </a:p>
+          <a:p>
+            <a:pPr indent="0" marL="0">
+              <a:lnSpc>
+                <a:spcPct val="112000"/>
+              </a:lnSpc>
+              <a:buNone/>
+            </a:pPr>
+            <a:r>
+              <a:rPr lang="en-US" sz="1100" dirty="0">
+                <a:solidFill>
+                  <a:srgbClr val="5F7580"/>
+                </a:solidFill>
+                <a:latin typeface="微软雅黑" pitchFamily="34" charset="0"/>
+                <a:ea typeface="微软雅黑" pitchFamily="34" charset="-122"/>
+                <a:cs typeface="微软雅黑" pitchFamily="34" charset="-120"/>
+              </a:rPr>
+              <a:t>   全队列   AUC 0.775</a:t>
+            </a:r>
+            <a:endParaRPr lang="en-US" sz="1100" dirty="0"/>
+          </a:p>
+          <a:p>
+            <a:pPr indent="0" marL="0">
+              <a:lnSpc>
+                <a:spcPct val="112000"/>
+              </a:lnSpc>
+              <a:buNone/>
+            </a:pPr>
+            <a:r>
+              <a:rPr lang="en-US" sz="1100" dirty="0">
+                <a:solidFill>
+                  <a:srgbClr val="5F7580"/>
+                </a:solidFill>
+                <a:latin typeface="微软雅黑" pitchFamily="34" charset="0"/>
+                <a:ea typeface="微软雅黑" pitchFamily="34" charset="-122"/>
+                <a:cs typeface="微软雅黑" pitchFamily="34" charset="-120"/>
+              </a:rPr>
+              <a:t>   子集     AUC 0.426</a:t>
+            </a:r>
+            <a:endParaRPr lang="en-US" sz="1100" dirty="0"/>
+          </a:p>
+          <a:p>
+            <a:pPr indent="0" marL="0">
+              <a:lnSpc>
+                <a:spcPct val="112000"/>
+              </a:lnSpc>
+              <a:buNone/>
+            </a:pPr>
+            <a:endParaRPr lang="en-US" sz="1100" dirty="0"/>
+          </a:p>
+          <a:p>
+            <a:pPr indent="0" marL="0">
+              <a:lnSpc>
+                <a:spcPct val="112000"/>
+              </a:lnSpc>
+              <a:buNone/>
+            </a:pPr>
+            <a:r>
+              <a:rPr lang="en-US" sz="1100" dirty="0">
+                <a:solidFill>
+                  <a:srgbClr val="5F7580"/>
+                </a:solidFill>
+                <a:latin typeface="微软雅黑" pitchFamily="34" charset="0"/>
+                <a:ea typeface="微软雅黑" pitchFamily="34" charset="-122"/>
+                <a:cs typeface="微软雅黑" pitchFamily="34" charset="-120"/>
+              </a:rPr>
+              <a:t>月份已被彻底中和。子集上的置换检验：p = 0.0099。</a:t>
+            </a:r>
+            <a:endParaRPr lang="en-US" sz="1100" dirty="0"/>
+          </a:p>
+        </p:txBody>
+      </p:sp>
+      <p:sp>
+        <p:nvSpPr>
+          <p:cNvPr id="12" name="Shape 9"/>
+          <p:cNvSpPr/>
+          <p:nvPr/>
+        </p:nvSpPr>
+        <p:spPr>
+          <a:xfrm>
+            <a:off x="548640" y="4069080"/>
+            <a:ext cx="5394960" cy="1783080"/>
+          </a:xfrm>
+          <a:prstGeom prst="rect">
+            <a:avLst/>
+          </a:prstGeom>
+          <a:solidFill>
+            <a:srgbClr val="FFFFFF"/>
+          </a:solidFill>
+          <a:ln/>
+          <a:effectLst>
+            <a:outerShdw sx="100000" sy="100000" kx="0" ky="0" algn="bl" rotWithShape="0" blurRad="101600" dist="25400" dir="8100000">
+              <a:srgbClr val="000000">
+                <a:alpha val="10000"/>
+              </a:srgbClr>
+            </a:outerShdw>
+          </a:effectLst>
+        </p:spPr>
+      </p:sp>
+      <p:sp>
+        <p:nvSpPr>
+          <p:cNvPr id="13" name="Shape 10"/>
+          <p:cNvSpPr/>
+          <p:nvPr/>
+        </p:nvSpPr>
+        <p:spPr>
+          <a:xfrm>
+            <a:off x="548640" y="4069080"/>
+            <a:ext cx="68580" cy="1783080"/>
+          </a:xfrm>
+          <a:prstGeom prst="rect">
+            <a:avLst/>
+          </a:prstGeom>
+          <a:solidFill>
+            <a:srgbClr val="18707F"/>
+          </a:solidFill>
+          <a:ln/>
+        </p:spPr>
+      </p:sp>
+      <p:sp>
+        <p:nvSpPr>
+          <p:cNvPr id="14" name="Text 11"/>
+          <p:cNvSpPr/>
+          <p:nvPr/>
+        </p:nvSpPr>
+        <p:spPr>
+          <a:xfrm>
+            <a:off x="804672" y="4215384"/>
+            <a:ext cx="4937760" cy="329184"/>
+          </a:xfrm>
+          <a:prstGeom prst="rect">
+            <a:avLst/>
+          </a:prstGeom>
+          <a:noFill/>
+          <a:ln/>
+        </p:spPr>
+        <p:txBody>
+          <a:bodyPr wrap="square" lIns="0" tIns="0" rIns="0" bIns="0" rtlCol="0" anchor="t"/>
+          <a:lstStyle/>
+          <a:p>
+            <a:pPr indent="0" marL="0">
+              <a:buNone/>
+            </a:pPr>
+            <a:r>
+              <a:rPr lang="en-US" sz="1400" b="1" dirty="0">
+                <a:solidFill>
+                  <a:srgbClr val="16252C"/>
+                </a:solidFill>
+                <a:latin typeface="微软雅黑" pitchFamily="34" charset="0"/>
+                <a:ea typeface="微软雅黑" pitchFamily="34" charset="-122"/>
+                <a:cs typeface="微软雅黑" pitchFamily="34" charset="-120"/>
+              </a:rPr>
+              <a:t>Biomarker 更显著了，而不是换了一批</a:t>
+            </a:r>
+            <a:endParaRPr lang="en-US" sz="1400" dirty="0"/>
+          </a:p>
+        </p:txBody>
+      </p:sp>
+      <p:sp>
+        <p:nvSpPr>
+          <p:cNvPr id="15" name="Text 12"/>
+          <p:cNvSpPr/>
+          <p:nvPr/>
+        </p:nvSpPr>
+        <p:spPr>
+          <a:xfrm>
+            <a:off x="804672" y="4599432"/>
+            <a:ext cx="4937760" cy="1124712"/>
+          </a:xfrm>
+          <a:prstGeom prst="rect">
+            <a:avLst/>
+          </a:prstGeom>
+          <a:noFill/>
+          <a:ln/>
+        </p:spPr>
+        <p:txBody>
+          <a:bodyPr wrap="square" lIns="0" tIns="0" rIns="0" bIns="0" rtlCol="0" anchor="t"/>
+          <a:lstStyle/>
+          <a:p>
+            <a:pPr indent="0" marL="0">
+              <a:lnSpc>
+                <a:spcPct val="112000"/>
+              </a:lnSpc>
+              <a:buNone/>
+            </a:pPr>
+            <a:r>
+              <a:rPr lang="en-US" sz="1100" dirty="0">
+                <a:solidFill>
+                  <a:srgbClr val="5F7580"/>
+                </a:solidFill>
+                <a:latin typeface="微软雅黑" pitchFamily="34" charset="0"/>
+                <a:ea typeface="微软雅黑" pitchFamily="34" charset="-122"/>
+                <a:cs typeface="微软雅黑" pitchFamily="34" charset="-120"/>
+              </a:rPr>
+              <a:t>显著菌数 19/70 → 34/65；t 统计量 Spearman ρ = 0.879；两边同时显著 18 个。</a:t>
+            </a:r>
+            <a:endParaRPr lang="en-US" sz="1100" dirty="0"/>
+          </a:p>
+          <a:p>
+            <a:pPr indent="0" marL="0">
+              <a:lnSpc>
+                <a:spcPct val="112000"/>
+              </a:lnSpc>
+              <a:buNone/>
+            </a:pPr>
+            <a:endParaRPr lang="en-US" sz="1100" dirty="0"/>
+          </a:p>
+          <a:p>
+            <a:pPr indent="0" marL="0">
+              <a:lnSpc>
+                <a:spcPct val="112000"/>
+              </a:lnSpc>
+              <a:buNone/>
+            </a:pPr>
+            <a:r>
+              <a:rPr lang="en-US" sz="1100" dirty="0">
+                <a:solidFill>
+                  <a:srgbClr val="5F7580"/>
+                </a:solidFill>
+                <a:latin typeface="微软雅黑" pitchFamily="34" charset="0"/>
+                <a:ea typeface="微软雅黑" pitchFamily="34" charset="-122"/>
+                <a:cs typeface="微软雅黑" pitchFamily="34" charset="-120"/>
+              </a:rPr>
+              <a:t>Veillonella（FDR 3.7e-29）与 Prevotella——此前因共线性被挤出九菌面板的那两个——现在成为最强信号。</a:t>
+            </a:r>
+            <a:endParaRPr lang="en-US" sz="1100" dirty="0"/>
+          </a:p>
+        </p:txBody>
+      </p:sp>
+      <p:sp>
+        <p:nvSpPr>
+          <p:cNvPr id="16" name="Shape 13"/>
+          <p:cNvSpPr/>
+          <p:nvPr/>
+        </p:nvSpPr>
+        <p:spPr>
+          <a:xfrm>
+            <a:off x="6217920" y="4069080"/>
+            <a:ext cx="5394960" cy="1783080"/>
+          </a:xfrm>
+          <a:prstGeom prst="rect">
+            <a:avLst/>
+          </a:prstGeom>
+          <a:solidFill>
+            <a:srgbClr val="FBEDE7"/>
+          </a:solidFill>
+          <a:ln/>
+          <a:effectLst>
+            <a:outerShdw sx="100000" sy="100000" kx="0" ky="0" algn="bl" rotWithShape="0" blurRad="101600" dist="25400" dir="8100000">
+              <a:srgbClr val="000000">
+                <a:alpha val="10000"/>
+              </a:srgbClr>
+            </a:outerShdw>
+          </a:effectLst>
+        </p:spPr>
+      </p:sp>
+      <p:sp>
+        <p:nvSpPr>
+          <p:cNvPr id="17" name="Shape 14"/>
+          <p:cNvSpPr/>
+          <p:nvPr/>
+        </p:nvSpPr>
+        <p:spPr>
+          <a:xfrm>
+            <a:off x="6217920" y="4069080"/>
+            <a:ext cx="68580" cy="1783080"/>
+          </a:xfrm>
+          <a:prstGeom prst="rect">
+            <a:avLst/>
+          </a:prstGeom>
+          <a:solidFill>
+            <a:srgbClr val="D2603A"/>
+          </a:solidFill>
+          <a:ln/>
+        </p:spPr>
+      </p:sp>
+      <p:sp>
+        <p:nvSpPr>
+          <p:cNvPr id="18" name="Text 15"/>
+          <p:cNvSpPr/>
+          <p:nvPr/>
+        </p:nvSpPr>
+        <p:spPr>
+          <a:xfrm>
+            <a:off x="6473952" y="4215384"/>
+            <a:ext cx="4937760" cy="329184"/>
+          </a:xfrm>
+          <a:prstGeom prst="rect">
+            <a:avLst/>
+          </a:prstGeom>
+          <a:noFill/>
+          <a:ln/>
+        </p:spPr>
+        <p:txBody>
+          <a:bodyPr wrap="square" lIns="0" tIns="0" rIns="0" bIns="0" rtlCol="0" anchor="t"/>
+          <a:lstStyle/>
+          <a:p>
+            <a:pPr indent="0" marL="0">
+              <a:buNone/>
+            </a:pPr>
+            <a:r>
+              <a:rPr lang="en-US" sz="1400" b="1" dirty="0">
+                <a:solidFill>
+                  <a:srgbClr val="16252C"/>
+                </a:solidFill>
+                <a:latin typeface="微软雅黑" pitchFamily="34" charset="0"/>
+                <a:ea typeface="微软雅黑" pitchFamily="34" charset="-122"/>
+                <a:cs typeface="微软雅黑" pitchFamily="34" charset="-120"/>
+              </a:rPr>
+              <a:t>但这是敏感性分析，不是结果本身</a:t>
+            </a:r>
+            <a:endParaRPr lang="en-US" sz="1400" dirty="0"/>
+          </a:p>
+        </p:txBody>
+      </p:sp>
+      <p:sp>
+        <p:nvSpPr>
+          <p:cNvPr id="19" name="Text 16"/>
+          <p:cNvSpPr/>
+          <p:nvPr/>
+        </p:nvSpPr>
+        <p:spPr>
+          <a:xfrm>
+            <a:off x="6473952" y="4599432"/>
+            <a:ext cx="4937760" cy="1124712"/>
+          </a:xfrm>
+          <a:prstGeom prst="rect">
+            <a:avLst/>
+          </a:prstGeom>
+          <a:noFill/>
+          <a:ln/>
+        </p:spPr>
+        <p:txBody>
+          <a:bodyPr wrap="square" lIns="0" tIns="0" rIns="0" bIns="0" rtlCol="0" anchor="t"/>
+          <a:lstStyle/>
+          <a:p>
+            <a:pPr indent="0" marL="0">
+              <a:lnSpc>
+                <a:spcPct val="112000"/>
+              </a:lnSpc>
+              <a:buNone/>
+            </a:pPr>
+            <a:r>
+              <a:rPr lang="en-US" sz="1100" dirty="0">
+                <a:solidFill>
+                  <a:srgbClr val="7A2E14"/>
+                </a:solidFill>
+                <a:latin typeface="微软雅黑" pitchFamily="34" charset="0"/>
+                <a:ea typeface="微软雅黑" pitchFamily="34" charset="-122"/>
+                <a:cs typeface="微软雅黑" pitchFamily="34" charset="-120"/>
+              </a:rPr>
+              <a:t>被排除的 95 个样本同时也是最难分的一批（Jan+Oct 分层 AUC 仅 0.668），因此两个 AUC 不可直接比较。</a:t>
+            </a:r>
+            <a:endParaRPr lang="en-US" sz="1100" dirty="0"/>
+          </a:p>
+          <a:p>
+            <a:pPr indent="0" marL="0">
+              <a:lnSpc>
+                <a:spcPct val="112000"/>
+              </a:lnSpc>
+              <a:buNone/>
+            </a:pPr>
+            <a:endParaRPr lang="en-US" sz="1100" dirty="0"/>
+          </a:p>
+          <a:p>
+            <a:pPr indent="0" marL="0">
+              <a:lnSpc>
+                <a:spcPct val="112000"/>
+              </a:lnSpc>
+              <a:buNone/>
+            </a:pPr>
+            <a:r>
+              <a:rPr lang="en-US" sz="1100" dirty="0">
+                <a:solidFill>
+                  <a:srgbClr val="7A2E14"/>
+                </a:solidFill>
+                <a:latin typeface="微软雅黑" pitchFamily="34" charset="0"/>
+                <a:ea typeface="微软雅黑" pitchFamily="34" charset="-122"/>
+                <a:cs typeface="微软雅黑" pitchFamily="34" charset="-120"/>
+              </a:rPr>
+              <a:t>而且空间混杂原封不动：地点 → 标签 AUC 0.740，菌群 → 地点 AUC 0.753。</a:t>
+            </a:r>
+            <a:endParaRPr lang="en-US" sz="1100" dirty="0"/>
+          </a:p>
+        </p:txBody>
+      </p:sp>
+      <p:sp>
+        <p:nvSpPr>
+          <p:cNvPr id="20" name="Text 17"/>
+          <p:cNvSpPr/>
+          <p:nvPr/>
+        </p:nvSpPr>
+        <p:spPr>
+          <a:xfrm>
+            <a:off x="548640" y="5943600"/>
+            <a:ext cx="10607040" cy="274320"/>
+          </a:xfrm>
+          <a:prstGeom prst="rect">
+            <a:avLst/>
+          </a:prstGeom>
+          <a:noFill/>
+          <a:ln/>
+        </p:spPr>
+        <p:txBody>
+          <a:bodyPr wrap="square" lIns="0" tIns="0" rIns="0" bIns="0" rtlCol="0" anchor="ctr"/>
+          <a:lstStyle/>
+          <a:p>
+            <a:pPr indent="0" marL="0">
+              <a:buNone/>
+            </a:pPr>
+            <a:r>
+              <a:rPr lang="en-US" sz="1050" i="1" dirty="0">
+                <a:solidFill>
+                  <a:srgbClr val="5F7580"/>
+                </a:solidFill>
+                <a:latin typeface="微软雅黑" pitchFamily="34" charset="0"/>
+                <a:ea typeface="微软雅黑" pitchFamily="34" charset="-122"/>
+                <a:cs typeface="微软雅黑" pitchFamily="34" charset="-120"/>
+              </a:rPr>
+              <a:t>请把它读作菌群独立信息量的一个区间：保守估计 +0.043，消除时间混杂后 +0.177。</a:t>
+            </a:r>
+            <a:endParaRPr lang="en-US" sz="1050" dirty="0"/>
+          </a:p>
+        </p:txBody>
+      </p:sp>
+    </p:spTree>
+  </p:cSld>
+  <p:clrMapOvr>
+    <a:masterClrMapping/>
+  </p:clrMapOvr>
+</p:sld>
+</file>
+
+<file path=ppt/slides/slide23.xml><?xml version="1.0" encoding="utf-8"?>
+<p:sld xmlns:a="http://schemas.openxmlformats.org/drawingml/2006/main" xmlns:r="http://schemas.openxmlformats.org/officeDocument/2006/relationships" xmlns:p="http://schemas.openxmlformats.org/presentationml/2006/main">
+  <p:cSld name="Slide 23">
+    <p:bg>
+      <p:bgPr>
+        <a:solidFill>
           <a:srgbClr val="0B3C49"/>
         </a:solidFill>
       </p:bgPr>
@@ -27362,9 +29584,9 @@
 </p:sld>
 </file>
 
-<file path=ppt/slides/slide23.xml><?xml version="1.0" encoding="utf-8"?>
+<file path=ppt/slides/slide24.xml><?xml version="1.0" encoding="utf-8"?>
 <p:sld xmlns:a="http://schemas.openxmlformats.org/drawingml/2006/main" xmlns:r="http://schemas.openxmlformats.org/officeDocument/2006/relationships" xmlns:p="http://schemas.openxmlformats.org/presentationml/2006/main">
-  <p:cSld name="Slide 23">
+  <p:cSld name="Slide 24">
     <p:bg>
       <p:bgPr>
         <a:solidFill>
@@ -27517,7 +29739,7 @@
                 <a:ea typeface="微软雅黑" pitchFamily="34" charset="-122"/>
                 <a:cs typeface="微软雅黑" pitchFamily="34" charset="-120"/>
               </a:rPr>
-              <a:t>23</a:t>
+              <a:t>24</a:t>
             </a:r>
             <a:endParaRPr lang="en-US" sz="1000" dirty="0"/>
           </a:p>
@@ -27564,7 +29786,7 @@
       </p:sp>
       <p:graphicFrame>
         <p:nvGraphicFramePr>
-          <p:cNvPr id="24" name="Table 0"/>
+          <p:cNvPr id="25" name="Table 0"/>
           <p:cNvGraphicFramePr>
             <a:graphicFrameLocks noGrp="1"/>
           </p:cNvGraphicFramePr>
@@ -31296,9 +33518,9 @@
 </p:sld>
 </file>
 
-<file path=ppt/slides/slide24.xml><?xml version="1.0" encoding="utf-8"?>
+<file path=ppt/slides/slide25.xml><?xml version="1.0" encoding="utf-8"?>
 <p:sld xmlns:a="http://schemas.openxmlformats.org/drawingml/2006/main" xmlns:r="http://schemas.openxmlformats.org/officeDocument/2006/relationships" xmlns:p="http://schemas.openxmlformats.org/presentationml/2006/main">
-  <p:cSld name="Slide 24">
+  <p:cSld name="Slide 25">
     <p:bg>
       <p:bgPr>
         <a:solidFill>
@@ -31451,7 +33673,7 @@
                 <a:ea typeface="微软雅黑" pitchFamily="34" charset="-122"/>
                 <a:cs typeface="微软雅黑" pitchFamily="34" charset="-120"/>
               </a:rPr>
-              <a:t>24</a:t>
+              <a:t>25</a:t>
             </a:r>
             <a:endParaRPr lang="en-US" sz="1000" dirty="0"/>
           </a:p>
@@ -32004,9 +34226,9 @@
 </p:sld>
 </file>
 
-<file path=ppt/slides/slide25.xml><?xml version="1.0" encoding="utf-8"?>
+<file path=ppt/slides/slide26.xml><?xml version="1.0" encoding="utf-8"?>
 <p:sld xmlns:a="http://schemas.openxmlformats.org/drawingml/2006/main" xmlns:r="http://schemas.openxmlformats.org/officeDocument/2006/relationships" xmlns:p="http://schemas.openxmlformats.org/presentationml/2006/main">
-  <p:cSld name="Slide 25">
+  <p:cSld name="Slide 26">
     <p:bg>
       <p:bgPr>
         <a:solidFill>
@@ -32159,7 +34381,7 @@
                 <a:ea typeface="微软雅黑" pitchFamily="34" charset="-122"/>
                 <a:cs typeface="微软雅黑" pitchFamily="34" charset="-120"/>
               </a:rPr>
-              <a:t>25</a:t>
+              <a:t>26</a:t>
             </a:r>
             <a:endParaRPr lang="en-US" sz="1000" dirty="0"/>
           </a:p>
@@ -32791,9 +35013,9 @@
 </p:sld>
 </file>
 
-<file path=ppt/slides/slide26.xml><?xml version="1.0" encoding="utf-8"?>
+<file path=ppt/slides/slide27.xml><?xml version="1.0" encoding="utf-8"?>
 <p:sld xmlns:a="http://schemas.openxmlformats.org/drawingml/2006/main" xmlns:r="http://schemas.openxmlformats.org/officeDocument/2006/relationships" xmlns:p="http://schemas.openxmlformats.org/presentationml/2006/main">
-  <p:cSld name="Slide 26">
+  <p:cSld name="Slide 27">
     <p:bg>
       <p:bgPr>
         <a:solidFill>
@@ -32907,7 +35129,7 @@
                 <a:ea typeface="微软雅黑" pitchFamily="34" charset="-122"/>
                 <a:cs typeface="微软雅黑" pitchFamily="34" charset="-120"/>
               </a:rPr>
-              <a:t>七项已知局限</a:t>
+              <a:t>八项已知局限</a:t>
             </a:r>
             <a:endParaRPr lang="en-US" sz="3000" dirty="0"/>
           </a:p>
@@ -32946,7 +35168,7 @@
                 <a:ea typeface="微软雅黑" pitchFamily="34" charset="-122"/>
                 <a:cs typeface="微软雅黑" pitchFamily="34" charset="-120"/>
               </a:rPr>
-              <a:t>26</a:t>
+              <a:t>27</a:t>
             </a:r>
             <a:endParaRPr lang="en-US" sz="1000" dirty="0"/>
           </a:p>
@@ -33850,14 +36072,142 @@
       </p:sp>
       <p:sp>
         <p:nvSpPr>
-          <p:cNvPr id="34" name="Text 32"/>
-          <p:cNvSpPr/>
-          <p:nvPr/>
-        </p:nvSpPr>
-        <p:spPr>
-          <a:xfrm>
-            <a:off x="6263640" y="5029200"/>
-            <a:ext cx="5303520" cy="914400"/>
+          <p:cNvPr id="34" name="Shape 32"/>
+          <p:cNvSpPr/>
+          <p:nvPr/>
+        </p:nvSpPr>
+        <p:spPr>
+          <a:xfrm>
+            <a:off x="6263640" y="5020056"/>
+            <a:ext cx="5394960" cy="1078992"/>
+          </a:xfrm>
+          <a:prstGeom prst="rect">
+            <a:avLst/>
+          </a:prstGeom>
+          <a:solidFill>
+            <a:srgbClr val="FBEDE7"/>
+          </a:solidFill>
+          <a:ln/>
+          <a:effectLst>
+            <a:outerShdw sx="100000" sy="100000" kx="0" ky="0" algn="bl" rotWithShape="0" blurRad="101600" dist="25400" dir="8100000">
+              <a:srgbClr val="000000">
+                <a:alpha val="10000"/>
+              </a:srgbClr>
+            </a:outerShdw>
+          </a:effectLst>
+        </p:spPr>
+      </p:sp>
+      <p:sp>
+        <p:nvSpPr>
+          <p:cNvPr id="35" name="Shape 33"/>
+          <p:cNvSpPr/>
+          <p:nvPr/>
+        </p:nvSpPr>
+        <p:spPr>
+          <a:xfrm>
+            <a:off x="6263640" y="5020056"/>
+            <a:ext cx="68580" cy="1078992"/>
+          </a:xfrm>
+          <a:prstGeom prst="rect">
+            <a:avLst/>
+          </a:prstGeom>
+          <a:solidFill>
+            <a:srgbClr val="D2603A"/>
+          </a:solidFill>
+          <a:ln/>
+        </p:spPr>
+      </p:sp>
+      <p:sp>
+        <p:nvSpPr>
+          <p:cNvPr id="36" name="Text 34"/>
+          <p:cNvSpPr/>
+          <p:nvPr/>
+        </p:nvSpPr>
+        <p:spPr>
+          <a:xfrm>
+            <a:off x="6519672" y="5166360"/>
+            <a:ext cx="4937760" cy="329184"/>
+          </a:xfrm>
+          <a:prstGeom prst="rect">
+            <a:avLst/>
+          </a:prstGeom>
+          <a:noFill/>
+          <a:ln/>
+        </p:spPr>
+        <p:txBody>
+          <a:bodyPr wrap="square" lIns="0" tIns="0" rIns="0" bIns="0" rtlCol="0" anchor="t"/>
+          <a:lstStyle/>
+          <a:p>
+            <a:pPr indent="0" marL="0">
+              <a:buNone/>
+            </a:pPr>
+            <a:r>
+              <a:rPr lang="en-US" sz="1250" b="1" dirty="0">
+                <a:solidFill>
+                  <a:srgbClr val="16252C"/>
+                </a:solidFill>
+                <a:latin typeface="微软雅黑" pitchFamily="34" charset="0"/>
+                <a:ea typeface="微软雅黑" pitchFamily="34" charset="-122"/>
+                <a:cs typeface="微软雅黑" pitchFamily="34" charset="-120"/>
+              </a:rPr>
+              <a:t>8.  空间混杂未解决</a:t>
+            </a:r>
+            <a:endParaRPr lang="en-US" sz="1250" dirty="0"/>
+          </a:p>
+        </p:txBody>
+      </p:sp>
+      <p:sp>
+        <p:nvSpPr>
+          <p:cNvPr id="37" name="Text 35"/>
+          <p:cNvSpPr/>
+          <p:nvPr/>
+        </p:nvSpPr>
+        <p:spPr>
+          <a:xfrm>
+            <a:off x="6519672" y="5550408"/>
+            <a:ext cx="4937760" cy="420624"/>
+          </a:xfrm>
+          <a:prstGeom prst="rect">
+            <a:avLst/>
+          </a:prstGeom>
+          <a:noFill/>
+          <a:ln/>
+        </p:spPr>
+        <p:txBody>
+          <a:bodyPr wrap="square" lIns="0" tIns="0" rIns="0" bIns="0" rtlCol="0" anchor="t"/>
+          <a:lstStyle/>
+          <a:p>
+            <a:pPr indent="0" marL="0">
+              <a:lnSpc>
+                <a:spcPct val="112000"/>
+              </a:lnSpc>
+              <a:buNone/>
+            </a:pPr>
+            <a:r>
+              <a:rPr lang="en-US" sz="1050" dirty="0">
+                <a:solidFill>
+                  <a:srgbClr val="7A2E14"/>
+                </a:solidFill>
+                <a:latin typeface="微软雅黑" pitchFamily="34" charset="0"/>
+                <a:ea typeface="微软雅黑" pitchFamily="34" charset="-122"/>
+                <a:cs typeface="微软雅黑" pitchFamily="34" charset="-120"/>
+              </a:rPr>
+              <a:t>即使删掉被混杂的月份：地点 → 标签 AUC 0.740，菌群 → 地点 0.753。按地点分层则样本量不足。</a:t>
+            </a:r>
+            <a:endParaRPr lang="en-US" sz="1050" dirty="0"/>
+          </a:p>
+        </p:txBody>
+      </p:sp>
+      <p:sp>
+        <p:nvSpPr>
+          <p:cNvPr id="38" name="Text 36"/>
+          <p:cNvSpPr/>
+          <p:nvPr/>
+        </p:nvSpPr>
+        <p:spPr>
+          <a:xfrm>
+            <a:off x="548640" y="6309360"/>
+            <a:ext cx="11064240" cy="274320"/>
           </a:xfrm>
           <a:prstGeom prst="rect">
             <a:avLst/>
@@ -33884,899 +36234,6 @@
               <a:t>与 README 中的表述完全一致——未因汇报场合而弱化。</a:t>
             </a:r>
             <a:endParaRPr lang="en-US" sz="1100" dirty="0"/>
-          </a:p>
-          <a:p>
-            <a:pPr indent="0" marL="0">
-              <a:buNone/>
-            </a:pPr>
-            <a:r>
-              <a:rPr lang="en-US" sz="1100" i="1" dirty="0">
-                <a:solidFill>
-                  <a:srgbClr val="5F7580"/>
-                </a:solidFill>
-                <a:latin typeface="微软雅黑" pitchFamily="34" charset="0"/>
-                <a:ea typeface="微软雅黑" pitchFamily="34" charset="-122"/>
-                <a:cs typeface="微软雅黑" pitchFamily="34" charset="-120"/>
-              </a:rPr>
-              <a:t>第 7 项正是 ExtraTrees 虽有最高 AUC 却未成为主模型的原因。</a:t>
-            </a:r>
-            <a:endParaRPr lang="en-US" sz="1100" dirty="0"/>
-          </a:p>
-        </p:txBody>
-      </p:sp>
-    </p:spTree>
-  </p:cSld>
-  <p:clrMapOvr>
-    <a:masterClrMapping/>
-  </p:clrMapOvr>
-</p:sld>
-</file>
-
-<file path=ppt/slides/slide27.xml><?xml version="1.0" encoding="utf-8"?>
-<p:sld xmlns:a="http://schemas.openxmlformats.org/drawingml/2006/main" xmlns:r="http://schemas.openxmlformats.org/officeDocument/2006/relationships" xmlns:p="http://schemas.openxmlformats.org/presentationml/2006/main">
-  <p:cSld name="Slide 27">
-    <p:bg>
-      <p:bgPr>
-        <a:solidFill>
-          <a:srgbClr val="FCFAF6"/>
-        </a:solidFill>
-      </p:bgPr>
-    </p:bg>
-    <p:spTree>
-      <p:nvGrpSpPr>
-        <p:cNvPr id="1" name=""/>
-        <p:cNvGrpSpPr/>
-        <p:nvPr/>
-      </p:nvGrpSpPr>
-      <p:grpSpPr>
-        <a:xfrm>
-          <a:off x="0" y="0"/>
-          <a:ext cx="0" cy="0"/>
-          <a:chOff x="0" y="0"/>
-          <a:chExt cx="0" cy="0"/>
-        </a:xfrm>
-      </p:grpSpPr>
-      <p:sp>
-        <p:nvSpPr>
-          <p:cNvPr id="2" name="Shape 0"/>
-          <p:cNvSpPr/>
-          <p:nvPr/>
-        </p:nvSpPr>
-        <p:spPr>
-          <a:xfrm>
-            <a:off x="0" y="0"/>
-            <a:ext cx="12191695" cy="54864"/>
-          </a:xfrm>
-          <a:prstGeom prst="rect">
-            <a:avLst/>
-          </a:prstGeom>
-          <a:solidFill>
-            <a:srgbClr val="18707F"/>
-          </a:solidFill>
-          <a:ln/>
-        </p:spPr>
-      </p:sp>
-      <p:sp>
-        <p:nvSpPr>
-          <p:cNvPr id="3" name="Text 1"/>
-          <p:cNvSpPr/>
-          <p:nvPr/>
-        </p:nvSpPr>
-        <p:spPr>
-          <a:xfrm>
-            <a:off x="548640" y="310896"/>
-            <a:ext cx="7315200" cy="256032"/>
-          </a:xfrm>
-          <a:prstGeom prst="rect">
-            <a:avLst/>
-          </a:prstGeom>
-          <a:noFill/>
-          <a:ln/>
-        </p:spPr>
-        <p:txBody>
-          <a:bodyPr wrap="square" lIns="0" tIns="0" rIns="0" bIns="0" rtlCol="0" anchor="ctr"/>
-          <a:lstStyle/>
-          <a:p>
-            <a:pPr indent="0" marL="0">
-              <a:buNone/>
-            </a:pPr>
-            <a:r>
-              <a:rPr lang="en-US" sz="1100" b="1" spc="200" kern="0" dirty="0">
-                <a:solidFill>
-                  <a:srgbClr val="18707F"/>
-                </a:solidFill>
-                <a:latin typeface="微软雅黑" pitchFamily="34" charset="0"/>
-                <a:ea typeface="微软雅黑" pitchFamily="34" charset="-122"/>
-                <a:cs typeface="微软雅黑" pitchFamily="34" charset="-120"/>
-              </a:rPr>
-              <a:t>总结</a:t>
-            </a:r>
-            <a:endParaRPr lang="en-US" sz="1100" dirty="0"/>
-          </a:p>
-        </p:txBody>
-      </p:sp>
-      <p:sp>
-        <p:nvSpPr>
-          <p:cNvPr id="4" name="Text 2"/>
-          <p:cNvSpPr/>
-          <p:nvPr/>
-        </p:nvSpPr>
-        <p:spPr>
-          <a:xfrm>
-            <a:off x="548640" y="566928"/>
-            <a:ext cx="11064240" cy="685800"/>
-          </a:xfrm>
-          <a:prstGeom prst="rect">
-            <a:avLst/>
-          </a:prstGeom>
-          <a:noFill/>
-          <a:ln/>
-        </p:spPr>
-        <p:txBody>
-          <a:bodyPr wrap="square" lIns="0" tIns="0" rIns="0" bIns="0" rtlCol="0" anchor="ctr"/>
-          <a:lstStyle/>
-          <a:p>
-            <a:pPr indent="0" marL="0">
-              <a:buNone/>
-            </a:pPr>
-            <a:r>
-              <a:rPr lang="en-US" sz="3000" b="1" dirty="0">
-                <a:solidFill>
-                  <a:srgbClr val="16252C"/>
-                </a:solidFill>
-                <a:latin typeface="微软雅黑" pitchFamily="34" charset="0"/>
-                <a:ea typeface="微软雅黑" pitchFamily="34" charset="-122"/>
-                <a:cs typeface="微软雅黑" pitchFamily="34" charset="-120"/>
-              </a:rPr>
-              <a:t>结论</a:t>
-            </a:r>
-            <a:endParaRPr lang="en-US" sz="3000" dirty="0"/>
-          </a:p>
-        </p:txBody>
-      </p:sp>
-      <p:sp>
-        <p:nvSpPr>
-          <p:cNvPr id="5" name="Text 3"/>
-          <p:cNvSpPr/>
-          <p:nvPr/>
-        </p:nvSpPr>
-        <p:spPr>
-          <a:xfrm>
-            <a:off x="11430000" y="6355080"/>
-            <a:ext cx="411480" cy="274320"/>
-          </a:xfrm>
-          <a:prstGeom prst="rect">
-            <a:avLst/>
-          </a:prstGeom>
-          <a:noFill/>
-          <a:ln/>
-        </p:spPr>
-        <p:txBody>
-          <a:bodyPr wrap="square" lIns="0" tIns="0" rIns="0" bIns="0" rtlCol="0" anchor="ctr"/>
-          <a:lstStyle/>
-          <a:p>
-            <a:pPr algn="r" indent="0" marL="0">
-              <a:buNone/>
-            </a:pPr>
-            <a:r>
-              <a:rPr lang="en-US" sz="1000" dirty="0">
-                <a:solidFill>
-                  <a:srgbClr val="5F7580"/>
-                </a:solidFill>
-                <a:latin typeface="微软雅黑" pitchFamily="34" charset="0"/>
-                <a:ea typeface="微软雅黑" pitchFamily="34" charset="-122"/>
-                <a:cs typeface="微软雅黑" pitchFamily="34" charset="-120"/>
-              </a:rPr>
-              <a:t>27</a:t>
-            </a:r>
-            <a:endParaRPr lang="en-US" sz="1000" dirty="0"/>
-          </a:p>
-        </p:txBody>
-      </p:sp>
-      <p:sp>
-        <p:nvSpPr>
-          <p:cNvPr id="6" name="Shape 4"/>
-          <p:cNvSpPr/>
-          <p:nvPr/>
-        </p:nvSpPr>
-        <p:spPr>
-          <a:xfrm>
-            <a:off x="548640" y="1289304"/>
-            <a:ext cx="457200" cy="457200"/>
-          </a:xfrm>
-          <a:prstGeom prst="ellipse">
-            <a:avLst/>
-          </a:prstGeom>
-          <a:solidFill>
-            <a:srgbClr val="18707F"/>
-          </a:solidFill>
-          <a:ln/>
-        </p:spPr>
-      </p:sp>
-      <p:sp>
-        <p:nvSpPr>
-          <p:cNvPr id="7" name="Text 5"/>
-          <p:cNvSpPr/>
-          <p:nvPr/>
-        </p:nvSpPr>
-        <p:spPr>
-          <a:xfrm>
-            <a:off x="548640" y="1362456"/>
-            <a:ext cx="457200" cy="310896"/>
-          </a:xfrm>
-          <a:prstGeom prst="rect">
-            <a:avLst/>
-          </a:prstGeom>
-          <a:noFill/>
-          <a:ln/>
-        </p:spPr>
-        <p:txBody>
-          <a:bodyPr wrap="square" lIns="0" tIns="0" rIns="0" bIns="0" rtlCol="0" anchor="ctr"/>
-          <a:lstStyle/>
-          <a:p>
-            <a:pPr algn="ctr" indent="0" marL="0">
-              <a:buNone/>
-            </a:pPr>
-            <a:r>
-              <a:rPr lang="en-US" sz="1400" b="1" dirty="0">
-                <a:solidFill>
-                  <a:srgbClr val="FFFFFF"/>
-                </a:solidFill>
-                <a:latin typeface="微软雅黑" pitchFamily="34" charset="0"/>
-                <a:ea typeface="微软雅黑" pitchFamily="34" charset="-122"/>
-                <a:cs typeface="微软雅黑" pitchFamily="34" charset="-120"/>
-              </a:rPr>
-              <a:t>1</a:t>
-            </a:r>
-            <a:endParaRPr lang="en-US" sz="1400" dirty="0"/>
-          </a:p>
-        </p:txBody>
-      </p:sp>
-      <p:sp>
-        <p:nvSpPr>
-          <p:cNvPr id="8" name="Text 6"/>
-          <p:cNvSpPr/>
-          <p:nvPr/>
-        </p:nvSpPr>
-        <p:spPr>
-          <a:xfrm>
-            <a:off x="1188720" y="1252728"/>
-            <a:ext cx="10424160" cy="566928"/>
-          </a:xfrm>
-          <a:prstGeom prst="rect">
-            <a:avLst/>
-          </a:prstGeom>
-          <a:noFill/>
-          <a:ln/>
-        </p:spPr>
-        <p:txBody>
-          <a:bodyPr wrap="square" lIns="0" tIns="0" rIns="0" bIns="0" rtlCol="0" anchor="t"/>
-          <a:lstStyle/>
-          <a:p>
-            <a:pPr indent="0" marL="0">
-              <a:lnSpc>
-                <a:spcPct val="108000"/>
-              </a:lnSpc>
-              <a:buNone/>
-            </a:pPr>
-            <a:r>
-              <a:rPr lang="en-US" sz="1250" dirty="0">
-                <a:solidFill>
-                  <a:srgbClr val="16252C"/>
-                </a:solidFill>
-                <a:latin typeface="微软雅黑" pitchFamily="34" charset="0"/>
-                <a:ea typeface="微软雅黑" pitchFamily="34" charset="-122"/>
-                <a:cs typeface="微软雅黑" pitchFamily="34" charset="-120"/>
-              </a:rPr>
-              <a:t>野鸭肠道菌群携带真实且可复现的流感感染信号（置换检验 p = 0.0099）。</a:t>
-            </a:r>
-            <a:endParaRPr lang="en-US" sz="1250" dirty="0"/>
-          </a:p>
-        </p:txBody>
-      </p:sp>
-      <p:sp>
-        <p:nvSpPr>
-          <p:cNvPr id="9" name="Shape 7"/>
-          <p:cNvSpPr/>
-          <p:nvPr/>
-        </p:nvSpPr>
-        <p:spPr>
-          <a:xfrm>
-            <a:off x="548640" y="2011680"/>
-            <a:ext cx="457200" cy="457200"/>
-          </a:xfrm>
-          <a:prstGeom prst="ellipse">
-            <a:avLst/>
-          </a:prstGeom>
-          <a:solidFill>
-            <a:srgbClr val="18707F"/>
-          </a:solidFill>
-          <a:ln/>
-        </p:spPr>
-      </p:sp>
-      <p:sp>
-        <p:nvSpPr>
-          <p:cNvPr id="10" name="Text 8"/>
-          <p:cNvSpPr/>
-          <p:nvPr/>
-        </p:nvSpPr>
-        <p:spPr>
-          <a:xfrm>
-            <a:off x="548640" y="2084832"/>
-            <a:ext cx="457200" cy="310896"/>
-          </a:xfrm>
-          <a:prstGeom prst="rect">
-            <a:avLst/>
-          </a:prstGeom>
-          <a:noFill/>
-          <a:ln/>
-        </p:spPr>
-        <p:txBody>
-          <a:bodyPr wrap="square" lIns="0" tIns="0" rIns="0" bIns="0" rtlCol="0" anchor="ctr"/>
-          <a:lstStyle/>
-          <a:p>
-            <a:pPr algn="ctr" indent="0" marL="0">
-              <a:buNone/>
-            </a:pPr>
-            <a:r>
-              <a:rPr lang="en-US" sz="1400" b="1" dirty="0">
-                <a:solidFill>
-                  <a:srgbClr val="FFFFFF"/>
-                </a:solidFill>
-                <a:latin typeface="微软雅黑" pitchFamily="34" charset="0"/>
-                <a:ea typeface="微软雅黑" pitchFamily="34" charset="-122"/>
-                <a:cs typeface="微软雅黑" pitchFamily="34" charset="-120"/>
-              </a:rPr>
-              <a:t>2</a:t>
-            </a:r>
-            <a:endParaRPr lang="en-US" sz="1400" dirty="0"/>
-          </a:p>
-        </p:txBody>
-      </p:sp>
-      <p:sp>
-        <p:nvSpPr>
-          <p:cNvPr id="11" name="Text 9"/>
-          <p:cNvSpPr/>
-          <p:nvPr/>
-        </p:nvSpPr>
-        <p:spPr>
-          <a:xfrm>
-            <a:off x="1188720" y="1975104"/>
-            <a:ext cx="10424160" cy="566928"/>
-          </a:xfrm>
-          <a:prstGeom prst="rect">
-            <a:avLst/>
-          </a:prstGeom>
-          <a:noFill/>
-          <a:ln/>
-        </p:spPr>
-        <p:txBody>
-          <a:bodyPr wrap="square" lIns="0" tIns="0" rIns="0" bIns="0" rtlCol="0" anchor="t"/>
-          <a:lstStyle/>
-          <a:p>
-            <a:pPr indent="0" marL="0">
-              <a:lnSpc>
-                <a:spcPct val="108000"/>
-              </a:lnSpc>
-              <a:buNone/>
-            </a:pPr>
-            <a:r>
-              <a:rPr lang="en-US" sz="1250" dirty="0">
-                <a:solidFill>
-                  <a:srgbClr val="16252C"/>
-                </a:solidFill>
-                <a:latin typeface="微软雅黑" pitchFamily="34" charset="0"/>
-                <a:ea typeface="微软雅黑" pitchFamily="34" charset="-122"/>
-                <a:cs typeface="微软雅黑" pitchFamily="34" charset="-120"/>
-              </a:rPr>
-              <a:t>SVM-RBF 是主模型——AUC 0.839、MCC 0.531——在 17 个模型的比较中显著优于随机森林（p = 0.021）、XGBoost（p = 0.0016）与 L1-LR（p &lt; 0.001）。</a:t>
-            </a:r>
-            <a:endParaRPr lang="en-US" sz="1250" dirty="0"/>
-          </a:p>
-        </p:txBody>
-      </p:sp>
-      <p:sp>
-        <p:nvSpPr>
-          <p:cNvPr id="12" name="Shape 10"/>
-          <p:cNvSpPr/>
-          <p:nvPr/>
-        </p:nvSpPr>
-        <p:spPr>
-          <a:xfrm>
-            <a:off x="548640" y="2734056"/>
-            <a:ext cx="457200" cy="457200"/>
-          </a:xfrm>
-          <a:prstGeom prst="ellipse">
-            <a:avLst/>
-          </a:prstGeom>
-          <a:solidFill>
-            <a:srgbClr val="18707F"/>
-          </a:solidFill>
-          <a:ln/>
-        </p:spPr>
-      </p:sp>
-      <p:sp>
-        <p:nvSpPr>
-          <p:cNvPr id="13" name="Text 11"/>
-          <p:cNvSpPr/>
-          <p:nvPr/>
-        </p:nvSpPr>
-        <p:spPr>
-          <a:xfrm>
-            <a:off x="548640" y="2807208"/>
-            <a:ext cx="457200" cy="310896"/>
-          </a:xfrm>
-          <a:prstGeom prst="rect">
-            <a:avLst/>
-          </a:prstGeom>
-          <a:noFill/>
-          <a:ln/>
-        </p:spPr>
-        <p:txBody>
-          <a:bodyPr wrap="square" lIns="0" tIns="0" rIns="0" bIns="0" rtlCol="0" anchor="ctr"/>
-          <a:lstStyle/>
-          <a:p>
-            <a:pPr algn="ctr" indent="0" marL="0">
-              <a:buNone/>
-            </a:pPr>
-            <a:r>
-              <a:rPr lang="en-US" sz="1400" b="1" dirty="0">
-                <a:solidFill>
-                  <a:srgbClr val="FFFFFF"/>
-                </a:solidFill>
-                <a:latin typeface="微软雅黑" pitchFamily="34" charset="0"/>
-                <a:ea typeface="微软雅黑" pitchFamily="34" charset="-122"/>
-                <a:cs typeface="微软雅黑" pitchFamily="34" charset="-120"/>
-              </a:rPr>
-              <a:t>3</a:t>
-            </a:r>
-            <a:endParaRPr lang="en-US" sz="1400" dirty="0"/>
-          </a:p>
-        </p:txBody>
-      </p:sp>
-      <p:sp>
-        <p:nvSpPr>
-          <p:cNvPr id="14" name="Text 12"/>
-          <p:cNvSpPr/>
-          <p:nvPr/>
-        </p:nvSpPr>
-        <p:spPr>
-          <a:xfrm>
-            <a:off x="1188720" y="2697480"/>
-            <a:ext cx="10424160" cy="566928"/>
-          </a:xfrm>
-          <a:prstGeom prst="rect">
-            <a:avLst/>
-          </a:prstGeom>
-          <a:noFill/>
-          <a:ln/>
-        </p:spPr>
-        <p:txBody>
-          <a:bodyPr wrap="square" lIns="0" tIns="0" rIns="0" bIns="0" rtlCol="0" anchor="t"/>
-          <a:lstStyle/>
-          <a:p>
-            <a:pPr indent="0" marL="0">
-              <a:lnSpc>
-                <a:spcPct val="108000"/>
-              </a:lnSpc>
-              <a:buNone/>
-            </a:pPr>
-            <a:r>
-              <a:rPr lang="en-US" sz="1250" dirty="0">
-                <a:solidFill>
-                  <a:srgbClr val="16252C"/>
-                </a:solidFill>
-                <a:latin typeface="微软雅黑" pitchFamily="34" charset="0"/>
-                <a:ea typeface="微软雅黑" pitchFamily="34" charset="-122"/>
-                <a:cs typeface="微软雅黑" pitchFamily="34" charset="-120"/>
-              </a:rPr>
-              <a:t>信号部分来自非线性：RBF 核比线性核多出 0.073 的 AUC，且若干菌只在组合中起作用。</a:t>
-            </a:r>
-            <a:endParaRPr lang="en-US" sz="1250" dirty="0"/>
-          </a:p>
-        </p:txBody>
-      </p:sp>
-      <p:sp>
-        <p:nvSpPr>
-          <p:cNvPr id="15" name="Shape 13"/>
-          <p:cNvSpPr/>
-          <p:nvPr/>
-        </p:nvSpPr>
-        <p:spPr>
-          <a:xfrm>
-            <a:off x="548640" y="3456432"/>
-            <a:ext cx="457200" cy="457200"/>
-          </a:xfrm>
-          <a:prstGeom prst="ellipse">
-            <a:avLst/>
-          </a:prstGeom>
-          <a:solidFill>
-            <a:srgbClr val="18707F"/>
-          </a:solidFill>
-          <a:ln/>
-        </p:spPr>
-      </p:sp>
-      <p:sp>
-        <p:nvSpPr>
-          <p:cNvPr id="16" name="Text 14"/>
-          <p:cNvSpPr/>
-          <p:nvPr/>
-        </p:nvSpPr>
-        <p:spPr>
-          <a:xfrm>
-            <a:off x="548640" y="3529584"/>
-            <a:ext cx="457200" cy="310896"/>
-          </a:xfrm>
-          <a:prstGeom prst="rect">
-            <a:avLst/>
-          </a:prstGeom>
-          <a:noFill/>
-          <a:ln/>
-        </p:spPr>
-        <p:txBody>
-          <a:bodyPr wrap="square" lIns="0" tIns="0" rIns="0" bIns="0" rtlCol="0" anchor="ctr"/>
-          <a:lstStyle/>
-          <a:p>
-            <a:pPr algn="ctr" indent="0" marL="0">
-              <a:buNone/>
-            </a:pPr>
-            <a:r>
-              <a:rPr lang="en-US" sz="1400" b="1" dirty="0">
-                <a:solidFill>
-                  <a:srgbClr val="FFFFFF"/>
-                </a:solidFill>
-                <a:latin typeface="微软雅黑" pitchFamily="34" charset="0"/>
-                <a:ea typeface="微软雅黑" pitchFamily="34" charset="-122"/>
-                <a:cs typeface="微软雅黑" pitchFamily="34" charset="-120"/>
-              </a:rPr>
-              <a:t>4</a:t>
-            </a:r>
-            <a:endParaRPr lang="en-US" sz="1400" dirty="0"/>
-          </a:p>
-        </p:txBody>
-      </p:sp>
-      <p:sp>
-        <p:nvSpPr>
-          <p:cNvPr id="17" name="Text 15"/>
-          <p:cNvSpPr/>
-          <p:nvPr/>
-        </p:nvSpPr>
-        <p:spPr>
-          <a:xfrm>
-            <a:off x="1188720" y="3419856"/>
-            <a:ext cx="10424160" cy="566928"/>
-          </a:xfrm>
-          <a:prstGeom prst="rect">
-            <a:avLst/>
-          </a:prstGeom>
-          <a:noFill/>
-          <a:ln/>
-        </p:spPr>
-        <p:txBody>
-          <a:bodyPr wrap="square" lIns="0" tIns="0" rIns="0" bIns="0" rtlCol="0" anchor="t"/>
-          <a:lstStyle/>
-          <a:p>
-            <a:pPr indent="0" marL="0">
-              <a:lnSpc>
-                <a:spcPct val="108000"/>
-              </a:lnSpc>
-              <a:buNone/>
-            </a:pPr>
-            <a:r>
-              <a:rPr lang="en-US" sz="1250" dirty="0">
-                <a:solidFill>
-                  <a:srgbClr val="16252C"/>
-                </a:solidFill>
-                <a:latin typeface="微软雅黑" pitchFamily="34" charset="0"/>
-                <a:ea typeface="微软雅黑" pitchFamily="34" charset="-122"/>
-                <a:cs typeface="微软雅黑" pitchFamily="34" charset="-120"/>
-              </a:rPr>
-              <a:t>九个菌通过了三套独立筛选方法的交叉验证；其中 Candidatus Arthromitus（SFB）有独立的免疫学证据支持。</a:t>
-            </a:r>
-            <a:endParaRPr lang="en-US" sz="1250" dirty="0"/>
-          </a:p>
-        </p:txBody>
-      </p:sp>
-      <p:sp>
-        <p:nvSpPr>
-          <p:cNvPr id="18" name="Shape 16"/>
-          <p:cNvSpPr/>
-          <p:nvPr/>
-        </p:nvSpPr>
-        <p:spPr>
-          <a:xfrm>
-            <a:off x="548640" y="4178808"/>
-            <a:ext cx="457200" cy="457200"/>
-          </a:xfrm>
-          <a:prstGeom prst="ellipse">
-            <a:avLst/>
-          </a:prstGeom>
-          <a:solidFill>
-            <a:srgbClr val="18707F"/>
-          </a:solidFill>
-          <a:ln/>
-        </p:spPr>
-      </p:sp>
-      <p:sp>
-        <p:nvSpPr>
-          <p:cNvPr id="19" name="Text 17"/>
-          <p:cNvSpPr/>
-          <p:nvPr/>
-        </p:nvSpPr>
-        <p:spPr>
-          <a:xfrm>
-            <a:off x="548640" y="4251960"/>
-            <a:ext cx="457200" cy="310896"/>
-          </a:xfrm>
-          <a:prstGeom prst="rect">
-            <a:avLst/>
-          </a:prstGeom>
-          <a:noFill/>
-          <a:ln/>
-        </p:spPr>
-        <p:txBody>
-          <a:bodyPr wrap="square" lIns="0" tIns="0" rIns="0" bIns="0" rtlCol="0" anchor="ctr"/>
-          <a:lstStyle/>
-          <a:p>
-            <a:pPr algn="ctr" indent="0" marL="0">
-              <a:buNone/>
-            </a:pPr>
-            <a:r>
-              <a:rPr lang="en-US" sz="1400" b="1" dirty="0">
-                <a:solidFill>
-                  <a:srgbClr val="FFFFFF"/>
-                </a:solidFill>
-                <a:latin typeface="微软雅黑" pitchFamily="34" charset="0"/>
-                <a:ea typeface="微软雅黑" pitchFamily="34" charset="-122"/>
-                <a:cs typeface="微软雅黑" pitchFamily="34" charset="-120"/>
-              </a:rPr>
-              <a:t>5</a:t>
-            </a:r>
-            <a:endParaRPr lang="en-US" sz="1400" dirty="0"/>
-          </a:p>
-        </p:txBody>
-      </p:sp>
-      <p:sp>
-        <p:nvSpPr>
-          <p:cNvPr id="20" name="Text 18"/>
-          <p:cNvSpPr/>
-          <p:nvPr/>
-        </p:nvSpPr>
-        <p:spPr>
-          <a:xfrm>
-            <a:off x="1188720" y="4142232"/>
-            <a:ext cx="10424160" cy="566928"/>
-          </a:xfrm>
-          <a:prstGeom prst="rect">
-            <a:avLst/>
-          </a:prstGeom>
-          <a:noFill/>
-          <a:ln/>
-        </p:spPr>
-        <p:txBody>
-          <a:bodyPr wrap="square" lIns="0" tIns="0" rIns="0" bIns="0" rtlCol="0" anchor="t"/>
-          <a:lstStyle/>
-          <a:p>
-            <a:pPr indent="0" marL="0">
-              <a:lnSpc>
-                <a:spcPct val="108000"/>
-              </a:lnSpc>
-              <a:buNone/>
-            </a:pPr>
-            <a:r>
-              <a:rPr lang="en-US" sz="1250" dirty="0">
-                <a:solidFill>
-                  <a:srgbClr val="16252C"/>
-                </a:solidFill>
-                <a:latin typeface="微软雅黑" pitchFamily="34" charset="0"/>
-                <a:ea typeface="微软雅黑" pitchFamily="34" charset="-122"/>
-                <a:cs typeface="微软雅黑" pitchFamily="34" charset="-120"/>
-              </a:rPr>
-              <a:t>采样季节是严重的混杂因子（仅协变量即达 AUC 0.881），但分层分析表明它无法解释掉全部信号。</a:t>
-            </a:r>
-            <a:endParaRPr lang="en-US" sz="1250" dirty="0"/>
-          </a:p>
-        </p:txBody>
-      </p:sp>
-      <p:sp>
-        <p:nvSpPr>
-          <p:cNvPr id="21" name="Shape 19"/>
-          <p:cNvSpPr/>
-          <p:nvPr/>
-        </p:nvSpPr>
-        <p:spPr>
-          <a:xfrm>
-            <a:off x="548640" y="4901184"/>
-            <a:ext cx="457200" cy="457200"/>
-          </a:xfrm>
-          <a:prstGeom prst="ellipse">
-            <a:avLst/>
-          </a:prstGeom>
-          <a:solidFill>
-            <a:srgbClr val="D2603A"/>
-          </a:solidFill>
-          <a:ln/>
-        </p:spPr>
-      </p:sp>
-      <p:sp>
-        <p:nvSpPr>
-          <p:cNvPr id="22" name="Text 20"/>
-          <p:cNvSpPr/>
-          <p:nvPr/>
-        </p:nvSpPr>
-        <p:spPr>
-          <a:xfrm>
-            <a:off x="548640" y="4974336"/>
-            <a:ext cx="457200" cy="310896"/>
-          </a:xfrm>
-          <a:prstGeom prst="rect">
-            <a:avLst/>
-          </a:prstGeom>
-          <a:noFill/>
-          <a:ln/>
-        </p:spPr>
-        <p:txBody>
-          <a:bodyPr wrap="square" lIns="0" tIns="0" rIns="0" bIns="0" rtlCol="0" anchor="ctr"/>
-          <a:lstStyle/>
-          <a:p>
-            <a:pPr algn="ctr" indent="0" marL="0">
-              <a:buNone/>
-            </a:pPr>
-            <a:r>
-              <a:rPr lang="en-US" sz="1400" b="1" dirty="0">
-                <a:solidFill>
-                  <a:srgbClr val="FFFFFF"/>
-                </a:solidFill>
-                <a:latin typeface="微软雅黑" pitchFamily="34" charset="0"/>
-                <a:ea typeface="微软雅黑" pitchFamily="34" charset="-122"/>
-                <a:cs typeface="微软雅黑" pitchFamily="34" charset="-120"/>
-              </a:rPr>
-              <a:t>6</a:t>
-            </a:r>
-            <a:endParaRPr lang="en-US" sz="1400" dirty="0"/>
-          </a:p>
-        </p:txBody>
-      </p:sp>
-      <p:sp>
-        <p:nvSpPr>
-          <p:cNvPr id="23" name="Text 21"/>
-          <p:cNvSpPr/>
-          <p:nvPr/>
-        </p:nvSpPr>
-        <p:spPr>
-          <a:xfrm>
-            <a:off x="1188720" y="4864608"/>
-            <a:ext cx="10424160" cy="566928"/>
-          </a:xfrm>
-          <a:prstGeom prst="rect">
-            <a:avLst/>
-          </a:prstGeom>
-          <a:noFill/>
-          <a:ln/>
-        </p:spPr>
-        <p:txBody>
-          <a:bodyPr wrap="square" lIns="0" tIns="0" rIns="0" bIns="0" rtlCol="0" anchor="t"/>
-          <a:lstStyle/>
-          <a:p>
-            <a:pPr indent="0" marL="0">
-              <a:lnSpc>
-                <a:spcPct val="108000"/>
-              </a:lnSpc>
-              <a:buNone/>
-            </a:pPr>
-            <a:r>
-              <a:rPr lang="en-US" sz="1250" dirty="0">
-                <a:solidFill>
-                  <a:srgbClr val="16252C"/>
-                </a:solidFill>
-                <a:latin typeface="微软雅黑" pitchFamily="34" charset="0"/>
-                <a:ea typeface="微软雅黑" pitchFamily="34" charset="-122"/>
-                <a:cs typeface="微软雅黑" pitchFamily="34" charset="-120"/>
-              </a:rPr>
-              <a:t>ExtraTrees 分数更高（AUC 0.859），但在最弱分层上更差（0.715 对 0.774）——其领先只来自本已容易的分层。</a:t>
-            </a:r>
-            <a:endParaRPr lang="en-US" sz="1250" dirty="0"/>
-          </a:p>
-        </p:txBody>
-      </p:sp>
-      <p:sp>
-        <p:nvSpPr>
-          <p:cNvPr id="24" name="Shape 22"/>
-          <p:cNvSpPr/>
-          <p:nvPr/>
-        </p:nvSpPr>
-        <p:spPr>
-          <a:xfrm>
-            <a:off x="548640" y="5623560"/>
-            <a:ext cx="457200" cy="457200"/>
-          </a:xfrm>
-          <a:prstGeom prst="ellipse">
-            <a:avLst/>
-          </a:prstGeom>
-          <a:solidFill>
-            <a:srgbClr val="D2603A"/>
-          </a:solidFill>
-          <a:ln/>
-        </p:spPr>
-      </p:sp>
-      <p:sp>
-        <p:nvSpPr>
-          <p:cNvPr id="25" name="Text 23"/>
-          <p:cNvSpPr/>
-          <p:nvPr/>
-        </p:nvSpPr>
-        <p:spPr>
-          <a:xfrm>
-            <a:off x="548640" y="5696712"/>
-            <a:ext cx="457200" cy="310896"/>
-          </a:xfrm>
-          <a:prstGeom prst="rect">
-            <a:avLst/>
-          </a:prstGeom>
-          <a:noFill/>
-          <a:ln/>
-        </p:spPr>
-        <p:txBody>
-          <a:bodyPr wrap="square" lIns="0" tIns="0" rIns="0" bIns="0" rtlCol="0" anchor="ctr"/>
-          <a:lstStyle/>
-          <a:p>
-            <a:pPr algn="ctr" indent="0" marL="0">
-              <a:buNone/>
-            </a:pPr>
-            <a:r>
-              <a:rPr lang="en-US" sz="1400" b="1" dirty="0">
-                <a:solidFill>
-                  <a:srgbClr val="FFFFFF"/>
-                </a:solidFill>
-                <a:latin typeface="微软雅黑" pitchFamily="34" charset="0"/>
-                <a:ea typeface="微软雅黑" pitchFamily="34" charset="-122"/>
-                <a:cs typeface="微软雅黑" pitchFamily="34" charset="-120"/>
-              </a:rPr>
-              <a:t>7</a:t>
-            </a:r>
-            <a:endParaRPr lang="en-US" sz="1400" dirty="0"/>
-          </a:p>
-        </p:txBody>
-      </p:sp>
-      <p:sp>
-        <p:nvSpPr>
-          <p:cNvPr id="26" name="Text 24"/>
-          <p:cNvSpPr/>
-          <p:nvPr/>
-        </p:nvSpPr>
-        <p:spPr>
-          <a:xfrm>
-            <a:off x="1188720" y="5586984"/>
-            <a:ext cx="10424160" cy="566928"/>
-          </a:xfrm>
-          <a:prstGeom prst="rect">
-            <a:avLst/>
-          </a:prstGeom>
-          <a:noFill/>
-          <a:ln/>
-        </p:spPr>
-        <p:txBody>
-          <a:bodyPr wrap="square" lIns="0" tIns="0" rIns="0" bIns="0" rtlCol="0" anchor="t"/>
-          <a:lstStyle/>
-          <a:p>
-            <a:pPr indent="0" marL="0">
-              <a:lnSpc>
-                <a:spcPct val="108000"/>
-              </a:lnSpc>
-              <a:buNone/>
-            </a:pPr>
-            <a:r>
-              <a:rPr lang="en-US" sz="1250" dirty="0">
-                <a:solidFill>
-                  <a:srgbClr val="16252C"/>
-                </a:solidFill>
-                <a:latin typeface="微软雅黑" pitchFamily="34" charset="0"/>
-                <a:ea typeface="微软雅黑" pitchFamily="34" charset="-122"/>
-                <a:cs typeface="微软雅黑" pitchFamily="34" charset="-120"/>
-              </a:rPr>
-              <a:t>结论仅适用于 UC Davis 野鸭队列，不可跨宿主或跨研究外推。</a:t>
-            </a:r>
-            <a:endParaRPr lang="en-US" sz="1250" dirty="0"/>
           </a:p>
         </p:txBody>
       </p:sp>
@@ -34865,6 +36322,882 @@
                 <a:ea typeface="微软雅黑" pitchFamily="34" charset="-122"/>
                 <a:cs typeface="微软雅黑" pitchFamily="34" charset="-120"/>
               </a:rPr>
+              <a:t>总结</a:t>
+            </a:r>
+            <a:endParaRPr lang="en-US" sz="1100" dirty="0"/>
+          </a:p>
+        </p:txBody>
+      </p:sp>
+      <p:sp>
+        <p:nvSpPr>
+          <p:cNvPr id="4" name="Text 2"/>
+          <p:cNvSpPr/>
+          <p:nvPr/>
+        </p:nvSpPr>
+        <p:spPr>
+          <a:xfrm>
+            <a:off x="548640" y="566928"/>
+            <a:ext cx="11064240" cy="685800"/>
+          </a:xfrm>
+          <a:prstGeom prst="rect">
+            <a:avLst/>
+          </a:prstGeom>
+          <a:noFill/>
+          <a:ln/>
+        </p:spPr>
+        <p:txBody>
+          <a:bodyPr wrap="square" lIns="0" tIns="0" rIns="0" bIns="0" rtlCol="0" anchor="ctr"/>
+          <a:lstStyle/>
+          <a:p>
+            <a:pPr indent="0" marL="0">
+              <a:buNone/>
+            </a:pPr>
+            <a:r>
+              <a:rPr lang="en-US" sz="3000" b="1" dirty="0">
+                <a:solidFill>
+                  <a:srgbClr val="16252C"/>
+                </a:solidFill>
+                <a:latin typeface="微软雅黑" pitchFamily="34" charset="0"/>
+                <a:ea typeface="微软雅黑" pitchFamily="34" charset="-122"/>
+                <a:cs typeface="微软雅黑" pitchFamily="34" charset="-120"/>
+              </a:rPr>
+              <a:t>结论</a:t>
+            </a:r>
+            <a:endParaRPr lang="en-US" sz="3000" dirty="0"/>
+          </a:p>
+        </p:txBody>
+      </p:sp>
+      <p:sp>
+        <p:nvSpPr>
+          <p:cNvPr id="5" name="Text 3"/>
+          <p:cNvSpPr/>
+          <p:nvPr/>
+        </p:nvSpPr>
+        <p:spPr>
+          <a:xfrm>
+            <a:off x="11430000" y="6355080"/>
+            <a:ext cx="411480" cy="274320"/>
+          </a:xfrm>
+          <a:prstGeom prst="rect">
+            <a:avLst/>
+          </a:prstGeom>
+          <a:noFill/>
+          <a:ln/>
+        </p:spPr>
+        <p:txBody>
+          <a:bodyPr wrap="square" lIns="0" tIns="0" rIns="0" bIns="0" rtlCol="0" anchor="ctr"/>
+          <a:lstStyle/>
+          <a:p>
+            <a:pPr algn="r" indent="0" marL="0">
+              <a:buNone/>
+            </a:pPr>
+            <a:r>
+              <a:rPr lang="en-US" sz="1000" dirty="0">
+                <a:solidFill>
+                  <a:srgbClr val="5F7580"/>
+                </a:solidFill>
+                <a:latin typeface="微软雅黑" pitchFamily="34" charset="0"/>
+                <a:ea typeface="微软雅黑" pitchFamily="34" charset="-122"/>
+                <a:cs typeface="微软雅黑" pitchFamily="34" charset="-120"/>
+              </a:rPr>
+              <a:t>28</a:t>
+            </a:r>
+            <a:endParaRPr lang="en-US" sz="1000" dirty="0"/>
+          </a:p>
+        </p:txBody>
+      </p:sp>
+      <p:sp>
+        <p:nvSpPr>
+          <p:cNvPr id="6" name="Shape 4"/>
+          <p:cNvSpPr/>
+          <p:nvPr/>
+        </p:nvSpPr>
+        <p:spPr>
+          <a:xfrm>
+            <a:off x="548640" y="1289304"/>
+            <a:ext cx="457200" cy="457200"/>
+          </a:xfrm>
+          <a:prstGeom prst="ellipse">
+            <a:avLst/>
+          </a:prstGeom>
+          <a:solidFill>
+            <a:srgbClr val="18707F"/>
+          </a:solidFill>
+          <a:ln/>
+        </p:spPr>
+      </p:sp>
+      <p:sp>
+        <p:nvSpPr>
+          <p:cNvPr id="7" name="Text 5"/>
+          <p:cNvSpPr/>
+          <p:nvPr/>
+        </p:nvSpPr>
+        <p:spPr>
+          <a:xfrm>
+            <a:off x="548640" y="1362456"/>
+            <a:ext cx="457200" cy="310896"/>
+          </a:xfrm>
+          <a:prstGeom prst="rect">
+            <a:avLst/>
+          </a:prstGeom>
+          <a:noFill/>
+          <a:ln/>
+        </p:spPr>
+        <p:txBody>
+          <a:bodyPr wrap="square" lIns="0" tIns="0" rIns="0" bIns="0" rtlCol="0" anchor="ctr"/>
+          <a:lstStyle/>
+          <a:p>
+            <a:pPr algn="ctr" indent="0" marL="0">
+              <a:buNone/>
+            </a:pPr>
+            <a:r>
+              <a:rPr lang="en-US" sz="1400" b="1" dirty="0">
+                <a:solidFill>
+                  <a:srgbClr val="FFFFFF"/>
+                </a:solidFill>
+                <a:latin typeface="微软雅黑" pitchFamily="34" charset="0"/>
+                <a:ea typeface="微软雅黑" pitchFamily="34" charset="-122"/>
+                <a:cs typeface="微软雅黑" pitchFamily="34" charset="-120"/>
+              </a:rPr>
+              <a:t>1</a:t>
+            </a:r>
+            <a:endParaRPr lang="en-US" sz="1400" dirty="0"/>
+          </a:p>
+        </p:txBody>
+      </p:sp>
+      <p:sp>
+        <p:nvSpPr>
+          <p:cNvPr id="8" name="Text 6"/>
+          <p:cNvSpPr/>
+          <p:nvPr/>
+        </p:nvSpPr>
+        <p:spPr>
+          <a:xfrm>
+            <a:off x="1188720" y="1252728"/>
+            <a:ext cx="10424160" cy="566928"/>
+          </a:xfrm>
+          <a:prstGeom prst="rect">
+            <a:avLst/>
+          </a:prstGeom>
+          <a:noFill/>
+          <a:ln/>
+        </p:spPr>
+        <p:txBody>
+          <a:bodyPr wrap="square" lIns="0" tIns="0" rIns="0" bIns="0" rtlCol="0" anchor="t"/>
+          <a:lstStyle/>
+          <a:p>
+            <a:pPr indent="0" marL="0">
+              <a:lnSpc>
+                <a:spcPct val="108000"/>
+              </a:lnSpc>
+              <a:buNone/>
+            </a:pPr>
+            <a:r>
+              <a:rPr lang="en-US" sz="1250" dirty="0">
+                <a:solidFill>
+                  <a:srgbClr val="16252C"/>
+                </a:solidFill>
+                <a:latin typeface="微软雅黑" pitchFamily="34" charset="0"/>
+                <a:ea typeface="微软雅黑" pitchFamily="34" charset="-122"/>
+                <a:cs typeface="微软雅黑" pitchFamily="34" charset="-120"/>
+              </a:rPr>
+              <a:t>野鸭肠道菌群携带真实且可复现的流感感染信号（置换检验 p = 0.0099）。</a:t>
+            </a:r>
+            <a:endParaRPr lang="en-US" sz="1250" dirty="0"/>
+          </a:p>
+        </p:txBody>
+      </p:sp>
+      <p:sp>
+        <p:nvSpPr>
+          <p:cNvPr id="9" name="Shape 7"/>
+          <p:cNvSpPr/>
+          <p:nvPr/>
+        </p:nvSpPr>
+        <p:spPr>
+          <a:xfrm>
+            <a:off x="548640" y="2011680"/>
+            <a:ext cx="457200" cy="457200"/>
+          </a:xfrm>
+          <a:prstGeom prst="ellipse">
+            <a:avLst/>
+          </a:prstGeom>
+          <a:solidFill>
+            <a:srgbClr val="18707F"/>
+          </a:solidFill>
+          <a:ln/>
+        </p:spPr>
+      </p:sp>
+      <p:sp>
+        <p:nvSpPr>
+          <p:cNvPr id="10" name="Text 8"/>
+          <p:cNvSpPr/>
+          <p:nvPr/>
+        </p:nvSpPr>
+        <p:spPr>
+          <a:xfrm>
+            <a:off x="548640" y="2084832"/>
+            <a:ext cx="457200" cy="310896"/>
+          </a:xfrm>
+          <a:prstGeom prst="rect">
+            <a:avLst/>
+          </a:prstGeom>
+          <a:noFill/>
+          <a:ln/>
+        </p:spPr>
+        <p:txBody>
+          <a:bodyPr wrap="square" lIns="0" tIns="0" rIns="0" bIns="0" rtlCol="0" anchor="ctr"/>
+          <a:lstStyle/>
+          <a:p>
+            <a:pPr algn="ctr" indent="0" marL="0">
+              <a:buNone/>
+            </a:pPr>
+            <a:r>
+              <a:rPr lang="en-US" sz="1400" b="1" dirty="0">
+                <a:solidFill>
+                  <a:srgbClr val="FFFFFF"/>
+                </a:solidFill>
+                <a:latin typeface="微软雅黑" pitchFamily="34" charset="0"/>
+                <a:ea typeface="微软雅黑" pitchFamily="34" charset="-122"/>
+                <a:cs typeface="微软雅黑" pitchFamily="34" charset="-120"/>
+              </a:rPr>
+              <a:t>2</a:t>
+            </a:r>
+            <a:endParaRPr lang="en-US" sz="1400" dirty="0"/>
+          </a:p>
+        </p:txBody>
+      </p:sp>
+      <p:sp>
+        <p:nvSpPr>
+          <p:cNvPr id="11" name="Text 9"/>
+          <p:cNvSpPr/>
+          <p:nvPr/>
+        </p:nvSpPr>
+        <p:spPr>
+          <a:xfrm>
+            <a:off x="1188720" y="1975104"/>
+            <a:ext cx="10424160" cy="566928"/>
+          </a:xfrm>
+          <a:prstGeom prst="rect">
+            <a:avLst/>
+          </a:prstGeom>
+          <a:noFill/>
+          <a:ln/>
+        </p:spPr>
+        <p:txBody>
+          <a:bodyPr wrap="square" lIns="0" tIns="0" rIns="0" bIns="0" rtlCol="0" anchor="t"/>
+          <a:lstStyle/>
+          <a:p>
+            <a:pPr indent="0" marL="0">
+              <a:lnSpc>
+                <a:spcPct val="108000"/>
+              </a:lnSpc>
+              <a:buNone/>
+            </a:pPr>
+            <a:r>
+              <a:rPr lang="en-US" sz="1250" dirty="0">
+                <a:solidFill>
+                  <a:srgbClr val="16252C"/>
+                </a:solidFill>
+                <a:latin typeface="微软雅黑" pitchFamily="34" charset="0"/>
+                <a:ea typeface="微软雅黑" pitchFamily="34" charset="-122"/>
+                <a:cs typeface="微软雅黑" pitchFamily="34" charset="-120"/>
+              </a:rPr>
+              <a:t>SVM-RBF 是主模型——AUC 0.839、MCC 0.531——在 17 个模型的比较中显著优于随机森林（p = 0.021）、XGBoost（p = 0.0016）与 L1-LR（p &lt; 0.001）。</a:t>
+            </a:r>
+            <a:endParaRPr lang="en-US" sz="1250" dirty="0"/>
+          </a:p>
+        </p:txBody>
+      </p:sp>
+      <p:sp>
+        <p:nvSpPr>
+          <p:cNvPr id="12" name="Shape 10"/>
+          <p:cNvSpPr/>
+          <p:nvPr/>
+        </p:nvSpPr>
+        <p:spPr>
+          <a:xfrm>
+            <a:off x="548640" y="2734056"/>
+            <a:ext cx="457200" cy="457200"/>
+          </a:xfrm>
+          <a:prstGeom prst="ellipse">
+            <a:avLst/>
+          </a:prstGeom>
+          <a:solidFill>
+            <a:srgbClr val="18707F"/>
+          </a:solidFill>
+          <a:ln/>
+        </p:spPr>
+      </p:sp>
+      <p:sp>
+        <p:nvSpPr>
+          <p:cNvPr id="13" name="Text 11"/>
+          <p:cNvSpPr/>
+          <p:nvPr/>
+        </p:nvSpPr>
+        <p:spPr>
+          <a:xfrm>
+            <a:off x="548640" y="2807208"/>
+            <a:ext cx="457200" cy="310896"/>
+          </a:xfrm>
+          <a:prstGeom prst="rect">
+            <a:avLst/>
+          </a:prstGeom>
+          <a:noFill/>
+          <a:ln/>
+        </p:spPr>
+        <p:txBody>
+          <a:bodyPr wrap="square" lIns="0" tIns="0" rIns="0" bIns="0" rtlCol="0" anchor="ctr"/>
+          <a:lstStyle/>
+          <a:p>
+            <a:pPr algn="ctr" indent="0" marL="0">
+              <a:buNone/>
+            </a:pPr>
+            <a:r>
+              <a:rPr lang="en-US" sz="1400" b="1" dirty="0">
+                <a:solidFill>
+                  <a:srgbClr val="FFFFFF"/>
+                </a:solidFill>
+                <a:latin typeface="微软雅黑" pitchFamily="34" charset="0"/>
+                <a:ea typeface="微软雅黑" pitchFamily="34" charset="-122"/>
+                <a:cs typeface="微软雅黑" pitchFamily="34" charset="-120"/>
+              </a:rPr>
+              <a:t>3</a:t>
+            </a:r>
+            <a:endParaRPr lang="en-US" sz="1400" dirty="0"/>
+          </a:p>
+        </p:txBody>
+      </p:sp>
+      <p:sp>
+        <p:nvSpPr>
+          <p:cNvPr id="14" name="Text 12"/>
+          <p:cNvSpPr/>
+          <p:nvPr/>
+        </p:nvSpPr>
+        <p:spPr>
+          <a:xfrm>
+            <a:off x="1188720" y="2697480"/>
+            <a:ext cx="10424160" cy="566928"/>
+          </a:xfrm>
+          <a:prstGeom prst="rect">
+            <a:avLst/>
+          </a:prstGeom>
+          <a:noFill/>
+          <a:ln/>
+        </p:spPr>
+        <p:txBody>
+          <a:bodyPr wrap="square" lIns="0" tIns="0" rIns="0" bIns="0" rtlCol="0" anchor="t"/>
+          <a:lstStyle/>
+          <a:p>
+            <a:pPr indent="0" marL="0">
+              <a:lnSpc>
+                <a:spcPct val="108000"/>
+              </a:lnSpc>
+              <a:buNone/>
+            </a:pPr>
+            <a:r>
+              <a:rPr lang="en-US" sz="1250" dirty="0">
+                <a:solidFill>
+                  <a:srgbClr val="16252C"/>
+                </a:solidFill>
+                <a:latin typeface="微软雅黑" pitchFamily="34" charset="0"/>
+                <a:ea typeface="微软雅黑" pitchFamily="34" charset="-122"/>
+                <a:cs typeface="微软雅黑" pitchFamily="34" charset="-120"/>
+              </a:rPr>
+              <a:t>信号部分来自非线性：RBF 核比线性核多出 0.073 的 AUC，且若干菌只在组合中起作用。</a:t>
+            </a:r>
+            <a:endParaRPr lang="en-US" sz="1250" dirty="0"/>
+          </a:p>
+        </p:txBody>
+      </p:sp>
+      <p:sp>
+        <p:nvSpPr>
+          <p:cNvPr id="15" name="Shape 13"/>
+          <p:cNvSpPr/>
+          <p:nvPr/>
+        </p:nvSpPr>
+        <p:spPr>
+          <a:xfrm>
+            <a:off x="548640" y="3456432"/>
+            <a:ext cx="457200" cy="457200"/>
+          </a:xfrm>
+          <a:prstGeom prst="ellipse">
+            <a:avLst/>
+          </a:prstGeom>
+          <a:solidFill>
+            <a:srgbClr val="18707F"/>
+          </a:solidFill>
+          <a:ln/>
+        </p:spPr>
+      </p:sp>
+      <p:sp>
+        <p:nvSpPr>
+          <p:cNvPr id="16" name="Text 14"/>
+          <p:cNvSpPr/>
+          <p:nvPr/>
+        </p:nvSpPr>
+        <p:spPr>
+          <a:xfrm>
+            <a:off x="548640" y="3529584"/>
+            <a:ext cx="457200" cy="310896"/>
+          </a:xfrm>
+          <a:prstGeom prst="rect">
+            <a:avLst/>
+          </a:prstGeom>
+          <a:noFill/>
+          <a:ln/>
+        </p:spPr>
+        <p:txBody>
+          <a:bodyPr wrap="square" lIns="0" tIns="0" rIns="0" bIns="0" rtlCol="0" anchor="ctr"/>
+          <a:lstStyle/>
+          <a:p>
+            <a:pPr algn="ctr" indent="0" marL="0">
+              <a:buNone/>
+            </a:pPr>
+            <a:r>
+              <a:rPr lang="en-US" sz="1400" b="1" dirty="0">
+                <a:solidFill>
+                  <a:srgbClr val="FFFFFF"/>
+                </a:solidFill>
+                <a:latin typeface="微软雅黑" pitchFamily="34" charset="0"/>
+                <a:ea typeface="微软雅黑" pitchFamily="34" charset="-122"/>
+                <a:cs typeface="微软雅黑" pitchFamily="34" charset="-120"/>
+              </a:rPr>
+              <a:t>4</a:t>
+            </a:r>
+            <a:endParaRPr lang="en-US" sz="1400" dirty="0"/>
+          </a:p>
+        </p:txBody>
+      </p:sp>
+      <p:sp>
+        <p:nvSpPr>
+          <p:cNvPr id="17" name="Text 15"/>
+          <p:cNvSpPr/>
+          <p:nvPr/>
+        </p:nvSpPr>
+        <p:spPr>
+          <a:xfrm>
+            <a:off x="1188720" y="3419856"/>
+            <a:ext cx="10424160" cy="566928"/>
+          </a:xfrm>
+          <a:prstGeom prst="rect">
+            <a:avLst/>
+          </a:prstGeom>
+          <a:noFill/>
+          <a:ln/>
+        </p:spPr>
+        <p:txBody>
+          <a:bodyPr wrap="square" lIns="0" tIns="0" rIns="0" bIns="0" rtlCol="0" anchor="t"/>
+          <a:lstStyle/>
+          <a:p>
+            <a:pPr indent="0" marL="0">
+              <a:lnSpc>
+                <a:spcPct val="108000"/>
+              </a:lnSpc>
+              <a:buNone/>
+            </a:pPr>
+            <a:r>
+              <a:rPr lang="en-US" sz="1250" dirty="0">
+                <a:solidFill>
+                  <a:srgbClr val="16252C"/>
+                </a:solidFill>
+                <a:latin typeface="微软雅黑" pitchFamily="34" charset="0"/>
+                <a:ea typeface="微软雅黑" pitchFamily="34" charset="-122"/>
+                <a:cs typeface="微软雅黑" pitchFamily="34" charset="-120"/>
+              </a:rPr>
+              <a:t>九个菌通过了三套独立筛选方法的交叉验证；其中 Candidatus Arthromitus（SFB）有独立的免疫学证据支持。</a:t>
+            </a:r>
+            <a:endParaRPr lang="en-US" sz="1250" dirty="0"/>
+          </a:p>
+        </p:txBody>
+      </p:sp>
+      <p:sp>
+        <p:nvSpPr>
+          <p:cNvPr id="18" name="Shape 16"/>
+          <p:cNvSpPr/>
+          <p:nvPr/>
+        </p:nvSpPr>
+        <p:spPr>
+          <a:xfrm>
+            <a:off x="548640" y="4178808"/>
+            <a:ext cx="457200" cy="457200"/>
+          </a:xfrm>
+          <a:prstGeom prst="ellipse">
+            <a:avLst/>
+          </a:prstGeom>
+          <a:solidFill>
+            <a:srgbClr val="18707F"/>
+          </a:solidFill>
+          <a:ln/>
+        </p:spPr>
+      </p:sp>
+      <p:sp>
+        <p:nvSpPr>
+          <p:cNvPr id="19" name="Text 17"/>
+          <p:cNvSpPr/>
+          <p:nvPr/>
+        </p:nvSpPr>
+        <p:spPr>
+          <a:xfrm>
+            <a:off x="548640" y="4251960"/>
+            <a:ext cx="457200" cy="310896"/>
+          </a:xfrm>
+          <a:prstGeom prst="rect">
+            <a:avLst/>
+          </a:prstGeom>
+          <a:noFill/>
+          <a:ln/>
+        </p:spPr>
+        <p:txBody>
+          <a:bodyPr wrap="square" lIns="0" tIns="0" rIns="0" bIns="0" rtlCol="0" anchor="ctr"/>
+          <a:lstStyle/>
+          <a:p>
+            <a:pPr algn="ctr" indent="0" marL="0">
+              <a:buNone/>
+            </a:pPr>
+            <a:r>
+              <a:rPr lang="en-US" sz="1400" b="1" dirty="0">
+                <a:solidFill>
+                  <a:srgbClr val="FFFFFF"/>
+                </a:solidFill>
+                <a:latin typeface="微软雅黑" pitchFamily="34" charset="0"/>
+                <a:ea typeface="微软雅黑" pitchFamily="34" charset="-122"/>
+                <a:cs typeface="微软雅黑" pitchFamily="34" charset="-120"/>
+              </a:rPr>
+              <a:t>5</a:t>
+            </a:r>
+            <a:endParaRPr lang="en-US" sz="1400" dirty="0"/>
+          </a:p>
+        </p:txBody>
+      </p:sp>
+      <p:sp>
+        <p:nvSpPr>
+          <p:cNvPr id="20" name="Text 18"/>
+          <p:cNvSpPr/>
+          <p:nvPr/>
+        </p:nvSpPr>
+        <p:spPr>
+          <a:xfrm>
+            <a:off x="1188720" y="4142232"/>
+            <a:ext cx="10424160" cy="566928"/>
+          </a:xfrm>
+          <a:prstGeom prst="rect">
+            <a:avLst/>
+          </a:prstGeom>
+          <a:noFill/>
+          <a:ln/>
+        </p:spPr>
+        <p:txBody>
+          <a:bodyPr wrap="square" lIns="0" tIns="0" rIns="0" bIns="0" rtlCol="0" anchor="t"/>
+          <a:lstStyle/>
+          <a:p>
+            <a:pPr indent="0" marL="0">
+              <a:lnSpc>
+                <a:spcPct val="108000"/>
+              </a:lnSpc>
+              <a:buNone/>
+            </a:pPr>
+            <a:r>
+              <a:rPr lang="en-US" sz="1250" dirty="0">
+                <a:solidFill>
+                  <a:srgbClr val="16252C"/>
+                </a:solidFill>
+                <a:latin typeface="微软雅黑" pitchFamily="34" charset="0"/>
+                <a:ea typeface="微软雅黑" pitchFamily="34" charset="-122"/>
+                <a:cs typeface="微软雅黑" pitchFamily="34" charset="-120"/>
+              </a:rPr>
+              <a:t>采样季节是严重的混杂因子（仅协变量即达 AUC 0.881）。分层与去混杂子集都仍留有信号：菌群的独立贡献落在 +0.043 到 +0.177 这个区间内。</a:t>
+            </a:r>
+            <a:endParaRPr lang="en-US" sz="1250" dirty="0"/>
+          </a:p>
+        </p:txBody>
+      </p:sp>
+      <p:sp>
+        <p:nvSpPr>
+          <p:cNvPr id="21" name="Shape 19"/>
+          <p:cNvSpPr/>
+          <p:nvPr/>
+        </p:nvSpPr>
+        <p:spPr>
+          <a:xfrm>
+            <a:off x="548640" y="4901184"/>
+            <a:ext cx="457200" cy="457200"/>
+          </a:xfrm>
+          <a:prstGeom prst="ellipse">
+            <a:avLst/>
+          </a:prstGeom>
+          <a:solidFill>
+            <a:srgbClr val="D2603A"/>
+          </a:solidFill>
+          <a:ln/>
+        </p:spPr>
+      </p:sp>
+      <p:sp>
+        <p:nvSpPr>
+          <p:cNvPr id="22" name="Text 20"/>
+          <p:cNvSpPr/>
+          <p:nvPr/>
+        </p:nvSpPr>
+        <p:spPr>
+          <a:xfrm>
+            <a:off x="548640" y="4974336"/>
+            <a:ext cx="457200" cy="310896"/>
+          </a:xfrm>
+          <a:prstGeom prst="rect">
+            <a:avLst/>
+          </a:prstGeom>
+          <a:noFill/>
+          <a:ln/>
+        </p:spPr>
+        <p:txBody>
+          <a:bodyPr wrap="square" lIns="0" tIns="0" rIns="0" bIns="0" rtlCol="0" anchor="ctr"/>
+          <a:lstStyle/>
+          <a:p>
+            <a:pPr algn="ctr" indent="0" marL="0">
+              <a:buNone/>
+            </a:pPr>
+            <a:r>
+              <a:rPr lang="en-US" sz="1400" b="1" dirty="0">
+                <a:solidFill>
+                  <a:srgbClr val="FFFFFF"/>
+                </a:solidFill>
+                <a:latin typeface="微软雅黑" pitchFamily="34" charset="0"/>
+                <a:ea typeface="微软雅黑" pitchFamily="34" charset="-122"/>
+                <a:cs typeface="微软雅黑" pitchFamily="34" charset="-120"/>
+              </a:rPr>
+              <a:t>6</a:t>
+            </a:r>
+            <a:endParaRPr lang="en-US" sz="1400" dirty="0"/>
+          </a:p>
+        </p:txBody>
+      </p:sp>
+      <p:sp>
+        <p:nvSpPr>
+          <p:cNvPr id="23" name="Text 21"/>
+          <p:cNvSpPr/>
+          <p:nvPr/>
+        </p:nvSpPr>
+        <p:spPr>
+          <a:xfrm>
+            <a:off x="1188720" y="4864608"/>
+            <a:ext cx="10424160" cy="566928"/>
+          </a:xfrm>
+          <a:prstGeom prst="rect">
+            <a:avLst/>
+          </a:prstGeom>
+          <a:noFill/>
+          <a:ln/>
+        </p:spPr>
+        <p:txBody>
+          <a:bodyPr wrap="square" lIns="0" tIns="0" rIns="0" bIns="0" rtlCol="0" anchor="t"/>
+          <a:lstStyle/>
+          <a:p>
+            <a:pPr indent="0" marL="0">
+              <a:lnSpc>
+                <a:spcPct val="108000"/>
+              </a:lnSpc>
+              <a:buNone/>
+            </a:pPr>
+            <a:r>
+              <a:rPr lang="en-US" sz="1250" dirty="0">
+                <a:solidFill>
+                  <a:srgbClr val="16252C"/>
+                </a:solidFill>
+                <a:latin typeface="微软雅黑" pitchFamily="34" charset="0"/>
+                <a:ea typeface="微软雅黑" pitchFamily="34" charset="-122"/>
+                <a:cs typeface="微软雅黑" pitchFamily="34" charset="-120"/>
+              </a:rPr>
+              <a:t>ExtraTrees 分数更高（AUC 0.859），但在最弱分层上更差（0.715 对 0.774）——其领先只来自本已容易的分层。</a:t>
+            </a:r>
+            <a:endParaRPr lang="en-US" sz="1250" dirty="0"/>
+          </a:p>
+        </p:txBody>
+      </p:sp>
+      <p:sp>
+        <p:nvSpPr>
+          <p:cNvPr id="24" name="Shape 22"/>
+          <p:cNvSpPr/>
+          <p:nvPr/>
+        </p:nvSpPr>
+        <p:spPr>
+          <a:xfrm>
+            <a:off x="548640" y="5623560"/>
+            <a:ext cx="457200" cy="457200"/>
+          </a:xfrm>
+          <a:prstGeom prst="ellipse">
+            <a:avLst/>
+          </a:prstGeom>
+          <a:solidFill>
+            <a:srgbClr val="D2603A"/>
+          </a:solidFill>
+          <a:ln/>
+        </p:spPr>
+      </p:sp>
+      <p:sp>
+        <p:nvSpPr>
+          <p:cNvPr id="25" name="Text 23"/>
+          <p:cNvSpPr/>
+          <p:nvPr/>
+        </p:nvSpPr>
+        <p:spPr>
+          <a:xfrm>
+            <a:off x="548640" y="5696712"/>
+            <a:ext cx="457200" cy="310896"/>
+          </a:xfrm>
+          <a:prstGeom prst="rect">
+            <a:avLst/>
+          </a:prstGeom>
+          <a:noFill/>
+          <a:ln/>
+        </p:spPr>
+        <p:txBody>
+          <a:bodyPr wrap="square" lIns="0" tIns="0" rIns="0" bIns="0" rtlCol="0" anchor="ctr"/>
+          <a:lstStyle/>
+          <a:p>
+            <a:pPr algn="ctr" indent="0" marL="0">
+              <a:buNone/>
+            </a:pPr>
+            <a:r>
+              <a:rPr lang="en-US" sz="1400" b="1" dirty="0">
+                <a:solidFill>
+                  <a:srgbClr val="FFFFFF"/>
+                </a:solidFill>
+                <a:latin typeface="微软雅黑" pitchFamily="34" charset="0"/>
+                <a:ea typeface="微软雅黑" pitchFamily="34" charset="-122"/>
+                <a:cs typeface="微软雅黑" pitchFamily="34" charset="-120"/>
+              </a:rPr>
+              <a:t>7</a:t>
+            </a:r>
+            <a:endParaRPr lang="en-US" sz="1400" dirty="0"/>
+          </a:p>
+        </p:txBody>
+      </p:sp>
+      <p:sp>
+        <p:nvSpPr>
+          <p:cNvPr id="26" name="Text 24"/>
+          <p:cNvSpPr/>
+          <p:nvPr/>
+        </p:nvSpPr>
+        <p:spPr>
+          <a:xfrm>
+            <a:off x="1188720" y="5586984"/>
+            <a:ext cx="10424160" cy="566928"/>
+          </a:xfrm>
+          <a:prstGeom prst="rect">
+            <a:avLst/>
+          </a:prstGeom>
+          <a:noFill/>
+          <a:ln/>
+        </p:spPr>
+        <p:txBody>
+          <a:bodyPr wrap="square" lIns="0" tIns="0" rIns="0" bIns="0" rtlCol="0" anchor="t"/>
+          <a:lstStyle/>
+          <a:p>
+            <a:pPr indent="0" marL="0">
+              <a:lnSpc>
+                <a:spcPct val="108000"/>
+              </a:lnSpc>
+              <a:buNone/>
+            </a:pPr>
+            <a:r>
+              <a:rPr lang="en-US" sz="1250" dirty="0">
+                <a:solidFill>
+                  <a:srgbClr val="16252C"/>
+                </a:solidFill>
+                <a:latin typeface="微软雅黑" pitchFamily="34" charset="0"/>
+                <a:ea typeface="微软雅黑" pitchFamily="34" charset="-122"/>
+                <a:cs typeface="微软雅黑" pitchFamily="34" charset="-120"/>
+              </a:rPr>
+              <a:t>结论仅适用于 UC Davis 野鸭队列，不可跨宿主或跨研究外推。</a:t>
+            </a:r>
+            <a:endParaRPr lang="en-US" sz="1250" dirty="0"/>
+          </a:p>
+        </p:txBody>
+      </p:sp>
+    </p:spTree>
+  </p:cSld>
+  <p:clrMapOvr>
+    <a:masterClrMapping/>
+  </p:clrMapOvr>
+</p:sld>
+</file>
+
+<file path=ppt/slides/slide29.xml><?xml version="1.0" encoding="utf-8"?>
+<p:sld xmlns:a="http://schemas.openxmlformats.org/drawingml/2006/main" xmlns:r="http://schemas.openxmlformats.org/officeDocument/2006/relationships" xmlns:p="http://schemas.openxmlformats.org/presentationml/2006/main">
+  <p:cSld name="Slide 29">
+    <p:bg>
+      <p:bgPr>
+        <a:solidFill>
+          <a:srgbClr val="FCFAF6"/>
+        </a:solidFill>
+      </p:bgPr>
+    </p:bg>
+    <p:spTree>
+      <p:nvGrpSpPr>
+        <p:cNvPr id="1" name=""/>
+        <p:cNvGrpSpPr/>
+        <p:nvPr/>
+      </p:nvGrpSpPr>
+      <p:grpSpPr>
+        <a:xfrm>
+          <a:off x="0" y="0"/>
+          <a:ext cx="0" cy="0"/>
+          <a:chOff x="0" y="0"/>
+          <a:chExt cx="0" cy="0"/>
+        </a:xfrm>
+      </p:grpSpPr>
+      <p:sp>
+        <p:nvSpPr>
+          <p:cNvPr id="2" name="Shape 0"/>
+          <p:cNvSpPr/>
+          <p:nvPr/>
+        </p:nvSpPr>
+        <p:spPr>
+          <a:xfrm>
+            <a:off x="0" y="0"/>
+            <a:ext cx="12191695" cy="54864"/>
+          </a:xfrm>
+          <a:prstGeom prst="rect">
+            <a:avLst/>
+          </a:prstGeom>
+          <a:solidFill>
+            <a:srgbClr val="18707F"/>
+          </a:solidFill>
+          <a:ln/>
+        </p:spPr>
+      </p:sp>
+      <p:sp>
+        <p:nvSpPr>
+          <p:cNvPr id="3" name="Text 1"/>
+          <p:cNvSpPr/>
+          <p:nvPr/>
+        </p:nvSpPr>
+        <p:spPr>
+          <a:xfrm>
+            <a:off x="548640" y="310896"/>
+            <a:ext cx="7315200" cy="256032"/>
+          </a:xfrm>
+          <a:prstGeom prst="rect">
+            <a:avLst/>
+          </a:prstGeom>
+          <a:noFill/>
+          <a:ln/>
+        </p:spPr>
+        <p:txBody>
+          <a:bodyPr wrap="square" lIns="0" tIns="0" rIns="0" bIns="0" rtlCol="0" anchor="ctr"/>
+          <a:lstStyle/>
+          <a:p>
+            <a:pPr indent="0" marL="0">
+              <a:buNone/>
+            </a:pPr>
+            <a:r>
+              <a:rPr lang="en-US" sz="1100" b="1" spc="200" kern="0" dirty="0">
+                <a:solidFill>
+                  <a:srgbClr val="18707F"/>
+                </a:solidFill>
+                <a:latin typeface="微软雅黑" pitchFamily="34" charset="0"/>
+                <a:ea typeface="微软雅黑" pitchFamily="34" charset="-122"/>
+                <a:cs typeface="微软雅黑" pitchFamily="34" charset="-120"/>
+              </a:rPr>
               <a:t>可复现性</a:t>
             </a:r>
             <a:endParaRPr lang="en-US" sz="1100" dirty="0"/>
@@ -34943,7 +37276,7 @@
                 <a:ea typeface="微软雅黑" pitchFamily="34" charset="-122"/>
                 <a:cs typeface="微软雅黑" pitchFamily="34" charset="-120"/>
               </a:rPr>
-              <a:t>28</a:t>
+              <a:t>29</a:t>
             </a:r>
             <a:endParaRPr lang="en-US" sz="1000" dirty="0"/>
           </a:p>
@@ -34951,7 +37284,7 @@
       </p:sp>
       <p:graphicFrame>
         <p:nvGraphicFramePr>
-          <p:cNvPr id="29" name="Table 0"/>
+          <p:cNvPr id="30" name="Table 0"/>
           <p:cNvGraphicFramePr>
             <a:graphicFrameLocks noGrp="1"/>
           </p:cNvGraphicFramePr>
@@ -35972,490 +38305,6 @@
 </p:sld>
 </file>
 
-<file path=ppt/slides/slide29.xml><?xml version="1.0" encoding="utf-8"?>
-<p:sld xmlns:a="http://schemas.openxmlformats.org/drawingml/2006/main" xmlns:r="http://schemas.openxmlformats.org/officeDocument/2006/relationships" xmlns:p="http://schemas.openxmlformats.org/presentationml/2006/main">
-  <p:cSld name="Slide 29">
-    <p:bg>
-      <p:bgPr>
-        <a:solidFill>
-          <a:srgbClr val="0B3C49"/>
-        </a:solidFill>
-      </p:bgPr>
-    </p:bg>
-    <p:spTree>
-      <p:nvGrpSpPr>
-        <p:cNvPr id="1" name=""/>
-        <p:cNvGrpSpPr/>
-        <p:nvPr/>
-      </p:nvGrpSpPr>
-      <p:grpSpPr>
-        <a:xfrm>
-          <a:off x="0" y="0"/>
-          <a:ext cx="0" cy="0"/>
-          <a:chOff x="0" y="0"/>
-          <a:chExt cx="0" cy="0"/>
-        </a:xfrm>
-      </p:grpSpPr>
-      <p:sp>
-        <p:nvSpPr>
-          <p:cNvPr id="2" name="Shape 0"/>
-          <p:cNvSpPr/>
-          <p:nvPr/>
-        </p:nvSpPr>
-        <p:spPr>
-          <a:xfrm>
-            <a:off x="0" y="0"/>
-            <a:ext cx="12191695" cy="292608"/>
-          </a:xfrm>
-          <a:prstGeom prst="rect">
-            <a:avLst/>
-          </a:prstGeom>
-          <a:solidFill>
-            <a:srgbClr val="8FB996"/>
-          </a:solidFill>
-          <a:ln/>
-        </p:spPr>
-      </p:sp>
-      <p:sp>
-        <p:nvSpPr>
-          <p:cNvPr id="3" name="Text 1"/>
-          <p:cNvSpPr/>
-          <p:nvPr/>
-        </p:nvSpPr>
-        <p:spPr>
-          <a:xfrm>
-            <a:off x="914400" y="1234440"/>
-            <a:ext cx="10332720" cy="731520"/>
-          </a:xfrm>
-          <a:prstGeom prst="rect">
-            <a:avLst/>
-          </a:prstGeom>
-          <a:noFill/>
-          <a:ln/>
-        </p:spPr>
-        <p:txBody>
-          <a:bodyPr wrap="square" lIns="0" tIns="0" rIns="0" bIns="0" rtlCol="0" anchor="ctr"/>
-          <a:lstStyle/>
-          <a:p>
-            <a:pPr indent="0" marL="0">
-              <a:buNone/>
-            </a:pPr>
-            <a:r>
-              <a:rPr lang="en-US" sz="4000" b="1" dirty="0">
-                <a:solidFill>
-                  <a:srgbClr val="FFFFFF"/>
-                </a:solidFill>
-                <a:latin typeface="微软雅黑" pitchFamily="34" charset="0"/>
-                <a:ea typeface="微软雅黑" pitchFamily="34" charset="-122"/>
-                <a:cs typeface="微软雅黑" pitchFamily="34" charset="-120"/>
-              </a:rPr>
-              <a:t>下一步工作</a:t>
-            </a:r>
-            <a:endParaRPr lang="en-US" sz="4000" dirty="0"/>
-          </a:p>
-        </p:txBody>
-      </p:sp>
-      <p:sp>
-        <p:nvSpPr>
-          <p:cNvPr id="4" name="Shape 2"/>
-          <p:cNvSpPr/>
-          <p:nvPr/>
-        </p:nvSpPr>
-        <p:spPr>
-          <a:xfrm>
-            <a:off x="914400" y="2331720"/>
-            <a:ext cx="10332720" cy="960120"/>
-          </a:xfrm>
-          <a:prstGeom prst="rect">
-            <a:avLst/>
-          </a:prstGeom>
-          <a:solidFill>
-            <a:srgbClr val="12505F"/>
-          </a:solidFill>
-          <a:ln/>
-        </p:spPr>
-      </p:sp>
-      <p:sp>
-        <p:nvSpPr>
-          <p:cNvPr id="5" name="Shape 3"/>
-          <p:cNvSpPr/>
-          <p:nvPr/>
-        </p:nvSpPr>
-        <p:spPr>
-          <a:xfrm>
-            <a:off x="914400" y="2331720"/>
-            <a:ext cx="68580" cy="960120"/>
-          </a:xfrm>
-          <a:prstGeom prst="rect">
-            <a:avLst/>
-          </a:prstGeom>
-          <a:solidFill>
-            <a:srgbClr val="8FB996"/>
-          </a:solidFill>
-          <a:ln/>
-        </p:spPr>
-      </p:sp>
-      <p:sp>
-        <p:nvSpPr>
-          <p:cNvPr id="6" name="Text 4"/>
-          <p:cNvSpPr/>
-          <p:nvPr/>
-        </p:nvSpPr>
-        <p:spPr>
-          <a:xfrm>
-            <a:off x="1234440" y="2459736"/>
-            <a:ext cx="9692640" cy="320040"/>
-          </a:xfrm>
-          <a:prstGeom prst="rect">
-            <a:avLst/>
-          </a:prstGeom>
-          <a:noFill/>
-          <a:ln/>
-        </p:spPr>
-        <p:txBody>
-          <a:bodyPr wrap="square" lIns="0" tIns="0" rIns="0" bIns="0" rtlCol="0" anchor="ctr"/>
-          <a:lstStyle/>
-          <a:p>
-            <a:pPr indent="0" marL="0">
-              <a:buNone/>
-            </a:pPr>
-            <a:r>
-              <a:rPr lang="en-US" sz="1600" b="1" dirty="0">
-                <a:solidFill>
-                  <a:srgbClr val="FFFFFF"/>
-                </a:solidFill>
-                <a:latin typeface="微软雅黑" pitchFamily="34" charset="0"/>
-                <a:ea typeface="微软雅黑" pitchFamily="34" charset="-122"/>
-                <a:cs typeface="微软雅黑" pitchFamily="34" charset="-120"/>
-              </a:rPr>
-              <a:t>确认上游过滤规则</a:t>
-            </a:r>
-            <a:endParaRPr lang="en-US" sz="1600" dirty="0"/>
-          </a:p>
-        </p:txBody>
-      </p:sp>
-      <p:sp>
-        <p:nvSpPr>
-          <p:cNvPr id="7" name="Text 5"/>
-          <p:cNvSpPr/>
-          <p:nvPr/>
-        </p:nvSpPr>
-        <p:spPr>
-          <a:xfrm>
-            <a:off x="1234440" y="2807208"/>
-            <a:ext cx="9692640" cy="365760"/>
-          </a:xfrm>
-          <a:prstGeom prst="rect">
-            <a:avLst/>
-          </a:prstGeom>
-          <a:noFill/>
-          <a:ln/>
-        </p:spPr>
-        <p:txBody>
-          <a:bodyPr wrap="square" lIns="0" tIns="0" rIns="0" bIns="0" rtlCol="0" anchor="ctr"/>
-          <a:lstStyle/>
-          <a:p>
-            <a:pPr indent="0" marL="0">
-              <a:buNone/>
-            </a:pPr>
-            <a:r>
-              <a:rPr lang="en-US" sz="1200" dirty="0">
-                <a:solidFill>
-                  <a:srgbClr val="8FB996"/>
-                </a:solidFill>
-                <a:latin typeface="微软雅黑" pitchFamily="34" charset="0"/>
-                <a:ea typeface="微软雅黑" pitchFamily="34" charset="-122"/>
-                <a:cs typeface="微软雅黑" pitchFamily="34" charset="-120"/>
-              </a:rPr>
-              <a:t>唯一可能推翻全部性能数字的因素。需要向数据提供方核实。</a:t>
-            </a:r>
-            <a:endParaRPr lang="en-US" sz="1200" dirty="0"/>
-          </a:p>
-        </p:txBody>
-      </p:sp>
-      <p:sp>
-        <p:nvSpPr>
-          <p:cNvPr id="8" name="Shape 6"/>
-          <p:cNvSpPr/>
-          <p:nvPr/>
-        </p:nvSpPr>
-        <p:spPr>
-          <a:xfrm>
-            <a:off x="914400" y="3474720"/>
-            <a:ext cx="10332720" cy="960120"/>
-          </a:xfrm>
-          <a:prstGeom prst="rect">
-            <a:avLst/>
-          </a:prstGeom>
-          <a:solidFill>
-            <a:srgbClr val="12505F"/>
-          </a:solidFill>
-          <a:ln/>
-        </p:spPr>
-      </p:sp>
-      <p:sp>
-        <p:nvSpPr>
-          <p:cNvPr id="9" name="Shape 7"/>
-          <p:cNvSpPr/>
-          <p:nvPr/>
-        </p:nvSpPr>
-        <p:spPr>
-          <a:xfrm>
-            <a:off x="914400" y="3474720"/>
-            <a:ext cx="68580" cy="960120"/>
-          </a:xfrm>
-          <a:prstGeom prst="rect">
-            <a:avLst/>
-          </a:prstGeom>
-          <a:solidFill>
-            <a:srgbClr val="8FB996"/>
-          </a:solidFill>
-          <a:ln/>
-        </p:spPr>
-      </p:sp>
-      <p:sp>
-        <p:nvSpPr>
-          <p:cNvPr id="10" name="Text 8"/>
-          <p:cNvSpPr/>
-          <p:nvPr/>
-        </p:nvSpPr>
-        <p:spPr>
-          <a:xfrm>
-            <a:off x="1234440" y="3602736"/>
-            <a:ext cx="9692640" cy="320040"/>
-          </a:xfrm>
-          <a:prstGeom prst="rect">
-            <a:avLst/>
-          </a:prstGeom>
-          <a:noFill/>
-          <a:ln/>
-        </p:spPr>
-        <p:txBody>
-          <a:bodyPr wrap="square" lIns="0" tIns="0" rIns="0" bIns="0" rtlCol="0" anchor="ctr"/>
-          <a:lstStyle/>
-          <a:p>
-            <a:pPr indent="0" marL="0">
-              <a:buNone/>
-            </a:pPr>
-            <a:r>
-              <a:rPr lang="en-US" sz="1600" b="1" dirty="0">
-                <a:solidFill>
-                  <a:srgbClr val="FFFFFF"/>
-                </a:solidFill>
-                <a:latin typeface="微软雅黑" pitchFamily="34" charset="0"/>
-                <a:ea typeface="微软雅黑" pitchFamily="34" charset="-122"/>
-                <a:cs typeface="微软雅黑" pitchFamily="34" charset="-120"/>
-              </a:rPr>
-              <a:t>把判决阈值纳入嵌套</a:t>
-            </a:r>
-            <a:endParaRPr lang="en-US" sz="1600" dirty="0"/>
-          </a:p>
-        </p:txBody>
-      </p:sp>
-      <p:sp>
-        <p:nvSpPr>
-          <p:cNvPr id="11" name="Text 9"/>
-          <p:cNvSpPr/>
-          <p:nvPr/>
-        </p:nvSpPr>
-        <p:spPr>
-          <a:xfrm>
-            <a:off x="1234440" y="3950208"/>
-            <a:ext cx="9692640" cy="365760"/>
-          </a:xfrm>
-          <a:prstGeom prst="rect">
-            <a:avLst/>
-          </a:prstGeom>
-          <a:noFill/>
-          <a:ln/>
-        </p:spPr>
-        <p:txBody>
-          <a:bodyPr wrap="square" lIns="0" tIns="0" rIns="0" bIns="0" rtlCol="0" anchor="ctr"/>
-          <a:lstStyle/>
-          <a:p>
-            <a:pPr indent="0" marL="0">
-              <a:buNone/>
-            </a:pPr>
-            <a:r>
-              <a:rPr lang="en-US" sz="1200" dirty="0">
-                <a:solidFill>
-                  <a:srgbClr val="8FB996"/>
-                </a:solidFill>
-                <a:latin typeface="微软雅黑" pitchFamily="34" charset="0"/>
-                <a:ea typeface="微软雅黑" pitchFamily="34" charset="-122"/>
-                <a:cs typeface="微软雅黑" pitchFamily="34" charset="-120"/>
-              </a:rPr>
-              <a:t>将阈值选择放进 CV 内层，以得到无偏的准确率。</a:t>
-            </a:r>
-            <a:endParaRPr lang="en-US" sz="1200" dirty="0"/>
-          </a:p>
-        </p:txBody>
-      </p:sp>
-      <p:sp>
-        <p:nvSpPr>
-          <p:cNvPr id="12" name="Shape 10"/>
-          <p:cNvSpPr/>
-          <p:nvPr/>
-        </p:nvSpPr>
-        <p:spPr>
-          <a:xfrm>
-            <a:off x="914400" y="4617720"/>
-            <a:ext cx="10332720" cy="960120"/>
-          </a:xfrm>
-          <a:prstGeom prst="rect">
-            <a:avLst/>
-          </a:prstGeom>
-          <a:solidFill>
-            <a:srgbClr val="12505F"/>
-          </a:solidFill>
-          <a:ln/>
-        </p:spPr>
-      </p:sp>
-      <p:sp>
-        <p:nvSpPr>
-          <p:cNvPr id="13" name="Shape 11"/>
-          <p:cNvSpPr/>
-          <p:nvPr/>
-        </p:nvSpPr>
-        <p:spPr>
-          <a:xfrm>
-            <a:off x="914400" y="4617720"/>
-            <a:ext cx="68580" cy="960120"/>
-          </a:xfrm>
-          <a:prstGeom prst="rect">
-            <a:avLst/>
-          </a:prstGeom>
-          <a:solidFill>
-            <a:srgbClr val="8FB996"/>
-          </a:solidFill>
-          <a:ln/>
-        </p:spPr>
-      </p:sp>
-      <p:sp>
-        <p:nvSpPr>
-          <p:cNvPr id="14" name="Text 12"/>
-          <p:cNvSpPr/>
-          <p:nvPr/>
-        </p:nvSpPr>
-        <p:spPr>
-          <a:xfrm>
-            <a:off x="1234440" y="4745736"/>
-            <a:ext cx="9692640" cy="320040"/>
-          </a:xfrm>
-          <a:prstGeom prst="rect">
-            <a:avLst/>
-          </a:prstGeom>
-          <a:noFill/>
-          <a:ln/>
-        </p:spPr>
-        <p:txBody>
-          <a:bodyPr wrap="square" lIns="0" tIns="0" rIns="0" bIns="0" rtlCol="0" anchor="ctr"/>
-          <a:lstStyle/>
-          <a:p>
-            <a:pPr indent="0" marL="0">
-              <a:buNone/>
-            </a:pPr>
-            <a:r>
-              <a:rPr lang="en-US" sz="1600" b="1" dirty="0">
-                <a:solidFill>
-                  <a:srgbClr val="FFFFFF"/>
-                </a:solidFill>
-                <a:latin typeface="微软雅黑" pitchFamily="34" charset="0"/>
-                <a:ea typeface="微软雅黑" pitchFamily="34" charset="-122"/>
-                <a:cs typeface="微软雅黑" pitchFamily="34" charset="-120"/>
-              </a:rPr>
-              <a:t>扩充队列</a:t>
-            </a:r>
-            <a:endParaRPr lang="en-US" sz="1600" dirty="0"/>
-          </a:p>
-        </p:txBody>
-      </p:sp>
-      <p:sp>
-        <p:nvSpPr>
-          <p:cNvPr id="15" name="Text 13"/>
-          <p:cNvSpPr/>
-          <p:nvPr/>
-        </p:nvSpPr>
-        <p:spPr>
-          <a:xfrm>
-            <a:off x="1234440" y="5093208"/>
-            <a:ext cx="9692640" cy="365760"/>
-          </a:xfrm>
-          <a:prstGeom prst="rect">
-            <a:avLst/>
-          </a:prstGeom>
-          <a:noFill/>
-          <a:ln/>
-        </p:spPr>
-        <p:txBody>
-          <a:bodyPr wrap="square" lIns="0" tIns="0" rIns="0" bIns="0" rtlCol="0" anchor="ctr"/>
-          <a:lstStyle/>
-          <a:p>
-            <a:pPr indent="0" marL="0">
-              <a:buNone/>
-            </a:pPr>
-            <a:r>
-              <a:rPr lang="en-US" sz="1200" dirty="0">
-                <a:solidFill>
-                  <a:srgbClr val="8FB996"/>
-                </a:solidFill>
-                <a:latin typeface="微软雅黑" pitchFamily="34" charset="0"/>
-                <a:ea typeface="微软雅黑" pitchFamily="34" charset="-122"/>
-                <a:cs typeface="微软雅黑" pitchFamily="34" charset="-120"/>
-              </a:rPr>
-              <a:t>跨研究泛化需要的是更多同一宿主的个体，而不是更多不同宿主的研究。</a:t>
-            </a:r>
-            <a:endParaRPr lang="en-US" sz="1200" dirty="0"/>
-          </a:p>
-        </p:txBody>
-      </p:sp>
-      <p:sp>
-        <p:nvSpPr>
-          <p:cNvPr id="16" name="Text 14"/>
-          <p:cNvSpPr/>
-          <p:nvPr/>
-        </p:nvSpPr>
-        <p:spPr>
-          <a:xfrm>
-            <a:off x="914400" y="6172200"/>
-            <a:ext cx="10332720" cy="365760"/>
-          </a:xfrm>
-          <a:prstGeom prst="rect">
-            <a:avLst/>
-          </a:prstGeom>
-          <a:noFill/>
-          <a:ln/>
-        </p:spPr>
-        <p:txBody>
-          <a:bodyPr wrap="square" lIns="0" tIns="0" rIns="0" bIns="0" rtlCol="0" anchor="ctr"/>
-          <a:lstStyle/>
-          <a:p>
-            <a:pPr indent="0" marL="0">
-              <a:buNone/>
-            </a:pPr>
-            <a:r>
-              <a:rPr lang="en-US" sz="1200" dirty="0">
-                <a:solidFill>
-                  <a:srgbClr val="4E9FAD"/>
-                </a:solidFill>
-                <a:latin typeface="微软雅黑" pitchFamily="34" charset="0"/>
-                <a:ea typeface="微软雅黑" pitchFamily="34" charset="-122"/>
-                <a:cs typeface="微软雅黑" pitchFamily="34" charset="-120"/>
-              </a:rPr>
-              <a:t>Sihua Peng  ·  佐治亚大学公共卫生学院  ·  pengsihua99@gmail.com</a:t>
-            </a:r>
-            <a:endParaRPr lang="en-US" sz="1200" dirty="0"/>
-          </a:p>
-        </p:txBody>
-      </p:sp>
-    </p:spTree>
-  </p:cSld>
-  <p:clrMapOvr>
-    <a:masterClrMapping/>
-  </p:clrMapOvr>
-</p:sld>
-</file>
-
 <file path=ppt/slides/slide3.xml><?xml version="1.0" encoding="utf-8"?>
 <p:sld xmlns:a="http://schemas.openxmlformats.org/drawingml/2006/main" xmlns:r="http://schemas.openxmlformats.org/officeDocument/2006/relationships" xmlns:p="http://schemas.openxmlformats.org/presentationml/2006/main">
   <p:cSld name="Slide 3">
@@ -37123,7 +38972,7 @@
                 <a:ea typeface="微软雅黑" pitchFamily="34" charset="-122"/>
                 <a:cs typeface="微软雅黑" pitchFamily="34" charset="-120"/>
               </a:rPr>
-              <a:t>置换检验、混杂因子与分层再分析</a:t>
+              <a:t>置换检验、混杂因子、分层再分析与去混杂子集</a:t>
             </a:r>
             <a:endParaRPr lang="en-US" sz="1200" dirty="0"/>
           </a:p>
@@ -37380,6 +39229,490 @@
                 <a:cs typeface="微软雅黑" pitchFamily="34" charset="-120"/>
               </a:rPr>
               <a:t>七项局限，如实陈述</a:t>
+            </a:r>
+            <a:endParaRPr lang="en-US" sz="1200" dirty="0"/>
+          </a:p>
+        </p:txBody>
+      </p:sp>
+    </p:spTree>
+  </p:cSld>
+  <p:clrMapOvr>
+    <a:masterClrMapping/>
+  </p:clrMapOvr>
+</p:sld>
+</file>
+
+<file path=ppt/slides/slide30.xml><?xml version="1.0" encoding="utf-8"?>
+<p:sld xmlns:a="http://schemas.openxmlformats.org/drawingml/2006/main" xmlns:r="http://schemas.openxmlformats.org/officeDocument/2006/relationships" xmlns:p="http://schemas.openxmlformats.org/presentationml/2006/main">
+  <p:cSld name="Slide 30">
+    <p:bg>
+      <p:bgPr>
+        <a:solidFill>
+          <a:srgbClr val="0B3C49"/>
+        </a:solidFill>
+      </p:bgPr>
+    </p:bg>
+    <p:spTree>
+      <p:nvGrpSpPr>
+        <p:cNvPr id="1" name=""/>
+        <p:cNvGrpSpPr/>
+        <p:nvPr/>
+      </p:nvGrpSpPr>
+      <p:grpSpPr>
+        <a:xfrm>
+          <a:off x="0" y="0"/>
+          <a:ext cx="0" cy="0"/>
+          <a:chOff x="0" y="0"/>
+          <a:chExt cx="0" cy="0"/>
+        </a:xfrm>
+      </p:grpSpPr>
+      <p:sp>
+        <p:nvSpPr>
+          <p:cNvPr id="2" name="Shape 0"/>
+          <p:cNvSpPr/>
+          <p:nvPr/>
+        </p:nvSpPr>
+        <p:spPr>
+          <a:xfrm>
+            <a:off x="0" y="0"/>
+            <a:ext cx="12191695" cy="292608"/>
+          </a:xfrm>
+          <a:prstGeom prst="rect">
+            <a:avLst/>
+          </a:prstGeom>
+          <a:solidFill>
+            <a:srgbClr val="8FB996"/>
+          </a:solidFill>
+          <a:ln/>
+        </p:spPr>
+      </p:sp>
+      <p:sp>
+        <p:nvSpPr>
+          <p:cNvPr id="3" name="Text 1"/>
+          <p:cNvSpPr/>
+          <p:nvPr/>
+        </p:nvSpPr>
+        <p:spPr>
+          <a:xfrm>
+            <a:off x="914400" y="1234440"/>
+            <a:ext cx="10332720" cy="731520"/>
+          </a:xfrm>
+          <a:prstGeom prst="rect">
+            <a:avLst/>
+          </a:prstGeom>
+          <a:noFill/>
+          <a:ln/>
+        </p:spPr>
+        <p:txBody>
+          <a:bodyPr wrap="square" lIns="0" tIns="0" rIns="0" bIns="0" rtlCol="0" anchor="ctr"/>
+          <a:lstStyle/>
+          <a:p>
+            <a:pPr indent="0" marL="0">
+              <a:buNone/>
+            </a:pPr>
+            <a:r>
+              <a:rPr lang="en-US" sz="4000" b="1" dirty="0">
+                <a:solidFill>
+                  <a:srgbClr val="FFFFFF"/>
+                </a:solidFill>
+                <a:latin typeface="微软雅黑" pitchFamily="34" charset="0"/>
+                <a:ea typeface="微软雅黑" pitchFamily="34" charset="-122"/>
+                <a:cs typeface="微软雅黑" pitchFamily="34" charset="-120"/>
+              </a:rPr>
+              <a:t>下一步工作</a:t>
+            </a:r>
+            <a:endParaRPr lang="en-US" sz="4000" dirty="0"/>
+          </a:p>
+        </p:txBody>
+      </p:sp>
+      <p:sp>
+        <p:nvSpPr>
+          <p:cNvPr id="4" name="Shape 2"/>
+          <p:cNvSpPr/>
+          <p:nvPr/>
+        </p:nvSpPr>
+        <p:spPr>
+          <a:xfrm>
+            <a:off x="914400" y="2331720"/>
+            <a:ext cx="10332720" cy="960120"/>
+          </a:xfrm>
+          <a:prstGeom prst="rect">
+            <a:avLst/>
+          </a:prstGeom>
+          <a:solidFill>
+            <a:srgbClr val="12505F"/>
+          </a:solidFill>
+          <a:ln/>
+        </p:spPr>
+      </p:sp>
+      <p:sp>
+        <p:nvSpPr>
+          <p:cNvPr id="5" name="Shape 3"/>
+          <p:cNvSpPr/>
+          <p:nvPr/>
+        </p:nvSpPr>
+        <p:spPr>
+          <a:xfrm>
+            <a:off x="914400" y="2331720"/>
+            <a:ext cx="68580" cy="960120"/>
+          </a:xfrm>
+          <a:prstGeom prst="rect">
+            <a:avLst/>
+          </a:prstGeom>
+          <a:solidFill>
+            <a:srgbClr val="8FB996"/>
+          </a:solidFill>
+          <a:ln/>
+        </p:spPr>
+      </p:sp>
+      <p:sp>
+        <p:nvSpPr>
+          <p:cNvPr id="6" name="Text 4"/>
+          <p:cNvSpPr/>
+          <p:nvPr/>
+        </p:nvSpPr>
+        <p:spPr>
+          <a:xfrm>
+            <a:off x="1234440" y="2459736"/>
+            <a:ext cx="9692640" cy="320040"/>
+          </a:xfrm>
+          <a:prstGeom prst="rect">
+            <a:avLst/>
+          </a:prstGeom>
+          <a:noFill/>
+          <a:ln/>
+        </p:spPr>
+        <p:txBody>
+          <a:bodyPr wrap="square" lIns="0" tIns="0" rIns="0" bIns="0" rtlCol="0" anchor="ctr"/>
+          <a:lstStyle/>
+          <a:p>
+            <a:pPr indent="0" marL="0">
+              <a:buNone/>
+            </a:pPr>
+            <a:r>
+              <a:rPr lang="en-US" sz="1600" b="1" dirty="0">
+                <a:solidFill>
+                  <a:srgbClr val="FFFFFF"/>
+                </a:solidFill>
+                <a:latin typeface="微软雅黑" pitchFamily="34" charset="0"/>
+                <a:ea typeface="微软雅黑" pitchFamily="34" charset="-122"/>
+                <a:cs typeface="微软雅黑" pitchFamily="34" charset="-120"/>
+              </a:rPr>
+              <a:t>确认上游过滤规则</a:t>
+            </a:r>
+            <a:endParaRPr lang="en-US" sz="1600" dirty="0"/>
+          </a:p>
+        </p:txBody>
+      </p:sp>
+      <p:sp>
+        <p:nvSpPr>
+          <p:cNvPr id="7" name="Text 5"/>
+          <p:cNvSpPr/>
+          <p:nvPr/>
+        </p:nvSpPr>
+        <p:spPr>
+          <a:xfrm>
+            <a:off x="1234440" y="2807208"/>
+            <a:ext cx="9692640" cy="365760"/>
+          </a:xfrm>
+          <a:prstGeom prst="rect">
+            <a:avLst/>
+          </a:prstGeom>
+          <a:noFill/>
+          <a:ln/>
+        </p:spPr>
+        <p:txBody>
+          <a:bodyPr wrap="square" lIns="0" tIns="0" rIns="0" bIns="0" rtlCol="0" anchor="ctr"/>
+          <a:lstStyle/>
+          <a:p>
+            <a:pPr indent="0" marL="0">
+              <a:buNone/>
+            </a:pPr>
+            <a:r>
+              <a:rPr lang="en-US" sz="1200" dirty="0">
+                <a:solidFill>
+                  <a:srgbClr val="8FB996"/>
+                </a:solidFill>
+                <a:latin typeface="微软雅黑" pitchFamily="34" charset="0"/>
+                <a:ea typeface="微软雅黑" pitchFamily="34" charset="-122"/>
+                <a:cs typeface="微软雅黑" pitchFamily="34" charset="-120"/>
+              </a:rPr>
+              <a:t>唯一可能推翻全部性能数字的因素。需要向数据提供方核实。</a:t>
+            </a:r>
+            <a:endParaRPr lang="en-US" sz="1200" dirty="0"/>
+          </a:p>
+        </p:txBody>
+      </p:sp>
+      <p:sp>
+        <p:nvSpPr>
+          <p:cNvPr id="8" name="Shape 6"/>
+          <p:cNvSpPr/>
+          <p:nvPr/>
+        </p:nvSpPr>
+        <p:spPr>
+          <a:xfrm>
+            <a:off x="914400" y="3474720"/>
+            <a:ext cx="10332720" cy="960120"/>
+          </a:xfrm>
+          <a:prstGeom prst="rect">
+            <a:avLst/>
+          </a:prstGeom>
+          <a:solidFill>
+            <a:srgbClr val="12505F"/>
+          </a:solidFill>
+          <a:ln/>
+        </p:spPr>
+      </p:sp>
+      <p:sp>
+        <p:nvSpPr>
+          <p:cNvPr id="9" name="Shape 7"/>
+          <p:cNvSpPr/>
+          <p:nvPr/>
+        </p:nvSpPr>
+        <p:spPr>
+          <a:xfrm>
+            <a:off x="914400" y="3474720"/>
+            <a:ext cx="68580" cy="960120"/>
+          </a:xfrm>
+          <a:prstGeom prst="rect">
+            <a:avLst/>
+          </a:prstGeom>
+          <a:solidFill>
+            <a:srgbClr val="8FB996"/>
+          </a:solidFill>
+          <a:ln/>
+        </p:spPr>
+      </p:sp>
+      <p:sp>
+        <p:nvSpPr>
+          <p:cNvPr id="10" name="Text 8"/>
+          <p:cNvSpPr/>
+          <p:nvPr/>
+        </p:nvSpPr>
+        <p:spPr>
+          <a:xfrm>
+            <a:off x="1234440" y="3602736"/>
+            <a:ext cx="9692640" cy="320040"/>
+          </a:xfrm>
+          <a:prstGeom prst="rect">
+            <a:avLst/>
+          </a:prstGeom>
+          <a:noFill/>
+          <a:ln/>
+        </p:spPr>
+        <p:txBody>
+          <a:bodyPr wrap="square" lIns="0" tIns="0" rIns="0" bIns="0" rtlCol="0" anchor="ctr"/>
+          <a:lstStyle/>
+          <a:p>
+            <a:pPr indent="0" marL="0">
+              <a:buNone/>
+            </a:pPr>
+            <a:r>
+              <a:rPr lang="en-US" sz="1600" b="1" dirty="0">
+                <a:solidFill>
+                  <a:srgbClr val="FFFFFF"/>
+                </a:solidFill>
+                <a:latin typeface="微软雅黑" pitchFamily="34" charset="0"/>
+                <a:ea typeface="微软雅黑" pitchFamily="34" charset="-122"/>
+                <a:cs typeface="微软雅黑" pitchFamily="34" charset="-120"/>
+              </a:rPr>
+              <a:t>把判决阈值纳入嵌套</a:t>
+            </a:r>
+            <a:endParaRPr lang="en-US" sz="1600" dirty="0"/>
+          </a:p>
+        </p:txBody>
+      </p:sp>
+      <p:sp>
+        <p:nvSpPr>
+          <p:cNvPr id="11" name="Text 9"/>
+          <p:cNvSpPr/>
+          <p:nvPr/>
+        </p:nvSpPr>
+        <p:spPr>
+          <a:xfrm>
+            <a:off x="1234440" y="3950208"/>
+            <a:ext cx="9692640" cy="365760"/>
+          </a:xfrm>
+          <a:prstGeom prst="rect">
+            <a:avLst/>
+          </a:prstGeom>
+          <a:noFill/>
+          <a:ln/>
+        </p:spPr>
+        <p:txBody>
+          <a:bodyPr wrap="square" lIns="0" tIns="0" rIns="0" bIns="0" rtlCol="0" anchor="ctr"/>
+          <a:lstStyle/>
+          <a:p>
+            <a:pPr indent="0" marL="0">
+              <a:buNone/>
+            </a:pPr>
+            <a:r>
+              <a:rPr lang="en-US" sz="1200" dirty="0">
+                <a:solidFill>
+                  <a:srgbClr val="8FB996"/>
+                </a:solidFill>
+                <a:latin typeface="微软雅黑" pitchFamily="34" charset="0"/>
+                <a:ea typeface="微软雅黑" pitchFamily="34" charset="-122"/>
+                <a:cs typeface="微软雅黑" pitchFamily="34" charset="-120"/>
+              </a:rPr>
+              <a:t>将阈值选择放进 CV 内层，以得到无偏的准确率。</a:t>
+            </a:r>
+            <a:endParaRPr lang="en-US" sz="1200" dirty="0"/>
+          </a:p>
+        </p:txBody>
+      </p:sp>
+      <p:sp>
+        <p:nvSpPr>
+          <p:cNvPr id="12" name="Shape 10"/>
+          <p:cNvSpPr/>
+          <p:nvPr/>
+        </p:nvSpPr>
+        <p:spPr>
+          <a:xfrm>
+            <a:off x="914400" y="4617720"/>
+            <a:ext cx="10332720" cy="960120"/>
+          </a:xfrm>
+          <a:prstGeom prst="rect">
+            <a:avLst/>
+          </a:prstGeom>
+          <a:solidFill>
+            <a:srgbClr val="12505F"/>
+          </a:solidFill>
+          <a:ln/>
+        </p:spPr>
+      </p:sp>
+      <p:sp>
+        <p:nvSpPr>
+          <p:cNvPr id="13" name="Shape 11"/>
+          <p:cNvSpPr/>
+          <p:nvPr/>
+        </p:nvSpPr>
+        <p:spPr>
+          <a:xfrm>
+            <a:off x="914400" y="4617720"/>
+            <a:ext cx="68580" cy="960120"/>
+          </a:xfrm>
+          <a:prstGeom prst="rect">
+            <a:avLst/>
+          </a:prstGeom>
+          <a:solidFill>
+            <a:srgbClr val="8FB996"/>
+          </a:solidFill>
+          <a:ln/>
+        </p:spPr>
+      </p:sp>
+      <p:sp>
+        <p:nvSpPr>
+          <p:cNvPr id="14" name="Text 12"/>
+          <p:cNvSpPr/>
+          <p:nvPr/>
+        </p:nvSpPr>
+        <p:spPr>
+          <a:xfrm>
+            <a:off x="1234440" y="4745736"/>
+            <a:ext cx="9692640" cy="320040"/>
+          </a:xfrm>
+          <a:prstGeom prst="rect">
+            <a:avLst/>
+          </a:prstGeom>
+          <a:noFill/>
+          <a:ln/>
+        </p:spPr>
+        <p:txBody>
+          <a:bodyPr wrap="square" lIns="0" tIns="0" rIns="0" bIns="0" rtlCol="0" anchor="ctr"/>
+          <a:lstStyle/>
+          <a:p>
+            <a:pPr indent="0" marL="0">
+              <a:buNone/>
+            </a:pPr>
+            <a:r>
+              <a:rPr lang="en-US" sz="1600" b="1" dirty="0">
+                <a:solidFill>
+                  <a:srgbClr val="FFFFFF"/>
+                </a:solidFill>
+                <a:latin typeface="微软雅黑" pitchFamily="34" charset="0"/>
+                <a:ea typeface="微软雅黑" pitchFamily="34" charset="-122"/>
+                <a:cs typeface="微软雅黑" pitchFamily="34" charset="-120"/>
+              </a:rPr>
+              <a:t>扩充队列</a:t>
+            </a:r>
+            <a:endParaRPr lang="en-US" sz="1600" dirty="0"/>
+          </a:p>
+        </p:txBody>
+      </p:sp>
+      <p:sp>
+        <p:nvSpPr>
+          <p:cNvPr id="15" name="Text 13"/>
+          <p:cNvSpPr/>
+          <p:nvPr/>
+        </p:nvSpPr>
+        <p:spPr>
+          <a:xfrm>
+            <a:off x="1234440" y="5093208"/>
+            <a:ext cx="9692640" cy="365760"/>
+          </a:xfrm>
+          <a:prstGeom prst="rect">
+            <a:avLst/>
+          </a:prstGeom>
+          <a:noFill/>
+          <a:ln/>
+        </p:spPr>
+        <p:txBody>
+          <a:bodyPr wrap="square" lIns="0" tIns="0" rIns="0" bIns="0" rtlCol="0" anchor="ctr"/>
+          <a:lstStyle/>
+          <a:p>
+            <a:pPr indent="0" marL="0">
+              <a:buNone/>
+            </a:pPr>
+            <a:r>
+              <a:rPr lang="en-US" sz="1200" dirty="0">
+                <a:solidFill>
+                  <a:srgbClr val="8FB996"/>
+                </a:solidFill>
+                <a:latin typeface="微软雅黑" pitchFamily="34" charset="0"/>
+                <a:ea typeface="微软雅黑" pitchFamily="34" charset="-122"/>
+                <a:cs typeface="微软雅黑" pitchFamily="34" charset="-120"/>
+              </a:rPr>
+              <a:t>跨研究泛化需要的是更多同一宿主的个体，而不是更多不同宿主的研究。</a:t>
+            </a:r>
+            <a:endParaRPr lang="en-US" sz="1200" dirty="0"/>
+          </a:p>
+        </p:txBody>
+      </p:sp>
+      <p:sp>
+        <p:nvSpPr>
+          <p:cNvPr id="16" name="Text 14"/>
+          <p:cNvSpPr/>
+          <p:nvPr/>
+        </p:nvSpPr>
+        <p:spPr>
+          <a:xfrm>
+            <a:off x="914400" y="6172200"/>
+            <a:ext cx="10332720" cy="365760"/>
+          </a:xfrm>
+          <a:prstGeom prst="rect">
+            <a:avLst/>
+          </a:prstGeom>
+          <a:noFill/>
+          <a:ln/>
+        </p:spPr>
+        <p:txBody>
+          <a:bodyPr wrap="square" lIns="0" tIns="0" rIns="0" bIns="0" rtlCol="0" anchor="ctr"/>
+          <a:lstStyle/>
+          <a:p>
+            <a:pPr indent="0" marL="0">
+              <a:buNone/>
+            </a:pPr>
+            <a:r>
+              <a:rPr lang="en-US" sz="1200" dirty="0">
+                <a:solidFill>
+                  <a:srgbClr val="4E9FAD"/>
+                </a:solidFill>
+                <a:latin typeface="微软雅黑" pitchFamily="34" charset="0"/>
+                <a:ea typeface="微软雅黑" pitchFamily="34" charset="-122"/>
+                <a:cs typeface="微软雅黑" pitchFamily="34" charset="-120"/>
+              </a:rPr>
+              <a:t>Sihua Peng  ·  佐治亚大学公共卫生学院  ·  pengsihua99@gmail.com</a:t>
             </a:r>
             <a:endParaRPr lang="en-US" sz="1200" dirty="0"/>
           </a:p>

--- a/slides/Influenza_Microbiome_ML_Overview_ZH.pptx
+++ b/slides/Influenza_Microbiome_ML_Overview_ZH.pptx
@@ -35,9 +35,10 @@
     <p:sldId id="283" r:id="rId29"/>
     <p:sldId id="284" r:id="rId30"/>
     <p:sldId id="285" r:id="rId31"/>
+    <p:sldId id="286" r:id="rId32"/>
   </p:sldIdLst>
   <p:notesMasterIdLst>
-    <p:notesMasterId r:id="rId32"/>
+    <p:notesMasterId r:id="rId33"/>
   </p:notesMasterIdLst>
   <p:sldSz cx="12192000" cy="6858000"/>
   <p:notesSz cx="6858000" cy="12192000"/>
@@ -2579,6 +2580,94 @@
             <a:fld id="{F7021451-1387-4CA6-816F-3879F97B5CBC}" type="slidenum">
               <a:rPr lang="en-US"/>
               <a:t>30</a:t>
+            </a:fld>
+            <a:endParaRPr lang="en-US"/>
+          </a:p>
+        </p:txBody>
+      </p:sp>
+    </p:spTree>
+    <p:extLst>
+      <p:ext uri="{BB962C8B-B14F-4D97-AF65-F5344CB8AC3E}">
+        <p14:creationId xmlns:p14="http://schemas.microsoft.com/office/powerpoint/2010/main" val="1024086991"/>
+      </p:ext>
+    </p:extLst>
+  </p:cSld>
+  <p:clrMapOvr>
+    <a:masterClrMapping/>
+  </p:clrMapOvr>
+</p:notes>
+</file>
+
+<file path=ppt/notesSlides/notesSlide31.xml><?xml version="1.0" encoding="utf-8"?>
+<p:notes xmlns:a="http://schemas.openxmlformats.org/drawingml/2006/main" xmlns:r="http://schemas.openxmlformats.org/officeDocument/2006/relationships" xmlns:p="http://schemas.openxmlformats.org/presentationml/2006/main">
+  <p:cSld>
+    <p:spTree>
+      <p:nvGrpSpPr>
+        <p:cNvPr id="1" name=""/>
+        <p:cNvGrpSpPr/>
+        <p:nvPr/>
+      </p:nvGrpSpPr>
+      <p:grpSpPr>
+        <a:xfrm>
+          <a:off x="0" y="0"/>
+          <a:ext cx="0" cy="0"/>
+          <a:chOff x="0" y="0"/>
+          <a:chExt cx="0" cy="0"/>
+        </a:xfrm>
+      </p:grpSpPr>
+      <p:sp>
+        <p:nvSpPr>
+          <p:cNvPr id="2" name="Slide Image Placeholder 1"/>
+          <p:cNvSpPr>
+            <a:spLocks noGrp="1" noRot="1" noChangeAspect="1"/>
+          </p:cNvSpPr>
+          <p:nvPr>
+            <p:ph type="sldImg"/>
+          </p:nvPr>
+        </p:nvSpPr>
+        <p:spPr/>
+      </p:sp>
+      <p:sp>
+        <p:nvSpPr>
+          <p:cNvPr id="3" name="Notes Placeholder 2"/>
+          <p:cNvSpPr>
+            <a:spLocks noGrp="1"/>
+          </p:cNvSpPr>
+          <p:nvPr>
+            <p:ph type="body" idx="1"/>
+          </p:nvPr>
+        </p:nvSpPr>
+        <p:spPr/>
+        <p:txBody>
+          <a:bodyPr/>
+          <a:lstStyle/>
+          <a:p>
+            <a:r>
+              <a:rPr lang="en-US" dirty="0"/>
+              <a:t/>
+            </a:r>
+            <a:endParaRPr lang="en-US" dirty="0"/>
+          </a:p>
+        </p:txBody>
+      </p:sp>
+      <p:sp>
+        <p:nvSpPr>
+          <p:cNvPr id="4" name="Slide Number Placeholder 3"/>
+          <p:cNvSpPr>
+            <a:spLocks noGrp="1"/>
+          </p:cNvSpPr>
+          <p:nvPr>
+            <p:ph type="sldNum" sz="quarter" idx="10"/>
+          </p:nvPr>
+        </p:nvSpPr>
+        <p:spPr/>
+        <p:txBody>
+          <a:bodyPr/>
+          <a:lstStyle/>
+          <a:p>
+            <a:fld id="{F7021451-1387-4CA6-816F-3879F97B5CBC}" type="slidenum">
+              <a:rPr lang="en-US"/>
+              <a:t>31</a:t>
             </a:fld>
             <a:endParaRPr lang="en-US"/>
           </a:p>
@@ -29421,6 +29510,3003 @@
     <p:bg>
       <p:bgPr>
         <a:solidFill>
+          <a:srgbClr val="FCFAF6"/>
+        </a:solidFill>
+      </p:bgPr>
+    </p:bg>
+    <p:spTree>
+      <p:nvGrpSpPr>
+        <p:cNvPr id="1" name=""/>
+        <p:cNvGrpSpPr/>
+        <p:nvPr/>
+      </p:nvGrpSpPr>
+      <p:grpSpPr>
+        <a:xfrm>
+          <a:off x="0" y="0"/>
+          <a:ext cx="0" cy="0"/>
+          <a:chOff x="0" y="0"/>
+          <a:chExt cx="0" cy="0"/>
+        </a:xfrm>
+      </p:grpSpPr>
+      <p:sp>
+        <p:nvSpPr>
+          <p:cNvPr id="2" name="Shape 0"/>
+          <p:cNvSpPr/>
+          <p:nvPr/>
+        </p:nvSpPr>
+        <p:spPr>
+          <a:xfrm>
+            <a:off x="0" y="0"/>
+            <a:ext cx="12191695" cy="54864"/>
+          </a:xfrm>
+          <a:prstGeom prst="rect">
+            <a:avLst/>
+          </a:prstGeom>
+          <a:solidFill>
+            <a:srgbClr val="18707F"/>
+          </a:solidFill>
+          <a:ln/>
+        </p:spPr>
+      </p:sp>
+      <p:sp>
+        <p:nvSpPr>
+          <p:cNvPr id="3" name="Text 1"/>
+          <p:cNvSpPr/>
+          <p:nvPr/>
+        </p:nvSpPr>
+        <p:spPr>
+          <a:xfrm>
+            <a:off x="548640" y="310896"/>
+            <a:ext cx="7315200" cy="256032"/>
+          </a:xfrm>
+          <a:prstGeom prst="rect">
+            <a:avLst/>
+          </a:prstGeom>
+          <a:noFill/>
+          <a:ln/>
+        </p:spPr>
+        <p:txBody>
+          <a:bodyPr wrap="square" lIns="0" tIns="0" rIns="0" bIns="0" rtlCol="0" anchor="ctr"/>
+          <a:lstStyle/>
+          <a:p>
+            <a:pPr indent="0" marL="0">
+              <a:buNone/>
+            </a:pPr>
+            <a:r>
+              <a:rPr lang="en-US" sz="1100" b="1" spc="200" kern="0" dirty="0">
+                <a:solidFill>
+                  <a:srgbClr val="18707F"/>
+                </a:solidFill>
+                <a:latin typeface="微软雅黑" pitchFamily="34" charset="0"/>
+                <a:ea typeface="微软雅黑" pitchFamily="34" charset="-122"/>
+                <a:cs typeface="微软雅黑" pitchFamily="34" charset="-120"/>
+              </a:rPr>
+              <a:t>有效性 · 泛化</a:t>
+            </a:r>
+            <a:endParaRPr lang="en-US" sz="1100" dirty="0"/>
+          </a:p>
+        </p:txBody>
+      </p:sp>
+      <p:sp>
+        <p:nvSpPr>
+          <p:cNvPr id="4" name="Text 2"/>
+          <p:cNvSpPr/>
+          <p:nvPr/>
+        </p:nvSpPr>
+        <p:spPr>
+          <a:xfrm>
+            <a:off x="548640" y="566928"/>
+            <a:ext cx="11064240" cy="685800"/>
+          </a:xfrm>
+          <a:prstGeom prst="rect">
+            <a:avLst/>
+          </a:prstGeom>
+          <a:noFill/>
+          <a:ln/>
+        </p:spPr>
+        <p:txBody>
+          <a:bodyPr wrap="square" lIns="0" tIns="0" rIns="0" bIns="0" rtlCol="0" anchor="ctr"/>
+          <a:lstStyle/>
+          <a:p>
+            <a:pPr indent="0" marL="0">
+              <a:buNone/>
+            </a:pPr>
+            <a:r>
+              <a:rPr lang="en-US" sz="3000" b="1" dirty="0">
+                <a:solidFill>
+                  <a:srgbClr val="16252C"/>
+                </a:solidFill>
+                <a:latin typeface="微软雅黑" pitchFamily="34" charset="0"/>
+                <a:ea typeface="微软雅黑" pitchFamily="34" charset="-122"/>
+                <a:cs typeface="微软雅黑" pitchFamily="34" charset="-120"/>
+              </a:rPr>
+              <a:t>换一个湿地还能用吗？</a:t>
+            </a:r>
+            <a:endParaRPr lang="en-US" sz="3000" dirty="0"/>
+          </a:p>
+        </p:txBody>
+      </p:sp>
+      <p:sp>
+        <p:nvSpPr>
+          <p:cNvPr id="5" name="Text 3"/>
+          <p:cNvSpPr/>
+          <p:nvPr/>
+        </p:nvSpPr>
+        <p:spPr>
+          <a:xfrm>
+            <a:off x="11430000" y="6355080"/>
+            <a:ext cx="411480" cy="274320"/>
+          </a:xfrm>
+          <a:prstGeom prst="rect">
+            <a:avLst/>
+          </a:prstGeom>
+          <a:noFill/>
+          <a:ln/>
+        </p:spPr>
+        <p:txBody>
+          <a:bodyPr wrap="square" lIns="0" tIns="0" rIns="0" bIns="0" rtlCol="0" anchor="ctr"/>
+          <a:lstStyle/>
+          <a:p>
+            <a:pPr algn="r" indent="0" marL="0">
+              <a:buNone/>
+            </a:pPr>
+            <a:r>
+              <a:rPr lang="en-US" sz="1000" dirty="0">
+                <a:solidFill>
+                  <a:srgbClr val="5F7580"/>
+                </a:solidFill>
+                <a:latin typeface="微软雅黑" pitchFamily="34" charset="0"/>
+                <a:ea typeface="微软雅黑" pitchFamily="34" charset="-122"/>
+                <a:cs typeface="微软雅黑" pitchFamily="34" charset="-120"/>
+              </a:rPr>
+              <a:t>23</a:t>
+            </a:r>
+            <a:endParaRPr lang="en-US" sz="1000" dirty="0"/>
+          </a:p>
+        </p:txBody>
+      </p:sp>
+      <p:sp>
+        <p:nvSpPr>
+          <p:cNvPr id="6" name="Text 4"/>
+          <p:cNvSpPr/>
+          <p:nvPr/>
+        </p:nvSpPr>
+        <p:spPr>
+          <a:xfrm>
+            <a:off x="548640" y="1298448"/>
+            <a:ext cx="11064240" cy="457200"/>
+          </a:xfrm>
+          <a:prstGeom prst="rect">
+            <a:avLst/>
+          </a:prstGeom>
+          <a:noFill/>
+          <a:ln/>
+        </p:spPr>
+        <p:txBody>
+          <a:bodyPr wrap="square" lIns="0" tIns="0" rIns="0" bIns="0" rtlCol="0" anchor="t"/>
+          <a:lstStyle/>
+          <a:p>
+            <a:pPr indent="0" marL="0">
+              <a:buNone/>
+            </a:pPr>
+            <a:r>
+              <a:rPr lang="en-US" sz="1250" dirty="0">
+                <a:solidFill>
+                  <a:srgbClr val="5F7580"/>
+                </a:solidFill>
+                <a:latin typeface="微软雅黑" pitchFamily="34" charset="0"/>
+                <a:ea typeface="微软雅黑" pitchFamily="34" charset="-122"/>
+                <a:cs typeface="微软雅黑" pitchFamily="34" charset="-120"/>
+              </a:rPr>
+              <a:t>随机交叉验证允许模型靠「认地点」拿分，按地点分组则切断这条捷径。朴素结果初看是灾难性的——而且具有误导性。</a:t>
+            </a:r>
+            <a:endParaRPr lang="en-US" sz="1250" dirty="0"/>
+          </a:p>
+        </p:txBody>
+      </p:sp>
+      <p:graphicFrame>
+        <p:nvGraphicFramePr>
+          <p:cNvPr id="24" name="Table 0"/>
+          <p:cNvGraphicFramePr>
+            <a:graphicFrameLocks noGrp="1"/>
+          </p:cNvGraphicFramePr>
+          <p:nvPr>
+            <p:extLst>
+              <p:ext uri="{D42A27DB-BD31-4B8C-83A1-F6EECF244321}">
+                <p14:modId xmlns:p14="http://schemas.microsoft.com/office/powerpoint/2010/main" val="1579011935"/>
+              </p:ext>
+            </p:extLst>
+          </p:nvPr>
+        </p:nvGraphicFramePr>
+        <p:xfrm>
+          <a:off x="548640" y="1828800"/>
+          <a:ext cx="5486400" cy="914400"/>
+        </p:xfrm>
+        <a:graphic>
+          <a:graphicData uri="http://schemas.openxmlformats.org/drawingml/2006/table">
+            <a:tbl>
+              <a:tblPr/>
+              <a:tblGrid>
+                <a:gridCol w="1920240"/>
+                <a:gridCol w="1234440"/>
+                <a:gridCol w="1234440"/>
+                <a:gridCol w="1097280"/>
+              </a:tblGrid>
+              <a:tr h="402336">
+                <a:tc>
+                  <a:txBody>
+                    <a:bodyPr/>
+                    <a:lstStyle/>
+                    <a:p>
+                      <a:pPr algn="ctr" indent="0" marL="0">
+                        <a:buNone/>
+                      </a:pPr>
+                      <a:r>
+                        <a:rPr lang="en-US" sz="1100" b="1" dirty="0">
+                          <a:solidFill>
+                            <a:srgbClr val="FFFFFF"/>
+                          </a:solidFill>
+                          <a:latin typeface="微软雅黑" pitchFamily="34" charset="0"/>
+                          <a:ea typeface="微软雅黑" pitchFamily="34" charset="-122"/>
+                          <a:cs typeface="微软雅黑" pitchFamily="34" charset="-120"/>
+                        </a:rPr>
+                        <a:t>留一地点交叉验证</a:t>
+                      </a:r>
+                      <a:endParaRPr lang="en-US" sz="1100" dirty="0">
+                        <a:latin typeface="微软雅黑" charset="0"/>
+                        <a:ea typeface="微软雅黑" charset="0"/>
+                        <a:cs typeface="微软雅黑" charset="0"/>
+                      </a:endParaRPr>
+                    </a:p>
+                  </a:txBody>
+                  <a:tcPr marL="91440" marR="91440" marT="45720" marB="45720" anchor="ctr">
+                    <a:lnL w="6350" cap="flat" cmpd="sng" algn="ctr">
+                      <a:solidFill>
+                        <a:srgbClr val="DDE5E8"/>
+                      </a:solidFill>
+                      <a:prstDash val="solid"/>
+                      <a:round/>
+                      <a:headEnd type="none" w="med" len="med"/>
+                      <a:tailEnd type="none" w="med" len="med"/>
+                    </a:lnL>
+                    <a:lnR w="6350" cap="flat" cmpd="sng" algn="ctr">
+                      <a:solidFill>
+                        <a:srgbClr val="DDE5E8"/>
+                      </a:solidFill>
+                      <a:prstDash val="solid"/>
+                      <a:round/>
+                      <a:headEnd type="none" w="med" len="med"/>
+                      <a:tailEnd type="none" w="med" len="med"/>
+                    </a:lnR>
+                    <a:lnT w="6350" cap="flat" cmpd="sng" algn="ctr">
+                      <a:solidFill>
+                        <a:srgbClr val="DDE5E8"/>
+                      </a:solidFill>
+                      <a:prstDash val="solid"/>
+                      <a:round/>
+                      <a:headEnd type="none" w="med" len="med"/>
+                      <a:tailEnd type="none" w="med" len="med"/>
+                    </a:lnT>
+                    <a:lnB w="6350" cap="flat" cmpd="sng" algn="ctr">
+                      <a:solidFill>
+                        <a:srgbClr val="DDE5E8"/>
+                      </a:solidFill>
+                      <a:prstDash val="solid"/>
+                      <a:round/>
+                      <a:headEnd type="none" w="med" len="med"/>
+                      <a:tailEnd type="none" w="med" len="med"/>
+                    </a:lnB>
+                    <a:solidFill>
+                      <a:srgbClr val="0B3C49"/>
+                    </a:solidFill>
+                  </a:tcPr>
+                </a:tc>
+                <a:tc>
+                  <a:txBody>
+                    <a:bodyPr/>
+                    <a:lstStyle/>
+                    <a:p>
+                      <a:pPr algn="ctr" indent="0" marL="0">
+                        <a:buNone/>
+                      </a:pPr>
+                      <a:r>
+                        <a:rPr lang="en-US" sz="1100" b="1" dirty="0">
+                          <a:solidFill>
+                            <a:srgbClr val="FFFFFF"/>
+                          </a:solidFill>
+                          <a:latin typeface="微软雅黑" pitchFamily="34" charset="0"/>
+                          <a:ea typeface="微软雅黑" pitchFamily="34" charset="-122"/>
+                          <a:cs typeface="微软雅黑" pitchFamily="34" charset="-120"/>
+                        </a:rPr>
+                        <a:t>LOLO AUC</a:t>
+                      </a:r>
+                      <a:endParaRPr lang="en-US" sz="1100" dirty="0">
+                        <a:latin typeface="微软雅黑" charset="0"/>
+                        <a:ea typeface="微软雅黑" charset="0"/>
+                        <a:cs typeface="微软雅黑" charset="0"/>
+                      </a:endParaRPr>
+                    </a:p>
+                  </a:txBody>
+                  <a:tcPr marL="91440" marR="91440" marT="45720" marB="45720" anchor="ctr">
+                    <a:lnL w="6350" cap="flat" cmpd="sng" algn="ctr">
+                      <a:solidFill>
+                        <a:srgbClr val="DDE5E8"/>
+                      </a:solidFill>
+                      <a:prstDash val="solid"/>
+                      <a:round/>
+                      <a:headEnd type="none" w="med" len="med"/>
+                      <a:tailEnd type="none" w="med" len="med"/>
+                    </a:lnL>
+                    <a:lnR w="6350" cap="flat" cmpd="sng" algn="ctr">
+                      <a:solidFill>
+                        <a:srgbClr val="DDE5E8"/>
+                      </a:solidFill>
+                      <a:prstDash val="solid"/>
+                      <a:round/>
+                      <a:headEnd type="none" w="med" len="med"/>
+                      <a:tailEnd type="none" w="med" len="med"/>
+                    </a:lnR>
+                    <a:lnT w="6350" cap="flat" cmpd="sng" algn="ctr">
+                      <a:solidFill>
+                        <a:srgbClr val="DDE5E8"/>
+                      </a:solidFill>
+                      <a:prstDash val="solid"/>
+                      <a:round/>
+                      <a:headEnd type="none" w="med" len="med"/>
+                      <a:tailEnd type="none" w="med" len="med"/>
+                    </a:lnT>
+                    <a:lnB w="6350" cap="flat" cmpd="sng" algn="ctr">
+                      <a:solidFill>
+                        <a:srgbClr val="DDE5E8"/>
+                      </a:solidFill>
+                      <a:prstDash val="solid"/>
+                      <a:round/>
+                      <a:headEnd type="none" w="med" len="med"/>
+                      <a:tailEnd type="none" w="med" len="med"/>
+                    </a:lnB>
+                    <a:solidFill>
+                      <a:srgbClr val="0B3C49"/>
+                    </a:solidFill>
+                  </a:tcPr>
+                </a:tc>
+                <a:tc>
+                  <a:txBody>
+                    <a:bodyPr/>
+                    <a:lstStyle/>
+                    <a:p>
+                      <a:pPr algn="ctr" indent="0" marL="0">
+                        <a:buNone/>
+                      </a:pPr>
+                      <a:r>
+                        <a:rPr lang="en-US" sz="1100" b="1" dirty="0">
+                          <a:solidFill>
+                            <a:srgbClr val="FFFFFF"/>
+                          </a:solidFill>
+                          <a:latin typeface="微软雅黑" pitchFamily="34" charset="0"/>
+                          <a:ea typeface="微软雅黑" pitchFamily="34" charset="-122"/>
+                          <a:cs typeface="微软雅黑" pitchFamily="34" charset="-120"/>
+                        </a:rPr>
+                        <a:t>随机 CV</a:t>
+                      </a:r>
+                      <a:endParaRPr lang="en-US" sz="1100" dirty="0">
+                        <a:latin typeface="微软雅黑" charset="0"/>
+                        <a:ea typeface="微软雅黑" charset="0"/>
+                        <a:cs typeface="微软雅黑" charset="0"/>
+                      </a:endParaRPr>
+                    </a:p>
+                  </a:txBody>
+                  <a:tcPr marL="91440" marR="91440" marT="45720" marB="45720" anchor="ctr">
+                    <a:lnL w="6350" cap="flat" cmpd="sng" algn="ctr">
+                      <a:solidFill>
+                        <a:srgbClr val="DDE5E8"/>
+                      </a:solidFill>
+                      <a:prstDash val="solid"/>
+                      <a:round/>
+                      <a:headEnd type="none" w="med" len="med"/>
+                      <a:tailEnd type="none" w="med" len="med"/>
+                    </a:lnL>
+                    <a:lnR w="6350" cap="flat" cmpd="sng" algn="ctr">
+                      <a:solidFill>
+                        <a:srgbClr val="DDE5E8"/>
+                      </a:solidFill>
+                      <a:prstDash val="solid"/>
+                      <a:round/>
+                      <a:headEnd type="none" w="med" len="med"/>
+                      <a:tailEnd type="none" w="med" len="med"/>
+                    </a:lnR>
+                    <a:lnT w="6350" cap="flat" cmpd="sng" algn="ctr">
+                      <a:solidFill>
+                        <a:srgbClr val="DDE5E8"/>
+                      </a:solidFill>
+                      <a:prstDash val="solid"/>
+                      <a:round/>
+                      <a:headEnd type="none" w="med" len="med"/>
+                      <a:tailEnd type="none" w="med" len="med"/>
+                    </a:lnT>
+                    <a:lnB w="6350" cap="flat" cmpd="sng" algn="ctr">
+                      <a:solidFill>
+                        <a:srgbClr val="DDE5E8"/>
+                      </a:solidFill>
+                      <a:prstDash val="solid"/>
+                      <a:round/>
+                      <a:headEnd type="none" w="med" len="med"/>
+                      <a:tailEnd type="none" w="med" len="med"/>
+                    </a:lnB>
+                    <a:solidFill>
+                      <a:srgbClr val="0B3C49"/>
+                    </a:solidFill>
+                  </a:tcPr>
+                </a:tc>
+                <a:tc>
+                  <a:txBody>
+                    <a:bodyPr/>
+                    <a:lstStyle/>
+                    <a:p>
+                      <a:pPr algn="ctr" indent="0" marL="0">
+                        <a:buNone/>
+                      </a:pPr>
+                      <a:r>
+                        <a:rPr lang="en-US" sz="1100" b="1" dirty="0">
+                          <a:solidFill>
+                            <a:srgbClr val="FFFFFF"/>
+                          </a:solidFill>
+                          <a:latin typeface="微软雅黑" pitchFamily="34" charset="0"/>
+                          <a:ea typeface="微软雅黑" pitchFamily="34" charset="-122"/>
+                          <a:cs typeface="微软雅黑" pitchFamily="34" charset="-120"/>
+                        </a:rPr>
+                        <a:t>差</a:t>
+                      </a:r>
+                      <a:endParaRPr lang="en-US" sz="1100" dirty="0">
+                        <a:latin typeface="微软雅黑" charset="0"/>
+                        <a:ea typeface="微软雅黑" charset="0"/>
+                        <a:cs typeface="微软雅黑" charset="0"/>
+                      </a:endParaRPr>
+                    </a:p>
+                  </a:txBody>
+                  <a:tcPr marL="91440" marR="91440" marT="45720" marB="45720" anchor="ctr">
+                    <a:lnL w="6350" cap="flat" cmpd="sng" algn="ctr">
+                      <a:solidFill>
+                        <a:srgbClr val="DDE5E8"/>
+                      </a:solidFill>
+                      <a:prstDash val="solid"/>
+                      <a:round/>
+                      <a:headEnd type="none" w="med" len="med"/>
+                      <a:tailEnd type="none" w="med" len="med"/>
+                    </a:lnL>
+                    <a:lnR w="6350" cap="flat" cmpd="sng" algn="ctr">
+                      <a:solidFill>
+                        <a:srgbClr val="DDE5E8"/>
+                      </a:solidFill>
+                      <a:prstDash val="solid"/>
+                      <a:round/>
+                      <a:headEnd type="none" w="med" len="med"/>
+                      <a:tailEnd type="none" w="med" len="med"/>
+                    </a:lnR>
+                    <a:lnT w="6350" cap="flat" cmpd="sng" algn="ctr">
+                      <a:solidFill>
+                        <a:srgbClr val="DDE5E8"/>
+                      </a:solidFill>
+                      <a:prstDash val="solid"/>
+                      <a:round/>
+                      <a:headEnd type="none" w="med" len="med"/>
+                      <a:tailEnd type="none" w="med" len="med"/>
+                    </a:lnT>
+                    <a:lnB w="6350" cap="flat" cmpd="sng" algn="ctr">
+                      <a:solidFill>
+                        <a:srgbClr val="DDE5E8"/>
+                      </a:solidFill>
+                      <a:prstDash val="solid"/>
+                      <a:round/>
+                      <a:headEnd type="none" w="med" len="med"/>
+                      <a:tailEnd type="none" w="med" len="med"/>
+                    </a:lnB>
+                    <a:solidFill>
+                      <a:srgbClr val="0B3C49"/>
+                    </a:solidFill>
+                  </a:tcPr>
+                </a:tc>
+              </a:tr>
+              <a:tr h="402336">
+                <a:tc>
+                  <a:txBody>
+                    <a:bodyPr/>
+                    <a:lstStyle/>
+                    <a:p>
+                      <a:pPr algn="ctr" indent="0" marL="0">
+                        <a:buNone/>
+                      </a:pPr>
+                      <a:r>
+                        <a:rPr lang="en-US" sz="1100" dirty="0">
+                          <a:solidFill>
+                            <a:srgbClr val="16252C"/>
+                          </a:solidFill>
+                          <a:latin typeface="微软雅黑" pitchFamily="34" charset="0"/>
+                          <a:ea typeface="微软雅黑" pitchFamily="34" charset="-122"/>
+                          <a:cs typeface="微软雅黑" pitchFamily="34" charset="-120"/>
+                        </a:rPr>
+                        <a:t>SVM-RBF</a:t>
+                      </a:r>
+                      <a:endParaRPr lang="en-US" sz="1100" dirty="0">
+                        <a:latin typeface="微软雅黑" charset="0"/>
+                        <a:ea typeface="微软雅黑" charset="0"/>
+                        <a:cs typeface="微软雅黑" charset="0"/>
+                      </a:endParaRPr>
+                    </a:p>
+                  </a:txBody>
+                  <a:tcPr marL="91440" marR="91440" marT="45720" marB="45720" anchor="ctr">
+                    <a:lnL w="6350" cap="flat" cmpd="sng" algn="ctr">
+                      <a:solidFill>
+                        <a:srgbClr val="DDE5E8"/>
+                      </a:solidFill>
+                      <a:prstDash val="solid"/>
+                      <a:round/>
+                      <a:headEnd type="none" w="med" len="med"/>
+                      <a:tailEnd type="none" w="med" len="med"/>
+                    </a:lnL>
+                    <a:lnR w="6350" cap="flat" cmpd="sng" algn="ctr">
+                      <a:solidFill>
+                        <a:srgbClr val="DDE5E8"/>
+                      </a:solidFill>
+                      <a:prstDash val="solid"/>
+                      <a:round/>
+                      <a:headEnd type="none" w="med" len="med"/>
+                      <a:tailEnd type="none" w="med" len="med"/>
+                    </a:lnR>
+                    <a:lnT w="6350" cap="flat" cmpd="sng" algn="ctr">
+                      <a:solidFill>
+                        <a:srgbClr val="DDE5E8"/>
+                      </a:solidFill>
+                      <a:prstDash val="solid"/>
+                      <a:round/>
+                      <a:headEnd type="none" w="med" len="med"/>
+                      <a:tailEnd type="none" w="med" len="med"/>
+                    </a:lnT>
+                    <a:lnB w="6350" cap="flat" cmpd="sng" algn="ctr">
+                      <a:solidFill>
+                        <a:srgbClr val="DDE5E8"/>
+                      </a:solidFill>
+                      <a:prstDash val="solid"/>
+                      <a:round/>
+                      <a:headEnd type="none" w="med" len="med"/>
+                      <a:tailEnd type="none" w="med" len="med"/>
+                    </a:lnB>
+                  </a:tcPr>
+                </a:tc>
+                <a:tc>
+                  <a:txBody>
+                    <a:bodyPr/>
+                    <a:lstStyle/>
+                    <a:p>
+                      <a:pPr algn="ctr" indent="0" marL="0">
+                        <a:buNone/>
+                      </a:pPr>
+                      <a:r>
+                        <a:rPr lang="en-US" sz="1100" b="1" dirty="0">
+                          <a:solidFill>
+                            <a:srgbClr val="D2603A"/>
+                          </a:solidFill>
+                          <a:latin typeface="微软雅黑" pitchFamily="34" charset="0"/>
+                          <a:ea typeface="微软雅黑" pitchFamily="34" charset="-122"/>
+                          <a:cs typeface="微软雅黑" pitchFamily="34" charset="-120"/>
+                        </a:rPr>
+                        <a:t>0.443</a:t>
+                      </a:r>
+                      <a:endParaRPr lang="en-US" sz="1100" dirty="0">
+                        <a:latin typeface="微软雅黑" charset="0"/>
+                        <a:ea typeface="微软雅黑" charset="0"/>
+                        <a:cs typeface="微软雅黑" charset="0"/>
+                      </a:endParaRPr>
+                    </a:p>
+                  </a:txBody>
+                  <a:tcPr marL="91440" marR="91440" marT="45720" marB="45720" anchor="ctr">
+                    <a:lnL w="6350" cap="flat" cmpd="sng" algn="ctr">
+                      <a:solidFill>
+                        <a:srgbClr val="DDE5E8"/>
+                      </a:solidFill>
+                      <a:prstDash val="solid"/>
+                      <a:round/>
+                      <a:headEnd type="none" w="med" len="med"/>
+                      <a:tailEnd type="none" w="med" len="med"/>
+                    </a:lnL>
+                    <a:lnR w="6350" cap="flat" cmpd="sng" algn="ctr">
+                      <a:solidFill>
+                        <a:srgbClr val="DDE5E8"/>
+                      </a:solidFill>
+                      <a:prstDash val="solid"/>
+                      <a:round/>
+                      <a:headEnd type="none" w="med" len="med"/>
+                      <a:tailEnd type="none" w="med" len="med"/>
+                    </a:lnR>
+                    <a:lnT w="6350" cap="flat" cmpd="sng" algn="ctr">
+                      <a:solidFill>
+                        <a:srgbClr val="DDE5E8"/>
+                      </a:solidFill>
+                      <a:prstDash val="solid"/>
+                      <a:round/>
+                      <a:headEnd type="none" w="med" len="med"/>
+                      <a:tailEnd type="none" w="med" len="med"/>
+                    </a:lnT>
+                    <a:lnB w="6350" cap="flat" cmpd="sng" algn="ctr">
+                      <a:solidFill>
+                        <a:srgbClr val="DDE5E8"/>
+                      </a:solidFill>
+                      <a:prstDash val="solid"/>
+                      <a:round/>
+                      <a:headEnd type="none" w="med" len="med"/>
+                      <a:tailEnd type="none" w="med" len="med"/>
+                    </a:lnB>
+                  </a:tcPr>
+                </a:tc>
+                <a:tc>
+                  <a:txBody>
+                    <a:bodyPr/>
+                    <a:lstStyle/>
+                    <a:p>
+                      <a:pPr algn="ctr" indent="0" marL="0">
+                        <a:buNone/>
+                      </a:pPr>
+                      <a:r>
+                        <a:rPr lang="en-US" sz="1100" dirty="0">
+                          <a:solidFill>
+                            <a:srgbClr val="16252C"/>
+                          </a:solidFill>
+                          <a:latin typeface="微软雅黑" pitchFamily="34" charset="0"/>
+                          <a:ea typeface="微软雅黑" pitchFamily="34" charset="-122"/>
+                          <a:cs typeface="微软雅黑" pitchFamily="34" charset="-120"/>
+                        </a:rPr>
+                        <a:t>0.853</a:t>
+                      </a:r>
+                      <a:endParaRPr lang="en-US" sz="1100" dirty="0">
+                        <a:latin typeface="微软雅黑" charset="0"/>
+                        <a:ea typeface="微软雅黑" charset="0"/>
+                        <a:cs typeface="微软雅黑" charset="0"/>
+                      </a:endParaRPr>
+                    </a:p>
+                  </a:txBody>
+                  <a:tcPr marL="91440" marR="91440" marT="45720" marB="45720" anchor="ctr">
+                    <a:lnL w="6350" cap="flat" cmpd="sng" algn="ctr">
+                      <a:solidFill>
+                        <a:srgbClr val="DDE5E8"/>
+                      </a:solidFill>
+                      <a:prstDash val="solid"/>
+                      <a:round/>
+                      <a:headEnd type="none" w="med" len="med"/>
+                      <a:tailEnd type="none" w="med" len="med"/>
+                    </a:lnL>
+                    <a:lnR w="6350" cap="flat" cmpd="sng" algn="ctr">
+                      <a:solidFill>
+                        <a:srgbClr val="DDE5E8"/>
+                      </a:solidFill>
+                      <a:prstDash val="solid"/>
+                      <a:round/>
+                      <a:headEnd type="none" w="med" len="med"/>
+                      <a:tailEnd type="none" w="med" len="med"/>
+                    </a:lnR>
+                    <a:lnT w="6350" cap="flat" cmpd="sng" algn="ctr">
+                      <a:solidFill>
+                        <a:srgbClr val="DDE5E8"/>
+                      </a:solidFill>
+                      <a:prstDash val="solid"/>
+                      <a:round/>
+                      <a:headEnd type="none" w="med" len="med"/>
+                      <a:tailEnd type="none" w="med" len="med"/>
+                    </a:lnT>
+                    <a:lnB w="6350" cap="flat" cmpd="sng" algn="ctr">
+                      <a:solidFill>
+                        <a:srgbClr val="DDE5E8"/>
+                      </a:solidFill>
+                      <a:prstDash val="solid"/>
+                      <a:round/>
+                      <a:headEnd type="none" w="med" len="med"/>
+                      <a:tailEnd type="none" w="med" len="med"/>
+                    </a:lnB>
+                  </a:tcPr>
+                </a:tc>
+                <a:tc>
+                  <a:txBody>
+                    <a:bodyPr/>
+                    <a:lstStyle/>
+                    <a:p>
+                      <a:pPr algn="ctr" indent="0" marL="0">
+                        <a:buNone/>
+                      </a:pPr>
+                      <a:r>
+                        <a:rPr lang="en-US" sz="1100" dirty="0">
+                          <a:solidFill>
+                            <a:srgbClr val="D2603A"/>
+                          </a:solidFill>
+                          <a:latin typeface="微软雅黑" pitchFamily="34" charset="0"/>
+                          <a:ea typeface="微软雅黑" pitchFamily="34" charset="-122"/>
+                          <a:cs typeface="微软雅黑" pitchFamily="34" charset="-120"/>
+                        </a:rPr>
+                        <a:t>−0.409</a:t>
+                      </a:r>
+                      <a:endParaRPr lang="en-US" sz="1100" dirty="0">
+                        <a:latin typeface="微软雅黑" charset="0"/>
+                        <a:ea typeface="微软雅黑" charset="0"/>
+                        <a:cs typeface="微软雅黑" charset="0"/>
+                      </a:endParaRPr>
+                    </a:p>
+                  </a:txBody>
+                  <a:tcPr marL="91440" marR="91440" marT="45720" marB="45720" anchor="ctr">
+                    <a:lnL w="6350" cap="flat" cmpd="sng" algn="ctr">
+                      <a:solidFill>
+                        <a:srgbClr val="DDE5E8"/>
+                      </a:solidFill>
+                      <a:prstDash val="solid"/>
+                      <a:round/>
+                      <a:headEnd type="none" w="med" len="med"/>
+                      <a:tailEnd type="none" w="med" len="med"/>
+                    </a:lnL>
+                    <a:lnR w="6350" cap="flat" cmpd="sng" algn="ctr">
+                      <a:solidFill>
+                        <a:srgbClr val="DDE5E8"/>
+                      </a:solidFill>
+                      <a:prstDash val="solid"/>
+                      <a:round/>
+                      <a:headEnd type="none" w="med" len="med"/>
+                      <a:tailEnd type="none" w="med" len="med"/>
+                    </a:lnR>
+                    <a:lnT w="6350" cap="flat" cmpd="sng" algn="ctr">
+                      <a:solidFill>
+                        <a:srgbClr val="DDE5E8"/>
+                      </a:solidFill>
+                      <a:prstDash val="solid"/>
+                      <a:round/>
+                      <a:headEnd type="none" w="med" len="med"/>
+                      <a:tailEnd type="none" w="med" len="med"/>
+                    </a:lnT>
+                    <a:lnB w="6350" cap="flat" cmpd="sng" algn="ctr">
+                      <a:solidFill>
+                        <a:srgbClr val="DDE5E8"/>
+                      </a:solidFill>
+                      <a:prstDash val="solid"/>
+                      <a:round/>
+                      <a:headEnd type="none" w="med" len="med"/>
+                      <a:tailEnd type="none" w="med" len="med"/>
+                    </a:lnB>
+                  </a:tcPr>
+                </a:tc>
+              </a:tr>
+              <a:tr h="402336">
+                <a:tc>
+                  <a:txBody>
+                    <a:bodyPr/>
+                    <a:lstStyle/>
+                    <a:p>
+                      <a:pPr algn="ctr" indent="0" marL="0">
+                        <a:buNone/>
+                      </a:pPr>
+                      <a:r>
+                        <a:rPr lang="en-US" sz="1100" dirty="0">
+                          <a:solidFill>
+                            <a:srgbClr val="16252C"/>
+                          </a:solidFill>
+                          <a:latin typeface="微软雅黑" pitchFamily="34" charset="0"/>
+                          <a:ea typeface="微软雅黑" pitchFamily="34" charset="-122"/>
+                          <a:cs typeface="微软雅黑" pitchFamily="34" charset="-120"/>
+                        </a:rPr>
+                        <a:t>ExtraTrees</a:t>
+                      </a:r>
+                      <a:endParaRPr lang="en-US" sz="1100" dirty="0">
+                        <a:latin typeface="微软雅黑" charset="0"/>
+                        <a:ea typeface="微软雅黑" charset="0"/>
+                        <a:cs typeface="微软雅黑" charset="0"/>
+                      </a:endParaRPr>
+                    </a:p>
+                  </a:txBody>
+                  <a:tcPr marL="91440" marR="91440" marT="45720" marB="45720" anchor="ctr">
+                    <a:lnL w="6350" cap="flat" cmpd="sng" algn="ctr">
+                      <a:solidFill>
+                        <a:srgbClr val="DDE5E8"/>
+                      </a:solidFill>
+                      <a:prstDash val="solid"/>
+                      <a:round/>
+                      <a:headEnd type="none" w="med" len="med"/>
+                      <a:tailEnd type="none" w="med" len="med"/>
+                    </a:lnL>
+                    <a:lnR w="6350" cap="flat" cmpd="sng" algn="ctr">
+                      <a:solidFill>
+                        <a:srgbClr val="DDE5E8"/>
+                      </a:solidFill>
+                      <a:prstDash val="solid"/>
+                      <a:round/>
+                      <a:headEnd type="none" w="med" len="med"/>
+                      <a:tailEnd type="none" w="med" len="med"/>
+                    </a:lnR>
+                    <a:lnT w="6350" cap="flat" cmpd="sng" algn="ctr">
+                      <a:solidFill>
+                        <a:srgbClr val="DDE5E8"/>
+                      </a:solidFill>
+                      <a:prstDash val="solid"/>
+                      <a:round/>
+                      <a:headEnd type="none" w="med" len="med"/>
+                      <a:tailEnd type="none" w="med" len="med"/>
+                    </a:lnT>
+                    <a:lnB w="6350" cap="flat" cmpd="sng" algn="ctr">
+                      <a:solidFill>
+                        <a:srgbClr val="DDE5E8"/>
+                      </a:solidFill>
+                      <a:prstDash val="solid"/>
+                      <a:round/>
+                      <a:headEnd type="none" w="med" len="med"/>
+                      <a:tailEnd type="none" w="med" len="med"/>
+                    </a:lnB>
+                  </a:tcPr>
+                </a:tc>
+                <a:tc>
+                  <a:txBody>
+                    <a:bodyPr/>
+                    <a:lstStyle/>
+                    <a:p>
+                      <a:pPr algn="ctr" indent="0" marL="0">
+                        <a:buNone/>
+                      </a:pPr>
+                      <a:r>
+                        <a:rPr lang="en-US" sz="1100" b="1" dirty="0">
+                          <a:solidFill>
+                            <a:srgbClr val="D2603A"/>
+                          </a:solidFill>
+                          <a:latin typeface="微软雅黑" pitchFamily="34" charset="0"/>
+                          <a:ea typeface="微软雅黑" pitchFamily="34" charset="-122"/>
+                          <a:cs typeface="微软雅黑" pitchFamily="34" charset="-120"/>
+                        </a:rPr>
+                        <a:t>0.443</a:t>
+                      </a:r>
+                      <a:endParaRPr lang="en-US" sz="1100" dirty="0">
+                        <a:latin typeface="微软雅黑" charset="0"/>
+                        <a:ea typeface="微软雅黑" charset="0"/>
+                        <a:cs typeface="微软雅黑" charset="0"/>
+                      </a:endParaRPr>
+                    </a:p>
+                  </a:txBody>
+                  <a:tcPr marL="91440" marR="91440" marT="45720" marB="45720" anchor="ctr">
+                    <a:lnL w="6350" cap="flat" cmpd="sng" algn="ctr">
+                      <a:solidFill>
+                        <a:srgbClr val="DDE5E8"/>
+                      </a:solidFill>
+                      <a:prstDash val="solid"/>
+                      <a:round/>
+                      <a:headEnd type="none" w="med" len="med"/>
+                      <a:tailEnd type="none" w="med" len="med"/>
+                    </a:lnL>
+                    <a:lnR w="6350" cap="flat" cmpd="sng" algn="ctr">
+                      <a:solidFill>
+                        <a:srgbClr val="DDE5E8"/>
+                      </a:solidFill>
+                      <a:prstDash val="solid"/>
+                      <a:round/>
+                      <a:headEnd type="none" w="med" len="med"/>
+                      <a:tailEnd type="none" w="med" len="med"/>
+                    </a:lnR>
+                    <a:lnT w="6350" cap="flat" cmpd="sng" algn="ctr">
+                      <a:solidFill>
+                        <a:srgbClr val="DDE5E8"/>
+                      </a:solidFill>
+                      <a:prstDash val="solid"/>
+                      <a:round/>
+                      <a:headEnd type="none" w="med" len="med"/>
+                      <a:tailEnd type="none" w="med" len="med"/>
+                    </a:lnT>
+                    <a:lnB w="6350" cap="flat" cmpd="sng" algn="ctr">
+                      <a:solidFill>
+                        <a:srgbClr val="DDE5E8"/>
+                      </a:solidFill>
+                      <a:prstDash val="solid"/>
+                      <a:round/>
+                      <a:headEnd type="none" w="med" len="med"/>
+                      <a:tailEnd type="none" w="med" len="med"/>
+                    </a:lnB>
+                  </a:tcPr>
+                </a:tc>
+                <a:tc>
+                  <a:txBody>
+                    <a:bodyPr/>
+                    <a:lstStyle/>
+                    <a:p>
+                      <a:pPr algn="ctr" indent="0" marL="0">
+                        <a:buNone/>
+                      </a:pPr>
+                      <a:r>
+                        <a:rPr lang="en-US" sz="1100" dirty="0">
+                          <a:solidFill>
+                            <a:srgbClr val="16252C"/>
+                          </a:solidFill>
+                          <a:latin typeface="微软雅黑" pitchFamily="34" charset="0"/>
+                          <a:ea typeface="微软雅黑" pitchFamily="34" charset="-122"/>
+                          <a:cs typeface="微软雅黑" pitchFamily="34" charset="-120"/>
+                        </a:rPr>
+                        <a:t>0.842</a:t>
+                      </a:r>
+                      <a:endParaRPr lang="en-US" sz="1100" dirty="0">
+                        <a:latin typeface="微软雅黑" charset="0"/>
+                        <a:ea typeface="微软雅黑" charset="0"/>
+                        <a:cs typeface="微软雅黑" charset="0"/>
+                      </a:endParaRPr>
+                    </a:p>
+                  </a:txBody>
+                  <a:tcPr marL="91440" marR="91440" marT="45720" marB="45720" anchor="ctr">
+                    <a:lnL w="6350" cap="flat" cmpd="sng" algn="ctr">
+                      <a:solidFill>
+                        <a:srgbClr val="DDE5E8"/>
+                      </a:solidFill>
+                      <a:prstDash val="solid"/>
+                      <a:round/>
+                      <a:headEnd type="none" w="med" len="med"/>
+                      <a:tailEnd type="none" w="med" len="med"/>
+                    </a:lnL>
+                    <a:lnR w="6350" cap="flat" cmpd="sng" algn="ctr">
+                      <a:solidFill>
+                        <a:srgbClr val="DDE5E8"/>
+                      </a:solidFill>
+                      <a:prstDash val="solid"/>
+                      <a:round/>
+                      <a:headEnd type="none" w="med" len="med"/>
+                      <a:tailEnd type="none" w="med" len="med"/>
+                    </a:lnR>
+                    <a:lnT w="6350" cap="flat" cmpd="sng" algn="ctr">
+                      <a:solidFill>
+                        <a:srgbClr val="DDE5E8"/>
+                      </a:solidFill>
+                      <a:prstDash val="solid"/>
+                      <a:round/>
+                      <a:headEnd type="none" w="med" len="med"/>
+                      <a:tailEnd type="none" w="med" len="med"/>
+                    </a:lnT>
+                    <a:lnB w="6350" cap="flat" cmpd="sng" algn="ctr">
+                      <a:solidFill>
+                        <a:srgbClr val="DDE5E8"/>
+                      </a:solidFill>
+                      <a:prstDash val="solid"/>
+                      <a:round/>
+                      <a:headEnd type="none" w="med" len="med"/>
+                      <a:tailEnd type="none" w="med" len="med"/>
+                    </a:lnB>
+                  </a:tcPr>
+                </a:tc>
+                <a:tc>
+                  <a:txBody>
+                    <a:bodyPr/>
+                    <a:lstStyle/>
+                    <a:p>
+                      <a:pPr algn="ctr" indent="0" marL="0">
+                        <a:buNone/>
+                      </a:pPr>
+                      <a:r>
+                        <a:rPr lang="en-US" sz="1100" dirty="0">
+                          <a:solidFill>
+                            <a:srgbClr val="D2603A"/>
+                          </a:solidFill>
+                          <a:latin typeface="微软雅黑" pitchFamily="34" charset="0"/>
+                          <a:ea typeface="微软雅黑" pitchFamily="34" charset="-122"/>
+                          <a:cs typeface="微软雅黑" pitchFamily="34" charset="-120"/>
+                        </a:rPr>
+                        <a:t>−0.399</a:t>
+                      </a:r>
+                      <a:endParaRPr lang="en-US" sz="1100" dirty="0">
+                        <a:latin typeface="微软雅黑" charset="0"/>
+                        <a:ea typeface="微软雅黑" charset="0"/>
+                        <a:cs typeface="微软雅黑" charset="0"/>
+                      </a:endParaRPr>
+                    </a:p>
+                  </a:txBody>
+                  <a:tcPr marL="91440" marR="91440" marT="45720" marB="45720" anchor="ctr">
+                    <a:lnL w="6350" cap="flat" cmpd="sng" algn="ctr">
+                      <a:solidFill>
+                        <a:srgbClr val="DDE5E8"/>
+                      </a:solidFill>
+                      <a:prstDash val="solid"/>
+                      <a:round/>
+                      <a:headEnd type="none" w="med" len="med"/>
+                      <a:tailEnd type="none" w="med" len="med"/>
+                    </a:lnL>
+                    <a:lnR w="6350" cap="flat" cmpd="sng" algn="ctr">
+                      <a:solidFill>
+                        <a:srgbClr val="DDE5E8"/>
+                      </a:solidFill>
+                      <a:prstDash val="solid"/>
+                      <a:round/>
+                      <a:headEnd type="none" w="med" len="med"/>
+                      <a:tailEnd type="none" w="med" len="med"/>
+                    </a:lnR>
+                    <a:lnT w="6350" cap="flat" cmpd="sng" algn="ctr">
+                      <a:solidFill>
+                        <a:srgbClr val="DDE5E8"/>
+                      </a:solidFill>
+                      <a:prstDash val="solid"/>
+                      <a:round/>
+                      <a:headEnd type="none" w="med" len="med"/>
+                      <a:tailEnd type="none" w="med" len="med"/>
+                    </a:lnT>
+                    <a:lnB w="6350" cap="flat" cmpd="sng" algn="ctr">
+                      <a:solidFill>
+                        <a:srgbClr val="DDE5E8"/>
+                      </a:solidFill>
+                      <a:prstDash val="solid"/>
+                      <a:round/>
+                      <a:headEnd type="none" w="med" len="med"/>
+                      <a:tailEnd type="none" w="med" len="med"/>
+                    </a:lnB>
+                  </a:tcPr>
+                </a:tc>
+              </a:tr>
+              <a:tr h="402336">
+                <a:tc>
+                  <a:txBody>
+                    <a:bodyPr/>
+                    <a:lstStyle/>
+                    <a:p>
+                      <a:pPr algn="ctr" indent="0" marL="0">
+                        <a:buNone/>
+                      </a:pPr>
+                      <a:r>
+                        <a:rPr lang="en-US" sz="1100" dirty="0">
+                          <a:solidFill>
+                            <a:srgbClr val="16252C"/>
+                          </a:solidFill>
+                          <a:latin typeface="微软雅黑" pitchFamily="34" charset="0"/>
+                          <a:ea typeface="微软雅黑" pitchFamily="34" charset="-122"/>
+                          <a:cs typeface="微软雅黑" pitchFamily="34" charset="-120"/>
+                        </a:rPr>
+                        <a:t>L1-LR</a:t>
+                      </a:r>
+                      <a:endParaRPr lang="en-US" sz="1100" dirty="0">
+                        <a:latin typeface="微软雅黑" charset="0"/>
+                        <a:ea typeface="微软雅黑" charset="0"/>
+                        <a:cs typeface="微软雅黑" charset="0"/>
+                      </a:endParaRPr>
+                    </a:p>
+                  </a:txBody>
+                  <a:tcPr marL="91440" marR="91440" marT="45720" marB="45720" anchor="ctr">
+                    <a:lnL w="6350" cap="flat" cmpd="sng" algn="ctr">
+                      <a:solidFill>
+                        <a:srgbClr val="DDE5E8"/>
+                      </a:solidFill>
+                      <a:prstDash val="solid"/>
+                      <a:round/>
+                      <a:headEnd type="none" w="med" len="med"/>
+                      <a:tailEnd type="none" w="med" len="med"/>
+                    </a:lnL>
+                    <a:lnR w="6350" cap="flat" cmpd="sng" algn="ctr">
+                      <a:solidFill>
+                        <a:srgbClr val="DDE5E8"/>
+                      </a:solidFill>
+                      <a:prstDash val="solid"/>
+                      <a:round/>
+                      <a:headEnd type="none" w="med" len="med"/>
+                      <a:tailEnd type="none" w="med" len="med"/>
+                    </a:lnR>
+                    <a:lnT w="6350" cap="flat" cmpd="sng" algn="ctr">
+                      <a:solidFill>
+                        <a:srgbClr val="DDE5E8"/>
+                      </a:solidFill>
+                      <a:prstDash val="solid"/>
+                      <a:round/>
+                      <a:headEnd type="none" w="med" len="med"/>
+                      <a:tailEnd type="none" w="med" len="med"/>
+                    </a:lnT>
+                    <a:lnB w="6350" cap="flat" cmpd="sng" algn="ctr">
+                      <a:solidFill>
+                        <a:srgbClr val="DDE5E8"/>
+                      </a:solidFill>
+                      <a:prstDash val="solid"/>
+                      <a:round/>
+                      <a:headEnd type="none" w="med" len="med"/>
+                      <a:tailEnd type="none" w="med" len="med"/>
+                    </a:lnB>
+                  </a:tcPr>
+                </a:tc>
+                <a:tc>
+                  <a:txBody>
+                    <a:bodyPr/>
+                    <a:lstStyle/>
+                    <a:p>
+                      <a:pPr algn="ctr" indent="0" marL="0">
+                        <a:buNone/>
+                      </a:pPr>
+                      <a:r>
+                        <a:rPr lang="en-US" sz="1100" b="1" dirty="0">
+                          <a:solidFill>
+                            <a:srgbClr val="D2603A"/>
+                          </a:solidFill>
+                          <a:latin typeface="微软雅黑" pitchFamily="34" charset="0"/>
+                          <a:ea typeface="微软雅黑" pitchFamily="34" charset="-122"/>
+                          <a:cs typeface="微软雅黑" pitchFamily="34" charset="-120"/>
+                        </a:rPr>
+                        <a:t>0.469</a:t>
+                      </a:r>
+                      <a:endParaRPr lang="en-US" sz="1100" dirty="0">
+                        <a:latin typeface="微软雅黑" charset="0"/>
+                        <a:ea typeface="微软雅黑" charset="0"/>
+                        <a:cs typeface="微软雅黑" charset="0"/>
+                      </a:endParaRPr>
+                    </a:p>
+                  </a:txBody>
+                  <a:tcPr marL="91440" marR="91440" marT="45720" marB="45720" anchor="ctr">
+                    <a:lnL w="6350" cap="flat" cmpd="sng" algn="ctr">
+                      <a:solidFill>
+                        <a:srgbClr val="DDE5E8"/>
+                      </a:solidFill>
+                      <a:prstDash val="solid"/>
+                      <a:round/>
+                      <a:headEnd type="none" w="med" len="med"/>
+                      <a:tailEnd type="none" w="med" len="med"/>
+                    </a:lnL>
+                    <a:lnR w="6350" cap="flat" cmpd="sng" algn="ctr">
+                      <a:solidFill>
+                        <a:srgbClr val="DDE5E8"/>
+                      </a:solidFill>
+                      <a:prstDash val="solid"/>
+                      <a:round/>
+                      <a:headEnd type="none" w="med" len="med"/>
+                      <a:tailEnd type="none" w="med" len="med"/>
+                    </a:lnR>
+                    <a:lnT w="6350" cap="flat" cmpd="sng" algn="ctr">
+                      <a:solidFill>
+                        <a:srgbClr val="DDE5E8"/>
+                      </a:solidFill>
+                      <a:prstDash val="solid"/>
+                      <a:round/>
+                      <a:headEnd type="none" w="med" len="med"/>
+                      <a:tailEnd type="none" w="med" len="med"/>
+                    </a:lnT>
+                    <a:lnB w="6350" cap="flat" cmpd="sng" algn="ctr">
+                      <a:solidFill>
+                        <a:srgbClr val="DDE5E8"/>
+                      </a:solidFill>
+                      <a:prstDash val="solid"/>
+                      <a:round/>
+                      <a:headEnd type="none" w="med" len="med"/>
+                      <a:tailEnd type="none" w="med" len="med"/>
+                    </a:lnB>
+                  </a:tcPr>
+                </a:tc>
+                <a:tc>
+                  <a:txBody>
+                    <a:bodyPr/>
+                    <a:lstStyle/>
+                    <a:p>
+                      <a:pPr algn="ctr" indent="0" marL="0">
+                        <a:buNone/>
+                      </a:pPr>
+                      <a:r>
+                        <a:rPr lang="en-US" sz="1100" dirty="0">
+                          <a:solidFill>
+                            <a:srgbClr val="16252C"/>
+                          </a:solidFill>
+                          <a:latin typeface="微软雅黑" pitchFamily="34" charset="0"/>
+                          <a:ea typeface="微软雅黑" pitchFamily="34" charset="-122"/>
+                          <a:cs typeface="微软雅黑" pitchFamily="34" charset="-120"/>
+                        </a:rPr>
+                        <a:t>0.777</a:t>
+                      </a:r>
+                      <a:endParaRPr lang="en-US" sz="1100" dirty="0">
+                        <a:latin typeface="微软雅黑" charset="0"/>
+                        <a:ea typeface="微软雅黑" charset="0"/>
+                        <a:cs typeface="微软雅黑" charset="0"/>
+                      </a:endParaRPr>
+                    </a:p>
+                  </a:txBody>
+                  <a:tcPr marL="91440" marR="91440" marT="45720" marB="45720" anchor="ctr">
+                    <a:lnL w="6350" cap="flat" cmpd="sng" algn="ctr">
+                      <a:solidFill>
+                        <a:srgbClr val="DDE5E8"/>
+                      </a:solidFill>
+                      <a:prstDash val="solid"/>
+                      <a:round/>
+                      <a:headEnd type="none" w="med" len="med"/>
+                      <a:tailEnd type="none" w="med" len="med"/>
+                    </a:lnL>
+                    <a:lnR w="6350" cap="flat" cmpd="sng" algn="ctr">
+                      <a:solidFill>
+                        <a:srgbClr val="DDE5E8"/>
+                      </a:solidFill>
+                      <a:prstDash val="solid"/>
+                      <a:round/>
+                      <a:headEnd type="none" w="med" len="med"/>
+                      <a:tailEnd type="none" w="med" len="med"/>
+                    </a:lnR>
+                    <a:lnT w="6350" cap="flat" cmpd="sng" algn="ctr">
+                      <a:solidFill>
+                        <a:srgbClr val="DDE5E8"/>
+                      </a:solidFill>
+                      <a:prstDash val="solid"/>
+                      <a:round/>
+                      <a:headEnd type="none" w="med" len="med"/>
+                      <a:tailEnd type="none" w="med" len="med"/>
+                    </a:lnT>
+                    <a:lnB w="6350" cap="flat" cmpd="sng" algn="ctr">
+                      <a:solidFill>
+                        <a:srgbClr val="DDE5E8"/>
+                      </a:solidFill>
+                      <a:prstDash val="solid"/>
+                      <a:round/>
+                      <a:headEnd type="none" w="med" len="med"/>
+                      <a:tailEnd type="none" w="med" len="med"/>
+                    </a:lnB>
+                  </a:tcPr>
+                </a:tc>
+                <a:tc>
+                  <a:txBody>
+                    <a:bodyPr/>
+                    <a:lstStyle/>
+                    <a:p>
+                      <a:pPr algn="ctr" indent="0" marL="0">
+                        <a:buNone/>
+                      </a:pPr>
+                      <a:r>
+                        <a:rPr lang="en-US" sz="1100" dirty="0">
+                          <a:solidFill>
+                            <a:srgbClr val="D2603A"/>
+                          </a:solidFill>
+                          <a:latin typeface="微软雅黑" pitchFamily="34" charset="0"/>
+                          <a:ea typeface="微软雅黑" pitchFamily="34" charset="-122"/>
+                          <a:cs typeface="微软雅黑" pitchFamily="34" charset="-120"/>
+                        </a:rPr>
+                        <a:t>−0.308</a:t>
+                      </a:r>
+                      <a:endParaRPr lang="en-US" sz="1100" dirty="0">
+                        <a:latin typeface="微软雅黑" charset="0"/>
+                        <a:ea typeface="微软雅黑" charset="0"/>
+                        <a:cs typeface="微软雅黑" charset="0"/>
+                      </a:endParaRPr>
+                    </a:p>
+                  </a:txBody>
+                  <a:tcPr marL="91440" marR="91440" marT="45720" marB="45720" anchor="ctr">
+                    <a:lnL w="6350" cap="flat" cmpd="sng" algn="ctr">
+                      <a:solidFill>
+                        <a:srgbClr val="DDE5E8"/>
+                      </a:solidFill>
+                      <a:prstDash val="solid"/>
+                      <a:round/>
+                      <a:headEnd type="none" w="med" len="med"/>
+                      <a:tailEnd type="none" w="med" len="med"/>
+                    </a:lnL>
+                    <a:lnR w="6350" cap="flat" cmpd="sng" algn="ctr">
+                      <a:solidFill>
+                        <a:srgbClr val="DDE5E8"/>
+                      </a:solidFill>
+                      <a:prstDash val="solid"/>
+                      <a:round/>
+                      <a:headEnd type="none" w="med" len="med"/>
+                      <a:tailEnd type="none" w="med" len="med"/>
+                    </a:lnR>
+                    <a:lnT w="6350" cap="flat" cmpd="sng" algn="ctr">
+                      <a:solidFill>
+                        <a:srgbClr val="DDE5E8"/>
+                      </a:solidFill>
+                      <a:prstDash val="solid"/>
+                      <a:round/>
+                      <a:headEnd type="none" w="med" len="med"/>
+                      <a:tailEnd type="none" w="med" len="med"/>
+                    </a:lnT>
+                    <a:lnB w="6350" cap="flat" cmpd="sng" algn="ctr">
+                      <a:solidFill>
+                        <a:srgbClr val="DDE5E8"/>
+                      </a:solidFill>
+                      <a:prstDash val="solid"/>
+                      <a:round/>
+                      <a:headEnd type="none" w="med" len="med"/>
+                      <a:tailEnd type="none" w="med" len="med"/>
+                    </a:lnB>
+                  </a:tcPr>
+                </a:tc>
+              </a:tr>
+            </a:tbl>
+          </a:graphicData>
+        </a:graphic>
+      </p:graphicFrame>
+      <p:sp>
+        <p:nvSpPr>
+          <p:cNvPr id="8" name="Shape 5"/>
+          <p:cNvSpPr/>
+          <p:nvPr/>
+        </p:nvSpPr>
+        <p:spPr>
+          <a:xfrm>
+            <a:off x="6309360" y="1828800"/>
+            <a:ext cx="5303520" cy="1773936"/>
+          </a:xfrm>
+          <a:prstGeom prst="rect">
+            <a:avLst/>
+          </a:prstGeom>
+          <a:solidFill>
+            <a:srgbClr val="FBEDE7"/>
+          </a:solidFill>
+          <a:ln/>
+          <a:effectLst>
+            <a:outerShdw sx="100000" sy="100000" kx="0" ky="0" algn="bl" rotWithShape="0" blurRad="101600" dist="25400" dir="8100000">
+              <a:srgbClr val="000000">
+                <a:alpha val="10000"/>
+              </a:srgbClr>
+            </a:outerShdw>
+          </a:effectLst>
+        </p:spPr>
+      </p:sp>
+      <p:sp>
+        <p:nvSpPr>
+          <p:cNvPr id="9" name="Shape 6"/>
+          <p:cNvSpPr/>
+          <p:nvPr/>
+        </p:nvSpPr>
+        <p:spPr>
+          <a:xfrm>
+            <a:off x="6309360" y="1828800"/>
+            <a:ext cx="68580" cy="1773936"/>
+          </a:xfrm>
+          <a:prstGeom prst="rect">
+            <a:avLst/>
+          </a:prstGeom>
+          <a:solidFill>
+            <a:srgbClr val="D2603A"/>
+          </a:solidFill>
+          <a:ln/>
+        </p:spPr>
+      </p:sp>
+      <p:sp>
+        <p:nvSpPr>
+          <p:cNvPr id="10" name="Text 7"/>
+          <p:cNvSpPr/>
+          <p:nvPr/>
+        </p:nvSpPr>
+        <p:spPr>
+          <a:xfrm>
+            <a:off x="6565392" y="1975104"/>
+            <a:ext cx="4846320" cy="329184"/>
+          </a:xfrm>
+          <a:prstGeom prst="rect">
+            <a:avLst/>
+          </a:prstGeom>
+          <a:noFill/>
+          <a:ln/>
+        </p:spPr>
+        <p:txBody>
+          <a:bodyPr wrap="square" lIns="0" tIns="0" rIns="0" bIns="0" rtlCol="0" anchor="t"/>
+          <a:lstStyle/>
+          <a:p>
+            <a:pPr indent="0" marL="0">
+              <a:buNone/>
+            </a:pPr>
+            <a:r>
+              <a:rPr lang="en-US" sz="1400" b="1" dirty="0">
+                <a:solidFill>
+                  <a:srgbClr val="16252C"/>
+                </a:solidFill>
+                <a:latin typeface="微软雅黑" pitchFamily="34" charset="0"/>
+                <a:ea typeface="微软雅黑" pitchFamily="34" charset="-122"/>
+                <a:cs typeface="微软雅黑" pitchFamily="34" charset="-120"/>
+              </a:rPr>
+              <a:t>为什么具有误导性</a:t>
+            </a:r>
+            <a:endParaRPr lang="en-US" sz="1400" dirty="0"/>
+          </a:p>
+        </p:txBody>
+      </p:sp>
+      <p:sp>
+        <p:nvSpPr>
+          <p:cNvPr id="11" name="Text 8"/>
+          <p:cNvSpPr/>
+          <p:nvPr/>
+        </p:nvSpPr>
+        <p:spPr>
+          <a:xfrm>
+            <a:off x="6565392" y="2359152"/>
+            <a:ext cx="4846320" cy="1115568"/>
+          </a:xfrm>
+          <a:prstGeom prst="rect">
+            <a:avLst/>
+          </a:prstGeom>
+          <a:noFill/>
+          <a:ln/>
+        </p:spPr>
+        <p:txBody>
+          <a:bodyPr wrap="square" lIns="0" tIns="0" rIns="0" bIns="0" rtlCol="0" anchor="t"/>
+          <a:lstStyle/>
+          <a:p>
+            <a:pPr indent="0" marL="0">
+              <a:lnSpc>
+                <a:spcPct val="112000"/>
+              </a:lnSpc>
+              <a:buNone/>
+            </a:pPr>
+            <a:r>
+              <a:rPr lang="en-US" sz="1100" dirty="0">
+                <a:solidFill>
+                  <a:srgbClr val="7A2E14"/>
+                </a:solidFill>
+                <a:latin typeface="微软雅黑" pitchFamily="34" charset="0"/>
+                <a:ea typeface="微软雅黑" pitchFamily="34" charset="-122"/>
+                <a:cs typeface="微软雅黑" pitchFamily="34" charset="-120"/>
+              </a:rPr>
+              <a:t>本队列的地点与月份几乎可以互换：Sacramento 80 个中 46 个在 1 月，GIWA 96 个中 82 个在 7–8 月，ConawayRanch 只在秋冬。</a:t>
+            </a:r>
+            <a:endParaRPr lang="en-US" sz="1100" dirty="0"/>
+          </a:p>
+          <a:p>
+            <a:pPr indent="0" marL="0">
+              <a:lnSpc>
+                <a:spcPct val="112000"/>
+              </a:lnSpc>
+              <a:buNone/>
+            </a:pPr>
+            <a:endParaRPr lang="en-US" sz="1100" dirty="0"/>
+          </a:p>
+          <a:p>
+            <a:pPr indent="0" marL="0">
+              <a:lnSpc>
+                <a:spcPct val="112000"/>
+              </a:lnSpc>
+              <a:buNone/>
+            </a:pPr>
+            <a:r>
+              <a:rPr lang="en-US" sz="1100" dirty="0">
+                <a:solidFill>
+                  <a:srgbClr val="7A2E14"/>
+                </a:solidFill>
+                <a:latin typeface="微软雅黑" pitchFamily="34" charset="0"/>
+                <a:ea typeface="微软雅黑" pitchFamily="34" charset="-122"/>
+                <a:cs typeface="微软雅黑" pitchFamily="34" charset="-120"/>
+              </a:rPr>
+              <a:t>所以「留一地点」同时也是「留一季节」。</a:t>
+            </a:r>
+            <a:endParaRPr lang="en-US" sz="1100" dirty="0"/>
+          </a:p>
+        </p:txBody>
+      </p:sp>
+      <p:sp>
+        <p:nvSpPr>
+          <p:cNvPr id="12" name="Text 9"/>
+          <p:cNvSpPr/>
+          <p:nvPr/>
+        </p:nvSpPr>
+        <p:spPr>
+          <a:xfrm>
+            <a:off x="548640" y="3840480"/>
+            <a:ext cx="11064240" cy="274320"/>
+          </a:xfrm>
+          <a:prstGeom prst="rect">
+            <a:avLst/>
+          </a:prstGeom>
+          <a:noFill/>
+          <a:ln/>
+        </p:spPr>
+        <p:txBody>
+          <a:bodyPr wrap="square" lIns="0" tIns="0" rIns="0" bIns="0" rtlCol="0" anchor="ctr"/>
+          <a:lstStyle/>
+          <a:p>
+            <a:pPr indent="0" marL="0">
+              <a:buNone/>
+            </a:pPr>
+            <a:r>
+              <a:rPr lang="en-US" sz="1500" b="1" dirty="0">
+                <a:solidFill>
+                  <a:srgbClr val="16252C"/>
+                </a:solidFill>
+                <a:latin typeface="微软雅黑" pitchFamily="34" charset="0"/>
+                <a:ea typeface="微软雅黑" pitchFamily="34" charset="-122"/>
+                <a:cs typeface="微软雅黑" pitchFamily="34" charset="-120"/>
+              </a:rPr>
+              <a:t>固定季节（仅 7–8 月）后重做留一地点：</a:t>
+            </a:r>
+            <a:endParaRPr lang="en-US" sz="1500" dirty="0"/>
+          </a:p>
+        </p:txBody>
+      </p:sp>
+      <p:graphicFrame>
+        <p:nvGraphicFramePr>
+          <p:cNvPr id="47" name="Table 1"/>
+          <p:cNvGraphicFramePr>
+            <a:graphicFrameLocks noGrp="1"/>
+          </p:cNvGraphicFramePr>
+          <p:nvPr>
+            <p:extLst>
+              <p:ext uri="{D42A27DB-BD31-4B8C-83A1-F6EECF244321}">
+                <p14:modId xmlns:p14="http://schemas.microsoft.com/office/powerpoint/2010/main" val="1579011935"/>
+              </p:ext>
+            </p:extLst>
+          </p:nvPr>
+        </p:nvGraphicFramePr>
+        <p:xfrm>
+          <a:off x="548640" y="4206240"/>
+          <a:ext cx="5486400" cy="914400"/>
+        </p:xfrm>
+        <a:graphic>
+          <a:graphicData uri="http://schemas.openxmlformats.org/drawingml/2006/table">
+            <a:tbl>
+              <a:tblPr/>
+              <a:tblGrid>
+                <a:gridCol w="2331720"/>
+                <a:gridCol w="960120"/>
+                <a:gridCol w="960120"/>
+                <a:gridCol w="1234440"/>
+              </a:tblGrid>
+              <a:tr h="384048">
+                <a:tc>
+                  <a:txBody>
+                    <a:bodyPr/>
+                    <a:lstStyle/>
+                    <a:p>
+                      <a:pPr algn="ctr" indent="0" marL="0">
+                        <a:buNone/>
+                      </a:pPr>
+                      <a:r>
+                        <a:rPr lang="en-US" sz="1100" b="1" dirty="0">
+                          <a:solidFill>
+                            <a:srgbClr val="FFFFFF"/>
+                          </a:solidFill>
+                          <a:latin typeface="微软雅黑" pitchFamily="34" charset="0"/>
+                          <a:ea typeface="微软雅黑" pitchFamily="34" charset="-122"/>
+                          <a:cs typeface="微软雅黑" pitchFamily="34" charset="-120"/>
+                        </a:rPr>
+                        <a:t>留出地点</a:t>
+                      </a:r>
+                      <a:endParaRPr lang="en-US" sz="1100" dirty="0">
+                        <a:latin typeface="微软雅黑" charset="0"/>
+                        <a:ea typeface="微软雅黑" charset="0"/>
+                        <a:cs typeface="微软雅黑" charset="0"/>
+                      </a:endParaRPr>
+                    </a:p>
+                  </a:txBody>
+                  <a:tcPr marL="91440" marR="91440" marT="45720" marB="45720" anchor="ctr">
+                    <a:lnL w="6350" cap="flat" cmpd="sng" algn="ctr">
+                      <a:solidFill>
+                        <a:srgbClr val="DDE5E8"/>
+                      </a:solidFill>
+                      <a:prstDash val="solid"/>
+                      <a:round/>
+                      <a:headEnd type="none" w="med" len="med"/>
+                      <a:tailEnd type="none" w="med" len="med"/>
+                    </a:lnL>
+                    <a:lnR w="6350" cap="flat" cmpd="sng" algn="ctr">
+                      <a:solidFill>
+                        <a:srgbClr val="DDE5E8"/>
+                      </a:solidFill>
+                      <a:prstDash val="solid"/>
+                      <a:round/>
+                      <a:headEnd type="none" w="med" len="med"/>
+                      <a:tailEnd type="none" w="med" len="med"/>
+                    </a:lnR>
+                    <a:lnT w="6350" cap="flat" cmpd="sng" algn="ctr">
+                      <a:solidFill>
+                        <a:srgbClr val="DDE5E8"/>
+                      </a:solidFill>
+                      <a:prstDash val="solid"/>
+                      <a:round/>
+                      <a:headEnd type="none" w="med" len="med"/>
+                      <a:tailEnd type="none" w="med" len="med"/>
+                    </a:lnT>
+                    <a:lnB w="6350" cap="flat" cmpd="sng" algn="ctr">
+                      <a:solidFill>
+                        <a:srgbClr val="DDE5E8"/>
+                      </a:solidFill>
+                      <a:prstDash val="solid"/>
+                      <a:round/>
+                      <a:headEnd type="none" w="med" len="med"/>
+                      <a:tailEnd type="none" w="med" len="med"/>
+                    </a:lnB>
+                    <a:solidFill>
+                      <a:srgbClr val="0B3C49"/>
+                    </a:solidFill>
+                  </a:tcPr>
+                </a:tc>
+                <a:tc>
+                  <a:txBody>
+                    <a:bodyPr/>
+                    <a:lstStyle/>
+                    <a:p>
+                      <a:pPr algn="ctr" indent="0" marL="0">
+                        <a:buNone/>
+                      </a:pPr>
+                      <a:r>
+                        <a:rPr lang="en-US" sz="1100" b="1" dirty="0">
+                          <a:solidFill>
+                            <a:srgbClr val="FFFFFF"/>
+                          </a:solidFill>
+                          <a:latin typeface="微软雅黑" pitchFamily="34" charset="0"/>
+                          <a:ea typeface="微软雅黑" pitchFamily="34" charset="-122"/>
+                          <a:cs typeface="微软雅黑" pitchFamily="34" charset="-120"/>
+                        </a:rPr>
+                        <a:t>n</a:t>
+                      </a:r>
+                      <a:endParaRPr lang="en-US" sz="1100" dirty="0">
+                        <a:latin typeface="微软雅黑" charset="0"/>
+                        <a:ea typeface="微软雅黑" charset="0"/>
+                        <a:cs typeface="微软雅黑" charset="0"/>
+                      </a:endParaRPr>
+                    </a:p>
+                  </a:txBody>
+                  <a:tcPr marL="91440" marR="91440" marT="45720" marB="45720" anchor="ctr">
+                    <a:lnL w="6350" cap="flat" cmpd="sng" algn="ctr">
+                      <a:solidFill>
+                        <a:srgbClr val="DDE5E8"/>
+                      </a:solidFill>
+                      <a:prstDash val="solid"/>
+                      <a:round/>
+                      <a:headEnd type="none" w="med" len="med"/>
+                      <a:tailEnd type="none" w="med" len="med"/>
+                    </a:lnL>
+                    <a:lnR w="6350" cap="flat" cmpd="sng" algn="ctr">
+                      <a:solidFill>
+                        <a:srgbClr val="DDE5E8"/>
+                      </a:solidFill>
+                      <a:prstDash val="solid"/>
+                      <a:round/>
+                      <a:headEnd type="none" w="med" len="med"/>
+                      <a:tailEnd type="none" w="med" len="med"/>
+                    </a:lnR>
+                    <a:lnT w="6350" cap="flat" cmpd="sng" algn="ctr">
+                      <a:solidFill>
+                        <a:srgbClr val="DDE5E8"/>
+                      </a:solidFill>
+                      <a:prstDash val="solid"/>
+                      <a:round/>
+                      <a:headEnd type="none" w="med" len="med"/>
+                      <a:tailEnd type="none" w="med" len="med"/>
+                    </a:lnT>
+                    <a:lnB w="6350" cap="flat" cmpd="sng" algn="ctr">
+                      <a:solidFill>
+                        <a:srgbClr val="DDE5E8"/>
+                      </a:solidFill>
+                      <a:prstDash val="solid"/>
+                      <a:round/>
+                      <a:headEnd type="none" w="med" len="med"/>
+                      <a:tailEnd type="none" w="med" len="med"/>
+                    </a:lnB>
+                    <a:solidFill>
+                      <a:srgbClr val="0B3C49"/>
+                    </a:solidFill>
+                  </a:tcPr>
+                </a:tc>
+                <a:tc>
+                  <a:txBody>
+                    <a:bodyPr/>
+                    <a:lstStyle/>
+                    <a:p>
+                      <a:pPr algn="ctr" indent="0" marL="0">
+                        <a:buNone/>
+                      </a:pPr>
+                      <a:r>
+                        <a:rPr lang="en-US" sz="1100" b="1" dirty="0">
+                          <a:solidFill>
+                            <a:srgbClr val="FFFFFF"/>
+                          </a:solidFill>
+                          <a:latin typeface="微软雅黑" pitchFamily="34" charset="0"/>
+                          <a:ea typeface="微软雅黑" pitchFamily="34" charset="-122"/>
+                          <a:cs typeface="微软雅黑" pitchFamily="34" charset="-120"/>
+                        </a:rPr>
+                        <a:t>阳性</a:t>
+                      </a:r>
+                      <a:endParaRPr lang="en-US" sz="1100" dirty="0">
+                        <a:latin typeface="微软雅黑" charset="0"/>
+                        <a:ea typeface="微软雅黑" charset="0"/>
+                        <a:cs typeface="微软雅黑" charset="0"/>
+                      </a:endParaRPr>
+                    </a:p>
+                  </a:txBody>
+                  <a:tcPr marL="91440" marR="91440" marT="45720" marB="45720" anchor="ctr">
+                    <a:lnL w="6350" cap="flat" cmpd="sng" algn="ctr">
+                      <a:solidFill>
+                        <a:srgbClr val="DDE5E8"/>
+                      </a:solidFill>
+                      <a:prstDash val="solid"/>
+                      <a:round/>
+                      <a:headEnd type="none" w="med" len="med"/>
+                      <a:tailEnd type="none" w="med" len="med"/>
+                    </a:lnL>
+                    <a:lnR w="6350" cap="flat" cmpd="sng" algn="ctr">
+                      <a:solidFill>
+                        <a:srgbClr val="DDE5E8"/>
+                      </a:solidFill>
+                      <a:prstDash val="solid"/>
+                      <a:round/>
+                      <a:headEnd type="none" w="med" len="med"/>
+                      <a:tailEnd type="none" w="med" len="med"/>
+                    </a:lnR>
+                    <a:lnT w="6350" cap="flat" cmpd="sng" algn="ctr">
+                      <a:solidFill>
+                        <a:srgbClr val="DDE5E8"/>
+                      </a:solidFill>
+                      <a:prstDash val="solid"/>
+                      <a:round/>
+                      <a:headEnd type="none" w="med" len="med"/>
+                      <a:tailEnd type="none" w="med" len="med"/>
+                    </a:lnT>
+                    <a:lnB w="6350" cap="flat" cmpd="sng" algn="ctr">
+                      <a:solidFill>
+                        <a:srgbClr val="DDE5E8"/>
+                      </a:solidFill>
+                      <a:prstDash val="solid"/>
+                      <a:round/>
+                      <a:headEnd type="none" w="med" len="med"/>
+                      <a:tailEnd type="none" w="med" len="med"/>
+                    </a:lnB>
+                    <a:solidFill>
+                      <a:srgbClr val="0B3C49"/>
+                    </a:solidFill>
+                  </a:tcPr>
+                </a:tc>
+                <a:tc>
+                  <a:txBody>
+                    <a:bodyPr/>
+                    <a:lstStyle/>
+                    <a:p>
+                      <a:pPr algn="ctr" indent="0" marL="0">
+                        <a:buNone/>
+                      </a:pPr>
+                      <a:r>
+                        <a:rPr lang="en-US" sz="1100" b="1" dirty="0">
+                          <a:solidFill>
+                            <a:srgbClr val="FFFFFF"/>
+                          </a:solidFill>
+                          <a:latin typeface="微软雅黑" pitchFamily="34" charset="0"/>
+                          <a:ea typeface="微软雅黑" pitchFamily="34" charset="-122"/>
+                          <a:cs typeface="微软雅黑" pitchFamily="34" charset="-120"/>
+                        </a:rPr>
+                        <a:t>AUC</a:t>
+                      </a:r>
+                      <a:endParaRPr lang="en-US" sz="1100" dirty="0">
+                        <a:latin typeface="微软雅黑" charset="0"/>
+                        <a:ea typeface="微软雅黑" charset="0"/>
+                        <a:cs typeface="微软雅黑" charset="0"/>
+                      </a:endParaRPr>
+                    </a:p>
+                  </a:txBody>
+                  <a:tcPr marL="91440" marR="91440" marT="45720" marB="45720" anchor="ctr">
+                    <a:lnL w="6350" cap="flat" cmpd="sng" algn="ctr">
+                      <a:solidFill>
+                        <a:srgbClr val="DDE5E8"/>
+                      </a:solidFill>
+                      <a:prstDash val="solid"/>
+                      <a:round/>
+                      <a:headEnd type="none" w="med" len="med"/>
+                      <a:tailEnd type="none" w="med" len="med"/>
+                    </a:lnL>
+                    <a:lnR w="6350" cap="flat" cmpd="sng" algn="ctr">
+                      <a:solidFill>
+                        <a:srgbClr val="DDE5E8"/>
+                      </a:solidFill>
+                      <a:prstDash val="solid"/>
+                      <a:round/>
+                      <a:headEnd type="none" w="med" len="med"/>
+                      <a:tailEnd type="none" w="med" len="med"/>
+                    </a:lnR>
+                    <a:lnT w="6350" cap="flat" cmpd="sng" algn="ctr">
+                      <a:solidFill>
+                        <a:srgbClr val="DDE5E8"/>
+                      </a:solidFill>
+                      <a:prstDash val="solid"/>
+                      <a:round/>
+                      <a:headEnd type="none" w="med" len="med"/>
+                      <a:tailEnd type="none" w="med" len="med"/>
+                    </a:lnT>
+                    <a:lnB w="6350" cap="flat" cmpd="sng" algn="ctr">
+                      <a:solidFill>
+                        <a:srgbClr val="DDE5E8"/>
+                      </a:solidFill>
+                      <a:prstDash val="solid"/>
+                      <a:round/>
+                      <a:headEnd type="none" w="med" len="med"/>
+                      <a:tailEnd type="none" w="med" len="med"/>
+                    </a:lnB>
+                    <a:solidFill>
+                      <a:srgbClr val="0B3C49"/>
+                    </a:solidFill>
+                  </a:tcPr>
+                </a:tc>
+              </a:tr>
+              <a:tr h="384048">
+                <a:tc>
+                  <a:txBody>
+                    <a:bodyPr/>
+                    <a:lstStyle/>
+                    <a:p>
+                      <a:pPr algn="ctr" indent="0" marL="0">
+                        <a:buNone/>
+                      </a:pPr>
+                      <a:r>
+                        <a:rPr lang="en-US" sz="1100" dirty="0">
+                          <a:solidFill>
+                            <a:srgbClr val="16252C"/>
+                          </a:solidFill>
+                          <a:latin typeface="微软雅黑" pitchFamily="34" charset="0"/>
+                          <a:ea typeface="微软雅黑" pitchFamily="34" charset="-122"/>
+                          <a:cs typeface="微软雅黑" pitchFamily="34" charset="-120"/>
+                        </a:rPr>
+                        <a:t>GIWA</a:t>
+                      </a:r>
+                      <a:endParaRPr lang="en-US" sz="1100" dirty="0">
+                        <a:latin typeface="微软雅黑" charset="0"/>
+                        <a:ea typeface="微软雅黑" charset="0"/>
+                        <a:cs typeface="微软雅黑" charset="0"/>
+                      </a:endParaRPr>
+                    </a:p>
+                  </a:txBody>
+                  <a:tcPr marL="91440" marR="91440" marT="45720" marB="45720" anchor="ctr">
+                    <a:lnL w="6350" cap="flat" cmpd="sng" algn="ctr">
+                      <a:solidFill>
+                        <a:srgbClr val="DDE5E8"/>
+                      </a:solidFill>
+                      <a:prstDash val="solid"/>
+                      <a:round/>
+                      <a:headEnd type="none" w="med" len="med"/>
+                      <a:tailEnd type="none" w="med" len="med"/>
+                    </a:lnL>
+                    <a:lnR w="6350" cap="flat" cmpd="sng" algn="ctr">
+                      <a:solidFill>
+                        <a:srgbClr val="DDE5E8"/>
+                      </a:solidFill>
+                      <a:prstDash val="solid"/>
+                      <a:round/>
+                      <a:headEnd type="none" w="med" len="med"/>
+                      <a:tailEnd type="none" w="med" len="med"/>
+                    </a:lnR>
+                    <a:lnT w="6350" cap="flat" cmpd="sng" algn="ctr">
+                      <a:solidFill>
+                        <a:srgbClr val="DDE5E8"/>
+                      </a:solidFill>
+                      <a:prstDash val="solid"/>
+                      <a:round/>
+                      <a:headEnd type="none" w="med" len="med"/>
+                      <a:tailEnd type="none" w="med" len="med"/>
+                    </a:lnT>
+                    <a:lnB w="6350" cap="flat" cmpd="sng" algn="ctr">
+                      <a:solidFill>
+                        <a:srgbClr val="DDE5E8"/>
+                      </a:solidFill>
+                      <a:prstDash val="solid"/>
+                      <a:round/>
+                      <a:headEnd type="none" w="med" len="med"/>
+                      <a:tailEnd type="none" w="med" len="med"/>
+                    </a:lnB>
+                  </a:tcPr>
+                </a:tc>
+                <a:tc>
+                  <a:txBody>
+                    <a:bodyPr/>
+                    <a:lstStyle/>
+                    <a:p>
+                      <a:pPr algn="ctr" indent="0" marL="0">
+                        <a:buNone/>
+                      </a:pPr>
+                      <a:r>
+                        <a:rPr lang="en-US" sz="1100" dirty="0">
+                          <a:solidFill>
+                            <a:srgbClr val="16252C"/>
+                          </a:solidFill>
+                          <a:latin typeface="微软雅黑" pitchFamily="34" charset="0"/>
+                          <a:ea typeface="微软雅黑" pitchFamily="34" charset="-122"/>
+                          <a:cs typeface="微软雅黑" pitchFamily="34" charset="-120"/>
+                        </a:rPr>
+                        <a:t>82</a:t>
+                      </a:r>
+                      <a:endParaRPr lang="en-US" sz="1100" dirty="0">
+                        <a:latin typeface="微软雅黑" charset="0"/>
+                        <a:ea typeface="微软雅黑" charset="0"/>
+                        <a:cs typeface="微软雅黑" charset="0"/>
+                      </a:endParaRPr>
+                    </a:p>
+                  </a:txBody>
+                  <a:tcPr marL="91440" marR="91440" marT="45720" marB="45720" anchor="ctr">
+                    <a:lnL w="6350" cap="flat" cmpd="sng" algn="ctr">
+                      <a:solidFill>
+                        <a:srgbClr val="DDE5E8"/>
+                      </a:solidFill>
+                      <a:prstDash val="solid"/>
+                      <a:round/>
+                      <a:headEnd type="none" w="med" len="med"/>
+                      <a:tailEnd type="none" w="med" len="med"/>
+                    </a:lnL>
+                    <a:lnR w="6350" cap="flat" cmpd="sng" algn="ctr">
+                      <a:solidFill>
+                        <a:srgbClr val="DDE5E8"/>
+                      </a:solidFill>
+                      <a:prstDash val="solid"/>
+                      <a:round/>
+                      <a:headEnd type="none" w="med" len="med"/>
+                      <a:tailEnd type="none" w="med" len="med"/>
+                    </a:lnR>
+                    <a:lnT w="6350" cap="flat" cmpd="sng" algn="ctr">
+                      <a:solidFill>
+                        <a:srgbClr val="DDE5E8"/>
+                      </a:solidFill>
+                      <a:prstDash val="solid"/>
+                      <a:round/>
+                      <a:headEnd type="none" w="med" len="med"/>
+                      <a:tailEnd type="none" w="med" len="med"/>
+                    </a:lnT>
+                    <a:lnB w="6350" cap="flat" cmpd="sng" algn="ctr">
+                      <a:solidFill>
+                        <a:srgbClr val="DDE5E8"/>
+                      </a:solidFill>
+                      <a:prstDash val="solid"/>
+                      <a:round/>
+                      <a:headEnd type="none" w="med" len="med"/>
+                      <a:tailEnd type="none" w="med" len="med"/>
+                    </a:lnB>
+                  </a:tcPr>
+                </a:tc>
+                <a:tc>
+                  <a:txBody>
+                    <a:bodyPr/>
+                    <a:lstStyle/>
+                    <a:p>
+                      <a:pPr algn="ctr" indent="0" marL="0">
+                        <a:buNone/>
+                      </a:pPr>
+                      <a:r>
+                        <a:rPr lang="en-US" sz="1100" dirty="0">
+                          <a:solidFill>
+                            <a:srgbClr val="16252C"/>
+                          </a:solidFill>
+                          <a:latin typeface="微软雅黑" pitchFamily="34" charset="0"/>
+                          <a:ea typeface="微软雅黑" pitchFamily="34" charset="-122"/>
+                          <a:cs typeface="微软雅黑" pitchFamily="34" charset="-120"/>
+                        </a:rPr>
+                        <a:t>51</a:t>
+                      </a:r>
+                      <a:endParaRPr lang="en-US" sz="1100" dirty="0">
+                        <a:latin typeface="微软雅黑" charset="0"/>
+                        <a:ea typeface="微软雅黑" charset="0"/>
+                        <a:cs typeface="微软雅黑" charset="0"/>
+                      </a:endParaRPr>
+                    </a:p>
+                  </a:txBody>
+                  <a:tcPr marL="91440" marR="91440" marT="45720" marB="45720" anchor="ctr">
+                    <a:lnL w="6350" cap="flat" cmpd="sng" algn="ctr">
+                      <a:solidFill>
+                        <a:srgbClr val="DDE5E8"/>
+                      </a:solidFill>
+                      <a:prstDash val="solid"/>
+                      <a:round/>
+                      <a:headEnd type="none" w="med" len="med"/>
+                      <a:tailEnd type="none" w="med" len="med"/>
+                    </a:lnL>
+                    <a:lnR w="6350" cap="flat" cmpd="sng" algn="ctr">
+                      <a:solidFill>
+                        <a:srgbClr val="DDE5E8"/>
+                      </a:solidFill>
+                      <a:prstDash val="solid"/>
+                      <a:round/>
+                      <a:headEnd type="none" w="med" len="med"/>
+                      <a:tailEnd type="none" w="med" len="med"/>
+                    </a:lnR>
+                    <a:lnT w="6350" cap="flat" cmpd="sng" algn="ctr">
+                      <a:solidFill>
+                        <a:srgbClr val="DDE5E8"/>
+                      </a:solidFill>
+                      <a:prstDash val="solid"/>
+                      <a:round/>
+                      <a:headEnd type="none" w="med" len="med"/>
+                      <a:tailEnd type="none" w="med" len="med"/>
+                    </a:lnT>
+                    <a:lnB w="6350" cap="flat" cmpd="sng" algn="ctr">
+                      <a:solidFill>
+                        <a:srgbClr val="DDE5E8"/>
+                      </a:solidFill>
+                      <a:prstDash val="solid"/>
+                      <a:round/>
+                      <a:headEnd type="none" w="med" len="med"/>
+                      <a:tailEnd type="none" w="med" len="med"/>
+                    </a:lnB>
+                  </a:tcPr>
+                </a:tc>
+                <a:tc>
+                  <a:txBody>
+                    <a:bodyPr/>
+                    <a:lstStyle/>
+                    <a:p>
+                      <a:pPr algn="ctr" indent="0" marL="0">
+                        <a:buNone/>
+                      </a:pPr>
+                      <a:r>
+                        <a:rPr lang="en-US" sz="1100" b="1" dirty="0">
+                          <a:solidFill>
+                            <a:srgbClr val="2E6B3A"/>
+                          </a:solidFill>
+                          <a:latin typeface="微软雅黑" pitchFamily="34" charset="0"/>
+                          <a:ea typeface="微软雅黑" pitchFamily="34" charset="-122"/>
+                          <a:cs typeface="微软雅黑" pitchFamily="34" charset="-120"/>
+                        </a:rPr>
+                        <a:t>0.919</a:t>
+                      </a:r>
+                      <a:endParaRPr lang="en-US" sz="1100" dirty="0">
+                        <a:latin typeface="微软雅黑" charset="0"/>
+                        <a:ea typeface="微软雅黑" charset="0"/>
+                        <a:cs typeface="微软雅黑" charset="0"/>
+                      </a:endParaRPr>
+                    </a:p>
+                  </a:txBody>
+                  <a:tcPr marL="91440" marR="91440" marT="45720" marB="45720" anchor="ctr">
+                    <a:lnL w="6350" cap="flat" cmpd="sng" algn="ctr">
+                      <a:solidFill>
+                        <a:srgbClr val="DDE5E8"/>
+                      </a:solidFill>
+                      <a:prstDash val="solid"/>
+                      <a:round/>
+                      <a:headEnd type="none" w="med" len="med"/>
+                      <a:tailEnd type="none" w="med" len="med"/>
+                    </a:lnL>
+                    <a:lnR w="6350" cap="flat" cmpd="sng" algn="ctr">
+                      <a:solidFill>
+                        <a:srgbClr val="DDE5E8"/>
+                      </a:solidFill>
+                      <a:prstDash val="solid"/>
+                      <a:round/>
+                      <a:headEnd type="none" w="med" len="med"/>
+                      <a:tailEnd type="none" w="med" len="med"/>
+                    </a:lnR>
+                    <a:lnT w="6350" cap="flat" cmpd="sng" algn="ctr">
+                      <a:solidFill>
+                        <a:srgbClr val="DDE5E8"/>
+                      </a:solidFill>
+                      <a:prstDash val="solid"/>
+                      <a:round/>
+                      <a:headEnd type="none" w="med" len="med"/>
+                      <a:tailEnd type="none" w="med" len="med"/>
+                    </a:lnT>
+                    <a:lnB w="6350" cap="flat" cmpd="sng" algn="ctr">
+                      <a:solidFill>
+                        <a:srgbClr val="DDE5E8"/>
+                      </a:solidFill>
+                      <a:prstDash val="solid"/>
+                      <a:round/>
+                      <a:headEnd type="none" w="med" len="med"/>
+                      <a:tailEnd type="none" w="med" len="med"/>
+                    </a:lnB>
+                  </a:tcPr>
+                </a:tc>
+              </a:tr>
+              <a:tr h="384048">
+                <a:tc>
+                  <a:txBody>
+                    <a:bodyPr/>
+                    <a:lstStyle/>
+                    <a:p>
+                      <a:pPr algn="ctr" indent="0" marL="0">
+                        <a:buNone/>
+                      </a:pPr>
+                      <a:r>
+                        <a:rPr lang="en-US" sz="1100" dirty="0">
+                          <a:solidFill>
+                            <a:srgbClr val="16252C"/>
+                          </a:solidFill>
+                          <a:latin typeface="微软雅黑" pitchFamily="34" charset="0"/>
+                          <a:ea typeface="微软雅黑" pitchFamily="34" charset="-122"/>
+                          <a:cs typeface="微软雅黑" pitchFamily="34" charset="-120"/>
+                        </a:rPr>
+                        <a:t>MandevilleIsland</a:t>
+                      </a:r>
+                      <a:endParaRPr lang="en-US" sz="1100" dirty="0">
+                        <a:latin typeface="微软雅黑" charset="0"/>
+                        <a:ea typeface="微软雅黑" charset="0"/>
+                        <a:cs typeface="微软雅黑" charset="0"/>
+                      </a:endParaRPr>
+                    </a:p>
+                  </a:txBody>
+                  <a:tcPr marL="91440" marR="91440" marT="45720" marB="45720" anchor="ctr">
+                    <a:lnL w="6350" cap="flat" cmpd="sng" algn="ctr">
+                      <a:solidFill>
+                        <a:srgbClr val="DDE5E8"/>
+                      </a:solidFill>
+                      <a:prstDash val="solid"/>
+                      <a:round/>
+                      <a:headEnd type="none" w="med" len="med"/>
+                      <a:tailEnd type="none" w="med" len="med"/>
+                    </a:lnL>
+                    <a:lnR w="6350" cap="flat" cmpd="sng" algn="ctr">
+                      <a:solidFill>
+                        <a:srgbClr val="DDE5E8"/>
+                      </a:solidFill>
+                      <a:prstDash val="solid"/>
+                      <a:round/>
+                      <a:headEnd type="none" w="med" len="med"/>
+                      <a:tailEnd type="none" w="med" len="med"/>
+                    </a:lnR>
+                    <a:lnT w="6350" cap="flat" cmpd="sng" algn="ctr">
+                      <a:solidFill>
+                        <a:srgbClr val="DDE5E8"/>
+                      </a:solidFill>
+                      <a:prstDash val="solid"/>
+                      <a:round/>
+                      <a:headEnd type="none" w="med" len="med"/>
+                      <a:tailEnd type="none" w="med" len="med"/>
+                    </a:lnT>
+                    <a:lnB w="6350" cap="flat" cmpd="sng" algn="ctr">
+                      <a:solidFill>
+                        <a:srgbClr val="DDE5E8"/>
+                      </a:solidFill>
+                      <a:prstDash val="solid"/>
+                      <a:round/>
+                      <a:headEnd type="none" w="med" len="med"/>
+                      <a:tailEnd type="none" w="med" len="med"/>
+                    </a:lnB>
+                  </a:tcPr>
+                </a:tc>
+                <a:tc>
+                  <a:txBody>
+                    <a:bodyPr/>
+                    <a:lstStyle/>
+                    <a:p>
+                      <a:pPr algn="ctr" indent="0" marL="0">
+                        <a:buNone/>
+                      </a:pPr>
+                      <a:r>
+                        <a:rPr lang="en-US" sz="1100" dirty="0">
+                          <a:solidFill>
+                            <a:srgbClr val="16252C"/>
+                          </a:solidFill>
+                          <a:latin typeface="微软雅黑" pitchFamily="34" charset="0"/>
+                          <a:ea typeface="微软雅黑" pitchFamily="34" charset="-122"/>
+                          <a:cs typeface="微软雅黑" pitchFamily="34" charset="-120"/>
+                        </a:rPr>
+                        <a:t>14</a:t>
+                      </a:r>
+                      <a:endParaRPr lang="en-US" sz="1100" dirty="0">
+                        <a:latin typeface="微软雅黑" charset="0"/>
+                        <a:ea typeface="微软雅黑" charset="0"/>
+                        <a:cs typeface="微软雅黑" charset="0"/>
+                      </a:endParaRPr>
+                    </a:p>
+                  </a:txBody>
+                  <a:tcPr marL="91440" marR="91440" marT="45720" marB="45720" anchor="ctr">
+                    <a:lnL w="6350" cap="flat" cmpd="sng" algn="ctr">
+                      <a:solidFill>
+                        <a:srgbClr val="DDE5E8"/>
+                      </a:solidFill>
+                      <a:prstDash val="solid"/>
+                      <a:round/>
+                      <a:headEnd type="none" w="med" len="med"/>
+                      <a:tailEnd type="none" w="med" len="med"/>
+                    </a:lnL>
+                    <a:lnR w="6350" cap="flat" cmpd="sng" algn="ctr">
+                      <a:solidFill>
+                        <a:srgbClr val="DDE5E8"/>
+                      </a:solidFill>
+                      <a:prstDash val="solid"/>
+                      <a:round/>
+                      <a:headEnd type="none" w="med" len="med"/>
+                      <a:tailEnd type="none" w="med" len="med"/>
+                    </a:lnR>
+                    <a:lnT w="6350" cap="flat" cmpd="sng" algn="ctr">
+                      <a:solidFill>
+                        <a:srgbClr val="DDE5E8"/>
+                      </a:solidFill>
+                      <a:prstDash val="solid"/>
+                      <a:round/>
+                      <a:headEnd type="none" w="med" len="med"/>
+                      <a:tailEnd type="none" w="med" len="med"/>
+                    </a:lnT>
+                    <a:lnB w="6350" cap="flat" cmpd="sng" algn="ctr">
+                      <a:solidFill>
+                        <a:srgbClr val="DDE5E8"/>
+                      </a:solidFill>
+                      <a:prstDash val="solid"/>
+                      <a:round/>
+                      <a:headEnd type="none" w="med" len="med"/>
+                      <a:tailEnd type="none" w="med" len="med"/>
+                    </a:lnB>
+                  </a:tcPr>
+                </a:tc>
+                <a:tc>
+                  <a:txBody>
+                    <a:bodyPr/>
+                    <a:lstStyle/>
+                    <a:p>
+                      <a:pPr algn="ctr" indent="0" marL="0">
+                        <a:buNone/>
+                      </a:pPr>
+                      <a:r>
+                        <a:rPr lang="en-US" sz="1100" dirty="0">
+                          <a:solidFill>
+                            <a:srgbClr val="16252C"/>
+                          </a:solidFill>
+                          <a:latin typeface="微软雅黑" pitchFamily="34" charset="0"/>
+                          <a:ea typeface="微软雅黑" pitchFamily="34" charset="-122"/>
+                          <a:cs typeface="微软雅黑" pitchFamily="34" charset="-120"/>
+                        </a:rPr>
+                        <a:t>9</a:t>
+                      </a:r>
+                      <a:endParaRPr lang="en-US" sz="1100" dirty="0">
+                        <a:latin typeface="微软雅黑" charset="0"/>
+                        <a:ea typeface="微软雅黑" charset="0"/>
+                        <a:cs typeface="微软雅黑" charset="0"/>
+                      </a:endParaRPr>
+                    </a:p>
+                  </a:txBody>
+                  <a:tcPr marL="91440" marR="91440" marT="45720" marB="45720" anchor="ctr">
+                    <a:lnL w="6350" cap="flat" cmpd="sng" algn="ctr">
+                      <a:solidFill>
+                        <a:srgbClr val="DDE5E8"/>
+                      </a:solidFill>
+                      <a:prstDash val="solid"/>
+                      <a:round/>
+                      <a:headEnd type="none" w="med" len="med"/>
+                      <a:tailEnd type="none" w="med" len="med"/>
+                    </a:lnL>
+                    <a:lnR w="6350" cap="flat" cmpd="sng" algn="ctr">
+                      <a:solidFill>
+                        <a:srgbClr val="DDE5E8"/>
+                      </a:solidFill>
+                      <a:prstDash val="solid"/>
+                      <a:round/>
+                      <a:headEnd type="none" w="med" len="med"/>
+                      <a:tailEnd type="none" w="med" len="med"/>
+                    </a:lnR>
+                    <a:lnT w="6350" cap="flat" cmpd="sng" algn="ctr">
+                      <a:solidFill>
+                        <a:srgbClr val="DDE5E8"/>
+                      </a:solidFill>
+                      <a:prstDash val="solid"/>
+                      <a:round/>
+                      <a:headEnd type="none" w="med" len="med"/>
+                      <a:tailEnd type="none" w="med" len="med"/>
+                    </a:lnT>
+                    <a:lnB w="6350" cap="flat" cmpd="sng" algn="ctr">
+                      <a:solidFill>
+                        <a:srgbClr val="DDE5E8"/>
+                      </a:solidFill>
+                      <a:prstDash val="solid"/>
+                      <a:round/>
+                      <a:headEnd type="none" w="med" len="med"/>
+                      <a:tailEnd type="none" w="med" len="med"/>
+                    </a:lnB>
+                  </a:tcPr>
+                </a:tc>
+                <a:tc>
+                  <a:txBody>
+                    <a:bodyPr/>
+                    <a:lstStyle/>
+                    <a:p>
+                      <a:pPr algn="ctr" indent="0" marL="0">
+                        <a:buNone/>
+                      </a:pPr>
+                      <a:r>
+                        <a:rPr lang="en-US" sz="1100" b="1" dirty="0">
+                          <a:solidFill>
+                            <a:srgbClr val="2E6B3A"/>
+                          </a:solidFill>
+                          <a:latin typeface="微软雅黑" pitchFamily="34" charset="0"/>
+                          <a:ea typeface="微软雅黑" pitchFamily="34" charset="-122"/>
+                          <a:cs typeface="微软雅黑" pitchFamily="34" charset="-120"/>
+                        </a:rPr>
+                        <a:t>0.844</a:t>
+                      </a:r>
+                      <a:endParaRPr lang="en-US" sz="1100" dirty="0">
+                        <a:latin typeface="微软雅黑" charset="0"/>
+                        <a:ea typeface="微软雅黑" charset="0"/>
+                        <a:cs typeface="微软雅黑" charset="0"/>
+                      </a:endParaRPr>
+                    </a:p>
+                  </a:txBody>
+                  <a:tcPr marL="91440" marR="91440" marT="45720" marB="45720" anchor="ctr">
+                    <a:lnL w="6350" cap="flat" cmpd="sng" algn="ctr">
+                      <a:solidFill>
+                        <a:srgbClr val="DDE5E8"/>
+                      </a:solidFill>
+                      <a:prstDash val="solid"/>
+                      <a:round/>
+                      <a:headEnd type="none" w="med" len="med"/>
+                      <a:tailEnd type="none" w="med" len="med"/>
+                    </a:lnL>
+                    <a:lnR w="6350" cap="flat" cmpd="sng" algn="ctr">
+                      <a:solidFill>
+                        <a:srgbClr val="DDE5E8"/>
+                      </a:solidFill>
+                      <a:prstDash val="solid"/>
+                      <a:round/>
+                      <a:headEnd type="none" w="med" len="med"/>
+                      <a:tailEnd type="none" w="med" len="med"/>
+                    </a:lnR>
+                    <a:lnT w="6350" cap="flat" cmpd="sng" algn="ctr">
+                      <a:solidFill>
+                        <a:srgbClr val="DDE5E8"/>
+                      </a:solidFill>
+                      <a:prstDash val="solid"/>
+                      <a:round/>
+                      <a:headEnd type="none" w="med" len="med"/>
+                      <a:tailEnd type="none" w="med" len="med"/>
+                    </a:lnT>
+                    <a:lnB w="6350" cap="flat" cmpd="sng" algn="ctr">
+                      <a:solidFill>
+                        <a:srgbClr val="DDE5E8"/>
+                      </a:solidFill>
+                      <a:prstDash val="solid"/>
+                      <a:round/>
+                      <a:headEnd type="none" w="med" len="med"/>
+                      <a:tailEnd type="none" w="med" len="med"/>
+                    </a:lnB>
+                  </a:tcPr>
+                </a:tc>
+              </a:tr>
+              <a:tr h="384048">
+                <a:tc>
+                  <a:txBody>
+                    <a:bodyPr/>
+                    <a:lstStyle/>
+                    <a:p>
+                      <a:pPr algn="ctr" indent="0" marL="0">
+                        <a:buNone/>
+                      </a:pPr>
+                      <a:r>
+                        <a:rPr lang="en-US" sz="1100" dirty="0">
+                          <a:solidFill>
+                            <a:srgbClr val="16252C"/>
+                          </a:solidFill>
+                          <a:latin typeface="微软雅黑" pitchFamily="34" charset="0"/>
+                          <a:ea typeface="微软雅黑" pitchFamily="34" charset="-122"/>
+                          <a:cs typeface="微软雅黑" pitchFamily="34" charset="-120"/>
+                        </a:rPr>
+                        <a:t>SuisunMarsh/Balboa</a:t>
+                      </a:r>
+                      <a:endParaRPr lang="en-US" sz="1100" dirty="0">
+                        <a:latin typeface="微软雅黑" charset="0"/>
+                        <a:ea typeface="微软雅黑" charset="0"/>
+                        <a:cs typeface="微软雅黑" charset="0"/>
+                      </a:endParaRPr>
+                    </a:p>
+                  </a:txBody>
+                  <a:tcPr marL="91440" marR="91440" marT="45720" marB="45720" anchor="ctr">
+                    <a:lnL w="6350" cap="flat" cmpd="sng" algn="ctr">
+                      <a:solidFill>
+                        <a:srgbClr val="DDE5E8"/>
+                      </a:solidFill>
+                      <a:prstDash val="solid"/>
+                      <a:round/>
+                      <a:headEnd type="none" w="med" len="med"/>
+                      <a:tailEnd type="none" w="med" len="med"/>
+                    </a:lnL>
+                    <a:lnR w="6350" cap="flat" cmpd="sng" algn="ctr">
+                      <a:solidFill>
+                        <a:srgbClr val="DDE5E8"/>
+                      </a:solidFill>
+                      <a:prstDash val="solid"/>
+                      <a:round/>
+                      <a:headEnd type="none" w="med" len="med"/>
+                      <a:tailEnd type="none" w="med" len="med"/>
+                    </a:lnR>
+                    <a:lnT w="6350" cap="flat" cmpd="sng" algn="ctr">
+                      <a:solidFill>
+                        <a:srgbClr val="DDE5E8"/>
+                      </a:solidFill>
+                      <a:prstDash val="solid"/>
+                      <a:round/>
+                      <a:headEnd type="none" w="med" len="med"/>
+                      <a:tailEnd type="none" w="med" len="med"/>
+                    </a:lnT>
+                    <a:lnB w="6350" cap="flat" cmpd="sng" algn="ctr">
+                      <a:solidFill>
+                        <a:srgbClr val="DDE5E8"/>
+                      </a:solidFill>
+                      <a:prstDash val="solid"/>
+                      <a:round/>
+                      <a:headEnd type="none" w="med" len="med"/>
+                      <a:tailEnd type="none" w="med" len="med"/>
+                    </a:lnB>
+                  </a:tcPr>
+                </a:tc>
+                <a:tc>
+                  <a:txBody>
+                    <a:bodyPr/>
+                    <a:lstStyle/>
+                    <a:p>
+                      <a:pPr algn="ctr" indent="0" marL="0">
+                        <a:buNone/>
+                      </a:pPr>
+                      <a:r>
+                        <a:rPr lang="en-US" sz="1100" dirty="0">
+                          <a:solidFill>
+                            <a:srgbClr val="16252C"/>
+                          </a:solidFill>
+                          <a:latin typeface="微软雅黑" pitchFamily="34" charset="0"/>
+                          <a:ea typeface="微软雅黑" pitchFamily="34" charset="-122"/>
+                          <a:cs typeface="微软雅黑" pitchFamily="34" charset="-120"/>
+                        </a:rPr>
+                        <a:t>11</a:t>
+                      </a:r>
+                      <a:endParaRPr lang="en-US" sz="1100" dirty="0">
+                        <a:latin typeface="微软雅黑" charset="0"/>
+                        <a:ea typeface="微软雅黑" charset="0"/>
+                        <a:cs typeface="微软雅黑" charset="0"/>
+                      </a:endParaRPr>
+                    </a:p>
+                  </a:txBody>
+                  <a:tcPr marL="91440" marR="91440" marT="45720" marB="45720" anchor="ctr">
+                    <a:lnL w="6350" cap="flat" cmpd="sng" algn="ctr">
+                      <a:solidFill>
+                        <a:srgbClr val="DDE5E8"/>
+                      </a:solidFill>
+                      <a:prstDash val="solid"/>
+                      <a:round/>
+                      <a:headEnd type="none" w="med" len="med"/>
+                      <a:tailEnd type="none" w="med" len="med"/>
+                    </a:lnL>
+                    <a:lnR w="6350" cap="flat" cmpd="sng" algn="ctr">
+                      <a:solidFill>
+                        <a:srgbClr val="DDE5E8"/>
+                      </a:solidFill>
+                      <a:prstDash val="solid"/>
+                      <a:round/>
+                      <a:headEnd type="none" w="med" len="med"/>
+                      <a:tailEnd type="none" w="med" len="med"/>
+                    </a:lnR>
+                    <a:lnT w="6350" cap="flat" cmpd="sng" algn="ctr">
+                      <a:solidFill>
+                        <a:srgbClr val="DDE5E8"/>
+                      </a:solidFill>
+                      <a:prstDash val="solid"/>
+                      <a:round/>
+                      <a:headEnd type="none" w="med" len="med"/>
+                      <a:tailEnd type="none" w="med" len="med"/>
+                    </a:lnT>
+                    <a:lnB w="6350" cap="flat" cmpd="sng" algn="ctr">
+                      <a:solidFill>
+                        <a:srgbClr val="DDE5E8"/>
+                      </a:solidFill>
+                      <a:prstDash val="solid"/>
+                      <a:round/>
+                      <a:headEnd type="none" w="med" len="med"/>
+                      <a:tailEnd type="none" w="med" len="med"/>
+                    </a:lnB>
+                  </a:tcPr>
+                </a:tc>
+                <a:tc>
+                  <a:txBody>
+                    <a:bodyPr/>
+                    <a:lstStyle/>
+                    <a:p>
+                      <a:pPr algn="ctr" indent="0" marL="0">
+                        <a:buNone/>
+                      </a:pPr>
+                      <a:r>
+                        <a:rPr lang="en-US" sz="1100" dirty="0">
+                          <a:solidFill>
+                            <a:srgbClr val="16252C"/>
+                          </a:solidFill>
+                          <a:latin typeface="微软雅黑" pitchFamily="34" charset="0"/>
+                          <a:ea typeface="微软雅黑" pitchFamily="34" charset="-122"/>
+                          <a:cs typeface="微软雅黑" pitchFamily="34" charset="-120"/>
+                        </a:rPr>
+                        <a:t>1</a:t>
+                      </a:r>
+                      <a:endParaRPr lang="en-US" sz="1100" dirty="0">
+                        <a:latin typeface="微软雅黑" charset="0"/>
+                        <a:ea typeface="微软雅黑" charset="0"/>
+                        <a:cs typeface="微软雅黑" charset="0"/>
+                      </a:endParaRPr>
+                    </a:p>
+                  </a:txBody>
+                  <a:tcPr marL="91440" marR="91440" marT="45720" marB="45720" anchor="ctr">
+                    <a:lnL w="6350" cap="flat" cmpd="sng" algn="ctr">
+                      <a:solidFill>
+                        <a:srgbClr val="DDE5E8"/>
+                      </a:solidFill>
+                      <a:prstDash val="solid"/>
+                      <a:round/>
+                      <a:headEnd type="none" w="med" len="med"/>
+                      <a:tailEnd type="none" w="med" len="med"/>
+                    </a:lnL>
+                    <a:lnR w="6350" cap="flat" cmpd="sng" algn="ctr">
+                      <a:solidFill>
+                        <a:srgbClr val="DDE5E8"/>
+                      </a:solidFill>
+                      <a:prstDash val="solid"/>
+                      <a:round/>
+                      <a:headEnd type="none" w="med" len="med"/>
+                      <a:tailEnd type="none" w="med" len="med"/>
+                    </a:lnR>
+                    <a:lnT w="6350" cap="flat" cmpd="sng" algn="ctr">
+                      <a:solidFill>
+                        <a:srgbClr val="DDE5E8"/>
+                      </a:solidFill>
+                      <a:prstDash val="solid"/>
+                      <a:round/>
+                      <a:headEnd type="none" w="med" len="med"/>
+                      <a:tailEnd type="none" w="med" len="med"/>
+                    </a:lnT>
+                    <a:lnB w="6350" cap="flat" cmpd="sng" algn="ctr">
+                      <a:solidFill>
+                        <a:srgbClr val="DDE5E8"/>
+                      </a:solidFill>
+                      <a:prstDash val="solid"/>
+                      <a:round/>
+                      <a:headEnd type="none" w="med" len="med"/>
+                      <a:tailEnd type="none" w="med" len="med"/>
+                    </a:lnB>
+                  </a:tcPr>
+                </a:tc>
+                <a:tc>
+                  <a:txBody>
+                    <a:bodyPr/>
+                    <a:lstStyle/>
+                    <a:p>
+                      <a:pPr algn="ctr" indent="0" marL="0">
+                        <a:buNone/>
+                      </a:pPr>
+                      <a:r>
+                        <a:rPr lang="en-US" sz="1100" dirty="0">
+                          <a:solidFill>
+                            <a:srgbClr val="16252C"/>
+                          </a:solidFill>
+                          <a:latin typeface="微软雅黑" pitchFamily="34" charset="0"/>
+                          <a:ea typeface="微软雅黑" pitchFamily="34" charset="-122"/>
+                          <a:cs typeface="微软雅黑" pitchFamily="34" charset="-120"/>
+                        </a:rPr>
+                        <a:t>1.000</a:t>
+                      </a:r>
+                      <a:endParaRPr lang="en-US" sz="1100" dirty="0">
+                        <a:latin typeface="微软雅黑" charset="0"/>
+                        <a:ea typeface="微软雅黑" charset="0"/>
+                        <a:cs typeface="微软雅黑" charset="0"/>
+                      </a:endParaRPr>
+                    </a:p>
+                  </a:txBody>
+                  <a:tcPr marL="91440" marR="91440" marT="45720" marB="45720" anchor="ctr">
+                    <a:lnL w="6350" cap="flat" cmpd="sng" algn="ctr">
+                      <a:solidFill>
+                        <a:srgbClr val="DDE5E8"/>
+                      </a:solidFill>
+                      <a:prstDash val="solid"/>
+                      <a:round/>
+                      <a:headEnd type="none" w="med" len="med"/>
+                      <a:tailEnd type="none" w="med" len="med"/>
+                    </a:lnL>
+                    <a:lnR w="6350" cap="flat" cmpd="sng" algn="ctr">
+                      <a:solidFill>
+                        <a:srgbClr val="DDE5E8"/>
+                      </a:solidFill>
+                      <a:prstDash val="solid"/>
+                      <a:round/>
+                      <a:headEnd type="none" w="med" len="med"/>
+                      <a:tailEnd type="none" w="med" len="med"/>
+                    </a:lnR>
+                    <a:lnT w="6350" cap="flat" cmpd="sng" algn="ctr">
+                      <a:solidFill>
+                        <a:srgbClr val="DDE5E8"/>
+                      </a:solidFill>
+                      <a:prstDash val="solid"/>
+                      <a:round/>
+                      <a:headEnd type="none" w="med" len="med"/>
+                      <a:tailEnd type="none" w="med" len="med"/>
+                    </a:lnT>
+                    <a:lnB w="6350" cap="flat" cmpd="sng" algn="ctr">
+                      <a:solidFill>
+                        <a:srgbClr val="DDE5E8"/>
+                      </a:solidFill>
+                      <a:prstDash val="solid"/>
+                      <a:round/>
+                      <a:headEnd type="none" w="med" len="med"/>
+                      <a:tailEnd type="none" w="med" len="med"/>
+                    </a:lnB>
+                  </a:tcPr>
+                </a:tc>
+              </a:tr>
+              <a:tr h="384048">
+                <a:tc>
+                  <a:txBody>
+                    <a:bodyPr/>
+                    <a:lstStyle/>
+                    <a:p>
+                      <a:pPr algn="ctr" indent="0" marL="0">
+                        <a:buNone/>
+                      </a:pPr>
+                      <a:r>
+                        <a:rPr lang="en-US" sz="1150" b="1" dirty="0">
+                          <a:solidFill>
+                            <a:srgbClr val="16252C"/>
+                          </a:solidFill>
+                          <a:latin typeface="微软雅黑" pitchFamily="34" charset="0"/>
+                          <a:ea typeface="微软雅黑" pitchFamily="34" charset="-122"/>
+                          <a:cs typeface="微软雅黑" pitchFamily="34" charset="-120"/>
+                        </a:rPr>
+                        <a:t>平均</a:t>
+                      </a:r>
+                      <a:endParaRPr lang="en-US" sz="1150" dirty="0">
+                        <a:latin typeface="微软雅黑" charset="0"/>
+                        <a:ea typeface="微软雅黑" charset="0"/>
+                        <a:cs typeface="微软雅黑" charset="0"/>
+                      </a:endParaRPr>
+                    </a:p>
+                  </a:txBody>
+                  <a:tcPr marL="91440" marR="91440" marT="45720" marB="45720" anchor="ctr">
+                    <a:lnL w="6350" cap="flat" cmpd="sng" algn="ctr">
+                      <a:solidFill>
+                        <a:srgbClr val="DDE5E8"/>
+                      </a:solidFill>
+                      <a:prstDash val="solid"/>
+                      <a:round/>
+                      <a:headEnd type="none" w="med" len="med"/>
+                      <a:tailEnd type="none" w="med" len="med"/>
+                    </a:lnL>
+                    <a:lnR w="6350" cap="flat" cmpd="sng" algn="ctr">
+                      <a:solidFill>
+                        <a:srgbClr val="DDE5E8"/>
+                      </a:solidFill>
+                      <a:prstDash val="solid"/>
+                      <a:round/>
+                      <a:headEnd type="none" w="med" len="med"/>
+                      <a:tailEnd type="none" w="med" len="med"/>
+                    </a:lnR>
+                    <a:lnT w="6350" cap="flat" cmpd="sng" algn="ctr">
+                      <a:solidFill>
+                        <a:srgbClr val="DDE5E8"/>
+                      </a:solidFill>
+                      <a:prstDash val="solid"/>
+                      <a:round/>
+                      <a:headEnd type="none" w="med" len="med"/>
+                      <a:tailEnd type="none" w="med" len="med"/>
+                    </a:lnT>
+                    <a:lnB w="6350" cap="flat" cmpd="sng" algn="ctr">
+                      <a:solidFill>
+                        <a:srgbClr val="DDE5E8"/>
+                      </a:solidFill>
+                      <a:prstDash val="solid"/>
+                      <a:round/>
+                      <a:headEnd type="none" w="med" len="med"/>
+                      <a:tailEnd type="none" w="med" len="med"/>
+                    </a:lnB>
+                    <a:solidFill>
+                      <a:srgbClr val="E4F0F0"/>
+                    </a:solidFill>
+                  </a:tcPr>
+                </a:tc>
+                <a:tc>
+                  <a:txBody>
+                    <a:bodyPr/>
+                    <a:lstStyle/>
+                    <a:p>
+                      <a:pPr algn="ctr" indent="0" marL="0">
+                        <a:buNone/>
+                      </a:pPr>
+                      <a:endParaRPr lang="en-US" sz="1150" dirty="0">
+                        <a:latin typeface="微软雅黑" charset="0"/>
+                        <a:ea typeface="微软雅黑" charset="0"/>
+                        <a:cs typeface="微软雅黑" charset="0"/>
+                      </a:endParaRPr>
+                    </a:p>
+                  </a:txBody>
+                  <a:tcPr marL="91440" marR="91440" marT="45720" marB="45720" anchor="ctr">
+                    <a:lnL w="6350" cap="flat" cmpd="sng" algn="ctr">
+                      <a:solidFill>
+                        <a:srgbClr val="DDE5E8"/>
+                      </a:solidFill>
+                      <a:prstDash val="solid"/>
+                      <a:round/>
+                      <a:headEnd type="none" w="med" len="med"/>
+                      <a:tailEnd type="none" w="med" len="med"/>
+                    </a:lnL>
+                    <a:lnR w="6350" cap="flat" cmpd="sng" algn="ctr">
+                      <a:solidFill>
+                        <a:srgbClr val="DDE5E8"/>
+                      </a:solidFill>
+                      <a:prstDash val="solid"/>
+                      <a:round/>
+                      <a:headEnd type="none" w="med" len="med"/>
+                      <a:tailEnd type="none" w="med" len="med"/>
+                    </a:lnR>
+                    <a:lnT w="6350" cap="flat" cmpd="sng" algn="ctr">
+                      <a:solidFill>
+                        <a:srgbClr val="DDE5E8"/>
+                      </a:solidFill>
+                      <a:prstDash val="solid"/>
+                      <a:round/>
+                      <a:headEnd type="none" w="med" len="med"/>
+                      <a:tailEnd type="none" w="med" len="med"/>
+                    </a:lnT>
+                    <a:lnB w="6350" cap="flat" cmpd="sng" algn="ctr">
+                      <a:solidFill>
+                        <a:srgbClr val="DDE5E8"/>
+                      </a:solidFill>
+                      <a:prstDash val="solid"/>
+                      <a:round/>
+                      <a:headEnd type="none" w="med" len="med"/>
+                      <a:tailEnd type="none" w="med" len="med"/>
+                    </a:lnB>
+                    <a:solidFill>
+                      <a:srgbClr val="E4F0F0"/>
+                    </a:solidFill>
+                  </a:tcPr>
+                </a:tc>
+                <a:tc>
+                  <a:txBody>
+                    <a:bodyPr/>
+                    <a:lstStyle/>
+                    <a:p>
+                      <a:pPr algn="ctr" indent="0" marL="0">
+                        <a:buNone/>
+                      </a:pPr>
+                      <a:endParaRPr lang="en-US" sz="1150" dirty="0">
+                        <a:latin typeface="微软雅黑" charset="0"/>
+                        <a:ea typeface="微软雅黑" charset="0"/>
+                        <a:cs typeface="微软雅黑" charset="0"/>
+                      </a:endParaRPr>
+                    </a:p>
+                  </a:txBody>
+                  <a:tcPr marL="91440" marR="91440" marT="45720" marB="45720" anchor="ctr">
+                    <a:lnL w="6350" cap="flat" cmpd="sng" algn="ctr">
+                      <a:solidFill>
+                        <a:srgbClr val="DDE5E8"/>
+                      </a:solidFill>
+                      <a:prstDash val="solid"/>
+                      <a:round/>
+                      <a:headEnd type="none" w="med" len="med"/>
+                      <a:tailEnd type="none" w="med" len="med"/>
+                    </a:lnL>
+                    <a:lnR w="6350" cap="flat" cmpd="sng" algn="ctr">
+                      <a:solidFill>
+                        <a:srgbClr val="DDE5E8"/>
+                      </a:solidFill>
+                      <a:prstDash val="solid"/>
+                      <a:round/>
+                      <a:headEnd type="none" w="med" len="med"/>
+                      <a:tailEnd type="none" w="med" len="med"/>
+                    </a:lnR>
+                    <a:lnT w="6350" cap="flat" cmpd="sng" algn="ctr">
+                      <a:solidFill>
+                        <a:srgbClr val="DDE5E8"/>
+                      </a:solidFill>
+                      <a:prstDash val="solid"/>
+                      <a:round/>
+                      <a:headEnd type="none" w="med" len="med"/>
+                      <a:tailEnd type="none" w="med" len="med"/>
+                    </a:lnT>
+                    <a:lnB w="6350" cap="flat" cmpd="sng" algn="ctr">
+                      <a:solidFill>
+                        <a:srgbClr val="DDE5E8"/>
+                      </a:solidFill>
+                      <a:prstDash val="solid"/>
+                      <a:round/>
+                      <a:headEnd type="none" w="med" len="med"/>
+                      <a:tailEnd type="none" w="med" len="med"/>
+                    </a:lnB>
+                    <a:solidFill>
+                      <a:srgbClr val="E4F0F0"/>
+                    </a:solidFill>
+                  </a:tcPr>
+                </a:tc>
+                <a:tc>
+                  <a:txBody>
+                    <a:bodyPr/>
+                    <a:lstStyle/>
+                    <a:p>
+                      <a:pPr algn="ctr" indent="0" marL="0">
+                        <a:buNone/>
+                      </a:pPr>
+                      <a:r>
+                        <a:rPr lang="en-US" sz="1150" b="1" dirty="0">
+                          <a:solidFill>
+                            <a:srgbClr val="16252C"/>
+                          </a:solidFill>
+                          <a:latin typeface="微软雅黑" pitchFamily="34" charset="0"/>
+                          <a:ea typeface="微软雅黑" pitchFamily="34" charset="-122"/>
+                          <a:cs typeface="微软雅黑" pitchFamily="34" charset="-120"/>
+                        </a:rPr>
+                        <a:t>0.921</a:t>
+                      </a:r>
+                      <a:endParaRPr lang="en-US" sz="1150" dirty="0">
+                        <a:latin typeface="微软雅黑" charset="0"/>
+                        <a:ea typeface="微软雅黑" charset="0"/>
+                        <a:cs typeface="微软雅黑" charset="0"/>
+                      </a:endParaRPr>
+                    </a:p>
+                  </a:txBody>
+                  <a:tcPr marL="91440" marR="91440" marT="45720" marB="45720" anchor="ctr">
+                    <a:lnL w="6350" cap="flat" cmpd="sng" algn="ctr">
+                      <a:solidFill>
+                        <a:srgbClr val="DDE5E8"/>
+                      </a:solidFill>
+                      <a:prstDash val="solid"/>
+                      <a:round/>
+                      <a:headEnd type="none" w="med" len="med"/>
+                      <a:tailEnd type="none" w="med" len="med"/>
+                    </a:lnL>
+                    <a:lnR w="6350" cap="flat" cmpd="sng" algn="ctr">
+                      <a:solidFill>
+                        <a:srgbClr val="DDE5E8"/>
+                      </a:solidFill>
+                      <a:prstDash val="solid"/>
+                      <a:round/>
+                      <a:headEnd type="none" w="med" len="med"/>
+                      <a:tailEnd type="none" w="med" len="med"/>
+                    </a:lnR>
+                    <a:lnT w="6350" cap="flat" cmpd="sng" algn="ctr">
+                      <a:solidFill>
+                        <a:srgbClr val="DDE5E8"/>
+                      </a:solidFill>
+                      <a:prstDash val="solid"/>
+                      <a:round/>
+                      <a:headEnd type="none" w="med" len="med"/>
+                      <a:tailEnd type="none" w="med" len="med"/>
+                    </a:lnT>
+                    <a:lnB w="6350" cap="flat" cmpd="sng" algn="ctr">
+                      <a:solidFill>
+                        <a:srgbClr val="DDE5E8"/>
+                      </a:solidFill>
+                      <a:prstDash val="solid"/>
+                      <a:round/>
+                      <a:headEnd type="none" w="med" len="med"/>
+                      <a:tailEnd type="none" w="med" len="med"/>
+                    </a:lnB>
+                    <a:solidFill>
+                      <a:srgbClr val="E4F0F0"/>
+                    </a:solidFill>
+                  </a:tcPr>
+                </a:tc>
+              </a:tr>
+            </a:tbl>
+          </a:graphicData>
+        </a:graphic>
+      </p:graphicFrame>
+      <p:sp>
+        <p:nvSpPr>
+          <p:cNvPr id="14" name="Shape 10"/>
+          <p:cNvSpPr/>
+          <p:nvPr/>
+        </p:nvSpPr>
+        <p:spPr>
+          <a:xfrm>
+            <a:off x="6309360" y="4206240"/>
+            <a:ext cx="5303520" cy="1536192"/>
+          </a:xfrm>
+          <a:prstGeom prst="rect">
+            <a:avLst/>
+          </a:prstGeom>
+          <a:solidFill>
+            <a:srgbClr val="FFFFFF"/>
+          </a:solidFill>
+          <a:ln/>
+          <a:effectLst>
+            <a:outerShdw sx="100000" sy="100000" kx="0" ky="0" algn="bl" rotWithShape="0" blurRad="101600" dist="25400" dir="8100000">
+              <a:srgbClr val="000000">
+                <a:alpha val="10000"/>
+              </a:srgbClr>
+            </a:outerShdw>
+          </a:effectLst>
+        </p:spPr>
+      </p:sp>
+      <p:sp>
+        <p:nvSpPr>
+          <p:cNvPr id="15" name="Shape 11"/>
+          <p:cNvSpPr/>
+          <p:nvPr/>
+        </p:nvSpPr>
+        <p:spPr>
+          <a:xfrm>
+            <a:off x="6309360" y="4206240"/>
+            <a:ext cx="68580" cy="1536192"/>
+          </a:xfrm>
+          <a:prstGeom prst="rect">
+            <a:avLst/>
+          </a:prstGeom>
+          <a:solidFill>
+            <a:srgbClr val="8FB996"/>
+          </a:solidFill>
+          <a:ln/>
+        </p:spPr>
+      </p:sp>
+      <p:sp>
+        <p:nvSpPr>
+          <p:cNvPr id="16" name="Text 12"/>
+          <p:cNvSpPr/>
+          <p:nvPr/>
+        </p:nvSpPr>
+        <p:spPr>
+          <a:xfrm>
+            <a:off x="6565392" y="4352544"/>
+            <a:ext cx="4846320" cy="329184"/>
+          </a:xfrm>
+          <a:prstGeom prst="rect">
+            <a:avLst/>
+          </a:prstGeom>
+          <a:noFill/>
+          <a:ln/>
+        </p:spPr>
+        <p:txBody>
+          <a:bodyPr wrap="square" lIns="0" tIns="0" rIns="0" bIns="0" rtlCol="0" anchor="t"/>
+          <a:lstStyle/>
+          <a:p>
+            <a:pPr indent="0" marL="0">
+              <a:buNone/>
+            </a:pPr>
+            <a:r>
+              <a:rPr lang="en-US" sz="1400" b="1" dirty="0">
+                <a:solidFill>
+                  <a:srgbClr val="16252C"/>
+                </a:solidFill>
+                <a:latin typeface="微软雅黑" pitchFamily="34" charset="0"/>
+                <a:ea typeface="微软雅黑" pitchFamily="34" charset="-122"/>
+                <a:cs typeface="微软雅黑" pitchFamily="34" charset="-120"/>
+              </a:rPr>
+              <a:t>空间泛化不是瓶颈</a:t>
+            </a:r>
+            <a:endParaRPr lang="en-US" sz="1400" dirty="0"/>
+          </a:p>
+        </p:txBody>
+      </p:sp>
+      <p:sp>
+        <p:nvSpPr>
+          <p:cNvPr id="17" name="Text 13"/>
+          <p:cNvSpPr/>
+          <p:nvPr/>
+        </p:nvSpPr>
+        <p:spPr>
+          <a:xfrm>
+            <a:off x="6565392" y="4736592"/>
+            <a:ext cx="4846320" cy="877824"/>
+          </a:xfrm>
+          <a:prstGeom prst="rect">
+            <a:avLst/>
+          </a:prstGeom>
+          <a:noFill/>
+          <a:ln/>
+        </p:spPr>
+        <p:txBody>
+          <a:bodyPr wrap="square" lIns="0" tIns="0" rIns="0" bIns="0" rtlCol="0" anchor="t"/>
+          <a:lstStyle/>
+          <a:p>
+            <a:pPr indent="0" marL="0">
+              <a:lnSpc>
+                <a:spcPct val="112000"/>
+              </a:lnSpc>
+              <a:buNone/>
+            </a:pPr>
+            <a:r>
+              <a:rPr lang="en-US" sz="1100" dirty="0">
+                <a:solidFill>
+                  <a:srgbClr val="5F7580"/>
+                </a:solidFill>
+                <a:latin typeface="微软雅黑" pitchFamily="34" charset="0"/>
+                <a:ea typeface="微软雅黑" pitchFamily="34" charset="-122"/>
+                <a:cs typeface="微软雅黑" pitchFamily="34" charset="-120"/>
+              </a:rPr>
+              <a:t>在季节可比的前提下，模型跨湿地迁移的 AUC 为 0.84–0.92。</a:t>
+            </a:r>
+            <a:endParaRPr lang="en-US" sz="1100" dirty="0"/>
+          </a:p>
+          <a:p>
+            <a:pPr indent="0" marL="0">
+              <a:lnSpc>
+                <a:spcPct val="112000"/>
+              </a:lnSpc>
+              <a:buNone/>
+            </a:pPr>
+            <a:endParaRPr lang="en-US" sz="1100" dirty="0"/>
+          </a:p>
+          <a:p>
+            <a:pPr indent="0" marL="0">
+              <a:lnSpc>
+                <a:spcPct val="112000"/>
+              </a:lnSpc>
+              <a:buNone/>
+            </a:pPr>
+            <a:r>
+              <a:rPr lang="en-US" sz="1100" dirty="0">
+                <a:solidFill>
+                  <a:srgbClr val="5F7580"/>
+                </a:solidFill>
+                <a:latin typeface="微软雅黑" pitchFamily="34" charset="0"/>
+                <a:ea typeface="微软雅黑" pitchFamily="34" charset="-122"/>
+                <a:cs typeface="微软雅黑" pitchFamily="34" charset="-120"/>
+              </a:rPr>
+              <a:t>把朴素平均值拖下去的 Sacramento 那一折，其 46 个 1 月样本中只有 1 个阳性——那个 AUC 是单只鸟的排名百分位，不是一个估计值。</a:t>
+            </a:r>
+            <a:endParaRPr lang="en-US" sz="1100" dirty="0"/>
+          </a:p>
+        </p:txBody>
+      </p:sp>
+    </p:spTree>
+  </p:cSld>
+  <p:clrMapOvr>
+    <a:masterClrMapping/>
+  </p:clrMapOvr>
+</p:sld>
+</file>
+
+<file path=ppt/slides/slide24.xml><?xml version="1.0" encoding="utf-8"?>
+<p:sld xmlns:a="http://schemas.openxmlformats.org/drawingml/2006/main" xmlns:r="http://schemas.openxmlformats.org/officeDocument/2006/relationships" xmlns:p="http://schemas.openxmlformats.org/presentationml/2006/main">
+  <p:cSld name="Slide 24">
+    <p:bg>
+      <p:bgPr>
+        <a:solidFill>
           <a:srgbClr val="0B3C49"/>
         </a:solidFill>
       </p:bgPr>
@@ -29584,9 +32670,9 @@
 </p:sld>
 </file>
 
-<file path=ppt/slides/slide24.xml><?xml version="1.0" encoding="utf-8"?>
+<file path=ppt/slides/slide25.xml><?xml version="1.0" encoding="utf-8"?>
 <p:sld xmlns:a="http://schemas.openxmlformats.org/drawingml/2006/main" xmlns:r="http://schemas.openxmlformats.org/officeDocument/2006/relationships" xmlns:p="http://schemas.openxmlformats.org/presentationml/2006/main">
-  <p:cSld name="Slide 24">
+  <p:cSld name="Slide 25">
     <p:bg>
       <p:bgPr>
         <a:solidFill>
@@ -29739,7 +32825,7 @@
                 <a:ea typeface="微软雅黑" pitchFamily="34" charset="-122"/>
                 <a:cs typeface="微软雅黑" pitchFamily="34" charset="-120"/>
               </a:rPr>
-              <a:t>24</a:t>
+              <a:t>25</a:t>
             </a:r>
             <a:endParaRPr lang="en-US" sz="1000" dirty="0"/>
           </a:p>
@@ -29786,7 +32872,7 @@
       </p:sp>
       <p:graphicFrame>
         <p:nvGraphicFramePr>
-          <p:cNvPr id="25" name="Table 0"/>
+          <p:cNvPr id="26" name="Table 0"/>
           <p:cNvGraphicFramePr>
             <a:graphicFrameLocks noGrp="1"/>
           </p:cNvGraphicFramePr>
@@ -33518,9 +36604,9 @@
 </p:sld>
 </file>
 
-<file path=ppt/slides/slide25.xml><?xml version="1.0" encoding="utf-8"?>
+<file path=ppt/slides/slide26.xml><?xml version="1.0" encoding="utf-8"?>
 <p:sld xmlns:a="http://schemas.openxmlformats.org/drawingml/2006/main" xmlns:r="http://schemas.openxmlformats.org/officeDocument/2006/relationships" xmlns:p="http://schemas.openxmlformats.org/presentationml/2006/main">
-  <p:cSld name="Slide 25">
+  <p:cSld name="Slide 26">
     <p:bg>
       <p:bgPr>
         <a:solidFill>
@@ -33673,7 +36759,7 @@
                 <a:ea typeface="微软雅黑" pitchFamily="34" charset="-122"/>
                 <a:cs typeface="微软雅黑" pitchFamily="34" charset="-120"/>
               </a:rPr>
-              <a:t>25</a:t>
+              <a:t>26</a:t>
             </a:r>
             <a:endParaRPr lang="en-US" sz="1000" dirty="0"/>
           </a:p>
@@ -34226,9 +37312,9 @@
 </p:sld>
 </file>
 
-<file path=ppt/slides/slide26.xml><?xml version="1.0" encoding="utf-8"?>
+<file path=ppt/slides/slide27.xml><?xml version="1.0" encoding="utf-8"?>
 <p:sld xmlns:a="http://schemas.openxmlformats.org/drawingml/2006/main" xmlns:r="http://schemas.openxmlformats.org/officeDocument/2006/relationships" xmlns:p="http://schemas.openxmlformats.org/presentationml/2006/main">
-  <p:cSld name="Slide 26">
+  <p:cSld name="Slide 27">
     <p:bg>
       <p:bgPr>
         <a:solidFill>
@@ -34381,7 +37467,7 @@
                 <a:ea typeface="微软雅黑" pitchFamily="34" charset="-122"/>
                 <a:cs typeface="微软雅黑" pitchFamily="34" charset="-120"/>
               </a:rPr>
-              <a:t>26</a:t>
+              <a:t>27</a:t>
             </a:r>
             <a:endParaRPr lang="en-US" sz="1000" dirty="0"/>
           </a:p>
@@ -35013,9 +38099,9 @@
 </p:sld>
 </file>
 
-<file path=ppt/slides/slide27.xml><?xml version="1.0" encoding="utf-8"?>
+<file path=ppt/slides/slide28.xml><?xml version="1.0" encoding="utf-8"?>
 <p:sld xmlns:a="http://schemas.openxmlformats.org/drawingml/2006/main" xmlns:r="http://schemas.openxmlformats.org/officeDocument/2006/relationships" xmlns:p="http://schemas.openxmlformats.org/presentationml/2006/main">
-  <p:cSld name="Slide 27">
+  <p:cSld name="Slide 28">
     <p:bg>
       <p:bgPr>
         <a:solidFill>
@@ -35168,7 +38254,7 @@
                 <a:ea typeface="微软雅黑" pitchFamily="34" charset="-122"/>
                 <a:cs typeface="微软雅黑" pitchFamily="34" charset="-120"/>
               </a:rPr>
-              <a:t>27</a:t>
+              <a:t>28</a:t>
             </a:r>
             <a:endParaRPr lang="en-US" sz="1000" dirty="0"/>
           </a:p>
@@ -36150,7 +39236,7 @@
                 <a:ea typeface="微软雅黑" pitchFamily="34" charset="-122"/>
                 <a:cs typeface="微软雅黑" pitchFamily="34" charset="-120"/>
               </a:rPr>
-              <a:t>8.  空间混杂未解决</a:t>
+              <a:t>8.  采样设计把空间与时间绑死</a:t>
             </a:r>
             <a:endParaRPr lang="en-US" sz="1250" dirty="0"/>
           </a:p>
@@ -36192,7 +39278,7 @@
                 <a:ea typeface="微软雅黑" pitchFamily="34" charset="-122"/>
                 <a:cs typeface="微软雅黑" pitchFamily="34" charset="-120"/>
               </a:rPr>
-              <a:t>即使删掉被混杂的月份：地点 → 标签 AUC 0.740，菌群 → 地点 0.753。按地点分层则样本量不足。</a:t>
+              <a:t>地点与月份几乎可互换，故跨季节部署无法检验。跨地点迁移本身是好的（0.84–0.92）。</a:t>
             </a:r>
             <a:endParaRPr lang="en-US" sz="1050" dirty="0"/>
           </a:p>
@@ -36234,882 +39320,6 @@
               <a:t>与 README 中的表述完全一致——未因汇报场合而弱化。</a:t>
             </a:r>
             <a:endParaRPr lang="en-US" sz="1100" dirty="0"/>
-          </a:p>
-        </p:txBody>
-      </p:sp>
-    </p:spTree>
-  </p:cSld>
-  <p:clrMapOvr>
-    <a:masterClrMapping/>
-  </p:clrMapOvr>
-</p:sld>
-</file>
-
-<file path=ppt/slides/slide28.xml><?xml version="1.0" encoding="utf-8"?>
-<p:sld xmlns:a="http://schemas.openxmlformats.org/drawingml/2006/main" xmlns:r="http://schemas.openxmlformats.org/officeDocument/2006/relationships" xmlns:p="http://schemas.openxmlformats.org/presentationml/2006/main">
-  <p:cSld name="Slide 28">
-    <p:bg>
-      <p:bgPr>
-        <a:solidFill>
-          <a:srgbClr val="FCFAF6"/>
-        </a:solidFill>
-      </p:bgPr>
-    </p:bg>
-    <p:spTree>
-      <p:nvGrpSpPr>
-        <p:cNvPr id="1" name=""/>
-        <p:cNvGrpSpPr/>
-        <p:nvPr/>
-      </p:nvGrpSpPr>
-      <p:grpSpPr>
-        <a:xfrm>
-          <a:off x="0" y="0"/>
-          <a:ext cx="0" cy="0"/>
-          <a:chOff x="0" y="0"/>
-          <a:chExt cx="0" cy="0"/>
-        </a:xfrm>
-      </p:grpSpPr>
-      <p:sp>
-        <p:nvSpPr>
-          <p:cNvPr id="2" name="Shape 0"/>
-          <p:cNvSpPr/>
-          <p:nvPr/>
-        </p:nvSpPr>
-        <p:spPr>
-          <a:xfrm>
-            <a:off x="0" y="0"/>
-            <a:ext cx="12191695" cy="54864"/>
-          </a:xfrm>
-          <a:prstGeom prst="rect">
-            <a:avLst/>
-          </a:prstGeom>
-          <a:solidFill>
-            <a:srgbClr val="18707F"/>
-          </a:solidFill>
-          <a:ln/>
-        </p:spPr>
-      </p:sp>
-      <p:sp>
-        <p:nvSpPr>
-          <p:cNvPr id="3" name="Text 1"/>
-          <p:cNvSpPr/>
-          <p:nvPr/>
-        </p:nvSpPr>
-        <p:spPr>
-          <a:xfrm>
-            <a:off x="548640" y="310896"/>
-            <a:ext cx="7315200" cy="256032"/>
-          </a:xfrm>
-          <a:prstGeom prst="rect">
-            <a:avLst/>
-          </a:prstGeom>
-          <a:noFill/>
-          <a:ln/>
-        </p:spPr>
-        <p:txBody>
-          <a:bodyPr wrap="square" lIns="0" tIns="0" rIns="0" bIns="0" rtlCol="0" anchor="ctr"/>
-          <a:lstStyle/>
-          <a:p>
-            <a:pPr indent="0" marL="0">
-              <a:buNone/>
-            </a:pPr>
-            <a:r>
-              <a:rPr lang="en-US" sz="1100" b="1" spc="200" kern="0" dirty="0">
-                <a:solidFill>
-                  <a:srgbClr val="18707F"/>
-                </a:solidFill>
-                <a:latin typeface="微软雅黑" pitchFamily="34" charset="0"/>
-                <a:ea typeface="微软雅黑" pitchFamily="34" charset="-122"/>
-                <a:cs typeface="微软雅黑" pitchFamily="34" charset="-120"/>
-              </a:rPr>
-              <a:t>总结</a:t>
-            </a:r>
-            <a:endParaRPr lang="en-US" sz="1100" dirty="0"/>
-          </a:p>
-        </p:txBody>
-      </p:sp>
-      <p:sp>
-        <p:nvSpPr>
-          <p:cNvPr id="4" name="Text 2"/>
-          <p:cNvSpPr/>
-          <p:nvPr/>
-        </p:nvSpPr>
-        <p:spPr>
-          <a:xfrm>
-            <a:off x="548640" y="566928"/>
-            <a:ext cx="11064240" cy="685800"/>
-          </a:xfrm>
-          <a:prstGeom prst="rect">
-            <a:avLst/>
-          </a:prstGeom>
-          <a:noFill/>
-          <a:ln/>
-        </p:spPr>
-        <p:txBody>
-          <a:bodyPr wrap="square" lIns="0" tIns="0" rIns="0" bIns="0" rtlCol="0" anchor="ctr"/>
-          <a:lstStyle/>
-          <a:p>
-            <a:pPr indent="0" marL="0">
-              <a:buNone/>
-            </a:pPr>
-            <a:r>
-              <a:rPr lang="en-US" sz="3000" b="1" dirty="0">
-                <a:solidFill>
-                  <a:srgbClr val="16252C"/>
-                </a:solidFill>
-                <a:latin typeface="微软雅黑" pitchFamily="34" charset="0"/>
-                <a:ea typeface="微软雅黑" pitchFamily="34" charset="-122"/>
-                <a:cs typeface="微软雅黑" pitchFamily="34" charset="-120"/>
-              </a:rPr>
-              <a:t>结论</a:t>
-            </a:r>
-            <a:endParaRPr lang="en-US" sz="3000" dirty="0"/>
-          </a:p>
-        </p:txBody>
-      </p:sp>
-      <p:sp>
-        <p:nvSpPr>
-          <p:cNvPr id="5" name="Text 3"/>
-          <p:cNvSpPr/>
-          <p:nvPr/>
-        </p:nvSpPr>
-        <p:spPr>
-          <a:xfrm>
-            <a:off x="11430000" y="6355080"/>
-            <a:ext cx="411480" cy="274320"/>
-          </a:xfrm>
-          <a:prstGeom prst="rect">
-            <a:avLst/>
-          </a:prstGeom>
-          <a:noFill/>
-          <a:ln/>
-        </p:spPr>
-        <p:txBody>
-          <a:bodyPr wrap="square" lIns="0" tIns="0" rIns="0" bIns="0" rtlCol="0" anchor="ctr"/>
-          <a:lstStyle/>
-          <a:p>
-            <a:pPr algn="r" indent="0" marL="0">
-              <a:buNone/>
-            </a:pPr>
-            <a:r>
-              <a:rPr lang="en-US" sz="1000" dirty="0">
-                <a:solidFill>
-                  <a:srgbClr val="5F7580"/>
-                </a:solidFill>
-                <a:latin typeface="微软雅黑" pitchFamily="34" charset="0"/>
-                <a:ea typeface="微软雅黑" pitchFamily="34" charset="-122"/>
-                <a:cs typeface="微软雅黑" pitchFamily="34" charset="-120"/>
-              </a:rPr>
-              <a:t>28</a:t>
-            </a:r>
-            <a:endParaRPr lang="en-US" sz="1000" dirty="0"/>
-          </a:p>
-        </p:txBody>
-      </p:sp>
-      <p:sp>
-        <p:nvSpPr>
-          <p:cNvPr id="6" name="Shape 4"/>
-          <p:cNvSpPr/>
-          <p:nvPr/>
-        </p:nvSpPr>
-        <p:spPr>
-          <a:xfrm>
-            <a:off x="548640" y="1289304"/>
-            <a:ext cx="457200" cy="457200"/>
-          </a:xfrm>
-          <a:prstGeom prst="ellipse">
-            <a:avLst/>
-          </a:prstGeom>
-          <a:solidFill>
-            <a:srgbClr val="18707F"/>
-          </a:solidFill>
-          <a:ln/>
-        </p:spPr>
-      </p:sp>
-      <p:sp>
-        <p:nvSpPr>
-          <p:cNvPr id="7" name="Text 5"/>
-          <p:cNvSpPr/>
-          <p:nvPr/>
-        </p:nvSpPr>
-        <p:spPr>
-          <a:xfrm>
-            <a:off x="548640" y="1362456"/>
-            <a:ext cx="457200" cy="310896"/>
-          </a:xfrm>
-          <a:prstGeom prst="rect">
-            <a:avLst/>
-          </a:prstGeom>
-          <a:noFill/>
-          <a:ln/>
-        </p:spPr>
-        <p:txBody>
-          <a:bodyPr wrap="square" lIns="0" tIns="0" rIns="0" bIns="0" rtlCol="0" anchor="ctr"/>
-          <a:lstStyle/>
-          <a:p>
-            <a:pPr algn="ctr" indent="0" marL="0">
-              <a:buNone/>
-            </a:pPr>
-            <a:r>
-              <a:rPr lang="en-US" sz="1400" b="1" dirty="0">
-                <a:solidFill>
-                  <a:srgbClr val="FFFFFF"/>
-                </a:solidFill>
-                <a:latin typeface="微软雅黑" pitchFamily="34" charset="0"/>
-                <a:ea typeface="微软雅黑" pitchFamily="34" charset="-122"/>
-                <a:cs typeface="微软雅黑" pitchFamily="34" charset="-120"/>
-              </a:rPr>
-              <a:t>1</a:t>
-            </a:r>
-            <a:endParaRPr lang="en-US" sz="1400" dirty="0"/>
-          </a:p>
-        </p:txBody>
-      </p:sp>
-      <p:sp>
-        <p:nvSpPr>
-          <p:cNvPr id="8" name="Text 6"/>
-          <p:cNvSpPr/>
-          <p:nvPr/>
-        </p:nvSpPr>
-        <p:spPr>
-          <a:xfrm>
-            <a:off x="1188720" y="1252728"/>
-            <a:ext cx="10424160" cy="566928"/>
-          </a:xfrm>
-          <a:prstGeom prst="rect">
-            <a:avLst/>
-          </a:prstGeom>
-          <a:noFill/>
-          <a:ln/>
-        </p:spPr>
-        <p:txBody>
-          <a:bodyPr wrap="square" lIns="0" tIns="0" rIns="0" bIns="0" rtlCol="0" anchor="t"/>
-          <a:lstStyle/>
-          <a:p>
-            <a:pPr indent="0" marL="0">
-              <a:lnSpc>
-                <a:spcPct val="108000"/>
-              </a:lnSpc>
-              <a:buNone/>
-            </a:pPr>
-            <a:r>
-              <a:rPr lang="en-US" sz="1250" dirty="0">
-                <a:solidFill>
-                  <a:srgbClr val="16252C"/>
-                </a:solidFill>
-                <a:latin typeface="微软雅黑" pitchFamily="34" charset="0"/>
-                <a:ea typeface="微软雅黑" pitchFamily="34" charset="-122"/>
-                <a:cs typeface="微软雅黑" pitchFamily="34" charset="-120"/>
-              </a:rPr>
-              <a:t>野鸭肠道菌群携带真实且可复现的流感感染信号（置换检验 p = 0.0099）。</a:t>
-            </a:r>
-            <a:endParaRPr lang="en-US" sz="1250" dirty="0"/>
-          </a:p>
-        </p:txBody>
-      </p:sp>
-      <p:sp>
-        <p:nvSpPr>
-          <p:cNvPr id="9" name="Shape 7"/>
-          <p:cNvSpPr/>
-          <p:nvPr/>
-        </p:nvSpPr>
-        <p:spPr>
-          <a:xfrm>
-            <a:off x="548640" y="2011680"/>
-            <a:ext cx="457200" cy="457200"/>
-          </a:xfrm>
-          <a:prstGeom prst="ellipse">
-            <a:avLst/>
-          </a:prstGeom>
-          <a:solidFill>
-            <a:srgbClr val="18707F"/>
-          </a:solidFill>
-          <a:ln/>
-        </p:spPr>
-      </p:sp>
-      <p:sp>
-        <p:nvSpPr>
-          <p:cNvPr id="10" name="Text 8"/>
-          <p:cNvSpPr/>
-          <p:nvPr/>
-        </p:nvSpPr>
-        <p:spPr>
-          <a:xfrm>
-            <a:off x="548640" y="2084832"/>
-            <a:ext cx="457200" cy="310896"/>
-          </a:xfrm>
-          <a:prstGeom prst="rect">
-            <a:avLst/>
-          </a:prstGeom>
-          <a:noFill/>
-          <a:ln/>
-        </p:spPr>
-        <p:txBody>
-          <a:bodyPr wrap="square" lIns="0" tIns="0" rIns="0" bIns="0" rtlCol="0" anchor="ctr"/>
-          <a:lstStyle/>
-          <a:p>
-            <a:pPr algn="ctr" indent="0" marL="0">
-              <a:buNone/>
-            </a:pPr>
-            <a:r>
-              <a:rPr lang="en-US" sz="1400" b="1" dirty="0">
-                <a:solidFill>
-                  <a:srgbClr val="FFFFFF"/>
-                </a:solidFill>
-                <a:latin typeface="微软雅黑" pitchFamily="34" charset="0"/>
-                <a:ea typeface="微软雅黑" pitchFamily="34" charset="-122"/>
-                <a:cs typeface="微软雅黑" pitchFamily="34" charset="-120"/>
-              </a:rPr>
-              <a:t>2</a:t>
-            </a:r>
-            <a:endParaRPr lang="en-US" sz="1400" dirty="0"/>
-          </a:p>
-        </p:txBody>
-      </p:sp>
-      <p:sp>
-        <p:nvSpPr>
-          <p:cNvPr id="11" name="Text 9"/>
-          <p:cNvSpPr/>
-          <p:nvPr/>
-        </p:nvSpPr>
-        <p:spPr>
-          <a:xfrm>
-            <a:off x="1188720" y="1975104"/>
-            <a:ext cx="10424160" cy="566928"/>
-          </a:xfrm>
-          <a:prstGeom prst="rect">
-            <a:avLst/>
-          </a:prstGeom>
-          <a:noFill/>
-          <a:ln/>
-        </p:spPr>
-        <p:txBody>
-          <a:bodyPr wrap="square" lIns="0" tIns="0" rIns="0" bIns="0" rtlCol="0" anchor="t"/>
-          <a:lstStyle/>
-          <a:p>
-            <a:pPr indent="0" marL="0">
-              <a:lnSpc>
-                <a:spcPct val="108000"/>
-              </a:lnSpc>
-              <a:buNone/>
-            </a:pPr>
-            <a:r>
-              <a:rPr lang="en-US" sz="1250" dirty="0">
-                <a:solidFill>
-                  <a:srgbClr val="16252C"/>
-                </a:solidFill>
-                <a:latin typeface="微软雅黑" pitchFamily="34" charset="0"/>
-                <a:ea typeface="微软雅黑" pitchFamily="34" charset="-122"/>
-                <a:cs typeface="微软雅黑" pitchFamily="34" charset="-120"/>
-              </a:rPr>
-              <a:t>SVM-RBF 是主模型——AUC 0.839、MCC 0.531——在 17 个模型的比较中显著优于随机森林（p = 0.021）、XGBoost（p = 0.0016）与 L1-LR（p &lt; 0.001）。</a:t>
-            </a:r>
-            <a:endParaRPr lang="en-US" sz="1250" dirty="0"/>
-          </a:p>
-        </p:txBody>
-      </p:sp>
-      <p:sp>
-        <p:nvSpPr>
-          <p:cNvPr id="12" name="Shape 10"/>
-          <p:cNvSpPr/>
-          <p:nvPr/>
-        </p:nvSpPr>
-        <p:spPr>
-          <a:xfrm>
-            <a:off x="548640" y="2734056"/>
-            <a:ext cx="457200" cy="457200"/>
-          </a:xfrm>
-          <a:prstGeom prst="ellipse">
-            <a:avLst/>
-          </a:prstGeom>
-          <a:solidFill>
-            <a:srgbClr val="18707F"/>
-          </a:solidFill>
-          <a:ln/>
-        </p:spPr>
-      </p:sp>
-      <p:sp>
-        <p:nvSpPr>
-          <p:cNvPr id="13" name="Text 11"/>
-          <p:cNvSpPr/>
-          <p:nvPr/>
-        </p:nvSpPr>
-        <p:spPr>
-          <a:xfrm>
-            <a:off x="548640" y="2807208"/>
-            <a:ext cx="457200" cy="310896"/>
-          </a:xfrm>
-          <a:prstGeom prst="rect">
-            <a:avLst/>
-          </a:prstGeom>
-          <a:noFill/>
-          <a:ln/>
-        </p:spPr>
-        <p:txBody>
-          <a:bodyPr wrap="square" lIns="0" tIns="0" rIns="0" bIns="0" rtlCol="0" anchor="ctr"/>
-          <a:lstStyle/>
-          <a:p>
-            <a:pPr algn="ctr" indent="0" marL="0">
-              <a:buNone/>
-            </a:pPr>
-            <a:r>
-              <a:rPr lang="en-US" sz="1400" b="1" dirty="0">
-                <a:solidFill>
-                  <a:srgbClr val="FFFFFF"/>
-                </a:solidFill>
-                <a:latin typeface="微软雅黑" pitchFamily="34" charset="0"/>
-                <a:ea typeface="微软雅黑" pitchFamily="34" charset="-122"/>
-                <a:cs typeface="微软雅黑" pitchFamily="34" charset="-120"/>
-              </a:rPr>
-              <a:t>3</a:t>
-            </a:r>
-            <a:endParaRPr lang="en-US" sz="1400" dirty="0"/>
-          </a:p>
-        </p:txBody>
-      </p:sp>
-      <p:sp>
-        <p:nvSpPr>
-          <p:cNvPr id="14" name="Text 12"/>
-          <p:cNvSpPr/>
-          <p:nvPr/>
-        </p:nvSpPr>
-        <p:spPr>
-          <a:xfrm>
-            <a:off x="1188720" y="2697480"/>
-            <a:ext cx="10424160" cy="566928"/>
-          </a:xfrm>
-          <a:prstGeom prst="rect">
-            <a:avLst/>
-          </a:prstGeom>
-          <a:noFill/>
-          <a:ln/>
-        </p:spPr>
-        <p:txBody>
-          <a:bodyPr wrap="square" lIns="0" tIns="0" rIns="0" bIns="0" rtlCol="0" anchor="t"/>
-          <a:lstStyle/>
-          <a:p>
-            <a:pPr indent="0" marL="0">
-              <a:lnSpc>
-                <a:spcPct val="108000"/>
-              </a:lnSpc>
-              <a:buNone/>
-            </a:pPr>
-            <a:r>
-              <a:rPr lang="en-US" sz="1250" dirty="0">
-                <a:solidFill>
-                  <a:srgbClr val="16252C"/>
-                </a:solidFill>
-                <a:latin typeface="微软雅黑" pitchFamily="34" charset="0"/>
-                <a:ea typeface="微软雅黑" pitchFamily="34" charset="-122"/>
-                <a:cs typeface="微软雅黑" pitchFamily="34" charset="-120"/>
-              </a:rPr>
-              <a:t>信号部分来自非线性：RBF 核比线性核多出 0.073 的 AUC，且若干菌只在组合中起作用。</a:t>
-            </a:r>
-            <a:endParaRPr lang="en-US" sz="1250" dirty="0"/>
-          </a:p>
-        </p:txBody>
-      </p:sp>
-      <p:sp>
-        <p:nvSpPr>
-          <p:cNvPr id="15" name="Shape 13"/>
-          <p:cNvSpPr/>
-          <p:nvPr/>
-        </p:nvSpPr>
-        <p:spPr>
-          <a:xfrm>
-            <a:off x="548640" y="3456432"/>
-            <a:ext cx="457200" cy="457200"/>
-          </a:xfrm>
-          <a:prstGeom prst="ellipse">
-            <a:avLst/>
-          </a:prstGeom>
-          <a:solidFill>
-            <a:srgbClr val="18707F"/>
-          </a:solidFill>
-          <a:ln/>
-        </p:spPr>
-      </p:sp>
-      <p:sp>
-        <p:nvSpPr>
-          <p:cNvPr id="16" name="Text 14"/>
-          <p:cNvSpPr/>
-          <p:nvPr/>
-        </p:nvSpPr>
-        <p:spPr>
-          <a:xfrm>
-            <a:off x="548640" y="3529584"/>
-            <a:ext cx="457200" cy="310896"/>
-          </a:xfrm>
-          <a:prstGeom prst="rect">
-            <a:avLst/>
-          </a:prstGeom>
-          <a:noFill/>
-          <a:ln/>
-        </p:spPr>
-        <p:txBody>
-          <a:bodyPr wrap="square" lIns="0" tIns="0" rIns="0" bIns="0" rtlCol="0" anchor="ctr"/>
-          <a:lstStyle/>
-          <a:p>
-            <a:pPr algn="ctr" indent="0" marL="0">
-              <a:buNone/>
-            </a:pPr>
-            <a:r>
-              <a:rPr lang="en-US" sz="1400" b="1" dirty="0">
-                <a:solidFill>
-                  <a:srgbClr val="FFFFFF"/>
-                </a:solidFill>
-                <a:latin typeface="微软雅黑" pitchFamily="34" charset="0"/>
-                <a:ea typeface="微软雅黑" pitchFamily="34" charset="-122"/>
-                <a:cs typeface="微软雅黑" pitchFamily="34" charset="-120"/>
-              </a:rPr>
-              <a:t>4</a:t>
-            </a:r>
-            <a:endParaRPr lang="en-US" sz="1400" dirty="0"/>
-          </a:p>
-        </p:txBody>
-      </p:sp>
-      <p:sp>
-        <p:nvSpPr>
-          <p:cNvPr id="17" name="Text 15"/>
-          <p:cNvSpPr/>
-          <p:nvPr/>
-        </p:nvSpPr>
-        <p:spPr>
-          <a:xfrm>
-            <a:off x="1188720" y="3419856"/>
-            <a:ext cx="10424160" cy="566928"/>
-          </a:xfrm>
-          <a:prstGeom prst="rect">
-            <a:avLst/>
-          </a:prstGeom>
-          <a:noFill/>
-          <a:ln/>
-        </p:spPr>
-        <p:txBody>
-          <a:bodyPr wrap="square" lIns="0" tIns="0" rIns="0" bIns="0" rtlCol="0" anchor="t"/>
-          <a:lstStyle/>
-          <a:p>
-            <a:pPr indent="0" marL="0">
-              <a:lnSpc>
-                <a:spcPct val="108000"/>
-              </a:lnSpc>
-              <a:buNone/>
-            </a:pPr>
-            <a:r>
-              <a:rPr lang="en-US" sz="1250" dirty="0">
-                <a:solidFill>
-                  <a:srgbClr val="16252C"/>
-                </a:solidFill>
-                <a:latin typeface="微软雅黑" pitchFamily="34" charset="0"/>
-                <a:ea typeface="微软雅黑" pitchFamily="34" charset="-122"/>
-                <a:cs typeface="微软雅黑" pitchFamily="34" charset="-120"/>
-              </a:rPr>
-              <a:t>九个菌通过了三套独立筛选方法的交叉验证；其中 Candidatus Arthromitus（SFB）有独立的免疫学证据支持。</a:t>
-            </a:r>
-            <a:endParaRPr lang="en-US" sz="1250" dirty="0"/>
-          </a:p>
-        </p:txBody>
-      </p:sp>
-      <p:sp>
-        <p:nvSpPr>
-          <p:cNvPr id="18" name="Shape 16"/>
-          <p:cNvSpPr/>
-          <p:nvPr/>
-        </p:nvSpPr>
-        <p:spPr>
-          <a:xfrm>
-            <a:off x="548640" y="4178808"/>
-            <a:ext cx="457200" cy="457200"/>
-          </a:xfrm>
-          <a:prstGeom prst="ellipse">
-            <a:avLst/>
-          </a:prstGeom>
-          <a:solidFill>
-            <a:srgbClr val="18707F"/>
-          </a:solidFill>
-          <a:ln/>
-        </p:spPr>
-      </p:sp>
-      <p:sp>
-        <p:nvSpPr>
-          <p:cNvPr id="19" name="Text 17"/>
-          <p:cNvSpPr/>
-          <p:nvPr/>
-        </p:nvSpPr>
-        <p:spPr>
-          <a:xfrm>
-            <a:off x="548640" y="4251960"/>
-            <a:ext cx="457200" cy="310896"/>
-          </a:xfrm>
-          <a:prstGeom prst="rect">
-            <a:avLst/>
-          </a:prstGeom>
-          <a:noFill/>
-          <a:ln/>
-        </p:spPr>
-        <p:txBody>
-          <a:bodyPr wrap="square" lIns="0" tIns="0" rIns="0" bIns="0" rtlCol="0" anchor="ctr"/>
-          <a:lstStyle/>
-          <a:p>
-            <a:pPr algn="ctr" indent="0" marL="0">
-              <a:buNone/>
-            </a:pPr>
-            <a:r>
-              <a:rPr lang="en-US" sz="1400" b="1" dirty="0">
-                <a:solidFill>
-                  <a:srgbClr val="FFFFFF"/>
-                </a:solidFill>
-                <a:latin typeface="微软雅黑" pitchFamily="34" charset="0"/>
-                <a:ea typeface="微软雅黑" pitchFamily="34" charset="-122"/>
-                <a:cs typeface="微软雅黑" pitchFamily="34" charset="-120"/>
-              </a:rPr>
-              <a:t>5</a:t>
-            </a:r>
-            <a:endParaRPr lang="en-US" sz="1400" dirty="0"/>
-          </a:p>
-        </p:txBody>
-      </p:sp>
-      <p:sp>
-        <p:nvSpPr>
-          <p:cNvPr id="20" name="Text 18"/>
-          <p:cNvSpPr/>
-          <p:nvPr/>
-        </p:nvSpPr>
-        <p:spPr>
-          <a:xfrm>
-            <a:off x="1188720" y="4142232"/>
-            <a:ext cx="10424160" cy="566928"/>
-          </a:xfrm>
-          <a:prstGeom prst="rect">
-            <a:avLst/>
-          </a:prstGeom>
-          <a:noFill/>
-          <a:ln/>
-        </p:spPr>
-        <p:txBody>
-          <a:bodyPr wrap="square" lIns="0" tIns="0" rIns="0" bIns="0" rtlCol="0" anchor="t"/>
-          <a:lstStyle/>
-          <a:p>
-            <a:pPr indent="0" marL="0">
-              <a:lnSpc>
-                <a:spcPct val="108000"/>
-              </a:lnSpc>
-              <a:buNone/>
-            </a:pPr>
-            <a:r>
-              <a:rPr lang="en-US" sz="1250" dirty="0">
-                <a:solidFill>
-                  <a:srgbClr val="16252C"/>
-                </a:solidFill>
-                <a:latin typeface="微软雅黑" pitchFamily="34" charset="0"/>
-                <a:ea typeface="微软雅黑" pitchFamily="34" charset="-122"/>
-                <a:cs typeface="微软雅黑" pitchFamily="34" charset="-120"/>
-              </a:rPr>
-              <a:t>采样季节是严重的混杂因子（仅协变量即达 AUC 0.881）。分层与去混杂子集都仍留有信号：菌群的独立贡献落在 +0.043 到 +0.177 这个区间内。</a:t>
-            </a:r>
-            <a:endParaRPr lang="en-US" sz="1250" dirty="0"/>
-          </a:p>
-        </p:txBody>
-      </p:sp>
-      <p:sp>
-        <p:nvSpPr>
-          <p:cNvPr id="21" name="Shape 19"/>
-          <p:cNvSpPr/>
-          <p:nvPr/>
-        </p:nvSpPr>
-        <p:spPr>
-          <a:xfrm>
-            <a:off x="548640" y="4901184"/>
-            <a:ext cx="457200" cy="457200"/>
-          </a:xfrm>
-          <a:prstGeom prst="ellipse">
-            <a:avLst/>
-          </a:prstGeom>
-          <a:solidFill>
-            <a:srgbClr val="D2603A"/>
-          </a:solidFill>
-          <a:ln/>
-        </p:spPr>
-      </p:sp>
-      <p:sp>
-        <p:nvSpPr>
-          <p:cNvPr id="22" name="Text 20"/>
-          <p:cNvSpPr/>
-          <p:nvPr/>
-        </p:nvSpPr>
-        <p:spPr>
-          <a:xfrm>
-            <a:off x="548640" y="4974336"/>
-            <a:ext cx="457200" cy="310896"/>
-          </a:xfrm>
-          <a:prstGeom prst="rect">
-            <a:avLst/>
-          </a:prstGeom>
-          <a:noFill/>
-          <a:ln/>
-        </p:spPr>
-        <p:txBody>
-          <a:bodyPr wrap="square" lIns="0" tIns="0" rIns="0" bIns="0" rtlCol="0" anchor="ctr"/>
-          <a:lstStyle/>
-          <a:p>
-            <a:pPr algn="ctr" indent="0" marL="0">
-              <a:buNone/>
-            </a:pPr>
-            <a:r>
-              <a:rPr lang="en-US" sz="1400" b="1" dirty="0">
-                <a:solidFill>
-                  <a:srgbClr val="FFFFFF"/>
-                </a:solidFill>
-                <a:latin typeface="微软雅黑" pitchFamily="34" charset="0"/>
-                <a:ea typeface="微软雅黑" pitchFamily="34" charset="-122"/>
-                <a:cs typeface="微软雅黑" pitchFamily="34" charset="-120"/>
-              </a:rPr>
-              <a:t>6</a:t>
-            </a:r>
-            <a:endParaRPr lang="en-US" sz="1400" dirty="0"/>
-          </a:p>
-        </p:txBody>
-      </p:sp>
-      <p:sp>
-        <p:nvSpPr>
-          <p:cNvPr id="23" name="Text 21"/>
-          <p:cNvSpPr/>
-          <p:nvPr/>
-        </p:nvSpPr>
-        <p:spPr>
-          <a:xfrm>
-            <a:off x="1188720" y="4864608"/>
-            <a:ext cx="10424160" cy="566928"/>
-          </a:xfrm>
-          <a:prstGeom prst="rect">
-            <a:avLst/>
-          </a:prstGeom>
-          <a:noFill/>
-          <a:ln/>
-        </p:spPr>
-        <p:txBody>
-          <a:bodyPr wrap="square" lIns="0" tIns="0" rIns="0" bIns="0" rtlCol="0" anchor="t"/>
-          <a:lstStyle/>
-          <a:p>
-            <a:pPr indent="0" marL="0">
-              <a:lnSpc>
-                <a:spcPct val="108000"/>
-              </a:lnSpc>
-              <a:buNone/>
-            </a:pPr>
-            <a:r>
-              <a:rPr lang="en-US" sz="1250" dirty="0">
-                <a:solidFill>
-                  <a:srgbClr val="16252C"/>
-                </a:solidFill>
-                <a:latin typeface="微软雅黑" pitchFamily="34" charset="0"/>
-                <a:ea typeface="微软雅黑" pitchFamily="34" charset="-122"/>
-                <a:cs typeface="微软雅黑" pitchFamily="34" charset="-120"/>
-              </a:rPr>
-              <a:t>ExtraTrees 分数更高（AUC 0.859），但在最弱分层上更差（0.715 对 0.774）——其领先只来自本已容易的分层。</a:t>
-            </a:r>
-            <a:endParaRPr lang="en-US" sz="1250" dirty="0"/>
-          </a:p>
-        </p:txBody>
-      </p:sp>
-      <p:sp>
-        <p:nvSpPr>
-          <p:cNvPr id="24" name="Shape 22"/>
-          <p:cNvSpPr/>
-          <p:nvPr/>
-        </p:nvSpPr>
-        <p:spPr>
-          <a:xfrm>
-            <a:off x="548640" y="5623560"/>
-            <a:ext cx="457200" cy="457200"/>
-          </a:xfrm>
-          <a:prstGeom prst="ellipse">
-            <a:avLst/>
-          </a:prstGeom>
-          <a:solidFill>
-            <a:srgbClr val="D2603A"/>
-          </a:solidFill>
-          <a:ln/>
-        </p:spPr>
-      </p:sp>
-      <p:sp>
-        <p:nvSpPr>
-          <p:cNvPr id="25" name="Text 23"/>
-          <p:cNvSpPr/>
-          <p:nvPr/>
-        </p:nvSpPr>
-        <p:spPr>
-          <a:xfrm>
-            <a:off x="548640" y="5696712"/>
-            <a:ext cx="457200" cy="310896"/>
-          </a:xfrm>
-          <a:prstGeom prst="rect">
-            <a:avLst/>
-          </a:prstGeom>
-          <a:noFill/>
-          <a:ln/>
-        </p:spPr>
-        <p:txBody>
-          <a:bodyPr wrap="square" lIns="0" tIns="0" rIns="0" bIns="0" rtlCol="0" anchor="ctr"/>
-          <a:lstStyle/>
-          <a:p>
-            <a:pPr algn="ctr" indent="0" marL="0">
-              <a:buNone/>
-            </a:pPr>
-            <a:r>
-              <a:rPr lang="en-US" sz="1400" b="1" dirty="0">
-                <a:solidFill>
-                  <a:srgbClr val="FFFFFF"/>
-                </a:solidFill>
-                <a:latin typeface="微软雅黑" pitchFamily="34" charset="0"/>
-                <a:ea typeface="微软雅黑" pitchFamily="34" charset="-122"/>
-                <a:cs typeface="微软雅黑" pitchFamily="34" charset="-120"/>
-              </a:rPr>
-              <a:t>7</a:t>
-            </a:r>
-            <a:endParaRPr lang="en-US" sz="1400" dirty="0"/>
-          </a:p>
-        </p:txBody>
-      </p:sp>
-      <p:sp>
-        <p:nvSpPr>
-          <p:cNvPr id="26" name="Text 24"/>
-          <p:cNvSpPr/>
-          <p:nvPr/>
-        </p:nvSpPr>
-        <p:spPr>
-          <a:xfrm>
-            <a:off x="1188720" y="5586984"/>
-            <a:ext cx="10424160" cy="566928"/>
-          </a:xfrm>
-          <a:prstGeom prst="rect">
-            <a:avLst/>
-          </a:prstGeom>
-          <a:noFill/>
-          <a:ln/>
-        </p:spPr>
-        <p:txBody>
-          <a:bodyPr wrap="square" lIns="0" tIns="0" rIns="0" bIns="0" rtlCol="0" anchor="t"/>
-          <a:lstStyle/>
-          <a:p>
-            <a:pPr indent="0" marL="0">
-              <a:lnSpc>
-                <a:spcPct val="108000"/>
-              </a:lnSpc>
-              <a:buNone/>
-            </a:pPr>
-            <a:r>
-              <a:rPr lang="en-US" sz="1250" dirty="0">
-                <a:solidFill>
-                  <a:srgbClr val="16252C"/>
-                </a:solidFill>
-                <a:latin typeface="微软雅黑" pitchFamily="34" charset="0"/>
-                <a:ea typeface="微软雅黑" pitchFamily="34" charset="-122"/>
-                <a:cs typeface="微软雅黑" pitchFamily="34" charset="-120"/>
-              </a:rPr>
-              <a:t>结论仅适用于 UC Davis 野鸭队列，不可跨宿主或跨研究外推。</a:t>
-            </a:r>
-            <a:endParaRPr lang="en-US" sz="1250" dirty="0"/>
           </a:p>
         </p:txBody>
       </p:sp>
@@ -37198,6 +39408,1819 @@
                 <a:ea typeface="微软雅黑" pitchFamily="34" charset="-122"/>
                 <a:cs typeface="微软雅黑" pitchFamily="34" charset="-120"/>
               </a:rPr>
+              <a:t>总结</a:t>
+            </a:r>
+            <a:endParaRPr lang="en-US" sz="1100" dirty="0"/>
+          </a:p>
+        </p:txBody>
+      </p:sp>
+      <p:sp>
+        <p:nvSpPr>
+          <p:cNvPr id="4" name="Text 2"/>
+          <p:cNvSpPr/>
+          <p:nvPr/>
+        </p:nvSpPr>
+        <p:spPr>
+          <a:xfrm>
+            <a:off x="548640" y="566928"/>
+            <a:ext cx="11064240" cy="685800"/>
+          </a:xfrm>
+          <a:prstGeom prst="rect">
+            <a:avLst/>
+          </a:prstGeom>
+          <a:noFill/>
+          <a:ln/>
+        </p:spPr>
+        <p:txBody>
+          <a:bodyPr wrap="square" lIns="0" tIns="0" rIns="0" bIns="0" rtlCol="0" anchor="ctr"/>
+          <a:lstStyle/>
+          <a:p>
+            <a:pPr indent="0" marL="0">
+              <a:buNone/>
+            </a:pPr>
+            <a:r>
+              <a:rPr lang="en-US" sz="3000" b="1" dirty="0">
+                <a:solidFill>
+                  <a:srgbClr val="16252C"/>
+                </a:solidFill>
+                <a:latin typeface="微软雅黑" pitchFamily="34" charset="0"/>
+                <a:ea typeface="微软雅黑" pitchFamily="34" charset="-122"/>
+                <a:cs typeface="微软雅黑" pitchFamily="34" charset="-120"/>
+              </a:rPr>
+              <a:t>结论</a:t>
+            </a:r>
+            <a:endParaRPr lang="en-US" sz="3000" dirty="0"/>
+          </a:p>
+        </p:txBody>
+      </p:sp>
+      <p:sp>
+        <p:nvSpPr>
+          <p:cNvPr id="5" name="Text 3"/>
+          <p:cNvSpPr/>
+          <p:nvPr/>
+        </p:nvSpPr>
+        <p:spPr>
+          <a:xfrm>
+            <a:off x="11430000" y="6355080"/>
+            <a:ext cx="411480" cy="274320"/>
+          </a:xfrm>
+          <a:prstGeom prst="rect">
+            <a:avLst/>
+          </a:prstGeom>
+          <a:noFill/>
+          <a:ln/>
+        </p:spPr>
+        <p:txBody>
+          <a:bodyPr wrap="square" lIns="0" tIns="0" rIns="0" bIns="0" rtlCol="0" anchor="ctr"/>
+          <a:lstStyle/>
+          <a:p>
+            <a:pPr algn="r" indent="0" marL="0">
+              <a:buNone/>
+            </a:pPr>
+            <a:r>
+              <a:rPr lang="en-US" sz="1000" dirty="0">
+                <a:solidFill>
+                  <a:srgbClr val="5F7580"/>
+                </a:solidFill>
+                <a:latin typeface="微软雅黑" pitchFamily="34" charset="0"/>
+                <a:ea typeface="微软雅黑" pitchFamily="34" charset="-122"/>
+                <a:cs typeface="微软雅黑" pitchFamily="34" charset="-120"/>
+              </a:rPr>
+              <a:t>29</a:t>
+            </a:r>
+            <a:endParaRPr lang="en-US" sz="1000" dirty="0"/>
+          </a:p>
+        </p:txBody>
+      </p:sp>
+      <p:sp>
+        <p:nvSpPr>
+          <p:cNvPr id="6" name="Shape 4"/>
+          <p:cNvSpPr/>
+          <p:nvPr/>
+        </p:nvSpPr>
+        <p:spPr>
+          <a:xfrm>
+            <a:off x="548640" y="1289304"/>
+            <a:ext cx="457200" cy="457200"/>
+          </a:xfrm>
+          <a:prstGeom prst="ellipse">
+            <a:avLst/>
+          </a:prstGeom>
+          <a:solidFill>
+            <a:srgbClr val="18707F"/>
+          </a:solidFill>
+          <a:ln/>
+        </p:spPr>
+      </p:sp>
+      <p:sp>
+        <p:nvSpPr>
+          <p:cNvPr id="7" name="Text 5"/>
+          <p:cNvSpPr/>
+          <p:nvPr/>
+        </p:nvSpPr>
+        <p:spPr>
+          <a:xfrm>
+            <a:off x="548640" y="1362456"/>
+            <a:ext cx="457200" cy="310896"/>
+          </a:xfrm>
+          <a:prstGeom prst="rect">
+            <a:avLst/>
+          </a:prstGeom>
+          <a:noFill/>
+          <a:ln/>
+        </p:spPr>
+        <p:txBody>
+          <a:bodyPr wrap="square" lIns="0" tIns="0" rIns="0" bIns="0" rtlCol="0" anchor="ctr"/>
+          <a:lstStyle/>
+          <a:p>
+            <a:pPr algn="ctr" indent="0" marL="0">
+              <a:buNone/>
+            </a:pPr>
+            <a:r>
+              <a:rPr lang="en-US" sz="1400" b="1" dirty="0">
+                <a:solidFill>
+                  <a:srgbClr val="FFFFFF"/>
+                </a:solidFill>
+                <a:latin typeface="微软雅黑" pitchFamily="34" charset="0"/>
+                <a:ea typeface="微软雅黑" pitchFamily="34" charset="-122"/>
+                <a:cs typeface="微软雅黑" pitchFamily="34" charset="-120"/>
+              </a:rPr>
+              <a:t>1</a:t>
+            </a:r>
+            <a:endParaRPr lang="en-US" sz="1400" dirty="0"/>
+          </a:p>
+        </p:txBody>
+      </p:sp>
+      <p:sp>
+        <p:nvSpPr>
+          <p:cNvPr id="8" name="Text 6"/>
+          <p:cNvSpPr/>
+          <p:nvPr/>
+        </p:nvSpPr>
+        <p:spPr>
+          <a:xfrm>
+            <a:off x="1188720" y="1252728"/>
+            <a:ext cx="10424160" cy="566928"/>
+          </a:xfrm>
+          <a:prstGeom prst="rect">
+            <a:avLst/>
+          </a:prstGeom>
+          <a:noFill/>
+          <a:ln/>
+        </p:spPr>
+        <p:txBody>
+          <a:bodyPr wrap="square" lIns="0" tIns="0" rIns="0" bIns="0" rtlCol="0" anchor="t"/>
+          <a:lstStyle/>
+          <a:p>
+            <a:pPr indent="0" marL="0">
+              <a:lnSpc>
+                <a:spcPct val="108000"/>
+              </a:lnSpc>
+              <a:buNone/>
+            </a:pPr>
+            <a:r>
+              <a:rPr lang="en-US" sz="1250" dirty="0">
+                <a:solidFill>
+                  <a:srgbClr val="16252C"/>
+                </a:solidFill>
+                <a:latin typeface="微软雅黑" pitchFamily="34" charset="0"/>
+                <a:ea typeface="微软雅黑" pitchFamily="34" charset="-122"/>
+                <a:cs typeface="微软雅黑" pitchFamily="34" charset="-120"/>
+              </a:rPr>
+              <a:t>野鸭肠道菌群携带真实且可复现的流感感染信号（置换检验 p = 0.0099）。</a:t>
+            </a:r>
+            <a:endParaRPr lang="en-US" sz="1250" dirty="0"/>
+          </a:p>
+        </p:txBody>
+      </p:sp>
+      <p:sp>
+        <p:nvSpPr>
+          <p:cNvPr id="9" name="Shape 7"/>
+          <p:cNvSpPr/>
+          <p:nvPr/>
+        </p:nvSpPr>
+        <p:spPr>
+          <a:xfrm>
+            <a:off x="548640" y="2011680"/>
+            <a:ext cx="457200" cy="457200"/>
+          </a:xfrm>
+          <a:prstGeom prst="ellipse">
+            <a:avLst/>
+          </a:prstGeom>
+          <a:solidFill>
+            <a:srgbClr val="18707F"/>
+          </a:solidFill>
+          <a:ln/>
+        </p:spPr>
+      </p:sp>
+      <p:sp>
+        <p:nvSpPr>
+          <p:cNvPr id="10" name="Text 8"/>
+          <p:cNvSpPr/>
+          <p:nvPr/>
+        </p:nvSpPr>
+        <p:spPr>
+          <a:xfrm>
+            <a:off x="548640" y="2084832"/>
+            <a:ext cx="457200" cy="310896"/>
+          </a:xfrm>
+          <a:prstGeom prst="rect">
+            <a:avLst/>
+          </a:prstGeom>
+          <a:noFill/>
+          <a:ln/>
+        </p:spPr>
+        <p:txBody>
+          <a:bodyPr wrap="square" lIns="0" tIns="0" rIns="0" bIns="0" rtlCol="0" anchor="ctr"/>
+          <a:lstStyle/>
+          <a:p>
+            <a:pPr algn="ctr" indent="0" marL="0">
+              <a:buNone/>
+            </a:pPr>
+            <a:r>
+              <a:rPr lang="en-US" sz="1400" b="1" dirty="0">
+                <a:solidFill>
+                  <a:srgbClr val="FFFFFF"/>
+                </a:solidFill>
+                <a:latin typeface="微软雅黑" pitchFamily="34" charset="0"/>
+                <a:ea typeface="微软雅黑" pitchFamily="34" charset="-122"/>
+                <a:cs typeface="微软雅黑" pitchFamily="34" charset="-120"/>
+              </a:rPr>
+              <a:t>2</a:t>
+            </a:r>
+            <a:endParaRPr lang="en-US" sz="1400" dirty="0"/>
+          </a:p>
+        </p:txBody>
+      </p:sp>
+      <p:sp>
+        <p:nvSpPr>
+          <p:cNvPr id="11" name="Text 9"/>
+          <p:cNvSpPr/>
+          <p:nvPr/>
+        </p:nvSpPr>
+        <p:spPr>
+          <a:xfrm>
+            <a:off x="1188720" y="1975104"/>
+            <a:ext cx="10424160" cy="566928"/>
+          </a:xfrm>
+          <a:prstGeom prst="rect">
+            <a:avLst/>
+          </a:prstGeom>
+          <a:noFill/>
+          <a:ln/>
+        </p:spPr>
+        <p:txBody>
+          <a:bodyPr wrap="square" lIns="0" tIns="0" rIns="0" bIns="0" rtlCol="0" anchor="t"/>
+          <a:lstStyle/>
+          <a:p>
+            <a:pPr indent="0" marL="0">
+              <a:lnSpc>
+                <a:spcPct val="108000"/>
+              </a:lnSpc>
+              <a:buNone/>
+            </a:pPr>
+            <a:r>
+              <a:rPr lang="en-US" sz="1250" dirty="0">
+                <a:solidFill>
+                  <a:srgbClr val="16252C"/>
+                </a:solidFill>
+                <a:latin typeface="微软雅黑" pitchFamily="34" charset="0"/>
+                <a:ea typeface="微软雅黑" pitchFamily="34" charset="-122"/>
+                <a:cs typeface="微软雅黑" pitchFamily="34" charset="-120"/>
+              </a:rPr>
+              <a:t>SVM-RBF 是主模型——AUC 0.839、MCC 0.531——在 17 个模型的比较中显著优于随机森林（p = 0.021）、XGBoost（p = 0.0016）与 L1-LR（p &lt; 0.001）。</a:t>
+            </a:r>
+            <a:endParaRPr lang="en-US" sz="1250" dirty="0"/>
+          </a:p>
+        </p:txBody>
+      </p:sp>
+      <p:sp>
+        <p:nvSpPr>
+          <p:cNvPr id="12" name="Shape 10"/>
+          <p:cNvSpPr/>
+          <p:nvPr/>
+        </p:nvSpPr>
+        <p:spPr>
+          <a:xfrm>
+            <a:off x="548640" y="2734056"/>
+            <a:ext cx="457200" cy="457200"/>
+          </a:xfrm>
+          <a:prstGeom prst="ellipse">
+            <a:avLst/>
+          </a:prstGeom>
+          <a:solidFill>
+            <a:srgbClr val="18707F"/>
+          </a:solidFill>
+          <a:ln/>
+        </p:spPr>
+      </p:sp>
+      <p:sp>
+        <p:nvSpPr>
+          <p:cNvPr id="13" name="Text 11"/>
+          <p:cNvSpPr/>
+          <p:nvPr/>
+        </p:nvSpPr>
+        <p:spPr>
+          <a:xfrm>
+            <a:off x="548640" y="2807208"/>
+            <a:ext cx="457200" cy="310896"/>
+          </a:xfrm>
+          <a:prstGeom prst="rect">
+            <a:avLst/>
+          </a:prstGeom>
+          <a:noFill/>
+          <a:ln/>
+        </p:spPr>
+        <p:txBody>
+          <a:bodyPr wrap="square" lIns="0" tIns="0" rIns="0" bIns="0" rtlCol="0" anchor="ctr"/>
+          <a:lstStyle/>
+          <a:p>
+            <a:pPr algn="ctr" indent="0" marL="0">
+              <a:buNone/>
+            </a:pPr>
+            <a:r>
+              <a:rPr lang="en-US" sz="1400" b="1" dirty="0">
+                <a:solidFill>
+                  <a:srgbClr val="FFFFFF"/>
+                </a:solidFill>
+                <a:latin typeface="微软雅黑" pitchFamily="34" charset="0"/>
+                <a:ea typeface="微软雅黑" pitchFamily="34" charset="-122"/>
+                <a:cs typeface="微软雅黑" pitchFamily="34" charset="-120"/>
+              </a:rPr>
+              <a:t>3</a:t>
+            </a:r>
+            <a:endParaRPr lang="en-US" sz="1400" dirty="0"/>
+          </a:p>
+        </p:txBody>
+      </p:sp>
+      <p:sp>
+        <p:nvSpPr>
+          <p:cNvPr id="14" name="Text 12"/>
+          <p:cNvSpPr/>
+          <p:nvPr/>
+        </p:nvSpPr>
+        <p:spPr>
+          <a:xfrm>
+            <a:off x="1188720" y="2697480"/>
+            <a:ext cx="10424160" cy="566928"/>
+          </a:xfrm>
+          <a:prstGeom prst="rect">
+            <a:avLst/>
+          </a:prstGeom>
+          <a:noFill/>
+          <a:ln/>
+        </p:spPr>
+        <p:txBody>
+          <a:bodyPr wrap="square" lIns="0" tIns="0" rIns="0" bIns="0" rtlCol="0" anchor="t"/>
+          <a:lstStyle/>
+          <a:p>
+            <a:pPr indent="0" marL="0">
+              <a:lnSpc>
+                <a:spcPct val="108000"/>
+              </a:lnSpc>
+              <a:buNone/>
+            </a:pPr>
+            <a:r>
+              <a:rPr lang="en-US" sz="1250" dirty="0">
+                <a:solidFill>
+                  <a:srgbClr val="16252C"/>
+                </a:solidFill>
+                <a:latin typeface="微软雅黑" pitchFamily="34" charset="0"/>
+                <a:ea typeface="微软雅黑" pitchFamily="34" charset="-122"/>
+                <a:cs typeface="微软雅黑" pitchFamily="34" charset="-120"/>
+              </a:rPr>
+              <a:t>信号部分来自非线性：RBF 核比线性核多出 0.073 的 AUC，且若干菌只在组合中起作用。</a:t>
+            </a:r>
+            <a:endParaRPr lang="en-US" sz="1250" dirty="0"/>
+          </a:p>
+        </p:txBody>
+      </p:sp>
+      <p:sp>
+        <p:nvSpPr>
+          <p:cNvPr id="15" name="Shape 13"/>
+          <p:cNvSpPr/>
+          <p:nvPr/>
+        </p:nvSpPr>
+        <p:spPr>
+          <a:xfrm>
+            <a:off x="548640" y="3456432"/>
+            <a:ext cx="457200" cy="457200"/>
+          </a:xfrm>
+          <a:prstGeom prst="ellipse">
+            <a:avLst/>
+          </a:prstGeom>
+          <a:solidFill>
+            <a:srgbClr val="18707F"/>
+          </a:solidFill>
+          <a:ln/>
+        </p:spPr>
+      </p:sp>
+      <p:sp>
+        <p:nvSpPr>
+          <p:cNvPr id="16" name="Text 14"/>
+          <p:cNvSpPr/>
+          <p:nvPr/>
+        </p:nvSpPr>
+        <p:spPr>
+          <a:xfrm>
+            <a:off x="548640" y="3529584"/>
+            <a:ext cx="457200" cy="310896"/>
+          </a:xfrm>
+          <a:prstGeom prst="rect">
+            <a:avLst/>
+          </a:prstGeom>
+          <a:noFill/>
+          <a:ln/>
+        </p:spPr>
+        <p:txBody>
+          <a:bodyPr wrap="square" lIns="0" tIns="0" rIns="0" bIns="0" rtlCol="0" anchor="ctr"/>
+          <a:lstStyle/>
+          <a:p>
+            <a:pPr algn="ctr" indent="0" marL="0">
+              <a:buNone/>
+            </a:pPr>
+            <a:r>
+              <a:rPr lang="en-US" sz="1400" b="1" dirty="0">
+                <a:solidFill>
+                  <a:srgbClr val="FFFFFF"/>
+                </a:solidFill>
+                <a:latin typeface="微软雅黑" pitchFamily="34" charset="0"/>
+                <a:ea typeface="微软雅黑" pitchFamily="34" charset="-122"/>
+                <a:cs typeface="微软雅黑" pitchFamily="34" charset="-120"/>
+              </a:rPr>
+              <a:t>4</a:t>
+            </a:r>
+            <a:endParaRPr lang="en-US" sz="1400" dirty="0"/>
+          </a:p>
+        </p:txBody>
+      </p:sp>
+      <p:sp>
+        <p:nvSpPr>
+          <p:cNvPr id="17" name="Text 15"/>
+          <p:cNvSpPr/>
+          <p:nvPr/>
+        </p:nvSpPr>
+        <p:spPr>
+          <a:xfrm>
+            <a:off x="1188720" y="3419856"/>
+            <a:ext cx="10424160" cy="566928"/>
+          </a:xfrm>
+          <a:prstGeom prst="rect">
+            <a:avLst/>
+          </a:prstGeom>
+          <a:noFill/>
+          <a:ln/>
+        </p:spPr>
+        <p:txBody>
+          <a:bodyPr wrap="square" lIns="0" tIns="0" rIns="0" bIns="0" rtlCol="0" anchor="t"/>
+          <a:lstStyle/>
+          <a:p>
+            <a:pPr indent="0" marL="0">
+              <a:lnSpc>
+                <a:spcPct val="108000"/>
+              </a:lnSpc>
+              <a:buNone/>
+            </a:pPr>
+            <a:r>
+              <a:rPr lang="en-US" sz="1250" dirty="0">
+                <a:solidFill>
+                  <a:srgbClr val="16252C"/>
+                </a:solidFill>
+                <a:latin typeface="微软雅黑" pitchFamily="34" charset="0"/>
+                <a:ea typeface="微软雅黑" pitchFamily="34" charset="-122"/>
+                <a:cs typeface="微软雅黑" pitchFamily="34" charset="-120"/>
+              </a:rPr>
+              <a:t>九个菌通过了三套独立筛选方法的交叉验证；其中 Candidatus Arthromitus（SFB）有独立的免疫学证据支持。</a:t>
+            </a:r>
+            <a:endParaRPr lang="en-US" sz="1250" dirty="0"/>
+          </a:p>
+        </p:txBody>
+      </p:sp>
+      <p:sp>
+        <p:nvSpPr>
+          <p:cNvPr id="18" name="Shape 16"/>
+          <p:cNvSpPr/>
+          <p:nvPr/>
+        </p:nvSpPr>
+        <p:spPr>
+          <a:xfrm>
+            <a:off x="548640" y="4178808"/>
+            <a:ext cx="457200" cy="457200"/>
+          </a:xfrm>
+          <a:prstGeom prst="ellipse">
+            <a:avLst/>
+          </a:prstGeom>
+          <a:solidFill>
+            <a:srgbClr val="18707F"/>
+          </a:solidFill>
+          <a:ln/>
+        </p:spPr>
+      </p:sp>
+      <p:sp>
+        <p:nvSpPr>
+          <p:cNvPr id="19" name="Text 17"/>
+          <p:cNvSpPr/>
+          <p:nvPr/>
+        </p:nvSpPr>
+        <p:spPr>
+          <a:xfrm>
+            <a:off x="548640" y="4251960"/>
+            <a:ext cx="457200" cy="310896"/>
+          </a:xfrm>
+          <a:prstGeom prst="rect">
+            <a:avLst/>
+          </a:prstGeom>
+          <a:noFill/>
+          <a:ln/>
+        </p:spPr>
+        <p:txBody>
+          <a:bodyPr wrap="square" lIns="0" tIns="0" rIns="0" bIns="0" rtlCol="0" anchor="ctr"/>
+          <a:lstStyle/>
+          <a:p>
+            <a:pPr algn="ctr" indent="0" marL="0">
+              <a:buNone/>
+            </a:pPr>
+            <a:r>
+              <a:rPr lang="en-US" sz="1400" b="1" dirty="0">
+                <a:solidFill>
+                  <a:srgbClr val="FFFFFF"/>
+                </a:solidFill>
+                <a:latin typeface="微软雅黑" pitchFamily="34" charset="0"/>
+                <a:ea typeface="微软雅黑" pitchFamily="34" charset="-122"/>
+                <a:cs typeface="微软雅黑" pitchFamily="34" charset="-120"/>
+              </a:rPr>
+              <a:t>5</a:t>
+            </a:r>
+            <a:endParaRPr lang="en-US" sz="1400" dirty="0"/>
+          </a:p>
+        </p:txBody>
+      </p:sp>
+      <p:sp>
+        <p:nvSpPr>
+          <p:cNvPr id="20" name="Text 18"/>
+          <p:cNvSpPr/>
+          <p:nvPr/>
+        </p:nvSpPr>
+        <p:spPr>
+          <a:xfrm>
+            <a:off x="1188720" y="4142232"/>
+            <a:ext cx="10424160" cy="566928"/>
+          </a:xfrm>
+          <a:prstGeom prst="rect">
+            <a:avLst/>
+          </a:prstGeom>
+          <a:noFill/>
+          <a:ln/>
+        </p:spPr>
+        <p:txBody>
+          <a:bodyPr wrap="square" lIns="0" tIns="0" rIns="0" bIns="0" rtlCol="0" anchor="t"/>
+          <a:lstStyle/>
+          <a:p>
+            <a:pPr indent="0" marL="0">
+              <a:lnSpc>
+                <a:spcPct val="108000"/>
+              </a:lnSpc>
+              <a:buNone/>
+            </a:pPr>
+            <a:r>
+              <a:rPr lang="en-US" sz="1250" dirty="0">
+                <a:solidFill>
+                  <a:srgbClr val="16252C"/>
+                </a:solidFill>
+                <a:latin typeface="微软雅黑" pitchFamily="34" charset="0"/>
+                <a:ea typeface="微软雅黑" pitchFamily="34" charset="-122"/>
+                <a:cs typeface="微软雅黑" pitchFamily="34" charset="-120"/>
+              </a:rPr>
+              <a:t>采样季节是严重的混杂因子（仅协变量即达 AUC 0.881）。分层与去混杂子集都仍留有信号：菌群的独立贡献落在 +0.043 到 +0.177 这个区间内。</a:t>
+            </a:r>
+            <a:endParaRPr lang="en-US" sz="1250" dirty="0"/>
+          </a:p>
+        </p:txBody>
+      </p:sp>
+      <p:sp>
+        <p:nvSpPr>
+          <p:cNvPr id="21" name="Shape 19"/>
+          <p:cNvSpPr/>
+          <p:nvPr/>
+        </p:nvSpPr>
+        <p:spPr>
+          <a:xfrm>
+            <a:off x="548640" y="4901184"/>
+            <a:ext cx="457200" cy="457200"/>
+          </a:xfrm>
+          <a:prstGeom prst="ellipse">
+            <a:avLst/>
+          </a:prstGeom>
+          <a:solidFill>
+            <a:srgbClr val="D2603A"/>
+          </a:solidFill>
+          <a:ln/>
+        </p:spPr>
+      </p:sp>
+      <p:sp>
+        <p:nvSpPr>
+          <p:cNvPr id="22" name="Text 20"/>
+          <p:cNvSpPr/>
+          <p:nvPr/>
+        </p:nvSpPr>
+        <p:spPr>
+          <a:xfrm>
+            <a:off x="548640" y="4974336"/>
+            <a:ext cx="457200" cy="310896"/>
+          </a:xfrm>
+          <a:prstGeom prst="rect">
+            <a:avLst/>
+          </a:prstGeom>
+          <a:noFill/>
+          <a:ln/>
+        </p:spPr>
+        <p:txBody>
+          <a:bodyPr wrap="square" lIns="0" tIns="0" rIns="0" bIns="0" rtlCol="0" anchor="ctr"/>
+          <a:lstStyle/>
+          <a:p>
+            <a:pPr algn="ctr" indent="0" marL="0">
+              <a:buNone/>
+            </a:pPr>
+            <a:r>
+              <a:rPr lang="en-US" sz="1400" b="1" dirty="0">
+                <a:solidFill>
+                  <a:srgbClr val="FFFFFF"/>
+                </a:solidFill>
+                <a:latin typeface="微软雅黑" pitchFamily="34" charset="0"/>
+                <a:ea typeface="微软雅黑" pitchFamily="34" charset="-122"/>
+                <a:cs typeface="微软雅黑" pitchFamily="34" charset="-120"/>
+              </a:rPr>
+              <a:t>6</a:t>
+            </a:r>
+            <a:endParaRPr lang="en-US" sz="1400" dirty="0"/>
+          </a:p>
+        </p:txBody>
+      </p:sp>
+      <p:sp>
+        <p:nvSpPr>
+          <p:cNvPr id="23" name="Text 21"/>
+          <p:cNvSpPr/>
+          <p:nvPr/>
+        </p:nvSpPr>
+        <p:spPr>
+          <a:xfrm>
+            <a:off x="1188720" y="4864608"/>
+            <a:ext cx="10424160" cy="566928"/>
+          </a:xfrm>
+          <a:prstGeom prst="rect">
+            <a:avLst/>
+          </a:prstGeom>
+          <a:noFill/>
+          <a:ln/>
+        </p:spPr>
+        <p:txBody>
+          <a:bodyPr wrap="square" lIns="0" tIns="0" rIns="0" bIns="0" rtlCol="0" anchor="t"/>
+          <a:lstStyle/>
+          <a:p>
+            <a:pPr indent="0" marL="0">
+              <a:lnSpc>
+                <a:spcPct val="108000"/>
+              </a:lnSpc>
+              <a:buNone/>
+            </a:pPr>
+            <a:r>
+              <a:rPr lang="en-US" sz="1250" dirty="0">
+                <a:solidFill>
+                  <a:srgbClr val="16252C"/>
+                </a:solidFill>
+                <a:latin typeface="微软雅黑" pitchFamily="34" charset="0"/>
+                <a:ea typeface="微软雅黑" pitchFamily="34" charset="-122"/>
+                <a:cs typeface="微软雅黑" pitchFamily="34" charset="-120"/>
+              </a:rPr>
+              <a:t>ExtraTrees 分数更高（AUC 0.859），但在最弱分层上更差（0.715 对 0.774）——其领先只来自本已容易的分层。</a:t>
+            </a:r>
+            <a:endParaRPr lang="en-US" sz="1250" dirty="0"/>
+          </a:p>
+        </p:txBody>
+      </p:sp>
+      <p:sp>
+        <p:nvSpPr>
+          <p:cNvPr id="24" name="Shape 22"/>
+          <p:cNvSpPr/>
+          <p:nvPr/>
+        </p:nvSpPr>
+        <p:spPr>
+          <a:xfrm>
+            <a:off x="548640" y="5623560"/>
+            <a:ext cx="457200" cy="457200"/>
+          </a:xfrm>
+          <a:prstGeom prst="ellipse">
+            <a:avLst/>
+          </a:prstGeom>
+          <a:solidFill>
+            <a:srgbClr val="D2603A"/>
+          </a:solidFill>
+          <a:ln/>
+        </p:spPr>
+      </p:sp>
+      <p:sp>
+        <p:nvSpPr>
+          <p:cNvPr id="25" name="Text 23"/>
+          <p:cNvSpPr/>
+          <p:nvPr/>
+        </p:nvSpPr>
+        <p:spPr>
+          <a:xfrm>
+            <a:off x="548640" y="5696712"/>
+            <a:ext cx="457200" cy="310896"/>
+          </a:xfrm>
+          <a:prstGeom prst="rect">
+            <a:avLst/>
+          </a:prstGeom>
+          <a:noFill/>
+          <a:ln/>
+        </p:spPr>
+        <p:txBody>
+          <a:bodyPr wrap="square" lIns="0" tIns="0" rIns="0" bIns="0" rtlCol="0" anchor="ctr"/>
+          <a:lstStyle/>
+          <a:p>
+            <a:pPr algn="ctr" indent="0" marL="0">
+              <a:buNone/>
+            </a:pPr>
+            <a:r>
+              <a:rPr lang="en-US" sz="1400" b="1" dirty="0">
+                <a:solidFill>
+                  <a:srgbClr val="FFFFFF"/>
+                </a:solidFill>
+                <a:latin typeface="微软雅黑" pitchFamily="34" charset="0"/>
+                <a:ea typeface="微软雅黑" pitchFamily="34" charset="-122"/>
+                <a:cs typeface="微软雅黑" pitchFamily="34" charset="-120"/>
+              </a:rPr>
+              <a:t>7</a:t>
+            </a:r>
+            <a:endParaRPr lang="en-US" sz="1400" dirty="0"/>
+          </a:p>
+        </p:txBody>
+      </p:sp>
+      <p:sp>
+        <p:nvSpPr>
+          <p:cNvPr id="26" name="Text 24"/>
+          <p:cNvSpPr/>
+          <p:nvPr/>
+        </p:nvSpPr>
+        <p:spPr>
+          <a:xfrm>
+            <a:off x="1188720" y="5586984"/>
+            <a:ext cx="10424160" cy="566928"/>
+          </a:xfrm>
+          <a:prstGeom prst="rect">
+            <a:avLst/>
+          </a:prstGeom>
+          <a:noFill/>
+          <a:ln/>
+        </p:spPr>
+        <p:txBody>
+          <a:bodyPr wrap="square" lIns="0" tIns="0" rIns="0" bIns="0" rtlCol="0" anchor="t"/>
+          <a:lstStyle/>
+          <a:p>
+            <a:pPr indent="0" marL="0">
+              <a:lnSpc>
+                <a:spcPct val="108000"/>
+              </a:lnSpc>
+              <a:buNone/>
+            </a:pPr>
+            <a:r>
+              <a:rPr lang="en-US" sz="1250" dirty="0">
+                <a:solidFill>
+                  <a:srgbClr val="16252C"/>
+                </a:solidFill>
+                <a:latin typeface="微软雅黑" pitchFamily="34" charset="0"/>
+                <a:ea typeface="微软雅黑" pitchFamily="34" charset="-122"/>
+                <a:cs typeface="微软雅黑" pitchFamily="34" charset="-120"/>
+              </a:rPr>
+              <a:t>结论仅适用于 UC Davis 野鸭队列，不可跨宿主或跨研究外推。</a:t>
+            </a:r>
+            <a:endParaRPr lang="en-US" sz="1250" dirty="0"/>
+          </a:p>
+        </p:txBody>
+      </p:sp>
+    </p:spTree>
+  </p:cSld>
+  <p:clrMapOvr>
+    <a:masterClrMapping/>
+  </p:clrMapOvr>
+</p:sld>
+</file>
+
+<file path=ppt/slides/slide3.xml><?xml version="1.0" encoding="utf-8"?>
+<p:sld xmlns:a="http://schemas.openxmlformats.org/drawingml/2006/main" xmlns:r="http://schemas.openxmlformats.org/officeDocument/2006/relationships" xmlns:p="http://schemas.openxmlformats.org/presentationml/2006/main">
+  <p:cSld name="Slide 3">
+    <p:bg>
+      <p:bgPr>
+        <a:solidFill>
+          <a:srgbClr val="FCFAF6"/>
+        </a:solidFill>
+      </p:bgPr>
+    </p:bg>
+    <p:spTree>
+      <p:nvGrpSpPr>
+        <p:cNvPr id="1" name=""/>
+        <p:cNvGrpSpPr/>
+        <p:nvPr/>
+      </p:nvGrpSpPr>
+      <p:grpSpPr>
+        <a:xfrm>
+          <a:off x="0" y="0"/>
+          <a:ext cx="0" cy="0"/>
+          <a:chOff x="0" y="0"/>
+          <a:chExt cx="0" cy="0"/>
+        </a:xfrm>
+      </p:grpSpPr>
+      <p:sp>
+        <p:nvSpPr>
+          <p:cNvPr id="2" name="Shape 0"/>
+          <p:cNvSpPr/>
+          <p:nvPr/>
+        </p:nvSpPr>
+        <p:spPr>
+          <a:xfrm>
+            <a:off x="0" y="0"/>
+            <a:ext cx="12191695" cy="54864"/>
+          </a:xfrm>
+          <a:prstGeom prst="rect">
+            <a:avLst/>
+          </a:prstGeom>
+          <a:solidFill>
+            <a:srgbClr val="18707F"/>
+          </a:solidFill>
+          <a:ln/>
+        </p:spPr>
+      </p:sp>
+      <p:sp>
+        <p:nvSpPr>
+          <p:cNvPr id="3" name="Text 1"/>
+          <p:cNvSpPr/>
+          <p:nvPr/>
+        </p:nvSpPr>
+        <p:spPr>
+          <a:xfrm>
+            <a:off x="548640" y="310896"/>
+            <a:ext cx="7315200" cy="256032"/>
+          </a:xfrm>
+          <a:prstGeom prst="rect">
+            <a:avLst/>
+          </a:prstGeom>
+          <a:noFill/>
+          <a:ln/>
+        </p:spPr>
+        <p:txBody>
+          <a:bodyPr wrap="square" lIns="0" tIns="0" rIns="0" bIns="0" rtlCol="0" anchor="ctr"/>
+          <a:lstStyle/>
+          <a:p>
+            <a:pPr indent="0" marL="0">
+              <a:buNone/>
+            </a:pPr>
+            <a:r>
+              <a:rPr lang="en-US" sz="1100" b="1" spc="200" kern="0" dirty="0">
+                <a:solidFill>
+                  <a:srgbClr val="18707F"/>
+                </a:solidFill>
+                <a:latin typeface="微软雅黑" pitchFamily="34" charset="0"/>
+                <a:ea typeface="微软雅黑" pitchFamily="34" charset="-122"/>
+                <a:cs typeface="微软雅黑" pitchFamily="34" charset="-120"/>
+              </a:rPr>
+              <a:t>路线图</a:t>
+            </a:r>
+            <a:endParaRPr lang="en-US" sz="1100" dirty="0"/>
+          </a:p>
+        </p:txBody>
+      </p:sp>
+      <p:sp>
+        <p:nvSpPr>
+          <p:cNvPr id="4" name="Text 2"/>
+          <p:cNvSpPr/>
+          <p:nvPr/>
+        </p:nvSpPr>
+        <p:spPr>
+          <a:xfrm>
+            <a:off x="548640" y="566928"/>
+            <a:ext cx="11064240" cy="685800"/>
+          </a:xfrm>
+          <a:prstGeom prst="rect">
+            <a:avLst/>
+          </a:prstGeom>
+          <a:noFill/>
+          <a:ln/>
+        </p:spPr>
+        <p:txBody>
+          <a:bodyPr wrap="square" lIns="0" tIns="0" rIns="0" bIns="0" rtlCol="0" anchor="ctr"/>
+          <a:lstStyle/>
+          <a:p>
+            <a:pPr indent="0" marL="0">
+              <a:buNone/>
+            </a:pPr>
+            <a:r>
+              <a:rPr lang="en-US" sz="3000" b="1" dirty="0">
+                <a:solidFill>
+                  <a:srgbClr val="16252C"/>
+                </a:solidFill>
+                <a:latin typeface="微软雅黑" pitchFamily="34" charset="0"/>
+                <a:ea typeface="微软雅黑" pitchFamily="34" charset="-122"/>
+                <a:cs typeface="微软雅黑" pitchFamily="34" charset="-120"/>
+              </a:rPr>
+              <a:t>本报告的内容结构</a:t>
+            </a:r>
+            <a:endParaRPr lang="en-US" sz="3000" dirty="0"/>
+          </a:p>
+        </p:txBody>
+      </p:sp>
+      <p:sp>
+        <p:nvSpPr>
+          <p:cNvPr id="5" name="Text 3"/>
+          <p:cNvSpPr/>
+          <p:nvPr/>
+        </p:nvSpPr>
+        <p:spPr>
+          <a:xfrm>
+            <a:off x="11430000" y="6355080"/>
+            <a:ext cx="411480" cy="274320"/>
+          </a:xfrm>
+          <a:prstGeom prst="rect">
+            <a:avLst/>
+          </a:prstGeom>
+          <a:noFill/>
+          <a:ln/>
+        </p:spPr>
+        <p:txBody>
+          <a:bodyPr wrap="square" lIns="0" tIns="0" rIns="0" bIns="0" rtlCol="0" anchor="ctr"/>
+          <a:lstStyle/>
+          <a:p>
+            <a:pPr algn="r" indent="0" marL="0">
+              <a:buNone/>
+            </a:pPr>
+            <a:r>
+              <a:rPr lang="en-US" sz="1000" dirty="0">
+                <a:solidFill>
+                  <a:srgbClr val="5F7580"/>
+                </a:solidFill>
+                <a:latin typeface="微软雅黑" pitchFamily="34" charset="0"/>
+                <a:ea typeface="微软雅黑" pitchFamily="34" charset="-122"/>
+                <a:cs typeface="微软雅黑" pitchFamily="34" charset="-120"/>
+              </a:rPr>
+              <a:t>3</a:t>
+            </a:r>
+            <a:endParaRPr lang="en-US" sz="1000" dirty="0"/>
+          </a:p>
+        </p:txBody>
+      </p:sp>
+      <p:sp>
+        <p:nvSpPr>
+          <p:cNvPr id="6" name="Shape 4"/>
+          <p:cNvSpPr/>
+          <p:nvPr/>
+        </p:nvSpPr>
+        <p:spPr>
+          <a:xfrm>
+            <a:off x="548640" y="1463040"/>
+            <a:ext cx="5394960" cy="1280160"/>
+          </a:xfrm>
+          <a:prstGeom prst="rect">
+            <a:avLst/>
+          </a:prstGeom>
+          <a:solidFill>
+            <a:srgbClr val="FFFFFF"/>
+          </a:solidFill>
+          <a:ln/>
+          <a:effectLst>
+            <a:outerShdw sx="100000" sy="100000" kx="0" ky="0" algn="bl" rotWithShape="0" blurRad="101600" dist="25400" dir="8100000">
+              <a:srgbClr val="000000">
+                <a:alpha val="10000"/>
+              </a:srgbClr>
+            </a:outerShdw>
+          </a:effectLst>
+        </p:spPr>
+      </p:sp>
+      <p:sp>
+        <p:nvSpPr>
+          <p:cNvPr id="7" name="Shape 5"/>
+          <p:cNvSpPr/>
+          <p:nvPr/>
+        </p:nvSpPr>
+        <p:spPr>
+          <a:xfrm>
+            <a:off x="548640" y="1463040"/>
+            <a:ext cx="68580" cy="1280160"/>
+          </a:xfrm>
+          <a:prstGeom prst="rect">
+            <a:avLst/>
+          </a:prstGeom>
+          <a:solidFill>
+            <a:srgbClr val="18707F"/>
+          </a:solidFill>
+          <a:ln/>
+        </p:spPr>
+      </p:sp>
+      <p:sp>
+        <p:nvSpPr>
+          <p:cNvPr id="8" name="Text 6"/>
+          <p:cNvSpPr/>
+          <p:nvPr/>
+        </p:nvSpPr>
+        <p:spPr>
+          <a:xfrm>
+            <a:off x="804672" y="1609344"/>
+            <a:ext cx="4937760" cy="329184"/>
+          </a:xfrm>
+          <a:prstGeom prst="rect">
+            <a:avLst/>
+          </a:prstGeom>
+          <a:noFill/>
+          <a:ln/>
+        </p:spPr>
+        <p:txBody>
+          <a:bodyPr wrap="square" lIns="0" tIns="0" rIns="0" bIns="0" rtlCol="0" anchor="t"/>
+          <a:lstStyle/>
+          <a:p>
+            <a:pPr indent="0" marL="0">
+              <a:buNone/>
+            </a:pPr>
+            <a:r>
+              <a:rPr lang="en-US" sz="1600" b="1" dirty="0">
+                <a:solidFill>
+                  <a:srgbClr val="16252C"/>
+                </a:solidFill>
+                <a:latin typeface="微软雅黑" pitchFamily="34" charset="0"/>
+                <a:ea typeface="微软雅黑" pitchFamily="34" charset="-122"/>
+                <a:cs typeface="微软雅黑" pitchFamily="34" charset="-120"/>
+              </a:rPr>
+              <a:t>01   数据</a:t>
+            </a:r>
+            <a:endParaRPr lang="en-US" sz="1600" dirty="0"/>
+          </a:p>
+        </p:txBody>
+      </p:sp>
+      <p:sp>
+        <p:nvSpPr>
+          <p:cNvPr id="9" name="Text 7"/>
+          <p:cNvSpPr/>
+          <p:nvPr/>
+        </p:nvSpPr>
+        <p:spPr>
+          <a:xfrm>
+            <a:off x="804672" y="1993392"/>
+            <a:ext cx="4937760" cy="621792"/>
+          </a:xfrm>
+          <a:prstGeom prst="rect">
+            <a:avLst/>
+          </a:prstGeom>
+          <a:noFill/>
+          <a:ln/>
+        </p:spPr>
+        <p:txBody>
+          <a:bodyPr wrap="square" lIns="0" tIns="0" rIns="0" bIns="0" rtlCol="0" anchor="t"/>
+          <a:lstStyle/>
+          <a:p>
+            <a:pPr indent="0" marL="0">
+              <a:lnSpc>
+                <a:spcPct val="112000"/>
+              </a:lnSpc>
+              <a:buNone/>
+            </a:pPr>
+            <a:r>
+              <a:rPr lang="en-US" sz="1200" dirty="0">
+                <a:solidFill>
+                  <a:srgbClr val="5F7580"/>
+                </a:solidFill>
+                <a:latin typeface="微软雅黑" pitchFamily="34" charset="0"/>
+                <a:ea typeface="微软雅黑" pitchFamily="34" charset="-122"/>
+                <a:cs typeface="微软雅黑" pitchFamily="34" charset="-120"/>
+              </a:rPr>
+              <a:t>三个输入文件、四个研究，以及为何只对其中一个建模</a:t>
+            </a:r>
+            <a:endParaRPr lang="en-US" sz="1200" dirty="0"/>
+          </a:p>
+        </p:txBody>
+      </p:sp>
+      <p:sp>
+        <p:nvSpPr>
+          <p:cNvPr id="10" name="Shape 8"/>
+          <p:cNvSpPr/>
+          <p:nvPr/>
+        </p:nvSpPr>
+        <p:spPr>
+          <a:xfrm>
+            <a:off x="6263640" y="1463040"/>
+            <a:ext cx="5394960" cy="1280160"/>
+          </a:xfrm>
+          <a:prstGeom prst="rect">
+            <a:avLst/>
+          </a:prstGeom>
+          <a:solidFill>
+            <a:srgbClr val="FFFFFF"/>
+          </a:solidFill>
+          <a:ln/>
+          <a:effectLst>
+            <a:outerShdw sx="100000" sy="100000" kx="0" ky="0" algn="bl" rotWithShape="0" blurRad="101600" dist="25400" dir="8100000">
+              <a:srgbClr val="000000">
+                <a:alpha val="10000"/>
+              </a:srgbClr>
+            </a:outerShdw>
+          </a:effectLst>
+        </p:spPr>
+      </p:sp>
+      <p:sp>
+        <p:nvSpPr>
+          <p:cNvPr id="11" name="Shape 9"/>
+          <p:cNvSpPr/>
+          <p:nvPr/>
+        </p:nvSpPr>
+        <p:spPr>
+          <a:xfrm>
+            <a:off x="6263640" y="1463040"/>
+            <a:ext cx="68580" cy="1280160"/>
+          </a:xfrm>
+          <a:prstGeom prst="rect">
+            <a:avLst/>
+          </a:prstGeom>
+          <a:solidFill>
+            <a:srgbClr val="8FB996"/>
+          </a:solidFill>
+          <a:ln/>
+        </p:spPr>
+      </p:sp>
+      <p:sp>
+        <p:nvSpPr>
+          <p:cNvPr id="12" name="Text 10"/>
+          <p:cNvSpPr/>
+          <p:nvPr/>
+        </p:nvSpPr>
+        <p:spPr>
+          <a:xfrm>
+            <a:off x="6519672" y="1609344"/>
+            <a:ext cx="4937760" cy="329184"/>
+          </a:xfrm>
+          <a:prstGeom prst="rect">
+            <a:avLst/>
+          </a:prstGeom>
+          <a:noFill/>
+          <a:ln/>
+        </p:spPr>
+        <p:txBody>
+          <a:bodyPr wrap="square" lIns="0" tIns="0" rIns="0" bIns="0" rtlCol="0" anchor="t"/>
+          <a:lstStyle/>
+          <a:p>
+            <a:pPr indent="0" marL="0">
+              <a:buNone/>
+            </a:pPr>
+            <a:r>
+              <a:rPr lang="en-US" sz="1600" b="1" dirty="0">
+                <a:solidFill>
+                  <a:srgbClr val="16252C"/>
+                </a:solidFill>
+                <a:latin typeface="微软雅黑" pitchFamily="34" charset="0"/>
+                <a:ea typeface="微软雅黑" pitchFamily="34" charset="-122"/>
+                <a:cs typeface="微软雅黑" pitchFamily="34" charset="-120"/>
+              </a:rPr>
+              <a:t>02   数据处理</a:t>
+            </a:r>
+            <a:endParaRPr lang="en-US" sz="1600" dirty="0"/>
+          </a:p>
+        </p:txBody>
+      </p:sp>
+      <p:sp>
+        <p:nvSpPr>
+          <p:cNvPr id="13" name="Text 11"/>
+          <p:cNvSpPr/>
+          <p:nvPr/>
+        </p:nvSpPr>
+        <p:spPr>
+          <a:xfrm>
+            <a:off x="6519672" y="1993392"/>
+            <a:ext cx="4937760" cy="621792"/>
+          </a:xfrm>
+          <a:prstGeom prst="rect">
+            <a:avLst/>
+          </a:prstGeom>
+          <a:noFill/>
+          <a:ln/>
+        </p:spPr>
+        <p:txBody>
+          <a:bodyPr wrap="square" lIns="0" tIns="0" rIns="0" bIns="0" rtlCol="0" anchor="t"/>
+          <a:lstStyle/>
+          <a:p>
+            <a:pPr indent="0" marL="0">
+              <a:lnSpc>
+                <a:spcPct val="112000"/>
+              </a:lnSpc>
+              <a:buNone/>
+            </a:pPr>
+            <a:r>
+              <a:rPr lang="en-US" sz="1200" dirty="0">
+                <a:solidFill>
+                  <a:srgbClr val="5F7580"/>
+                </a:solidFill>
+                <a:latin typeface="微软雅黑" pitchFamily="34" charset="0"/>
+                <a:ea typeface="微软雅黑" pitchFamily="34" charset="-122"/>
+                <a:cs typeface="微软雅黑" pitchFamily="34" charset="-120"/>
+              </a:rPr>
+              <a:t>标签泄漏、成分数据变换，以及无泄漏的 pipeline</a:t>
+            </a:r>
+            <a:endParaRPr lang="en-US" sz="1200" dirty="0"/>
+          </a:p>
+        </p:txBody>
+      </p:sp>
+      <p:sp>
+        <p:nvSpPr>
+          <p:cNvPr id="14" name="Shape 12"/>
+          <p:cNvSpPr/>
+          <p:nvPr/>
+        </p:nvSpPr>
+        <p:spPr>
+          <a:xfrm>
+            <a:off x="548640" y="2944368"/>
+            <a:ext cx="5394960" cy="1280160"/>
+          </a:xfrm>
+          <a:prstGeom prst="rect">
+            <a:avLst/>
+          </a:prstGeom>
+          <a:solidFill>
+            <a:srgbClr val="FFFFFF"/>
+          </a:solidFill>
+          <a:ln/>
+          <a:effectLst>
+            <a:outerShdw sx="100000" sy="100000" kx="0" ky="0" algn="bl" rotWithShape="0" blurRad="101600" dist="25400" dir="8100000">
+              <a:srgbClr val="000000">
+                <a:alpha val="10000"/>
+              </a:srgbClr>
+            </a:outerShdw>
+          </a:effectLst>
+        </p:spPr>
+      </p:sp>
+      <p:sp>
+        <p:nvSpPr>
+          <p:cNvPr id="15" name="Shape 13"/>
+          <p:cNvSpPr/>
+          <p:nvPr/>
+        </p:nvSpPr>
+        <p:spPr>
+          <a:xfrm>
+            <a:off x="548640" y="2944368"/>
+            <a:ext cx="68580" cy="1280160"/>
+          </a:xfrm>
+          <a:prstGeom prst="rect">
+            <a:avLst/>
+          </a:prstGeom>
+          <a:solidFill>
+            <a:srgbClr val="18707F"/>
+          </a:solidFill>
+          <a:ln/>
+        </p:spPr>
+      </p:sp>
+      <p:sp>
+        <p:nvSpPr>
+          <p:cNvPr id="16" name="Text 14"/>
+          <p:cNvSpPr/>
+          <p:nvPr/>
+        </p:nvSpPr>
+        <p:spPr>
+          <a:xfrm>
+            <a:off x="804672" y="3090672"/>
+            <a:ext cx="4937760" cy="329184"/>
+          </a:xfrm>
+          <a:prstGeom prst="rect">
+            <a:avLst/>
+          </a:prstGeom>
+          <a:noFill/>
+          <a:ln/>
+        </p:spPr>
+        <p:txBody>
+          <a:bodyPr wrap="square" lIns="0" tIns="0" rIns="0" bIns="0" rtlCol="0" anchor="t"/>
+          <a:lstStyle/>
+          <a:p>
+            <a:pPr indent="0" marL="0">
+              <a:buNone/>
+            </a:pPr>
+            <a:r>
+              <a:rPr lang="en-US" sz="1600" b="1" dirty="0">
+                <a:solidFill>
+                  <a:srgbClr val="16252C"/>
+                </a:solidFill>
+                <a:latin typeface="微软雅黑" pitchFamily="34" charset="0"/>
+                <a:ea typeface="微软雅黑" pitchFamily="34" charset="-122"/>
+                <a:cs typeface="微软雅黑" pitchFamily="34" charset="-120"/>
+              </a:rPr>
+              <a:t>03   建模评估</a:t>
+            </a:r>
+            <a:endParaRPr lang="en-US" sz="1600" dirty="0"/>
+          </a:p>
+        </p:txBody>
+      </p:sp>
+      <p:sp>
+        <p:nvSpPr>
+          <p:cNvPr id="17" name="Text 15"/>
+          <p:cNvSpPr/>
+          <p:nvPr/>
+        </p:nvSpPr>
+        <p:spPr>
+          <a:xfrm>
+            <a:off x="804672" y="3474720"/>
+            <a:ext cx="4937760" cy="621792"/>
+          </a:xfrm>
+          <a:prstGeom prst="rect">
+            <a:avLst/>
+          </a:prstGeom>
+          <a:noFill/>
+          <a:ln/>
+        </p:spPr>
+        <p:txBody>
+          <a:bodyPr wrap="square" lIns="0" tIns="0" rIns="0" bIns="0" rtlCol="0" anchor="t"/>
+          <a:lstStyle/>
+          <a:p>
+            <a:pPr indent="0" marL="0">
+              <a:lnSpc>
+                <a:spcPct val="112000"/>
+              </a:lnSpc>
+              <a:buNone/>
+            </a:pPr>
+            <a:r>
+              <a:rPr lang="en-US" sz="1200" dirty="0">
+                <a:solidFill>
+                  <a:srgbClr val="5F7580"/>
+                </a:solidFill>
+                <a:latin typeface="微软雅黑" pitchFamily="34" charset="0"/>
+                <a:ea typeface="微软雅黑" pitchFamily="34" charset="-122"/>
+                <a:cs typeface="微软雅黑" pitchFamily="34" charset="-120"/>
+              </a:rPr>
+              <a:t>嵌套 CV 协议与十七模型横向比较</a:t>
+            </a:r>
+            <a:endParaRPr lang="en-US" sz="1200" dirty="0"/>
+          </a:p>
+        </p:txBody>
+      </p:sp>
+      <p:sp>
+        <p:nvSpPr>
+          <p:cNvPr id="18" name="Shape 16"/>
+          <p:cNvSpPr/>
+          <p:nvPr/>
+        </p:nvSpPr>
+        <p:spPr>
+          <a:xfrm>
+            <a:off x="6263640" y="2944368"/>
+            <a:ext cx="5394960" cy="1280160"/>
+          </a:xfrm>
+          <a:prstGeom prst="rect">
+            <a:avLst/>
+          </a:prstGeom>
+          <a:solidFill>
+            <a:srgbClr val="FFFFFF"/>
+          </a:solidFill>
+          <a:ln/>
+          <a:effectLst>
+            <a:outerShdw sx="100000" sy="100000" kx="0" ky="0" algn="bl" rotWithShape="0" blurRad="101600" dist="25400" dir="8100000">
+              <a:srgbClr val="000000">
+                <a:alpha val="10000"/>
+              </a:srgbClr>
+            </a:outerShdw>
+          </a:effectLst>
+        </p:spPr>
+      </p:sp>
+      <p:sp>
+        <p:nvSpPr>
+          <p:cNvPr id="19" name="Shape 17"/>
+          <p:cNvSpPr/>
+          <p:nvPr/>
+        </p:nvSpPr>
+        <p:spPr>
+          <a:xfrm>
+            <a:off x="6263640" y="2944368"/>
+            <a:ext cx="68580" cy="1280160"/>
+          </a:xfrm>
+          <a:prstGeom prst="rect">
+            <a:avLst/>
+          </a:prstGeom>
+          <a:solidFill>
+            <a:srgbClr val="8FB996"/>
+          </a:solidFill>
+          <a:ln/>
+        </p:spPr>
+      </p:sp>
+      <p:sp>
+        <p:nvSpPr>
+          <p:cNvPr id="20" name="Text 18"/>
+          <p:cNvSpPr/>
+          <p:nvPr/>
+        </p:nvSpPr>
+        <p:spPr>
+          <a:xfrm>
+            <a:off x="6519672" y="3090672"/>
+            <a:ext cx="4937760" cy="329184"/>
+          </a:xfrm>
+          <a:prstGeom prst="rect">
+            <a:avLst/>
+          </a:prstGeom>
+          <a:noFill/>
+          <a:ln/>
+        </p:spPr>
+        <p:txBody>
+          <a:bodyPr wrap="square" lIns="0" tIns="0" rIns="0" bIns="0" rtlCol="0" anchor="t"/>
+          <a:lstStyle/>
+          <a:p>
+            <a:pPr indent="0" marL="0">
+              <a:buNone/>
+            </a:pPr>
+            <a:r>
+              <a:rPr lang="en-US" sz="1600" b="1" dirty="0">
+                <a:solidFill>
+                  <a:srgbClr val="16252C"/>
+                </a:solidFill>
+                <a:latin typeface="微软雅黑" pitchFamily="34" charset="0"/>
+                <a:ea typeface="微软雅黑" pitchFamily="34" charset="-122"/>
+                <a:cs typeface="微软雅黑" pitchFamily="34" charset="-120"/>
+              </a:rPr>
+              <a:t>04   有效性</a:t>
+            </a:r>
+            <a:endParaRPr lang="en-US" sz="1600" dirty="0"/>
+          </a:p>
+        </p:txBody>
+      </p:sp>
+      <p:sp>
+        <p:nvSpPr>
+          <p:cNvPr id="21" name="Text 19"/>
+          <p:cNvSpPr/>
+          <p:nvPr/>
+        </p:nvSpPr>
+        <p:spPr>
+          <a:xfrm>
+            <a:off x="6519672" y="3474720"/>
+            <a:ext cx="4937760" cy="621792"/>
+          </a:xfrm>
+          <a:prstGeom prst="rect">
+            <a:avLst/>
+          </a:prstGeom>
+          <a:noFill/>
+          <a:ln/>
+        </p:spPr>
+        <p:txBody>
+          <a:bodyPr wrap="square" lIns="0" tIns="0" rIns="0" bIns="0" rtlCol="0" anchor="t"/>
+          <a:lstStyle/>
+          <a:p>
+            <a:pPr indent="0" marL="0">
+              <a:lnSpc>
+                <a:spcPct val="112000"/>
+              </a:lnSpc>
+              <a:buNone/>
+            </a:pPr>
+            <a:r>
+              <a:rPr lang="en-US" sz="1200" dirty="0">
+                <a:solidFill>
+                  <a:srgbClr val="5F7580"/>
+                </a:solidFill>
+                <a:latin typeface="微软雅黑" pitchFamily="34" charset="0"/>
+                <a:ea typeface="微软雅黑" pitchFamily="34" charset="-122"/>
+                <a:cs typeface="微软雅黑" pitchFamily="34" charset="-120"/>
+              </a:rPr>
+              <a:t>置换检验、混杂因子、分层再分析与去混杂子集</a:t>
+            </a:r>
+            <a:endParaRPr lang="en-US" sz="1200" dirty="0"/>
+          </a:p>
+        </p:txBody>
+      </p:sp>
+      <p:sp>
+        <p:nvSpPr>
+          <p:cNvPr id="22" name="Shape 20"/>
+          <p:cNvSpPr/>
+          <p:nvPr/>
+        </p:nvSpPr>
+        <p:spPr>
+          <a:xfrm>
+            <a:off x="548640" y="4425696"/>
+            <a:ext cx="5394960" cy="1280160"/>
+          </a:xfrm>
+          <a:prstGeom prst="rect">
+            <a:avLst/>
+          </a:prstGeom>
+          <a:solidFill>
+            <a:srgbClr val="FFFFFF"/>
+          </a:solidFill>
+          <a:ln/>
+          <a:effectLst>
+            <a:outerShdw sx="100000" sy="100000" kx="0" ky="0" algn="bl" rotWithShape="0" blurRad="101600" dist="25400" dir="8100000">
+              <a:srgbClr val="000000">
+                <a:alpha val="10000"/>
+              </a:srgbClr>
+            </a:outerShdw>
+          </a:effectLst>
+        </p:spPr>
+      </p:sp>
+      <p:sp>
+        <p:nvSpPr>
+          <p:cNvPr id="23" name="Shape 21"/>
+          <p:cNvSpPr/>
+          <p:nvPr/>
+        </p:nvSpPr>
+        <p:spPr>
+          <a:xfrm>
+            <a:off x="548640" y="4425696"/>
+            <a:ext cx="68580" cy="1280160"/>
+          </a:xfrm>
+          <a:prstGeom prst="rect">
+            <a:avLst/>
+          </a:prstGeom>
+          <a:solidFill>
+            <a:srgbClr val="18707F"/>
+          </a:solidFill>
+          <a:ln/>
+        </p:spPr>
+      </p:sp>
+      <p:sp>
+        <p:nvSpPr>
+          <p:cNvPr id="24" name="Text 22"/>
+          <p:cNvSpPr/>
+          <p:nvPr/>
+        </p:nvSpPr>
+        <p:spPr>
+          <a:xfrm>
+            <a:off x="804672" y="4572000"/>
+            <a:ext cx="4937760" cy="329184"/>
+          </a:xfrm>
+          <a:prstGeom prst="rect">
+            <a:avLst/>
+          </a:prstGeom>
+          <a:noFill/>
+          <a:ln/>
+        </p:spPr>
+        <p:txBody>
+          <a:bodyPr wrap="square" lIns="0" tIns="0" rIns="0" bIns="0" rtlCol="0" anchor="t"/>
+          <a:lstStyle/>
+          <a:p>
+            <a:pPr indent="0" marL="0">
+              <a:buNone/>
+            </a:pPr>
+            <a:r>
+              <a:rPr lang="en-US" sz="1600" b="1" dirty="0">
+                <a:solidFill>
+                  <a:srgbClr val="16252C"/>
+                </a:solidFill>
+                <a:latin typeface="微软雅黑" pitchFamily="34" charset="0"/>
+                <a:ea typeface="微软雅黑" pitchFamily="34" charset="-122"/>
+                <a:cs typeface="微软雅黑" pitchFamily="34" charset="-120"/>
+              </a:rPr>
+              <a:t>05   生物学发现</a:t>
+            </a:r>
+            <a:endParaRPr lang="en-US" sz="1600" dirty="0"/>
+          </a:p>
+        </p:txBody>
+      </p:sp>
+      <p:sp>
+        <p:nvSpPr>
+          <p:cNvPr id="25" name="Text 23"/>
+          <p:cNvSpPr/>
+          <p:nvPr/>
+        </p:nvSpPr>
+        <p:spPr>
+          <a:xfrm>
+            <a:off x="804672" y="4956048"/>
+            <a:ext cx="4937760" cy="621792"/>
+          </a:xfrm>
+          <a:prstGeom prst="rect">
+            <a:avLst/>
+          </a:prstGeom>
+          <a:noFill/>
+          <a:ln/>
+        </p:spPr>
+        <p:txBody>
+          <a:bodyPr wrap="square" lIns="0" tIns="0" rIns="0" bIns="0" rtlCol="0" anchor="t"/>
+          <a:lstStyle/>
+          <a:p>
+            <a:pPr indent="0" marL="0">
+              <a:lnSpc>
+                <a:spcPct val="112000"/>
+              </a:lnSpc>
+              <a:buNone/>
+            </a:pPr>
+            <a:r>
+              <a:rPr lang="en-US" sz="1200" dirty="0">
+                <a:solidFill>
+                  <a:srgbClr val="5F7580"/>
+                </a:solidFill>
+                <a:latin typeface="微软雅黑" pitchFamily="34" charset="0"/>
+                <a:ea typeface="微软雅黑" pitchFamily="34" charset="-122"/>
+                <a:cs typeface="微软雅黑" pitchFamily="34" charset="-120"/>
+              </a:rPr>
+              <a:t>三方法交集的 Biomarker；非线性结构的证据</a:t>
+            </a:r>
+            <a:endParaRPr lang="en-US" sz="1200" dirty="0"/>
+          </a:p>
+        </p:txBody>
+      </p:sp>
+      <p:sp>
+        <p:nvSpPr>
+          <p:cNvPr id="26" name="Shape 24"/>
+          <p:cNvSpPr/>
+          <p:nvPr/>
+        </p:nvSpPr>
+        <p:spPr>
+          <a:xfrm>
+            <a:off x="6263640" y="4425696"/>
+            <a:ext cx="5394960" cy="1280160"/>
+          </a:xfrm>
+          <a:prstGeom prst="rect">
+            <a:avLst/>
+          </a:prstGeom>
+          <a:solidFill>
+            <a:srgbClr val="FFFFFF"/>
+          </a:solidFill>
+          <a:ln/>
+          <a:effectLst>
+            <a:outerShdw sx="100000" sy="100000" kx="0" ky="0" algn="bl" rotWithShape="0" blurRad="101600" dist="25400" dir="8100000">
+              <a:srgbClr val="000000">
+                <a:alpha val="10000"/>
+              </a:srgbClr>
+            </a:outerShdw>
+          </a:effectLst>
+        </p:spPr>
+      </p:sp>
+      <p:sp>
+        <p:nvSpPr>
+          <p:cNvPr id="27" name="Shape 25"/>
+          <p:cNvSpPr/>
+          <p:nvPr/>
+        </p:nvSpPr>
+        <p:spPr>
+          <a:xfrm>
+            <a:off x="6263640" y="4425696"/>
+            <a:ext cx="68580" cy="1280160"/>
+          </a:xfrm>
+          <a:prstGeom prst="rect">
+            <a:avLst/>
+          </a:prstGeom>
+          <a:solidFill>
+            <a:srgbClr val="8FB996"/>
+          </a:solidFill>
+          <a:ln/>
+        </p:spPr>
+      </p:sp>
+      <p:sp>
+        <p:nvSpPr>
+          <p:cNvPr id="28" name="Text 26"/>
+          <p:cNvSpPr/>
+          <p:nvPr/>
+        </p:nvSpPr>
+        <p:spPr>
+          <a:xfrm>
+            <a:off x="6519672" y="4572000"/>
+            <a:ext cx="4937760" cy="329184"/>
+          </a:xfrm>
+          <a:prstGeom prst="rect">
+            <a:avLst/>
+          </a:prstGeom>
+          <a:noFill/>
+          <a:ln/>
+        </p:spPr>
+        <p:txBody>
+          <a:bodyPr wrap="square" lIns="0" tIns="0" rIns="0" bIns="0" rtlCol="0" anchor="t"/>
+          <a:lstStyle/>
+          <a:p>
+            <a:pPr indent="0" marL="0">
+              <a:buNone/>
+            </a:pPr>
+            <a:r>
+              <a:rPr lang="en-US" sz="1600" b="1" dirty="0">
+                <a:solidFill>
+                  <a:srgbClr val="16252C"/>
+                </a:solidFill>
+                <a:latin typeface="微软雅黑" pitchFamily="34" charset="0"/>
+                <a:ea typeface="微软雅黑" pitchFamily="34" charset="-122"/>
+                <a:cs typeface="微软雅黑" pitchFamily="34" charset="-120"/>
+              </a:rPr>
+              <a:t>06   已知局限</a:t>
+            </a:r>
+            <a:endParaRPr lang="en-US" sz="1600" dirty="0"/>
+          </a:p>
+        </p:txBody>
+      </p:sp>
+      <p:sp>
+        <p:nvSpPr>
+          <p:cNvPr id="29" name="Text 27"/>
+          <p:cNvSpPr/>
+          <p:nvPr/>
+        </p:nvSpPr>
+        <p:spPr>
+          <a:xfrm>
+            <a:off x="6519672" y="4956048"/>
+            <a:ext cx="4937760" cy="621792"/>
+          </a:xfrm>
+          <a:prstGeom prst="rect">
+            <a:avLst/>
+          </a:prstGeom>
+          <a:noFill/>
+          <a:ln/>
+        </p:spPr>
+        <p:txBody>
+          <a:bodyPr wrap="square" lIns="0" tIns="0" rIns="0" bIns="0" rtlCol="0" anchor="t"/>
+          <a:lstStyle/>
+          <a:p>
+            <a:pPr indent="0" marL="0">
+              <a:lnSpc>
+                <a:spcPct val="112000"/>
+              </a:lnSpc>
+              <a:buNone/>
+            </a:pPr>
+            <a:r>
+              <a:rPr lang="en-US" sz="1200" dirty="0">
+                <a:solidFill>
+                  <a:srgbClr val="5F7580"/>
+                </a:solidFill>
+                <a:latin typeface="微软雅黑" pitchFamily="34" charset="0"/>
+                <a:ea typeface="微软雅黑" pitchFamily="34" charset="-122"/>
+                <a:cs typeface="微软雅黑" pitchFamily="34" charset="-120"/>
+              </a:rPr>
+              <a:t>七项局限，如实陈述</a:t>
+            </a:r>
+            <a:endParaRPr lang="en-US" sz="1200" dirty="0"/>
+          </a:p>
+        </p:txBody>
+      </p:sp>
+    </p:spTree>
+  </p:cSld>
+  <p:clrMapOvr>
+    <a:masterClrMapping/>
+  </p:clrMapOvr>
+</p:sld>
+</file>
+
+<file path=ppt/slides/slide30.xml><?xml version="1.0" encoding="utf-8"?>
+<p:sld xmlns:a="http://schemas.openxmlformats.org/drawingml/2006/main" xmlns:r="http://schemas.openxmlformats.org/officeDocument/2006/relationships" xmlns:p="http://schemas.openxmlformats.org/presentationml/2006/main">
+  <p:cSld name="Slide 30">
+    <p:bg>
+      <p:bgPr>
+        <a:solidFill>
+          <a:srgbClr val="FCFAF6"/>
+        </a:solidFill>
+      </p:bgPr>
+    </p:bg>
+    <p:spTree>
+      <p:nvGrpSpPr>
+        <p:cNvPr id="1" name=""/>
+        <p:cNvGrpSpPr/>
+        <p:nvPr/>
+      </p:nvGrpSpPr>
+      <p:grpSpPr>
+        <a:xfrm>
+          <a:off x="0" y="0"/>
+          <a:ext cx="0" cy="0"/>
+          <a:chOff x="0" y="0"/>
+          <a:chExt cx="0" cy="0"/>
+        </a:xfrm>
+      </p:grpSpPr>
+      <p:sp>
+        <p:nvSpPr>
+          <p:cNvPr id="2" name="Shape 0"/>
+          <p:cNvSpPr/>
+          <p:nvPr/>
+        </p:nvSpPr>
+        <p:spPr>
+          <a:xfrm>
+            <a:off x="0" y="0"/>
+            <a:ext cx="12191695" cy="54864"/>
+          </a:xfrm>
+          <a:prstGeom prst="rect">
+            <a:avLst/>
+          </a:prstGeom>
+          <a:solidFill>
+            <a:srgbClr val="18707F"/>
+          </a:solidFill>
+          <a:ln/>
+        </p:spPr>
+      </p:sp>
+      <p:sp>
+        <p:nvSpPr>
+          <p:cNvPr id="3" name="Text 1"/>
+          <p:cNvSpPr/>
+          <p:nvPr/>
+        </p:nvSpPr>
+        <p:spPr>
+          <a:xfrm>
+            <a:off x="548640" y="310896"/>
+            <a:ext cx="7315200" cy="256032"/>
+          </a:xfrm>
+          <a:prstGeom prst="rect">
+            <a:avLst/>
+          </a:prstGeom>
+          <a:noFill/>
+          <a:ln/>
+        </p:spPr>
+        <p:txBody>
+          <a:bodyPr wrap="square" lIns="0" tIns="0" rIns="0" bIns="0" rtlCol="0" anchor="ctr"/>
+          <a:lstStyle/>
+          <a:p>
+            <a:pPr indent="0" marL="0">
+              <a:buNone/>
+            </a:pPr>
+            <a:r>
+              <a:rPr lang="en-US" sz="1100" b="1" spc="200" kern="0" dirty="0">
+                <a:solidFill>
+                  <a:srgbClr val="18707F"/>
+                </a:solidFill>
+                <a:latin typeface="微软雅黑" pitchFamily="34" charset="0"/>
+                <a:ea typeface="微软雅黑" pitchFamily="34" charset="-122"/>
+                <a:cs typeface="微软雅黑" pitchFamily="34" charset="-120"/>
+              </a:rPr>
               <a:t>可复现性</a:t>
             </a:r>
             <a:endParaRPr lang="en-US" sz="1100" dirty="0"/>
@@ -37276,7 +41299,7 @@
                 <a:ea typeface="微软雅黑" pitchFamily="34" charset="-122"/>
                 <a:cs typeface="微软雅黑" pitchFamily="34" charset="-120"/>
               </a:rPr>
-              <a:t>29</a:t>
+              <a:t>30</a:t>
             </a:r>
             <a:endParaRPr lang="en-US" sz="1000" dirty="0"/>
           </a:p>
@@ -37284,7 +41307,7 @@
       </p:sp>
       <p:graphicFrame>
         <p:nvGraphicFramePr>
-          <p:cNvPr id="30" name="Table 0"/>
+          <p:cNvPr id="31" name="Table 0"/>
           <p:cNvGraphicFramePr>
             <a:graphicFrameLocks noGrp="1"/>
           </p:cNvGraphicFramePr>
@@ -38305,946 +42328,9 @@
 </p:sld>
 </file>
 
-<file path=ppt/slides/slide3.xml><?xml version="1.0" encoding="utf-8"?>
+<file path=ppt/slides/slide31.xml><?xml version="1.0" encoding="utf-8"?>
 <p:sld xmlns:a="http://schemas.openxmlformats.org/drawingml/2006/main" xmlns:r="http://schemas.openxmlformats.org/officeDocument/2006/relationships" xmlns:p="http://schemas.openxmlformats.org/presentationml/2006/main">
-  <p:cSld name="Slide 3">
-    <p:bg>
-      <p:bgPr>
-        <a:solidFill>
-          <a:srgbClr val="FCFAF6"/>
-        </a:solidFill>
-      </p:bgPr>
-    </p:bg>
-    <p:spTree>
-      <p:nvGrpSpPr>
-        <p:cNvPr id="1" name=""/>
-        <p:cNvGrpSpPr/>
-        <p:nvPr/>
-      </p:nvGrpSpPr>
-      <p:grpSpPr>
-        <a:xfrm>
-          <a:off x="0" y="0"/>
-          <a:ext cx="0" cy="0"/>
-          <a:chOff x="0" y="0"/>
-          <a:chExt cx="0" cy="0"/>
-        </a:xfrm>
-      </p:grpSpPr>
-      <p:sp>
-        <p:nvSpPr>
-          <p:cNvPr id="2" name="Shape 0"/>
-          <p:cNvSpPr/>
-          <p:nvPr/>
-        </p:nvSpPr>
-        <p:spPr>
-          <a:xfrm>
-            <a:off x="0" y="0"/>
-            <a:ext cx="12191695" cy="54864"/>
-          </a:xfrm>
-          <a:prstGeom prst="rect">
-            <a:avLst/>
-          </a:prstGeom>
-          <a:solidFill>
-            <a:srgbClr val="18707F"/>
-          </a:solidFill>
-          <a:ln/>
-        </p:spPr>
-      </p:sp>
-      <p:sp>
-        <p:nvSpPr>
-          <p:cNvPr id="3" name="Text 1"/>
-          <p:cNvSpPr/>
-          <p:nvPr/>
-        </p:nvSpPr>
-        <p:spPr>
-          <a:xfrm>
-            <a:off x="548640" y="310896"/>
-            <a:ext cx="7315200" cy="256032"/>
-          </a:xfrm>
-          <a:prstGeom prst="rect">
-            <a:avLst/>
-          </a:prstGeom>
-          <a:noFill/>
-          <a:ln/>
-        </p:spPr>
-        <p:txBody>
-          <a:bodyPr wrap="square" lIns="0" tIns="0" rIns="0" bIns="0" rtlCol="0" anchor="ctr"/>
-          <a:lstStyle/>
-          <a:p>
-            <a:pPr indent="0" marL="0">
-              <a:buNone/>
-            </a:pPr>
-            <a:r>
-              <a:rPr lang="en-US" sz="1100" b="1" spc="200" kern="0" dirty="0">
-                <a:solidFill>
-                  <a:srgbClr val="18707F"/>
-                </a:solidFill>
-                <a:latin typeface="微软雅黑" pitchFamily="34" charset="0"/>
-                <a:ea typeface="微软雅黑" pitchFamily="34" charset="-122"/>
-                <a:cs typeface="微软雅黑" pitchFamily="34" charset="-120"/>
-              </a:rPr>
-              <a:t>路线图</a:t>
-            </a:r>
-            <a:endParaRPr lang="en-US" sz="1100" dirty="0"/>
-          </a:p>
-        </p:txBody>
-      </p:sp>
-      <p:sp>
-        <p:nvSpPr>
-          <p:cNvPr id="4" name="Text 2"/>
-          <p:cNvSpPr/>
-          <p:nvPr/>
-        </p:nvSpPr>
-        <p:spPr>
-          <a:xfrm>
-            <a:off x="548640" y="566928"/>
-            <a:ext cx="11064240" cy="685800"/>
-          </a:xfrm>
-          <a:prstGeom prst="rect">
-            <a:avLst/>
-          </a:prstGeom>
-          <a:noFill/>
-          <a:ln/>
-        </p:spPr>
-        <p:txBody>
-          <a:bodyPr wrap="square" lIns="0" tIns="0" rIns="0" bIns="0" rtlCol="0" anchor="ctr"/>
-          <a:lstStyle/>
-          <a:p>
-            <a:pPr indent="0" marL="0">
-              <a:buNone/>
-            </a:pPr>
-            <a:r>
-              <a:rPr lang="en-US" sz="3000" b="1" dirty="0">
-                <a:solidFill>
-                  <a:srgbClr val="16252C"/>
-                </a:solidFill>
-                <a:latin typeface="微软雅黑" pitchFamily="34" charset="0"/>
-                <a:ea typeface="微软雅黑" pitchFamily="34" charset="-122"/>
-                <a:cs typeface="微软雅黑" pitchFamily="34" charset="-120"/>
-              </a:rPr>
-              <a:t>本报告的内容结构</a:t>
-            </a:r>
-            <a:endParaRPr lang="en-US" sz="3000" dirty="0"/>
-          </a:p>
-        </p:txBody>
-      </p:sp>
-      <p:sp>
-        <p:nvSpPr>
-          <p:cNvPr id="5" name="Text 3"/>
-          <p:cNvSpPr/>
-          <p:nvPr/>
-        </p:nvSpPr>
-        <p:spPr>
-          <a:xfrm>
-            <a:off x="11430000" y="6355080"/>
-            <a:ext cx="411480" cy="274320"/>
-          </a:xfrm>
-          <a:prstGeom prst="rect">
-            <a:avLst/>
-          </a:prstGeom>
-          <a:noFill/>
-          <a:ln/>
-        </p:spPr>
-        <p:txBody>
-          <a:bodyPr wrap="square" lIns="0" tIns="0" rIns="0" bIns="0" rtlCol="0" anchor="ctr"/>
-          <a:lstStyle/>
-          <a:p>
-            <a:pPr algn="r" indent="0" marL="0">
-              <a:buNone/>
-            </a:pPr>
-            <a:r>
-              <a:rPr lang="en-US" sz="1000" dirty="0">
-                <a:solidFill>
-                  <a:srgbClr val="5F7580"/>
-                </a:solidFill>
-                <a:latin typeface="微软雅黑" pitchFamily="34" charset="0"/>
-                <a:ea typeface="微软雅黑" pitchFamily="34" charset="-122"/>
-                <a:cs typeface="微软雅黑" pitchFamily="34" charset="-120"/>
-              </a:rPr>
-              <a:t>3</a:t>
-            </a:r>
-            <a:endParaRPr lang="en-US" sz="1000" dirty="0"/>
-          </a:p>
-        </p:txBody>
-      </p:sp>
-      <p:sp>
-        <p:nvSpPr>
-          <p:cNvPr id="6" name="Shape 4"/>
-          <p:cNvSpPr/>
-          <p:nvPr/>
-        </p:nvSpPr>
-        <p:spPr>
-          <a:xfrm>
-            <a:off x="548640" y="1463040"/>
-            <a:ext cx="5394960" cy="1280160"/>
-          </a:xfrm>
-          <a:prstGeom prst="rect">
-            <a:avLst/>
-          </a:prstGeom>
-          <a:solidFill>
-            <a:srgbClr val="FFFFFF"/>
-          </a:solidFill>
-          <a:ln/>
-          <a:effectLst>
-            <a:outerShdw sx="100000" sy="100000" kx="0" ky="0" algn="bl" rotWithShape="0" blurRad="101600" dist="25400" dir="8100000">
-              <a:srgbClr val="000000">
-                <a:alpha val="10000"/>
-              </a:srgbClr>
-            </a:outerShdw>
-          </a:effectLst>
-        </p:spPr>
-      </p:sp>
-      <p:sp>
-        <p:nvSpPr>
-          <p:cNvPr id="7" name="Shape 5"/>
-          <p:cNvSpPr/>
-          <p:nvPr/>
-        </p:nvSpPr>
-        <p:spPr>
-          <a:xfrm>
-            <a:off x="548640" y="1463040"/>
-            <a:ext cx="68580" cy="1280160"/>
-          </a:xfrm>
-          <a:prstGeom prst="rect">
-            <a:avLst/>
-          </a:prstGeom>
-          <a:solidFill>
-            <a:srgbClr val="18707F"/>
-          </a:solidFill>
-          <a:ln/>
-        </p:spPr>
-      </p:sp>
-      <p:sp>
-        <p:nvSpPr>
-          <p:cNvPr id="8" name="Text 6"/>
-          <p:cNvSpPr/>
-          <p:nvPr/>
-        </p:nvSpPr>
-        <p:spPr>
-          <a:xfrm>
-            <a:off x="804672" y="1609344"/>
-            <a:ext cx="4937760" cy="329184"/>
-          </a:xfrm>
-          <a:prstGeom prst="rect">
-            <a:avLst/>
-          </a:prstGeom>
-          <a:noFill/>
-          <a:ln/>
-        </p:spPr>
-        <p:txBody>
-          <a:bodyPr wrap="square" lIns="0" tIns="0" rIns="0" bIns="0" rtlCol="0" anchor="t"/>
-          <a:lstStyle/>
-          <a:p>
-            <a:pPr indent="0" marL="0">
-              <a:buNone/>
-            </a:pPr>
-            <a:r>
-              <a:rPr lang="en-US" sz="1600" b="1" dirty="0">
-                <a:solidFill>
-                  <a:srgbClr val="16252C"/>
-                </a:solidFill>
-                <a:latin typeface="微软雅黑" pitchFamily="34" charset="0"/>
-                <a:ea typeface="微软雅黑" pitchFamily="34" charset="-122"/>
-                <a:cs typeface="微软雅黑" pitchFamily="34" charset="-120"/>
-              </a:rPr>
-              <a:t>01   数据</a:t>
-            </a:r>
-            <a:endParaRPr lang="en-US" sz="1600" dirty="0"/>
-          </a:p>
-        </p:txBody>
-      </p:sp>
-      <p:sp>
-        <p:nvSpPr>
-          <p:cNvPr id="9" name="Text 7"/>
-          <p:cNvSpPr/>
-          <p:nvPr/>
-        </p:nvSpPr>
-        <p:spPr>
-          <a:xfrm>
-            <a:off x="804672" y="1993392"/>
-            <a:ext cx="4937760" cy="621792"/>
-          </a:xfrm>
-          <a:prstGeom prst="rect">
-            <a:avLst/>
-          </a:prstGeom>
-          <a:noFill/>
-          <a:ln/>
-        </p:spPr>
-        <p:txBody>
-          <a:bodyPr wrap="square" lIns="0" tIns="0" rIns="0" bIns="0" rtlCol="0" anchor="t"/>
-          <a:lstStyle/>
-          <a:p>
-            <a:pPr indent="0" marL="0">
-              <a:lnSpc>
-                <a:spcPct val="112000"/>
-              </a:lnSpc>
-              <a:buNone/>
-            </a:pPr>
-            <a:r>
-              <a:rPr lang="en-US" sz="1200" dirty="0">
-                <a:solidFill>
-                  <a:srgbClr val="5F7580"/>
-                </a:solidFill>
-                <a:latin typeface="微软雅黑" pitchFamily="34" charset="0"/>
-                <a:ea typeface="微软雅黑" pitchFamily="34" charset="-122"/>
-                <a:cs typeface="微软雅黑" pitchFamily="34" charset="-120"/>
-              </a:rPr>
-              <a:t>三个输入文件、四个研究，以及为何只对其中一个建模</a:t>
-            </a:r>
-            <a:endParaRPr lang="en-US" sz="1200" dirty="0"/>
-          </a:p>
-        </p:txBody>
-      </p:sp>
-      <p:sp>
-        <p:nvSpPr>
-          <p:cNvPr id="10" name="Shape 8"/>
-          <p:cNvSpPr/>
-          <p:nvPr/>
-        </p:nvSpPr>
-        <p:spPr>
-          <a:xfrm>
-            <a:off x="6263640" y="1463040"/>
-            <a:ext cx="5394960" cy="1280160"/>
-          </a:xfrm>
-          <a:prstGeom prst="rect">
-            <a:avLst/>
-          </a:prstGeom>
-          <a:solidFill>
-            <a:srgbClr val="FFFFFF"/>
-          </a:solidFill>
-          <a:ln/>
-          <a:effectLst>
-            <a:outerShdw sx="100000" sy="100000" kx="0" ky="0" algn="bl" rotWithShape="0" blurRad="101600" dist="25400" dir="8100000">
-              <a:srgbClr val="000000">
-                <a:alpha val="10000"/>
-              </a:srgbClr>
-            </a:outerShdw>
-          </a:effectLst>
-        </p:spPr>
-      </p:sp>
-      <p:sp>
-        <p:nvSpPr>
-          <p:cNvPr id="11" name="Shape 9"/>
-          <p:cNvSpPr/>
-          <p:nvPr/>
-        </p:nvSpPr>
-        <p:spPr>
-          <a:xfrm>
-            <a:off x="6263640" y="1463040"/>
-            <a:ext cx="68580" cy="1280160"/>
-          </a:xfrm>
-          <a:prstGeom prst="rect">
-            <a:avLst/>
-          </a:prstGeom>
-          <a:solidFill>
-            <a:srgbClr val="8FB996"/>
-          </a:solidFill>
-          <a:ln/>
-        </p:spPr>
-      </p:sp>
-      <p:sp>
-        <p:nvSpPr>
-          <p:cNvPr id="12" name="Text 10"/>
-          <p:cNvSpPr/>
-          <p:nvPr/>
-        </p:nvSpPr>
-        <p:spPr>
-          <a:xfrm>
-            <a:off x="6519672" y="1609344"/>
-            <a:ext cx="4937760" cy="329184"/>
-          </a:xfrm>
-          <a:prstGeom prst="rect">
-            <a:avLst/>
-          </a:prstGeom>
-          <a:noFill/>
-          <a:ln/>
-        </p:spPr>
-        <p:txBody>
-          <a:bodyPr wrap="square" lIns="0" tIns="0" rIns="0" bIns="0" rtlCol="0" anchor="t"/>
-          <a:lstStyle/>
-          <a:p>
-            <a:pPr indent="0" marL="0">
-              <a:buNone/>
-            </a:pPr>
-            <a:r>
-              <a:rPr lang="en-US" sz="1600" b="1" dirty="0">
-                <a:solidFill>
-                  <a:srgbClr val="16252C"/>
-                </a:solidFill>
-                <a:latin typeface="微软雅黑" pitchFamily="34" charset="0"/>
-                <a:ea typeface="微软雅黑" pitchFamily="34" charset="-122"/>
-                <a:cs typeface="微软雅黑" pitchFamily="34" charset="-120"/>
-              </a:rPr>
-              <a:t>02   数据处理</a:t>
-            </a:r>
-            <a:endParaRPr lang="en-US" sz="1600" dirty="0"/>
-          </a:p>
-        </p:txBody>
-      </p:sp>
-      <p:sp>
-        <p:nvSpPr>
-          <p:cNvPr id="13" name="Text 11"/>
-          <p:cNvSpPr/>
-          <p:nvPr/>
-        </p:nvSpPr>
-        <p:spPr>
-          <a:xfrm>
-            <a:off x="6519672" y="1993392"/>
-            <a:ext cx="4937760" cy="621792"/>
-          </a:xfrm>
-          <a:prstGeom prst="rect">
-            <a:avLst/>
-          </a:prstGeom>
-          <a:noFill/>
-          <a:ln/>
-        </p:spPr>
-        <p:txBody>
-          <a:bodyPr wrap="square" lIns="0" tIns="0" rIns="0" bIns="0" rtlCol="0" anchor="t"/>
-          <a:lstStyle/>
-          <a:p>
-            <a:pPr indent="0" marL="0">
-              <a:lnSpc>
-                <a:spcPct val="112000"/>
-              </a:lnSpc>
-              <a:buNone/>
-            </a:pPr>
-            <a:r>
-              <a:rPr lang="en-US" sz="1200" dirty="0">
-                <a:solidFill>
-                  <a:srgbClr val="5F7580"/>
-                </a:solidFill>
-                <a:latin typeface="微软雅黑" pitchFamily="34" charset="0"/>
-                <a:ea typeface="微软雅黑" pitchFamily="34" charset="-122"/>
-                <a:cs typeface="微软雅黑" pitchFamily="34" charset="-120"/>
-              </a:rPr>
-              <a:t>标签泄漏、成分数据变换，以及无泄漏的 pipeline</a:t>
-            </a:r>
-            <a:endParaRPr lang="en-US" sz="1200" dirty="0"/>
-          </a:p>
-        </p:txBody>
-      </p:sp>
-      <p:sp>
-        <p:nvSpPr>
-          <p:cNvPr id="14" name="Shape 12"/>
-          <p:cNvSpPr/>
-          <p:nvPr/>
-        </p:nvSpPr>
-        <p:spPr>
-          <a:xfrm>
-            <a:off x="548640" y="2944368"/>
-            <a:ext cx="5394960" cy="1280160"/>
-          </a:xfrm>
-          <a:prstGeom prst="rect">
-            <a:avLst/>
-          </a:prstGeom>
-          <a:solidFill>
-            <a:srgbClr val="FFFFFF"/>
-          </a:solidFill>
-          <a:ln/>
-          <a:effectLst>
-            <a:outerShdw sx="100000" sy="100000" kx="0" ky="0" algn="bl" rotWithShape="0" blurRad="101600" dist="25400" dir="8100000">
-              <a:srgbClr val="000000">
-                <a:alpha val="10000"/>
-              </a:srgbClr>
-            </a:outerShdw>
-          </a:effectLst>
-        </p:spPr>
-      </p:sp>
-      <p:sp>
-        <p:nvSpPr>
-          <p:cNvPr id="15" name="Shape 13"/>
-          <p:cNvSpPr/>
-          <p:nvPr/>
-        </p:nvSpPr>
-        <p:spPr>
-          <a:xfrm>
-            <a:off x="548640" y="2944368"/>
-            <a:ext cx="68580" cy="1280160"/>
-          </a:xfrm>
-          <a:prstGeom prst="rect">
-            <a:avLst/>
-          </a:prstGeom>
-          <a:solidFill>
-            <a:srgbClr val="18707F"/>
-          </a:solidFill>
-          <a:ln/>
-        </p:spPr>
-      </p:sp>
-      <p:sp>
-        <p:nvSpPr>
-          <p:cNvPr id="16" name="Text 14"/>
-          <p:cNvSpPr/>
-          <p:nvPr/>
-        </p:nvSpPr>
-        <p:spPr>
-          <a:xfrm>
-            <a:off x="804672" y="3090672"/>
-            <a:ext cx="4937760" cy="329184"/>
-          </a:xfrm>
-          <a:prstGeom prst="rect">
-            <a:avLst/>
-          </a:prstGeom>
-          <a:noFill/>
-          <a:ln/>
-        </p:spPr>
-        <p:txBody>
-          <a:bodyPr wrap="square" lIns="0" tIns="0" rIns="0" bIns="0" rtlCol="0" anchor="t"/>
-          <a:lstStyle/>
-          <a:p>
-            <a:pPr indent="0" marL="0">
-              <a:buNone/>
-            </a:pPr>
-            <a:r>
-              <a:rPr lang="en-US" sz="1600" b="1" dirty="0">
-                <a:solidFill>
-                  <a:srgbClr val="16252C"/>
-                </a:solidFill>
-                <a:latin typeface="微软雅黑" pitchFamily="34" charset="0"/>
-                <a:ea typeface="微软雅黑" pitchFamily="34" charset="-122"/>
-                <a:cs typeface="微软雅黑" pitchFamily="34" charset="-120"/>
-              </a:rPr>
-              <a:t>03   建模评估</a:t>
-            </a:r>
-            <a:endParaRPr lang="en-US" sz="1600" dirty="0"/>
-          </a:p>
-        </p:txBody>
-      </p:sp>
-      <p:sp>
-        <p:nvSpPr>
-          <p:cNvPr id="17" name="Text 15"/>
-          <p:cNvSpPr/>
-          <p:nvPr/>
-        </p:nvSpPr>
-        <p:spPr>
-          <a:xfrm>
-            <a:off x="804672" y="3474720"/>
-            <a:ext cx="4937760" cy="621792"/>
-          </a:xfrm>
-          <a:prstGeom prst="rect">
-            <a:avLst/>
-          </a:prstGeom>
-          <a:noFill/>
-          <a:ln/>
-        </p:spPr>
-        <p:txBody>
-          <a:bodyPr wrap="square" lIns="0" tIns="0" rIns="0" bIns="0" rtlCol="0" anchor="t"/>
-          <a:lstStyle/>
-          <a:p>
-            <a:pPr indent="0" marL="0">
-              <a:lnSpc>
-                <a:spcPct val="112000"/>
-              </a:lnSpc>
-              <a:buNone/>
-            </a:pPr>
-            <a:r>
-              <a:rPr lang="en-US" sz="1200" dirty="0">
-                <a:solidFill>
-                  <a:srgbClr val="5F7580"/>
-                </a:solidFill>
-                <a:latin typeface="微软雅黑" pitchFamily="34" charset="0"/>
-                <a:ea typeface="微软雅黑" pitchFamily="34" charset="-122"/>
-                <a:cs typeface="微软雅黑" pitchFamily="34" charset="-120"/>
-              </a:rPr>
-              <a:t>嵌套 CV 协议与十七模型横向比较</a:t>
-            </a:r>
-            <a:endParaRPr lang="en-US" sz="1200" dirty="0"/>
-          </a:p>
-        </p:txBody>
-      </p:sp>
-      <p:sp>
-        <p:nvSpPr>
-          <p:cNvPr id="18" name="Shape 16"/>
-          <p:cNvSpPr/>
-          <p:nvPr/>
-        </p:nvSpPr>
-        <p:spPr>
-          <a:xfrm>
-            <a:off x="6263640" y="2944368"/>
-            <a:ext cx="5394960" cy="1280160"/>
-          </a:xfrm>
-          <a:prstGeom prst="rect">
-            <a:avLst/>
-          </a:prstGeom>
-          <a:solidFill>
-            <a:srgbClr val="FFFFFF"/>
-          </a:solidFill>
-          <a:ln/>
-          <a:effectLst>
-            <a:outerShdw sx="100000" sy="100000" kx="0" ky="0" algn="bl" rotWithShape="0" blurRad="101600" dist="25400" dir="8100000">
-              <a:srgbClr val="000000">
-                <a:alpha val="10000"/>
-              </a:srgbClr>
-            </a:outerShdw>
-          </a:effectLst>
-        </p:spPr>
-      </p:sp>
-      <p:sp>
-        <p:nvSpPr>
-          <p:cNvPr id="19" name="Shape 17"/>
-          <p:cNvSpPr/>
-          <p:nvPr/>
-        </p:nvSpPr>
-        <p:spPr>
-          <a:xfrm>
-            <a:off x="6263640" y="2944368"/>
-            <a:ext cx="68580" cy="1280160"/>
-          </a:xfrm>
-          <a:prstGeom prst="rect">
-            <a:avLst/>
-          </a:prstGeom>
-          <a:solidFill>
-            <a:srgbClr val="8FB996"/>
-          </a:solidFill>
-          <a:ln/>
-        </p:spPr>
-      </p:sp>
-      <p:sp>
-        <p:nvSpPr>
-          <p:cNvPr id="20" name="Text 18"/>
-          <p:cNvSpPr/>
-          <p:nvPr/>
-        </p:nvSpPr>
-        <p:spPr>
-          <a:xfrm>
-            <a:off x="6519672" y="3090672"/>
-            <a:ext cx="4937760" cy="329184"/>
-          </a:xfrm>
-          <a:prstGeom prst="rect">
-            <a:avLst/>
-          </a:prstGeom>
-          <a:noFill/>
-          <a:ln/>
-        </p:spPr>
-        <p:txBody>
-          <a:bodyPr wrap="square" lIns="0" tIns="0" rIns="0" bIns="0" rtlCol="0" anchor="t"/>
-          <a:lstStyle/>
-          <a:p>
-            <a:pPr indent="0" marL="0">
-              <a:buNone/>
-            </a:pPr>
-            <a:r>
-              <a:rPr lang="en-US" sz="1600" b="1" dirty="0">
-                <a:solidFill>
-                  <a:srgbClr val="16252C"/>
-                </a:solidFill>
-                <a:latin typeface="微软雅黑" pitchFamily="34" charset="0"/>
-                <a:ea typeface="微软雅黑" pitchFamily="34" charset="-122"/>
-                <a:cs typeface="微软雅黑" pitchFamily="34" charset="-120"/>
-              </a:rPr>
-              <a:t>04   有效性</a:t>
-            </a:r>
-            <a:endParaRPr lang="en-US" sz="1600" dirty="0"/>
-          </a:p>
-        </p:txBody>
-      </p:sp>
-      <p:sp>
-        <p:nvSpPr>
-          <p:cNvPr id="21" name="Text 19"/>
-          <p:cNvSpPr/>
-          <p:nvPr/>
-        </p:nvSpPr>
-        <p:spPr>
-          <a:xfrm>
-            <a:off x="6519672" y="3474720"/>
-            <a:ext cx="4937760" cy="621792"/>
-          </a:xfrm>
-          <a:prstGeom prst="rect">
-            <a:avLst/>
-          </a:prstGeom>
-          <a:noFill/>
-          <a:ln/>
-        </p:spPr>
-        <p:txBody>
-          <a:bodyPr wrap="square" lIns="0" tIns="0" rIns="0" bIns="0" rtlCol="0" anchor="t"/>
-          <a:lstStyle/>
-          <a:p>
-            <a:pPr indent="0" marL="0">
-              <a:lnSpc>
-                <a:spcPct val="112000"/>
-              </a:lnSpc>
-              <a:buNone/>
-            </a:pPr>
-            <a:r>
-              <a:rPr lang="en-US" sz="1200" dirty="0">
-                <a:solidFill>
-                  <a:srgbClr val="5F7580"/>
-                </a:solidFill>
-                <a:latin typeface="微软雅黑" pitchFamily="34" charset="0"/>
-                <a:ea typeface="微软雅黑" pitchFamily="34" charset="-122"/>
-                <a:cs typeface="微软雅黑" pitchFamily="34" charset="-120"/>
-              </a:rPr>
-              <a:t>置换检验、混杂因子、分层再分析与去混杂子集</a:t>
-            </a:r>
-            <a:endParaRPr lang="en-US" sz="1200" dirty="0"/>
-          </a:p>
-        </p:txBody>
-      </p:sp>
-      <p:sp>
-        <p:nvSpPr>
-          <p:cNvPr id="22" name="Shape 20"/>
-          <p:cNvSpPr/>
-          <p:nvPr/>
-        </p:nvSpPr>
-        <p:spPr>
-          <a:xfrm>
-            <a:off x="548640" y="4425696"/>
-            <a:ext cx="5394960" cy="1280160"/>
-          </a:xfrm>
-          <a:prstGeom prst="rect">
-            <a:avLst/>
-          </a:prstGeom>
-          <a:solidFill>
-            <a:srgbClr val="FFFFFF"/>
-          </a:solidFill>
-          <a:ln/>
-          <a:effectLst>
-            <a:outerShdw sx="100000" sy="100000" kx="0" ky="0" algn="bl" rotWithShape="0" blurRad="101600" dist="25400" dir="8100000">
-              <a:srgbClr val="000000">
-                <a:alpha val="10000"/>
-              </a:srgbClr>
-            </a:outerShdw>
-          </a:effectLst>
-        </p:spPr>
-      </p:sp>
-      <p:sp>
-        <p:nvSpPr>
-          <p:cNvPr id="23" name="Shape 21"/>
-          <p:cNvSpPr/>
-          <p:nvPr/>
-        </p:nvSpPr>
-        <p:spPr>
-          <a:xfrm>
-            <a:off x="548640" y="4425696"/>
-            <a:ext cx="68580" cy="1280160"/>
-          </a:xfrm>
-          <a:prstGeom prst="rect">
-            <a:avLst/>
-          </a:prstGeom>
-          <a:solidFill>
-            <a:srgbClr val="18707F"/>
-          </a:solidFill>
-          <a:ln/>
-        </p:spPr>
-      </p:sp>
-      <p:sp>
-        <p:nvSpPr>
-          <p:cNvPr id="24" name="Text 22"/>
-          <p:cNvSpPr/>
-          <p:nvPr/>
-        </p:nvSpPr>
-        <p:spPr>
-          <a:xfrm>
-            <a:off x="804672" y="4572000"/>
-            <a:ext cx="4937760" cy="329184"/>
-          </a:xfrm>
-          <a:prstGeom prst="rect">
-            <a:avLst/>
-          </a:prstGeom>
-          <a:noFill/>
-          <a:ln/>
-        </p:spPr>
-        <p:txBody>
-          <a:bodyPr wrap="square" lIns="0" tIns="0" rIns="0" bIns="0" rtlCol="0" anchor="t"/>
-          <a:lstStyle/>
-          <a:p>
-            <a:pPr indent="0" marL="0">
-              <a:buNone/>
-            </a:pPr>
-            <a:r>
-              <a:rPr lang="en-US" sz="1600" b="1" dirty="0">
-                <a:solidFill>
-                  <a:srgbClr val="16252C"/>
-                </a:solidFill>
-                <a:latin typeface="微软雅黑" pitchFamily="34" charset="0"/>
-                <a:ea typeface="微软雅黑" pitchFamily="34" charset="-122"/>
-                <a:cs typeface="微软雅黑" pitchFamily="34" charset="-120"/>
-              </a:rPr>
-              <a:t>05   生物学发现</a:t>
-            </a:r>
-            <a:endParaRPr lang="en-US" sz="1600" dirty="0"/>
-          </a:p>
-        </p:txBody>
-      </p:sp>
-      <p:sp>
-        <p:nvSpPr>
-          <p:cNvPr id="25" name="Text 23"/>
-          <p:cNvSpPr/>
-          <p:nvPr/>
-        </p:nvSpPr>
-        <p:spPr>
-          <a:xfrm>
-            <a:off x="804672" y="4956048"/>
-            <a:ext cx="4937760" cy="621792"/>
-          </a:xfrm>
-          <a:prstGeom prst="rect">
-            <a:avLst/>
-          </a:prstGeom>
-          <a:noFill/>
-          <a:ln/>
-        </p:spPr>
-        <p:txBody>
-          <a:bodyPr wrap="square" lIns="0" tIns="0" rIns="0" bIns="0" rtlCol="0" anchor="t"/>
-          <a:lstStyle/>
-          <a:p>
-            <a:pPr indent="0" marL="0">
-              <a:lnSpc>
-                <a:spcPct val="112000"/>
-              </a:lnSpc>
-              <a:buNone/>
-            </a:pPr>
-            <a:r>
-              <a:rPr lang="en-US" sz="1200" dirty="0">
-                <a:solidFill>
-                  <a:srgbClr val="5F7580"/>
-                </a:solidFill>
-                <a:latin typeface="微软雅黑" pitchFamily="34" charset="0"/>
-                <a:ea typeface="微软雅黑" pitchFamily="34" charset="-122"/>
-                <a:cs typeface="微软雅黑" pitchFamily="34" charset="-120"/>
-              </a:rPr>
-              <a:t>三方法交集的 Biomarker；非线性结构的证据</a:t>
-            </a:r>
-            <a:endParaRPr lang="en-US" sz="1200" dirty="0"/>
-          </a:p>
-        </p:txBody>
-      </p:sp>
-      <p:sp>
-        <p:nvSpPr>
-          <p:cNvPr id="26" name="Shape 24"/>
-          <p:cNvSpPr/>
-          <p:nvPr/>
-        </p:nvSpPr>
-        <p:spPr>
-          <a:xfrm>
-            <a:off x="6263640" y="4425696"/>
-            <a:ext cx="5394960" cy="1280160"/>
-          </a:xfrm>
-          <a:prstGeom prst="rect">
-            <a:avLst/>
-          </a:prstGeom>
-          <a:solidFill>
-            <a:srgbClr val="FFFFFF"/>
-          </a:solidFill>
-          <a:ln/>
-          <a:effectLst>
-            <a:outerShdw sx="100000" sy="100000" kx="0" ky="0" algn="bl" rotWithShape="0" blurRad="101600" dist="25400" dir="8100000">
-              <a:srgbClr val="000000">
-                <a:alpha val="10000"/>
-              </a:srgbClr>
-            </a:outerShdw>
-          </a:effectLst>
-        </p:spPr>
-      </p:sp>
-      <p:sp>
-        <p:nvSpPr>
-          <p:cNvPr id="27" name="Shape 25"/>
-          <p:cNvSpPr/>
-          <p:nvPr/>
-        </p:nvSpPr>
-        <p:spPr>
-          <a:xfrm>
-            <a:off x="6263640" y="4425696"/>
-            <a:ext cx="68580" cy="1280160"/>
-          </a:xfrm>
-          <a:prstGeom prst="rect">
-            <a:avLst/>
-          </a:prstGeom>
-          <a:solidFill>
-            <a:srgbClr val="8FB996"/>
-          </a:solidFill>
-          <a:ln/>
-        </p:spPr>
-      </p:sp>
-      <p:sp>
-        <p:nvSpPr>
-          <p:cNvPr id="28" name="Text 26"/>
-          <p:cNvSpPr/>
-          <p:nvPr/>
-        </p:nvSpPr>
-        <p:spPr>
-          <a:xfrm>
-            <a:off x="6519672" y="4572000"/>
-            <a:ext cx="4937760" cy="329184"/>
-          </a:xfrm>
-          <a:prstGeom prst="rect">
-            <a:avLst/>
-          </a:prstGeom>
-          <a:noFill/>
-          <a:ln/>
-        </p:spPr>
-        <p:txBody>
-          <a:bodyPr wrap="square" lIns="0" tIns="0" rIns="0" bIns="0" rtlCol="0" anchor="t"/>
-          <a:lstStyle/>
-          <a:p>
-            <a:pPr indent="0" marL="0">
-              <a:buNone/>
-            </a:pPr>
-            <a:r>
-              <a:rPr lang="en-US" sz="1600" b="1" dirty="0">
-                <a:solidFill>
-                  <a:srgbClr val="16252C"/>
-                </a:solidFill>
-                <a:latin typeface="微软雅黑" pitchFamily="34" charset="0"/>
-                <a:ea typeface="微软雅黑" pitchFamily="34" charset="-122"/>
-                <a:cs typeface="微软雅黑" pitchFamily="34" charset="-120"/>
-              </a:rPr>
-              <a:t>06   已知局限</a:t>
-            </a:r>
-            <a:endParaRPr lang="en-US" sz="1600" dirty="0"/>
-          </a:p>
-        </p:txBody>
-      </p:sp>
-      <p:sp>
-        <p:nvSpPr>
-          <p:cNvPr id="29" name="Text 27"/>
-          <p:cNvSpPr/>
-          <p:nvPr/>
-        </p:nvSpPr>
-        <p:spPr>
-          <a:xfrm>
-            <a:off x="6519672" y="4956048"/>
-            <a:ext cx="4937760" cy="621792"/>
-          </a:xfrm>
-          <a:prstGeom prst="rect">
-            <a:avLst/>
-          </a:prstGeom>
-          <a:noFill/>
-          <a:ln/>
-        </p:spPr>
-        <p:txBody>
-          <a:bodyPr wrap="square" lIns="0" tIns="0" rIns="0" bIns="0" rtlCol="0" anchor="t"/>
-          <a:lstStyle/>
-          <a:p>
-            <a:pPr indent="0" marL="0">
-              <a:lnSpc>
-                <a:spcPct val="112000"/>
-              </a:lnSpc>
-              <a:buNone/>
-            </a:pPr>
-            <a:r>
-              <a:rPr lang="en-US" sz="1200" dirty="0">
-                <a:solidFill>
-                  <a:srgbClr val="5F7580"/>
-                </a:solidFill>
-                <a:latin typeface="微软雅黑" pitchFamily="34" charset="0"/>
-                <a:ea typeface="微软雅黑" pitchFamily="34" charset="-122"/>
-                <a:cs typeface="微软雅黑" pitchFamily="34" charset="-120"/>
-              </a:rPr>
-              <a:t>七项局限，如实陈述</a:t>
-            </a:r>
-            <a:endParaRPr lang="en-US" sz="1200" dirty="0"/>
-          </a:p>
-        </p:txBody>
-      </p:sp>
-    </p:spTree>
-  </p:cSld>
-  <p:clrMapOvr>
-    <a:masterClrMapping/>
-  </p:clrMapOvr>
-</p:sld>
-</file>
-
-<file path=ppt/slides/slide30.xml><?xml version="1.0" encoding="utf-8"?>
-<p:sld xmlns:a="http://schemas.openxmlformats.org/drawingml/2006/main" xmlns:r="http://schemas.openxmlformats.org/officeDocument/2006/relationships" xmlns:p="http://schemas.openxmlformats.org/presentationml/2006/main">
-  <p:cSld name="Slide 30">
+  <p:cSld name="Slide 31">
     <p:bg>
       <p:bgPr>
         <a:solidFill>
